--- a/docs/pptx/whole/jx-linsubhr-ratio-aki2.pptx
+++ b/docs/pptx/whole/jx-linsubhr-ratio-aki2.pptx
@@ -2271,7 +2271,7 @@
           </p:nvSpPr>
           <p:spPr>
             <a:xfrm>
-              <a:off x="817517" y="5114368"/>
+              <a:off x="817517" y="5142518"/>
               <a:ext cx="7799693" cy="0"/>
             </a:xfrm>
             <a:custGeom>
@@ -2314,7 +2314,7 @@
           </p:nvSpPr>
           <p:spPr>
             <a:xfrm>
-              <a:off x="817517" y="4244691"/>
+              <a:off x="817517" y="4313054"/>
               <a:ext cx="7799693" cy="0"/>
             </a:xfrm>
             <a:custGeom>
@@ -2357,7 +2357,7 @@
           </p:nvSpPr>
           <p:spPr>
             <a:xfrm>
-              <a:off x="817517" y="3375014"/>
+              <a:off x="817517" y="3483591"/>
               <a:ext cx="7799693" cy="0"/>
             </a:xfrm>
             <a:custGeom>
@@ -2400,7 +2400,7 @@
           </p:nvSpPr>
           <p:spPr>
             <a:xfrm>
-              <a:off x="817517" y="2505337"/>
+              <a:off x="817517" y="2654127"/>
               <a:ext cx="7799693" cy="0"/>
             </a:xfrm>
             <a:custGeom>
@@ -2443,15 +2443,15 @@
           </p:nvSpPr>
           <p:spPr>
             <a:xfrm>
-              <a:off x="1615213" y="1896563"/>
-              <a:ext cx="0" cy="3826579"/>
+              <a:off x="1615213" y="2073503"/>
+              <a:ext cx="0" cy="3649639"/>
             </a:xfrm>
             <a:custGeom>
               <a:avLst/>
               <a:pathLst>
-                <a:path w="0" h="3826579">
+                <a:path w="0" h="3649639">
                   <a:moveTo>
-                    <a:pt x="0" y="3826579"/>
+                    <a:pt x="0" y="3649639"/>
                   </a:moveTo>
                   <a:lnTo>
                     <a:pt x="0" y="0"/>
@@ -2486,15 +2486,15 @@
           </p:nvSpPr>
           <p:spPr>
             <a:xfrm>
-              <a:off x="3387871" y="1896563"/>
-              <a:ext cx="0" cy="3826579"/>
+              <a:off x="3387871" y="2073503"/>
+              <a:ext cx="0" cy="3649639"/>
             </a:xfrm>
             <a:custGeom>
               <a:avLst/>
               <a:pathLst>
-                <a:path w="0" h="3826579">
+                <a:path w="0" h="3649639">
                   <a:moveTo>
-                    <a:pt x="0" y="3826579"/>
+                    <a:pt x="0" y="3649639"/>
                   </a:moveTo>
                   <a:lnTo>
                     <a:pt x="0" y="0"/>
@@ -2529,15 +2529,15 @@
           </p:nvSpPr>
           <p:spPr>
             <a:xfrm>
-              <a:off x="5160528" y="1896563"/>
-              <a:ext cx="0" cy="3826579"/>
+              <a:off x="5160528" y="2073503"/>
+              <a:ext cx="0" cy="3649639"/>
             </a:xfrm>
             <a:custGeom>
               <a:avLst/>
               <a:pathLst>
-                <a:path w="0" h="3826579">
+                <a:path w="0" h="3649639">
                   <a:moveTo>
-                    <a:pt x="0" y="3826579"/>
+                    <a:pt x="0" y="3649639"/>
                   </a:moveTo>
                   <a:lnTo>
                     <a:pt x="0" y="0"/>
@@ -2572,15 +2572,15 @@
           </p:nvSpPr>
           <p:spPr>
             <a:xfrm>
-              <a:off x="6933186" y="1896563"/>
-              <a:ext cx="0" cy="3826579"/>
+              <a:off x="6933186" y="2073503"/>
+              <a:ext cx="0" cy="3649639"/>
             </a:xfrm>
             <a:custGeom>
               <a:avLst/>
               <a:pathLst>
-                <a:path w="0" h="3826579">
+                <a:path w="0" h="3649639">
                   <a:moveTo>
-                    <a:pt x="0" y="3826579"/>
+                    <a:pt x="0" y="3649639"/>
                   </a:moveTo>
                   <a:lnTo>
                     <a:pt x="0" y="0"/>
@@ -2615,7 +2615,7 @@
           </p:nvSpPr>
           <p:spPr>
             <a:xfrm>
-              <a:off x="817517" y="5549207"/>
+              <a:off x="817517" y="5557249"/>
               <a:ext cx="7799693" cy="0"/>
             </a:xfrm>
             <a:custGeom>
@@ -2658,7 +2658,7 @@
           </p:nvSpPr>
           <p:spPr>
             <a:xfrm>
-              <a:off x="817517" y="4679530"/>
+              <a:off x="817517" y="4727786"/>
               <a:ext cx="7799693" cy="0"/>
             </a:xfrm>
             <a:custGeom>
@@ -2701,7 +2701,7 @@
           </p:nvSpPr>
           <p:spPr>
             <a:xfrm>
-              <a:off x="817517" y="3809853"/>
+              <a:off x="817517" y="3898322"/>
               <a:ext cx="7799693" cy="0"/>
             </a:xfrm>
             <a:custGeom>
@@ -2744,7 +2744,7 @@
           </p:nvSpPr>
           <p:spPr>
             <a:xfrm>
-              <a:off x="817517" y="2940175"/>
+              <a:off x="817517" y="3068859"/>
               <a:ext cx="7799693" cy="0"/>
             </a:xfrm>
             <a:custGeom>
@@ -2787,7 +2787,7 @@
           </p:nvSpPr>
           <p:spPr>
             <a:xfrm>
-              <a:off x="817517" y="2070498"/>
+              <a:off x="817517" y="2239395"/>
               <a:ext cx="7799693" cy="0"/>
             </a:xfrm>
             <a:custGeom>
@@ -2830,15 +2830,15 @@
           </p:nvSpPr>
           <p:spPr>
             <a:xfrm>
-              <a:off x="2501542" y="1896563"/>
-              <a:ext cx="0" cy="3826579"/>
+              <a:off x="2501542" y="2073503"/>
+              <a:ext cx="0" cy="3649639"/>
             </a:xfrm>
             <a:custGeom>
               <a:avLst/>
               <a:pathLst>
-                <a:path w="0" h="3826579">
+                <a:path w="0" h="3649639">
                   <a:moveTo>
-                    <a:pt x="0" y="3826579"/>
+                    <a:pt x="0" y="3649639"/>
                   </a:moveTo>
                   <a:lnTo>
                     <a:pt x="0" y="0"/>
@@ -2873,15 +2873,15 @@
           </p:nvSpPr>
           <p:spPr>
             <a:xfrm>
-              <a:off x="4274200" y="1896563"/>
-              <a:ext cx="0" cy="3826579"/>
+              <a:off x="4274200" y="2073503"/>
+              <a:ext cx="0" cy="3649639"/>
             </a:xfrm>
             <a:custGeom>
               <a:avLst/>
               <a:pathLst>
-                <a:path w="0" h="3826579">
+                <a:path w="0" h="3649639">
                   <a:moveTo>
-                    <a:pt x="0" y="3826579"/>
+                    <a:pt x="0" y="3649639"/>
                   </a:moveTo>
                   <a:lnTo>
                     <a:pt x="0" y="0"/>
@@ -2916,15 +2916,15 @@
           </p:nvSpPr>
           <p:spPr>
             <a:xfrm>
-              <a:off x="6046857" y="1896563"/>
-              <a:ext cx="0" cy="3826579"/>
+              <a:off x="6046857" y="2073503"/>
+              <a:ext cx="0" cy="3649639"/>
             </a:xfrm>
             <a:custGeom>
               <a:avLst/>
               <a:pathLst>
-                <a:path w="0" h="3826579">
+                <a:path w="0" h="3649639">
                   <a:moveTo>
-                    <a:pt x="0" y="3826579"/>
+                    <a:pt x="0" y="3649639"/>
                   </a:moveTo>
                   <a:lnTo>
                     <a:pt x="0" y="0"/>
@@ -2959,15 +2959,15 @@
           </p:nvSpPr>
           <p:spPr>
             <a:xfrm>
-              <a:off x="7819515" y="1896563"/>
-              <a:ext cx="0" cy="3826579"/>
+              <a:off x="7819515" y="2073503"/>
+              <a:ext cx="0" cy="3649639"/>
             </a:xfrm>
             <a:custGeom>
               <a:avLst/>
               <a:pathLst>
-                <a:path w="0" h="3826579">
+                <a:path w="0" h="3649639">
                   <a:moveTo>
-                    <a:pt x="0" y="3826579"/>
+                    <a:pt x="0" y="3649639"/>
                   </a:moveTo>
                   <a:lnTo>
                     <a:pt x="0" y="0"/>
@@ -3002,594 +3002,594 @@
           </p:nvSpPr>
           <p:spPr>
             <a:xfrm>
-              <a:off x="817517" y="1896563"/>
-              <a:ext cx="7235830" cy="3508824"/>
+              <a:off x="817517" y="2073503"/>
+              <a:ext cx="7235830" cy="3346577"/>
             </a:xfrm>
             <a:custGeom>
               <a:avLst/>
               <a:pathLst>
-                <a:path w="7235830" h="3508824">
+                <a:path w="7235830" h="3346577">
                   <a:moveTo>
                     <a:pt x="434112" y="0"/>
                   </a:moveTo>
                   <a:lnTo>
-                    <a:pt x="449907" y="27712"/>
-                  </a:lnTo>
-                  <a:lnTo>
-                    <a:pt x="523667" y="152658"/>
-                  </a:lnTo>
-                  <a:lnTo>
-                    <a:pt x="597427" y="273296"/>
-                  </a:lnTo>
-                  <a:lnTo>
-                    <a:pt x="671187" y="389777"/>
-                  </a:lnTo>
-                  <a:lnTo>
-                    <a:pt x="744947" y="502243"/>
-                  </a:lnTo>
-                  <a:lnTo>
-                    <a:pt x="818707" y="610832"/>
-                  </a:lnTo>
-                  <a:lnTo>
-                    <a:pt x="892467" y="715679"/>
-                  </a:lnTo>
-                  <a:lnTo>
-                    <a:pt x="966227" y="816911"/>
-                  </a:lnTo>
-                  <a:lnTo>
-                    <a:pt x="1039987" y="914654"/>
-                  </a:lnTo>
-                  <a:lnTo>
-                    <a:pt x="1113747" y="1009028"/>
-                  </a:lnTo>
-                  <a:lnTo>
-                    <a:pt x="1187508" y="1100150"/>
-                  </a:lnTo>
-                  <a:lnTo>
-                    <a:pt x="1261268" y="1188130"/>
-                  </a:lnTo>
-                  <a:lnTo>
-                    <a:pt x="1335028" y="1273078"/>
-                  </a:lnTo>
-                  <a:lnTo>
-                    <a:pt x="1408788" y="1355098"/>
-                  </a:lnTo>
-                  <a:lnTo>
-                    <a:pt x="1482548" y="1434290"/>
-                  </a:lnTo>
-                  <a:lnTo>
-                    <a:pt x="1556308" y="1510754"/>
-                  </a:lnTo>
-                  <a:lnTo>
-                    <a:pt x="1630068" y="1584581"/>
-                  </a:lnTo>
-                  <a:lnTo>
-                    <a:pt x="1703828" y="1655864"/>
-                  </a:lnTo>
-                  <a:lnTo>
-                    <a:pt x="1777588" y="1724690"/>
-                  </a:lnTo>
-                  <a:lnTo>
-                    <a:pt x="1851348" y="1791143"/>
-                  </a:lnTo>
-                  <a:lnTo>
-                    <a:pt x="1925108" y="1855306"/>
-                  </a:lnTo>
-                  <a:lnTo>
-                    <a:pt x="1998868" y="1917257"/>
-                  </a:lnTo>
-                  <a:lnTo>
-                    <a:pt x="2072628" y="1977073"/>
-                  </a:lnTo>
-                  <a:lnTo>
-                    <a:pt x="2146388" y="2034828"/>
-                  </a:lnTo>
-                  <a:lnTo>
-                    <a:pt x="2220148" y="2090591"/>
-                  </a:lnTo>
-                  <a:lnTo>
-                    <a:pt x="2293908" y="2144433"/>
-                  </a:lnTo>
-                  <a:lnTo>
-                    <a:pt x="2367668" y="2196418"/>
-                  </a:lnTo>
-                  <a:lnTo>
-                    <a:pt x="2441428" y="2246612"/>
-                  </a:lnTo>
-                  <a:lnTo>
-                    <a:pt x="2515188" y="2295076"/>
-                  </a:lnTo>
-                  <a:lnTo>
-                    <a:pt x="2588948" y="2341869"/>
-                  </a:lnTo>
-                  <a:lnTo>
-                    <a:pt x="2662708" y="2387049"/>
-                  </a:lnTo>
-                  <a:lnTo>
-                    <a:pt x="2736468" y="2430672"/>
-                  </a:lnTo>
-                  <a:lnTo>
-                    <a:pt x="2810228" y="2472792"/>
-                  </a:lnTo>
-                  <a:lnTo>
-                    <a:pt x="2883988" y="2513459"/>
-                  </a:lnTo>
-                  <a:lnTo>
-                    <a:pt x="2957748" y="2552725"/>
-                  </a:lnTo>
-                  <a:lnTo>
-                    <a:pt x="3031508" y="2590637"/>
-                  </a:lnTo>
-                  <a:lnTo>
-                    <a:pt x="3105268" y="2627243"/>
-                  </a:lnTo>
-                  <a:lnTo>
-                    <a:pt x="3179028" y="2662587"/>
-                  </a:lnTo>
-                  <a:lnTo>
-                    <a:pt x="3252788" y="2696713"/>
-                  </a:lnTo>
-                  <a:lnTo>
-                    <a:pt x="3326548" y="2729662"/>
-                  </a:lnTo>
-                  <a:lnTo>
-                    <a:pt x="3400308" y="2761476"/>
-                  </a:lnTo>
-                  <a:lnTo>
-                    <a:pt x="3474068" y="2785874"/>
-                  </a:lnTo>
-                  <a:lnTo>
-                    <a:pt x="3547828" y="2795367"/>
-                  </a:lnTo>
-                  <a:lnTo>
-                    <a:pt x="3621588" y="2804757"/>
-                  </a:lnTo>
-                  <a:lnTo>
-                    <a:pt x="3695348" y="2814044"/>
-                  </a:lnTo>
-                  <a:lnTo>
-                    <a:pt x="3769108" y="2823229"/>
-                  </a:lnTo>
-                  <a:lnTo>
-                    <a:pt x="3842868" y="2832313"/>
-                  </a:lnTo>
-                  <a:lnTo>
-                    <a:pt x="3916628" y="2841298"/>
-                  </a:lnTo>
-                  <a:lnTo>
-                    <a:pt x="3990388" y="2850184"/>
-                  </a:lnTo>
-                  <a:lnTo>
-                    <a:pt x="4064149" y="2858974"/>
-                  </a:lnTo>
-                  <a:lnTo>
-                    <a:pt x="4137909" y="2867667"/>
-                  </a:lnTo>
-                  <a:lnTo>
-                    <a:pt x="4211669" y="2876264"/>
-                  </a:lnTo>
-                  <a:lnTo>
-                    <a:pt x="4285429" y="2884768"/>
-                  </a:lnTo>
-                  <a:lnTo>
-                    <a:pt x="4359189" y="2893178"/>
-                  </a:lnTo>
-                  <a:lnTo>
-                    <a:pt x="4432949" y="2901496"/>
-                  </a:lnTo>
-                  <a:lnTo>
-                    <a:pt x="4506709" y="2909724"/>
-                  </a:lnTo>
-                  <a:lnTo>
-                    <a:pt x="4580469" y="2917861"/>
-                  </a:lnTo>
-                  <a:lnTo>
-                    <a:pt x="4654229" y="2925909"/>
-                  </a:lnTo>
-                  <a:lnTo>
-                    <a:pt x="4727989" y="2933868"/>
-                  </a:lnTo>
-                  <a:lnTo>
-                    <a:pt x="4801749" y="2941741"/>
-                  </a:lnTo>
-                  <a:lnTo>
-                    <a:pt x="4875509" y="2949527"/>
-                  </a:lnTo>
-                  <a:lnTo>
-                    <a:pt x="4949269" y="2957228"/>
-                  </a:lnTo>
-                  <a:lnTo>
-                    <a:pt x="5023029" y="2964845"/>
-                  </a:lnTo>
-                  <a:lnTo>
-                    <a:pt x="5096789" y="2972378"/>
-                  </a:lnTo>
-                  <a:lnTo>
-                    <a:pt x="5170549" y="2979829"/>
-                  </a:lnTo>
-                  <a:lnTo>
-                    <a:pt x="5244309" y="2987198"/>
-                  </a:lnTo>
-                  <a:lnTo>
-                    <a:pt x="5318069" y="2994487"/>
-                  </a:lnTo>
-                  <a:lnTo>
-                    <a:pt x="5391829" y="3001696"/>
-                  </a:lnTo>
-                  <a:lnTo>
-                    <a:pt x="5465589" y="3008825"/>
-                  </a:lnTo>
-                  <a:lnTo>
-                    <a:pt x="5539349" y="3015877"/>
-                  </a:lnTo>
-                  <a:lnTo>
-                    <a:pt x="5613109" y="3022851"/>
-                  </a:lnTo>
-                  <a:lnTo>
-                    <a:pt x="5686869" y="3029749"/>
-                  </a:lnTo>
-                  <a:lnTo>
-                    <a:pt x="5760629" y="3036572"/>
-                  </a:lnTo>
-                  <a:lnTo>
-                    <a:pt x="5834389" y="3043319"/>
-                  </a:lnTo>
-                  <a:lnTo>
-                    <a:pt x="5908149" y="3049993"/>
-                  </a:lnTo>
-                  <a:lnTo>
-                    <a:pt x="5981909" y="3056594"/>
-                  </a:lnTo>
-                  <a:lnTo>
-                    <a:pt x="6055669" y="3063122"/>
-                  </a:lnTo>
-                  <a:lnTo>
-                    <a:pt x="6129429" y="3069579"/>
-                  </a:lnTo>
-                  <a:lnTo>
-                    <a:pt x="6203189" y="3075965"/>
-                  </a:lnTo>
-                  <a:lnTo>
-                    <a:pt x="6276949" y="3082282"/>
-                  </a:lnTo>
-                  <a:lnTo>
-                    <a:pt x="6350709" y="3088529"/>
-                  </a:lnTo>
-                  <a:lnTo>
-                    <a:pt x="6424469" y="3094707"/>
-                  </a:lnTo>
-                  <a:lnTo>
-                    <a:pt x="6498229" y="3100818"/>
-                  </a:lnTo>
-                  <a:lnTo>
-                    <a:pt x="6571989" y="3106862"/>
-                  </a:lnTo>
-                  <a:lnTo>
-                    <a:pt x="6645749" y="3112840"/>
-                  </a:lnTo>
-                  <a:lnTo>
-                    <a:pt x="6719509" y="3118752"/>
-                  </a:lnTo>
-                  <a:lnTo>
-                    <a:pt x="6793269" y="3124600"/>
-                  </a:lnTo>
-                  <a:lnTo>
-                    <a:pt x="6867029" y="3130384"/>
-                  </a:lnTo>
-                  <a:lnTo>
-                    <a:pt x="6940789" y="3136104"/>
-                  </a:lnTo>
-                  <a:lnTo>
-                    <a:pt x="7014550" y="3141761"/>
-                  </a:lnTo>
-                  <a:lnTo>
-                    <a:pt x="7088310" y="3147357"/>
-                  </a:lnTo>
-                  <a:lnTo>
-                    <a:pt x="7162070" y="3152891"/>
-                  </a:lnTo>
-                  <a:lnTo>
-                    <a:pt x="7235830" y="3158365"/>
-                  </a:lnTo>
-                  <a:lnTo>
-                    <a:pt x="7235830" y="3508824"/>
-                  </a:lnTo>
-                  <a:lnTo>
-                    <a:pt x="7162070" y="3503690"/>
-                  </a:lnTo>
-                  <a:lnTo>
-                    <a:pt x="7088310" y="3498372"/>
-                  </a:lnTo>
-                  <a:lnTo>
-                    <a:pt x="7014550" y="3492865"/>
-                  </a:lnTo>
-                  <a:lnTo>
-                    <a:pt x="6940789" y="3487161"/>
-                  </a:lnTo>
-                  <a:lnTo>
-                    <a:pt x="6867029" y="3481254"/>
-                  </a:lnTo>
-                  <a:lnTo>
-                    <a:pt x="6793269" y="3475135"/>
-                  </a:lnTo>
-                  <a:lnTo>
-                    <a:pt x="6719509" y="3468799"/>
-                  </a:lnTo>
-                  <a:lnTo>
-                    <a:pt x="6645749" y="3462235"/>
-                  </a:lnTo>
-                  <a:lnTo>
-                    <a:pt x="6571989" y="3455438"/>
-                  </a:lnTo>
-                  <a:lnTo>
-                    <a:pt x="6498229" y="3448398"/>
-                  </a:lnTo>
-                  <a:lnTo>
-                    <a:pt x="6424469" y="3441107"/>
-                  </a:lnTo>
-                  <a:lnTo>
-                    <a:pt x="6350709" y="3433555"/>
-                  </a:lnTo>
-                  <a:lnTo>
-                    <a:pt x="6276949" y="3425734"/>
-                  </a:lnTo>
-                  <a:lnTo>
-                    <a:pt x="6203189" y="3417634"/>
-                  </a:lnTo>
-                  <a:lnTo>
-                    <a:pt x="6129429" y="3409244"/>
-                  </a:lnTo>
-                  <a:lnTo>
-                    <a:pt x="6055669" y="3400555"/>
-                  </a:lnTo>
-                  <a:lnTo>
-                    <a:pt x="5981909" y="3391556"/>
-                  </a:lnTo>
-                  <a:lnTo>
-                    <a:pt x="5908149" y="3382235"/>
-                  </a:lnTo>
-                  <a:lnTo>
-                    <a:pt x="5834389" y="3372582"/>
-                  </a:lnTo>
-                  <a:lnTo>
-                    <a:pt x="5760629" y="3362584"/>
-                  </a:lnTo>
-                  <a:lnTo>
-                    <a:pt x="5686869" y="3352229"/>
-                  </a:lnTo>
-                  <a:lnTo>
-                    <a:pt x="5613109" y="3341505"/>
-                  </a:lnTo>
-                  <a:lnTo>
-                    <a:pt x="5539349" y="3330397"/>
-                  </a:lnTo>
-                  <a:lnTo>
-                    <a:pt x="5465589" y="3318893"/>
-                  </a:lnTo>
-                  <a:lnTo>
-                    <a:pt x="5391829" y="3306979"/>
-                  </a:lnTo>
-                  <a:lnTo>
-                    <a:pt x="5318069" y="3294639"/>
-                  </a:lnTo>
-                  <a:lnTo>
-                    <a:pt x="5244309" y="3281859"/>
-                  </a:lnTo>
-                  <a:lnTo>
-                    <a:pt x="5170549" y="3268622"/>
-                  </a:lnTo>
-                  <a:lnTo>
-                    <a:pt x="5096789" y="3254913"/>
-                  </a:lnTo>
-                  <a:lnTo>
-                    <a:pt x="5023029" y="3240715"/>
-                  </a:lnTo>
-                  <a:lnTo>
-                    <a:pt x="4949269" y="3226009"/>
-                  </a:lnTo>
-                  <a:lnTo>
-                    <a:pt x="4875509" y="3210779"/>
-                  </a:lnTo>
-                  <a:lnTo>
-                    <a:pt x="4801749" y="3195005"/>
-                  </a:lnTo>
-                  <a:lnTo>
-                    <a:pt x="4727989" y="3178668"/>
-                  </a:lnTo>
-                  <a:lnTo>
-                    <a:pt x="4654229" y="3161747"/>
-                  </a:lnTo>
-                  <a:lnTo>
-                    <a:pt x="4580469" y="3144223"/>
-                  </a:lnTo>
-                  <a:lnTo>
-                    <a:pt x="4506709" y="3126073"/>
-                  </a:lnTo>
-                  <a:lnTo>
-                    <a:pt x="4432949" y="3107275"/>
-                  </a:lnTo>
-                  <a:lnTo>
-                    <a:pt x="4359189" y="3087806"/>
-                  </a:lnTo>
-                  <a:lnTo>
-                    <a:pt x="4285429" y="3067642"/>
-                  </a:lnTo>
-                  <a:lnTo>
-                    <a:pt x="4211669" y="3046758"/>
-                  </a:lnTo>
-                  <a:lnTo>
-                    <a:pt x="4137909" y="3025128"/>
-                  </a:lnTo>
-                  <a:lnTo>
-                    <a:pt x="4064149" y="3002727"/>
-                  </a:lnTo>
-                  <a:lnTo>
-                    <a:pt x="3990388" y="2979525"/>
-                  </a:lnTo>
-                  <a:lnTo>
-                    <a:pt x="3916628" y="2955496"/>
-                  </a:lnTo>
-                  <a:lnTo>
-                    <a:pt x="3842868" y="2930608"/>
-                  </a:lnTo>
-                  <a:lnTo>
-                    <a:pt x="3769108" y="2904832"/>
-                  </a:lnTo>
-                  <a:lnTo>
-                    <a:pt x="3695348" y="2878136"/>
-                  </a:lnTo>
-                  <a:lnTo>
-                    <a:pt x="3621588" y="2850487"/>
-                  </a:lnTo>
-                  <a:lnTo>
-                    <a:pt x="3547828" y="2821851"/>
-                  </a:lnTo>
-                  <a:lnTo>
-                    <a:pt x="3474068" y="2792193"/>
-                  </a:lnTo>
-                  <a:lnTo>
-                    <a:pt x="3400308" y="2776275"/>
-                  </a:lnTo>
-                  <a:lnTo>
-                    <a:pt x="3326548" y="2766570"/>
-                  </a:lnTo>
-                  <a:lnTo>
-                    <a:pt x="3252788" y="2756758"/>
-                  </a:lnTo>
-                  <a:lnTo>
-                    <a:pt x="3179028" y="2746837"/>
-                  </a:lnTo>
-                  <a:lnTo>
-                    <a:pt x="3105268" y="2736806"/>
-                  </a:lnTo>
-                  <a:lnTo>
-                    <a:pt x="3031508" y="2726664"/>
-                  </a:lnTo>
-                  <a:lnTo>
-                    <a:pt x="2957748" y="2716409"/>
-                  </a:lnTo>
-                  <a:lnTo>
-                    <a:pt x="2883988" y="2706041"/>
-                  </a:lnTo>
-                  <a:lnTo>
-                    <a:pt x="2810228" y="2695558"/>
-                  </a:lnTo>
-                  <a:lnTo>
-                    <a:pt x="2736468" y="2684960"/>
-                  </a:lnTo>
-                  <a:lnTo>
-                    <a:pt x="2662708" y="2674243"/>
-                  </a:lnTo>
-                  <a:lnTo>
-                    <a:pt x="2588948" y="2663409"/>
-                  </a:lnTo>
-                  <a:lnTo>
-                    <a:pt x="2515188" y="2652454"/>
-                  </a:lnTo>
-                  <a:lnTo>
-                    <a:pt x="2441428" y="2641377"/>
-                  </a:lnTo>
-                  <a:lnTo>
-                    <a:pt x="2367668" y="2630179"/>
-                  </a:lnTo>
-                  <a:lnTo>
-                    <a:pt x="2293908" y="2618856"/>
-                  </a:lnTo>
-                  <a:lnTo>
-                    <a:pt x="2220148" y="2607408"/>
-                  </a:lnTo>
-                  <a:lnTo>
-                    <a:pt x="2146388" y="2595832"/>
-                  </a:lnTo>
-                  <a:lnTo>
-                    <a:pt x="2072628" y="2584129"/>
-                  </a:lnTo>
-                  <a:lnTo>
-                    <a:pt x="1998868" y="2572296"/>
-                  </a:lnTo>
-                  <a:lnTo>
-                    <a:pt x="1925108" y="2560333"/>
-                  </a:lnTo>
-                  <a:lnTo>
-                    <a:pt x="1851348" y="2548236"/>
-                  </a:lnTo>
-                  <a:lnTo>
-                    <a:pt x="1777588" y="2536006"/>
-                  </a:lnTo>
-                  <a:lnTo>
-                    <a:pt x="1703828" y="2523640"/>
-                  </a:lnTo>
-                  <a:lnTo>
-                    <a:pt x="1630068" y="2511138"/>
-                  </a:lnTo>
-                  <a:lnTo>
-                    <a:pt x="1556308" y="2498496"/>
-                  </a:lnTo>
-                  <a:lnTo>
-                    <a:pt x="1482548" y="2485715"/>
-                  </a:lnTo>
-                  <a:lnTo>
-                    <a:pt x="1408788" y="2472793"/>
-                  </a:lnTo>
-                  <a:lnTo>
-                    <a:pt x="1335028" y="2459727"/>
-                  </a:lnTo>
-                  <a:lnTo>
-                    <a:pt x="1261268" y="2446516"/>
-                  </a:lnTo>
-                  <a:lnTo>
-                    <a:pt x="1187508" y="2433160"/>
-                  </a:lnTo>
-                  <a:lnTo>
-                    <a:pt x="1113747" y="2419655"/>
-                  </a:lnTo>
-                  <a:lnTo>
-                    <a:pt x="1039987" y="2406001"/>
-                  </a:lnTo>
-                  <a:lnTo>
-                    <a:pt x="966227" y="2392195"/>
-                  </a:lnTo>
-                  <a:lnTo>
-                    <a:pt x="892467" y="2378237"/>
-                  </a:lnTo>
-                  <a:lnTo>
-                    <a:pt x="818707" y="2364124"/>
-                  </a:lnTo>
-                  <a:lnTo>
-                    <a:pt x="744947" y="2349855"/>
-                  </a:lnTo>
-                  <a:lnTo>
-                    <a:pt x="671187" y="2335428"/>
-                  </a:lnTo>
-                  <a:lnTo>
-                    <a:pt x="597427" y="2320841"/>
-                  </a:lnTo>
-                  <a:lnTo>
-                    <a:pt x="523667" y="2306092"/>
-                  </a:lnTo>
-                  <a:lnTo>
-                    <a:pt x="449907" y="2291180"/>
-                  </a:lnTo>
-                  <a:lnTo>
-                    <a:pt x="376147" y="2276104"/>
-                  </a:lnTo>
-                  <a:lnTo>
-                    <a:pt x="302387" y="2260860"/>
-                  </a:lnTo>
-                  <a:lnTo>
-                    <a:pt x="228627" y="2245447"/>
-                  </a:lnTo>
-                  <a:lnTo>
-                    <a:pt x="154867" y="2229863"/>
-                  </a:lnTo>
-                  <a:lnTo>
-                    <a:pt x="81107" y="2214107"/>
-                  </a:lnTo>
-                  <a:lnTo>
-                    <a:pt x="7347" y="2198177"/>
-                  </a:lnTo>
-                  <a:lnTo>
-                    <a:pt x="0" y="2196573"/>
+                    <a:pt x="449907" y="26430"/>
+                  </a:lnTo>
+                  <a:lnTo>
+                    <a:pt x="523667" y="145599"/>
+                  </a:lnTo>
+                  <a:lnTo>
+                    <a:pt x="597427" y="260659"/>
+                  </a:lnTo>
+                  <a:lnTo>
+                    <a:pt x="671187" y="371754"/>
+                  </a:lnTo>
+                  <a:lnTo>
+                    <a:pt x="744947" y="479019"/>
+                  </a:lnTo>
+                  <a:lnTo>
+                    <a:pt x="818707" y="582588"/>
+                  </a:lnTo>
+                  <a:lnTo>
+                    <a:pt x="892467" y="682586"/>
+                  </a:lnTo>
+                  <a:lnTo>
+                    <a:pt x="966227" y="779137"/>
+                  </a:lnTo>
+                  <a:lnTo>
+                    <a:pt x="1039987" y="872361"/>
+                  </a:lnTo>
+                  <a:lnTo>
+                    <a:pt x="1113747" y="962371"/>
+                  </a:lnTo>
+                  <a:lnTo>
+                    <a:pt x="1187508" y="1049279"/>
+                  </a:lnTo>
+                  <a:lnTo>
+                    <a:pt x="1261268" y="1133191"/>
+                  </a:lnTo>
+                  <a:lnTo>
+                    <a:pt x="1335028" y="1214211"/>
+                  </a:lnTo>
+                  <a:lnTo>
+                    <a:pt x="1408788" y="1292438"/>
+                  </a:lnTo>
+                  <a:lnTo>
+                    <a:pt x="1482548" y="1367969"/>
+                  </a:lnTo>
+                  <a:lnTo>
+                    <a:pt x="1556308" y="1440897"/>
+                  </a:lnTo>
+                  <a:lnTo>
+                    <a:pt x="1630068" y="1511311"/>
+                  </a:lnTo>
+                  <a:lnTo>
+                    <a:pt x="1703828" y="1579297"/>
+                  </a:lnTo>
+                  <a:lnTo>
+                    <a:pt x="1777588" y="1644941"/>
+                  </a:lnTo>
+                  <a:lnTo>
+                    <a:pt x="1851348" y="1708321"/>
+                  </a:lnTo>
+                  <a:lnTo>
+                    <a:pt x="1925108" y="1769517"/>
+                  </a:lnTo>
+                  <a:lnTo>
+                    <a:pt x="1998868" y="1828604"/>
+                  </a:lnTo>
+                  <a:lnTo>
+                    <a:pt x="2072628" y="1885654"/>
+                  </a:lnTo>
+                  <a:lnTo>
+                    <a:pt x="2146388" y="1940738"/>
+                  </a:lnTo>
+                  <a:lnTo>
+                    <a:pt x="2220148" y="1993923"/>
+                  </a:lnTo>
+                  <a:lnTo>
+                    <a:pt x="2293908" y="2045275"/>
+                  </a:lnTo>
+                  <a:lnTo>
+                    <a:pt x="2367668" y="2094857"/>
+                  </a:lnTo>
+                  <a:lnTo>
+                    <a:pt x="2441428" y="2142729"/>
+                  </a:lnTo>
+                  <a:lnTo>
+                    <a:pt x="2515188" y="2188952"/>
+                  </a:lnTo>
+                  <a:lnTo>
+                    <a:pt x="2588948" y="2233582"/>
+                  </a:lnTo>
+                  <a:lnTo>
+                    <a:pt x="2662708" y="2276673"/>
+                  </a:lnTo>
+                  <a:lnTo>
+                    <a:pt x="2736468" y="2318279"/>
+                  </a:lnTo>
+                  <a:lnTo>
+                    <a:pt x="2810228" y="2358451"/>
+                  </a:lnTo>
+                  <a:lnTo>
+                    <a:pt x="2883988" y="2397238"/>
+                  </a:lnTo>
+                  <a:lnTo>
+                    <a:pt x="2957748" y="2434688"/>
+                  </a:lnTo>
+                  <a:lnTo>
+                    <a:pt x="3031508" y="2470847"/>
+                  </a:lnTo>
+                  <a:lnTo>
+                    <a:pt x="3105268" y="2505760"/>
+                  </a:lnTo>
+                  <a:lnTo>
+                    <a:pt x="3179028" y="2539470"/>
+                  </a:lnTo>
+                  <a:lnTo>
+                    <a:pt x="3252788" y="2572018"/>
+                  </a:lnTo>
+                  <a:lnTo>
+                    <a:pt x="3326548" y="2603444"/>
+                  </a:lnTo>
+                  <a:lnTo>
+                    <a:pt x="3400308" y="2633786"/>
+                  </a:lnTo>
+                  <a:lnTo>
+                    <a:pt x="3474068" y="2657056"/>
+                  </a:lnTo>
+                  <a:lnTo>
+                    <a:pt x="3547828" y="2666111"/>
+                  </a:lnTo>
+                  <a:lnTo>
+                    <a:pt x="3621588" y="2675066"/>
+                  </a:lnTo>
+                  <a:lnTo>
+                    <a:pt x="3695348" y="2683923"/>
+                  </a:lnTo>
+                  <a:lnTo>
+                    <a:pt x="3769108" y="2692684"/>
+                  </a:lnTo>
+                  <a:lnTo>
+                    <a:pt x="3842868" y="2701348"/>
+                  </a:lnTo>
+                  <a:lnTo>
+                    <a:pt x="3916628" y="2709917"/>
+                  </a:lnTo>
+                  <a:lnTo>
+                    <a:pt x="3990388" y="2718393"/>
+                  </a:lnTo>
+                  <a:lnTo>
+                    <a:pt x="4064149" y="2726776"/>
+                  </a:lnTo>
+                  <a:lnTo>
+                    <a:pt x="4137909" y="2735067"/>
+                  </a:lnTo>
+                  <a:lnTo>
+                    <a:pt x="4211669" y="2743267"/>
+                  </a:lnTo>
+                  <a:lnTo>
+                    <a:pt x="4285429" y="2751377"/>
+                  </a:lnTo>
+                  <a:lnTo>
+                    <a:pt x="4359189" y="2759399"/>
+                  </a:lnTo>
+                  <a:lnTo>
+                    <a:pt x="4432949" y="2767332"/>
+                  </a:lnTo>
+                  <a:lnTo>
+                    <a:pt x="4506709" y="2775179"/>
+                  </a:lnTo>
+                  <a:lnTo>
+                    <a:pt x="4580469" y="2782940"/>
+                  </a:lnTo>
+                  <a:lnTo>
+                    <a:pt x="4654229" y="2790616"/>
+                  </a:lnTo>
+                  <a:lnTo>
+                    <a:pt x="4727989" y="2798207"/>
+                  </a:lnTo>
+                  <a:lnTo>
+                    <a:pt x="4801749" y="2805716"/>
+                  </a:lnTo>
+                  <a:lnTo>
+                    <a:pt x="4875509" y="2813142"/>
+                  </a:lnTo>
+                  <a:lnTo>
+                    <a:pt x="4949269" y="2820487"/>
+                  </a:lnTo>
+                  <a:lnTo>
+                    <a:pt x="5023029" y="2827752"/>
+                  </a:lnTo>
+                  <a:lnTo>
+                    <a:pt x="5096789" y="2834937"/>
+                  </a:lnTo>
+                  <a:lnTo>
+                    <a:pt x="5170549" y="2842043"/>
+                  </a:lnTo>
+                  <a:lnTo>
+                    <a:pt x="5244309" y="2849071"/>
+                  </a:lnTo>
+                  <a:lnTo>
+                    <a:pt x="5318069" y="2856023"/>
+                  </a:lnTo>
+                  <a:lnTo>
+                    <a:pt x="5391829" y="2862898"/>
+                  </a:lnTo>
+                  <a:lnTo>
+                    <a:pt x="5465589" y="2869698"/>
+                  </a:lnTo>
+                  <a:lnTo>
+                    <a:pt x="5539349" y="2876424"/>
+                  </a:lnTo>
+                  <a:lnTo>
+                    <a:pt x="5613109" y="2883076"/>
+                  </a:lnTo>
+                  <a:lnTo>
+                    <a:pt x="5686869" y="2889655"/>
+                  </a:lnTo>
+                  <a:lnTo>
+                    <a:pt x="5760629" y="2896162"/>
+                  </a:lnTo>
+                  <a:lnTo>
+                    <a:pt x="5834389" y="2902597"/>
+                  </a:lnTo>
+                  <a:lnTo>
+                    <a:pt x="5908149" y="2908963"/>
+                  </a:lnTo>
+                  <a:lnTo>
+                    <a:pt x="5981909" y="2915258"/>
+                  </a:lnTo>
+                  <a:lnTo>
+                    <a:pt x="6055669" y="2921485"/>
+                  </a:lnTo>
+                  <a:lnTo>
+                    <a:pt x="6129429" y="2927643"/>
+                  </a:lnTo>
+                  <a:lnTo>
+                    <a:pt x="6203189" y="2933734"/>
+                  </a:lnTo>
+                  <a:lnTo>
+                    <a:pt x="6276949" y="2939758"/>
+                  </a:lnTo>
+                  <a:lnTo>
+                    <a:pt x="6350709" y="2945716"/>
+                  </a:lnTo>
+                  <a:lnTo>
+                    <a:pt x="6424469" y="2951609"/>
+                  </a:lnTo>
+                  <a:lnTo>
+                    <a:pt x="6498229" y="2957437"/>
+                  </a:lnTo>
+                  <a:lnTo>
+                    <a:pt x="6571989" y="2963202"/>
+                  </a:lnTo>
+                  <a:lnTo>
+                    <a:pt x="6645749" y="2968903"/>
+                  </a:lnTo>
+                  <a:lnTo>
+                    <a:pt x="6719509" y="2974542"/>
+                  </a:lnTo>
+                  <a:lnTo>
+                    <a:pt x="6793269" y="2980120"/>
+                  </a:lnTo>
+                  <a:lnTo>
+                    <a:pt x="6867029" y="2985636"/>
+                  </a:lnTo>
+                  <a:lnTo>
+                    <a:pt x="6940789" y="2991091"/>
+                  </a:lnTo>
+                  <a:lnTo>
+                    <a:pt x="7014550" y="2996487"/>
+                  </a:lnTo>
+                  <a:lnTo>
+                    <a:pt x="7088310" y="3001824"/>
+                  </a:lnTo>
+                  <a:lnTo>
+                    <a:pt x="7162070" y="3007103"/>
+                  </a:lnTo>
+                  <a:lnTo>
+                    <a:pt x="7235830" y="3012323"/>
+                  </a:lnTo>
+                  <a:lnTo>
+                    <a:pt x="7235830" y="3346577"/>
+                  </a:lnTo>
+                  <a:lnTo>
+                    <a:pt x="7162070" y="3341681"/>
+                  </a:lnTo>
+                  <a:lnTo>
+                    <a:pt x="7088310" y="3336609"/>
+                  </a:lnTo>
+                  <a:lnTo>
+                    <a:pt x="7014550" y="3331356"/>
+                  </a:lnTo>
+                  <a:lnTo>
+                    <a:pt x="6940789" y="3325916"/>
+                  </a:lnTo>
+                  <a:lnTo>
+                    <a:pt x="6867029" y="3320282"/>
+                  </a:lnTo>
+                  <a:lnTo>
+                    <a:pt x="6793269" y="3314446"/>
+                  </a:lnTo>
+                  <a:lnTo>
+                    <a:pt x="6719509" y="3308403"/>
+                  </a:lnTo>
+                  <a:lnTo>
+                    <a:pt x="6645749" y="3302143"/>
+                  </a:lnTo>
+                  <a:lnTo>
+                    <a:pt x="6571989" y="3295660"/>
+                  </a:lnTo>
+                  <a:lnTo>
+                    <a:pt x="6498229" y="3288945"/>
+                  </a:lnTo>
+                  <a:lnTo>
+                    <a:pt x="6424469" y="3281991"/>
+                  </a:lnTo>
+                  <a:lnTo>
+                    <a:pt x="6350709" y="3274789"/>
+                  </a:lnTo>
+                  <a:lnTo>
+                    <a:pt x="6276949" y="3267329"/>
+                  </a:lnTo>
+                  <a:lnTo>
+                    <a:pt x="6203189" y="3259603"/>
+                  </a:lnTo>
+                  <a:lnTo>
+                    <a:pt x="6129429" y="3251602"/>
+                  </a:lnTo>
+                  <a:lnTo>
+                    <a:pt x="6055669" y="3243314"/>
+                  </a:lnTo>
+                  <a:lnTo>
+                    <a:pt x="5981909" y="3234731"/>
+                  </a:lnTo>
+                  <a:lnTo>
+                    <a:pt x="5908149" y="3225842"/>
+                  </a:lnTo>
+                  <a:lnTo>
+                    <a:pt x="5834389" y="3216635"/>
+                  </a:lnTo>
+                  <a:lnTo>
+                    <a:pt x="5760629" y="3207099"/>
+                  </a:lnTo>
+                  <a:lnTo>
+                    <a:pt x="5686869" y="3197223"/>
+                  </a:lnTo>
+                  <a:lnTo>
+                    <a:pt x="5613109" y="3186995"/>
+                  </a:lnTo>
+                  <a:lnTo>
+                    <a:pt x="5539349" y="3176401"/>
+                  </a:lnTo>
+                  <a:lnTo>
+                    <a:pt x="5465589" y="3165429"/>
+                  </a:lnTo>
+                  <a:lnTo>
+                    <a:pt x="5391829" y="3154065"/>
+                  </a:lnTo>
+                  <a:lnTo>
+                    <a:pt x="5318069" y="3142296"/>
+                  </a:lnTo>
+                  <a:lnTo>
+                    <a:pt x="5244309" y="3130107"/>
+                  </a:lnTo>
+                  <a:lnTo>
+                    <a:pt x="5170549" y="3117482"/>
+                  </a:lnTo>
+                  <a:lnTo>
+                    <a:pt x="5096789" y="3104407"/>
+                  </a:lnTo>
+                  <a:lnTo>
+                    <a:pt x="5023029" y="3090865"/>
+                  </a:lnTo>
+                  <a:lnTo>
+                    <a:pt x="4949269" y="3076840"/>
+                  </a:lnTo>
+                  <a:lnTo>
+                    <a:pt x="4875509" y="3062314"/>
+                  </a:lnTo>
+                  <a:lnTo>
+                    <a:pt x="4801749" y="3047269"/>
+                  </a:lnTo>
+                  <a:lnTo>
+                    <a:pt x="4727989" y="3031687"/>
+                  </a:lnTo>
+                  <a:lnTo>
+                    <a:pt x="4654229" y="3015549"/>
+                  </a:lnTo>
+                  <a:lnTo>
+                    <a:pt x="4580469" y="2998835"/>
+                  </a:lnTo>
+                  <a:lnTo>
+                    <a:pt x="4506709" y="2981524"/>
+                  </a:lnTo>
+                  <a:lnTo>
+                    <a:pt x="4432949" y="2963595"/>
+                  </a:lnTo>
+                  <a:lnTo>
+                    <a:pt x="4359189" y="2945027"/>
+                  </a:lnTo>
+                  <a:lnTo>
+                    <a:pt x="4285429" y="2925795"/>
+                  </a:lnTo>
+                  <a:lnTo>
+                    <a:pt x="4211669" y="2905877"/>
+                  </a:lnTo>
+                  <a:lnTo>
+                    <a:pt x="4137909" y="2885247"/>
+                  </a:lnTo>
+                  <a:lnTo>
+                    <a:pt x="4064149" y="2863882"/>
+                  </a:lnTo>
+                  <a:lnTo>
+                    <a:pt x="3990388" y="2841753"/>
+                  </a:lnTo>
+                  <a:lnTo>
+                    <a:pt x="3916628" y="2818835"/>
+                  </a:lnTo>
+                  <a:lnTo>
+                    <a:pt x="3842868" y="2795098"/>
+                  </a:lnTo>
+                  <a:lnTo>
+                    <a:pt x="3769108" y="2770514"/>
+                  </a:lnTo>
+                  <a:lnTo>
+                    <a:pt x="3695348" y="2745052"/>
+                  </a:lnTo>
+                  <a:lnTo>
+                    <a:pt x="3621588" y="2718682"/>
+                  </a:lnTo>
+                  <a:lnTo>
+                    <a:pt x="3547828" y="2691370"/>
+                  </a:lnTo>
+                  <a:lnTo>
+                    <a:pt x="3474068" y="2663083"/>
+                  </a:lnTo>
+                  <a:lnTo>
+                    <a:pt x="3400308" y="2647901"/>
+                  </a:lnTo>
+                  <a:lnTo>
+                    <a:pt x="3326548" y="2638645"/>
+                  </a:lnTo>
+                  <a:lnTo>
+                    <a:pt x="3252788" y="2629286"/>
+                  </a:lnTo>
+                  <a:lnTo>
+                    <a:pt x="3179028" y="2619824"/>
+                  </a:lnTo>
+                  <a:lnTo>
+                    <a:pt x="3105268" y="2610257"/>
+                  </a:lnTo>
+                  <a:lnTo>
+                    <a:pt x="3031508" y="2600584"/>
+                  </a:lnTo>
+                  <a:lnTo>
+                    <a:pt x="2957748" y="2590803"/>
+                  </a:lnTo>
+                  <a:lnTo>
+                    <a:pt x="2883988" y="2580915"/>
+                  </a:lnTo>
+                  <a:lnTo>
+                    <a:pt x="2810228" y="2570917"/>
+                  </a:lnTo>
+                  <a:lnTo>
+                    <a:pt x="2736468" y="2560808"/>
+                  </a:lnTo>
+                  <a:lnTo>
+                    <a:pt x="2662708" y="2550587"/>
+                  </a:lnTo>
+                  <a:lnTo>
+                    <a:pt x="2588948" y="2540253"/>
+                  </a:lnTo>
+                  <a:lnTo>
+                    <a:pt x="2515188" y="2529805"/>
+                  </a:lnTo>
+                  <a:lnTo>
+                    <a:pt x="2441428" y="2519241"/>
+                  </a:lnTo>
+                  <a:lnTo>
+                    <a:pt x="2367668" y="2508560"/>
+                  </a:lnTo>
+                  <a:lnTo>
+                    <a:pt x="2293908" y="2497761"/>
+                  </a:lnTo>
+                  <a:lnTo>
+                    <a:pt x="2220148" y="2486842"/>
+                  </a:lnTo>
+                  <a:lnTo>
+                    <a:pt x="2146388" y="2475802"/>
+                  </a:lnTo>
+                  <a:lnTo>
+                    <a:pt x="2072628" y="2464640"/>
+                  </a:lnTo>
+                  <a:lnTo>
+                    <a:pt x="1998868" y="2453354"/>
+                  </a:lnTo>
+                  <a:lnTo>
+                    <a:pt x="1925108" y="2441944"/>
+                  </a:lnTo>
+                  <a:lnTo>
+                    <a:pt x="1851348" y="2430407"/>
+                  </a:lnTo>
+                  <a:lnTo>
+                    <a:pt x="1777588" y="2418742"/>
+                  </a:lnTo>
+                  <a:lnTo>
+                    <a:pt x="1703828" y="2406948"/>
+                  </a:lnTo>
+                  <a:lnTo>
+                    <a:pt x="1630068" y="2395023"/>
+                  </a:lnTo>
+                  <a:lnTo>
+                    <a:pt x="1556308" y="2382967"/>
+                  </a:lnTo>
+                  <a:lnTo>
+                    <a:pt x="1482548" y="2370777"/>
+                  </a:lnTo>
+                  <a:lnTo>
+                    <a:pt x="1408788" y="2358452"/>
+                  </a:lnTo>
+                  <a:lnTo>
+                    <a:pt x="1335028" y="2345990"/>
+                  </a:lnTo>
+                  <a:lnTo>
+                    <a:pt x="1261268" y="2333390"/>
+                  </a:lnTo>
+                  <a:lnTo>
+                    <a:pt x="1187508" y="2320651"/>
+                  </a:lnTo>
+                  <a:lnTo>
+                    <a:pt x="1113747" y="2307771"/>
+                  </a:lnTo>
+                  <a:lnTo>
+                    <a:pt x="1039987" y="2294748"/>
+                  </a:lnTo>
+                  <a:lnTo>
+                    <a:pt x="966227" y="2281581"/>
+                  </a:lnTo>
+                  <a:lnTo>
+                    <a:pt x="892467" y="2268268"/>
+                  </a:lnTo>
+                  <a:lnTo>
+                    <a:pt x="818707" y="2254808"/>
+                  </a:lnTo>
+                  <a:lnTo>
+                    <a:pt x="744947" y="2241199"/>
+                  </a:lnTo>
+                  <a:lnTo>
+                    <a:pt x="671187" y="2227438"/>
+                  </a:lnTo>
+                  <a:lnTo>
+                    <a:pt x="597427" y="2213526"/>
+                  </a:lnTo>
+                  <a:lnTo>
+                    <a:pt x="523667" y="2199459"/>
+                  </a:lnTo>
+                  <a:lnTo>
+                    <a:pt x="449907" y="2185237"/>
+                  </a:lnTo>
+                  <a:lnTo>
+                    <a:pt x="376147" y="2170857"/>
+                  </a:lnTo>
+                  <a:lnTo>
+                    <a:pt x="302387" y="2156318"/>
+                  </a:lnTo>
+                  <a:lnTo>
+                    <a:pt x="228627" y="2141618"/>
+                  </a:lnTo>
+                  <a:lnTo>
+                    <a:pt x="154867" y="2126755"/>
+                  </a:lnTo>
+                  <a:lnTo>
+                    <a:pt x="81107" y="2111728"/>
+                  </a:lnTo>
+                  <a:lnTo>
+                    <a:pt x="7347" y="2096534"/>
+                  </a:lnTo>
+                  <a:lnTo>
+                    <a:pt x="0" y="2095004"/>
                   </a:lnTo>
                   <a:close/>
                 </a:path>
@@ -3615,294 +3615,294 @@
           </p:nvSpPr>
           <p:spPr>
             <a:xfrm>
-              <a:off x="1251629" y="1896563"/>
-              <a:ext cx="6801718" cy="3158365"/>
+              <a:off x="1251629" y="2073503"/>
+              <a:ext cx="6801718" cy="3012323"/>
             </a:xfrm>
             <a:custGeom>
               <a:avLst/>
               <a:pathLst>
-                <a:path w="6801718" h="3158365">
+                <a:path w="6801718" h="3012323">
                   <a:moveTo>
                     <a:pt x="0" y="0"/>
                   </a:moveTo>
                   <a:lnTo>
-                    <a:pt x="15795" y="27712"/>
-                  </a:lnTo>
-                  <a:lnTo>
-                    <a:pt x="89555" y="152658"/>
-                  </a:lnTo>
-                  <a:lnTo>
-                    <a:pt x="163315" y="273296"/>
-                  </a:lnTo>
-                  <a:lnTo>
-                    <a:pt x="237075" y="389777"/>
-                  </a:lnTo>
-                  <a:lnTo>
-                    <a:pt x="310835" y="502243"/>
-                  </a:lnTo>
-                  <a:lnTo>
-                    <a:pt x="384595" y="610832"/>
-                  </a:lnTo>
-                  <a:lnTo>
-                    <a:pt x="458355" y="715679"/>
-                  </a:lnTo>
-                  <a:lnTo>
-                    <a:pt x="532115" y="816911"/>
-                  </a:lnTo>
-                  <a:lnTo>
-                    <a:pt x="605875" y="914654"/>
-                  </a:lnTo>
-                  <a:lnTo>
-                    <a:pt x="679635" y="1009028"/>
-                  </a:lnTo>
-                  <a:lnTo>
-                    <a:pt x="753396" y="1100150"/>
-                  </a:lnTo>
-                  <a:lnTo>
-                    <a:pt x="827156" y="1188130"/>
-                  </a:lnTo>
-                  <a:lnTo>
-                    <a:pt x="900916" y="1273078"/>
-                  </a:lnTo>
-                  <a:lnTo>
-                    <a:pt x="974676" y="1355098"/>
-                  </a:lnTo>
-                  <a:lnTo>
-                    <a:pt x="1048436" y="1434290"/>
-                  </a:lnTo>
-                  <a:lnTo>
-                    <a:pt x="1122196" y="1510754"/>
-                  </a:lnTo>
-                  <a:lnTo>
-                    <a:pt x="1195956" y="1584581"/>
-                  </a:lnTo>
-                  <a:lnTo>
-                    <a:pt x="1269716" y="1655864"/>
-                  </a:lnTo>
-                  <a:lnTo>
-                    <a:pt x="1343476" y="1724690"/>
-                  </a:lnTo>
-                  <a:lnTo>
-                    <a:pt x="1417236" y="1791143"/>
-                  </a:lnTo>
-                  <a:lnTo>
-                    <a:pt x="1490996" y="1855306"/>
-                  </a:lnTo>
-                  <a:lnTo>
-                    <a:pt x="1564756" y="1917257"/>
-                  </a:lnTo>
-                  <a:lnTo>
-                    <a:pt x="1638516" y="1977073"/>
-                  </a:lnTo>
-                  <a:lnTo>
-                    <a:pt x="1712276" y="2034828"/>
-                  </a:lnTo>
-                  <a:lnTo>
-                    <a:pt x="1786036" y="2090591"/>
-                  </a:lnTo>
-                  <a:lnTo>
-                    <a:pt x="1859796" y="2144433"/>
-                  </a:lnTo>
-                  <a:lnTo>
-                    <a:pt x="1933556" y="2196418"/>
-                  </a:lnTo>
-                  <a:lnTo>
-                    <a:pt x="2007316" y="2246612"/>
-                  </a:lnTo>
-                  <a:lnTo>
-                    <a:pt x="2081076" y="2295076"/>
-                  </a:lnTo>
-                  <a:lnTo>
-                    <a:pt x="2154836" y="2341869"/>
-                  </a:lnTo>
-                  <a:lnTo>
-                    <a:pt x="2228596" y="2387049"/>
-                  </a:lnTo>
-                  <a:lnTo>
-                    <a:pt x="2302356" y="2430672"/>
-                  </a:lnTo>
-                  <a:lnTo>
-                    <a:pt x="2376116" y="2472792"/>
-                  </a:lnTo>
-                  <a:lnTo>
-                    <a:pt x="2449876" y="2513459"/>
-                  </a:lnTo>
-                  <a:lnTo>
-                    <a:pt x="2523636" y="2552725"/>
-                  </a:lnTo>
-                  <a:lnTo>
-                    <a:pt x="2597396" y="2590637"/>
-                  </a:lnTo>
-                  <a:lnTo>
-                    <a:pt x="2671156" y="2627243"/>
-                  </a:lnTo>
-                  <a:lnTo>
-                    <a:pt x="2744916" y="2662587"/>
-                  </a:lnTo>
-                  <a:lnTo>
-                    <a:pt x="2818676" y="2696713"/>
-                  </a:lnTo>
-                  <a:lnTo>
-                    <a:pt x="2892436" y="2729662"/>
-                  </a:lnTo>
-                  <a:lnTo>
-                    <a:pt x="2966196" y="2761476"/>
-                  </a:lnTo>
-                  <a:lnTo>
-                    <a:pt x="3039956" y="2785874"/>
-                  </a:lnTo>
-                  <a:lnTo>
-                    <a:pt x="3113716" y="2795367"/>
-                  </a:lnTo>
-                  <a:lnTo>
-                    <a:pt x="3187476" y="2804757"/>
-                  </a:lnTo>
-                  <a:lnTo>
-                    <a:pt x="3261236" y="2814044"/>
-                  </a:lnTo>
-                  <a:lnTo>
-                    <a:pt x="3334996" y="2823229"/>
-                  </a:lnTo>
-                  <a:lnTo>
-                    <a:pt x="3408756" y="2832313"/>
-                  </a:lnTo>
-                  <a:lnTo>
-                    <a:pt x="3482516" y="2841298"/>
-                  </a:lnTo>
-                  <a:lnTo>
-                    <a:pt x="3556276" y="2850184"/>
-                  </a:lnTo>
-                  <a:lnTo>
-                    <a:pt x="3630037" y="2858974"/>
-                  </a:lnTo>
-                  <a:lnTo>
-                    <a:pt x="3703797" y="2867667"/>
-                  </a:lnTo>
-                  <a:lnTo>
-                    <a:pt x="3777557" y="2876264"/>
-                  </a:lnTo>
-                  <a:lnTo>
-                    <a:pt x="3851317" y="2884768"/>
-                  </a:lnTo>
-                  <a:lnTo>
-                    <a:pt x="3925077" y="2893178"/>
-                  </a:lnTo>
-                  <a:lnTo>
-                    <a:pt x="3998837" y="2901496"/>
-                  </a:lnTo>
-                  <a:lnTo>
-                    <a:pt x="4072597" y="2909724"/>
-                  </a:lnTo>
-                  <a:lnTo>
-                    <a:pt x="4146357" y="2917861"/>
-                  </a:lnTo>
-                  <a:lnTo>
-                    <a:pt x="4220117" y="2925909"/>
-                  </a:lnTo>
-                  <a:lnTo>
-                    <a:pt x="4293877" y="2933868"/>
-                  </a:lnTo>
-                  <a:lnTo>
-                    <a:pt x="4367637" y="2941741"/>
-                  </a:lnTo>
-                  <a:lnTo>
-                    <a:pt x="4441397" y="2949527"/>
-                  </a:lnTo>
-                  <a:lnTo>
-                    <a:pt x="4515157" y="2957228"/>
-                  </a:lnTo>
-                  <a:lnTo>
-                    <a:pt x="4588917" y="2964845"/>
-                  </a:lnTo>
-                  <a:lnTo>
-                    <a:pt x="4662677" y="2972378"/>
-                  </a:lnTo>
-                  <a:lnTo>
-                    <a:pt x="4736437" y="2979829"/>
-                  </a:lnTo>
-                  <a:lnTo>
-                    <a:pt x="4810197" y="2987198"/>
-                  </a:lnTo>
-                  <a:lnTo>
-                    <a:pt x="4883957" y="2994487"/>
-                  </a:lnTo>
-                  <a:lnTo>
-                    <a:pt x="4957717" y="3001696"/>
-                  </a:lnTo>
-                  <a:lnTo>
-                    <a:pt x="5031477" y="3008825"/>
-                  </a:lnTo>
-                  <a:lnTo>
-                    <a:pt x="5105237" y="3015877"/>
-                  </a:lnTo>
-                  <a:lnTo>
-                    <a:pt x="5178997" y="3022851"/>
-                  </a:lnTo>
-                  <a:lnTo>
-                    <a:pt x="5252757" y="3029749"/>
-                  </a:lnTo>
-                  <a:lnTo>
-                    <a:pt x="5326517" y="3036572"/>
-                  </a:lnTo>
-                  <a:lnTo>
-                    <a:pt x="5400277" y="3043319"/>
-                  </a:lnTo>
-                  <a:lnTo>
-                    <a:pt x="5474037" y="3049993"/>
-                  </a:lnTo>
-                  <a:lnTo>
-                    <a:pt x="5547797" y="3056594"/>
-                  </a:lnTo>
-                  <a:lnTo>
-                    <a:pt x="5621557" y="3063122"/>
-                  </a:lnTo>
-                  <a:lnTo>
-                    <a:pt x="5695317" y="3069579"/>
-                  </a:lnTo>
-                  <a:lnTo>
-                    <a:pt x="5769077" y="3075965"/>
-                  </a:lnTo>
-                  <a:lnTo>
-                    <a:pt x="5842837" y="3082282"/>
-                  </a:lnTo>
-                  <a:lnTo>
-                    <a:pt x="5916597" y="3088529"/>
-                  </a:lnTo>
-                  <a:lnTo>
-                    <a:pt x="5990357" y="3094707"/>
-                  </a:lnTo>
-                  <a:lnTo>
-                    <a:pt x="6064117" y="3100818"/>
-                  </a:lnTo>
-                  <a:lnTo>
-                    <a:pt x="6137877" y="3106862"/>
-                  </a:lnTo>
-                  <a:lnTo>
-                    <a:pt x="6211637" y="3112840"/>
-                  </a:lnTo>
-                  <a:lnTo>
-                    <a:pt x="6285397" y="3118752"/>
-                  </a:lnTo>
-                  <a:lnTo>
-                    <a:pt x="6359157" y="3124600"/>
-                  </a:lnTo>
-                  <a:lnTo>
-                    <a:pt x="6432917" y="3130384"/>
-                  </a:lnTo>
-                  <a:lnTo>
-                    <a:pt x="6506677" y="3136104"/>
-                  </a:lnTo>
-                  <a:lnTo>
-                    <a:pt x="6580438" y="3141761"/>
-                  </a:lnTo>
-                  <a:lnTo>
-                    <a:pt x="6654198" y="3147357"/>
-                  </a:lnTo>
-                  <a:lnTo>
-                    <a:pt x="6727958" y="3152891"/>
-                  </a:lnTo>
-                  <a:lnTo>
-                    <a:pt x="6801718" y="3158365"/>
+                    <a:pt x="15795" y="26430"/>
+                  </a:lnTo>
+                  <a:lnTo>
+                    <a:pt x="89555" y="145599"/>
+                  </a:lnTo>
+                  <a:lnTo>
+                    <a:pt x="163315" y="260659"/>
+                  </a:lnTo>
+                  <a:lnTo>
+                    <a:pt x="237075" y="371754"/>
+                  </a:lnTo>
+                  <a:lnTo>
+                    <a:pt x="310835" y="479019"/>
+                  </a:lnTo>
+                  <a:lnTo>
+                    <a:pt x="384595" y="582588"/>
+                  </a:lnTo>
+                  <a:lnTo>
+                    <a:pt x="458355" y="682586"/>
+                  </a:lnTo>
+                  <a:lnTo>
+                    <a:pt x="532115" y="779137"/>
+                  </a:lnTo>
+                  <a:lnTo>
+                    <a:pt x="605875" y="872361"/>
+                  </a:lnTo>
+                  <a:lnTo>
+                    <a:pt x="679635" y="962371"/>
+                  </a:lnTo>
+                  <a:lnTo>
+                    <a:pt x="753396" y="1049279"/>
+                  </a:lnTo>
+                  <a:lnTo>
+                    <a:pt x="827156" y="1133191"/>
+                  </a:lnTo>
+                  <a:lnTo>
+                    <a:pt x="900916" y="1214211"/>
+                  </a:lnTo>
+                  <a:lnTo>
+                    <a:pt x="974676" y="1292438"/>
+                  </a:lnTo>
+                  <a:lnTo>
+                    <a:pt x="1048436" y="1367969"/>
+                  </a:lnTo>
+                  <a:lnTo>
+                    <a:pt x="1122196" y="1440897"/>
+                  </a:lnTo>
+                  <a:lnTo>
+                    <a:pt x="1195956" y="1511311"/>
+                  </a:lnTo>
+                  <a:lnTo>
+                    <a:pt x="1269716" y="1579297"/>
+                  </a:lnTo>
+                  <a:lnTo>
+                    <a:pt x="1343476" y="1644941"/>
+                  </a:lnTo>
+                  <a:lnTo>
+                    <a:pt x="1417236" y="1708321"/>
+                  </a:lnTo>
+                  <a:lnTo>
+                    <a:pt x="1490996" y="1769517"/>
+                  </a:lnTo>
+                  <a:lnTo>
+                    <a:pt x="1564756" y="1828604"/>
+                  </a:lnTo>
+                  <a:lnTo>
+                    <a:pt x="1638516" y="1885654"/>
+                  </a:lnTo>
+                  <a:lnTo>
+                    <a:pt x="1712276" y="1940738"/>
+                  </a:lnTo>
+                  <a:lnTo>
+                    <a:pt x="1786036" y="1993923"/>
+                  </a:lnTo>
+                  <a:lnTo>
+                    <a:pt x="1859796" y="2045275"/>
+                  </a:lnTo>
+                  <a:lnTo>
+                    <a:pt x="1933556" y="2094857"/>
+                  </a:lnTo>
+                  <a:lnTo>
+                    <a:pt x="2007316" y="2142729"/>
+                  </a:lnTo>
+                  <a:lnTo>
+                    <a:pt x="2081076" y="2188952"/>
+                  </a:lnTo>
+                  <a:lnTo>
+                    <a:pt x="2154836" y="2233582"/>
+                  </a:lnTo>
+                  <a:lnTo>
+                    <a:pt x="2228596" y="2276673"/>
+                  </a:lnTo>
+                  <a:lnTo>
+                    <a:pt x="2302356" y="2318279"/>
+                  </a:lnTo>
+                  <a:lnTo>
+                    <a:pt x="2376116" y="2358451"/>
+                  </a:lnTo>
+                  <a:lnTo>
+                    <a:pt x="2449876" y="2397238"/>
+                  </a:lnTo>
+                  <a:lnTo>
+                    <a:pt x="2523636" y="2434688"/>
+                  </a:lnTo>
+                  <a:lnTo>
+                    <a:pt x="2597396" y="2470847"/>
+                  </a:lnTo>
+                  <a:lnTo>
+                    <a:pt x="2671156" y="2505760"/>
+                  </a:lnTo>
+                  <a:lnTo>
+                    <a:pt x="2744916" y="2539470"/>
+                  </a:lnTo>
+                  <a:lnTo>
+                    <a:pt x="2818676" y="2572018"/>
+                  </a:lnTo>
+                  <a:lnTo>
+                    <a:pt x="2892436" y="2603444"/>
+                  </a:lnTo>
+                  <a:lnTo>
+                    <a:pt x="2966196" y="2633786"/>
+                  </a:lnTo>
+                  <a:lnTo>
+                    <a:pt x="3039956" y="2657056"/>
+                  </a:lnTo>
+                  <a:lnTo>
+                    <a:pt x="3113716" y="2666111"/>
+                  </a:lnTo>
+                  <a:lnTo>
+                    <a:pt x="3187476" y="2675066"/>
+                  </a:lnTo>
+                  <a:lnTo>
+                    <a:pt x="3261236" y="2683923"/>
+                  </a:lnTo>
+                  <a:lnTo>
+                    <a:pt x="3334996" y="2692684"/>
+                  </a:lnTo>
+                  <a:lnTo>
+                    <a:pt x="3408756" y="2701348"/>
+                  </a:lnTo>
+                  <a:lnTo>
+                    <a:pt x="3482516" y="2709917"/>
+                  </a:lnTo>
+                  <a:lnTo>
+                    <a:pt x="3556276" y="2718393"/>
+                  </a:lnTo>
+                  <a:lnTo>
+                    <a:pt x="3630037" y="2726776"/>
+                  </a:lnTo>
+                  <a:lnTo>
+                    <a:pt x="3703797" y="2735067"/>
+                  </a:lnTo>
+                  <a:lnTo>
+                    <a:pt x="3777557" y="2743267"/>
+                  </a:lnTo>
+                  <a:lnTo>
+                    <a:pt x="3851317" y="2751377"/>
+                  </a:lnTo>
+                  <a:lnTo>
+                    <a:pt x="3925077" y="2759399"/>
+                  </a:lnTo>
+                  <a:lnTo>
+                    <a:pt x="3998837" y="2767332"/>
+                  </a:lnTo>
+                  <a:lnTo>
+                    <a:pt x="4072597" y="2775179"/>
+                  </a:lnTo>
+                  <a:lnTo>
+                    <a:pt x="4146357" y="2782940"/>
+                  </a:lnTo>
+                  <a:lnTo>
+                    <a:pt x="4220117" y="2790616"/>
+                  </a:lnTo>
+                  <a:lnTo>
+                    <a:pt x="4293877" y="2798207"/>
+                  </a:lnTo>
+                  <a:lnTo>
+                    <a:pt x="4367637" y="2805716"/>
+                  </a:lnTo>
+                  <a:lnTo>
+                    <a:pt x="4441397" y="2813142"/>
+                  </a:lnTo>
+                  <a:lnTo>
+                    <a:pt x="4515157" y="2820487"/>
+                  </a:lnTo>
+                  <a:lnTo>
+                    <a:pt x="4588917" y="2827752"/>
+                  </a:lnTo>
+                  <a:lnTo>
+                    <a:pt x="4662677" y="2834937"/>
+                  </a:lnTo>
+                  <a:lnTo>
+                    <a:pt x="4736437" y="2842043"/>
+                  </a:lnTo>
+                  <a:lnTo>
+                    <a:pt x="4810197" y="2849071"/>
+                  </a:lnTo>
+                  <a:lnTo>
+                    <a:pt x="4883957" y="2856023"/>
+                  </a:lnTo>
+                  <a:lnTo>
+                    <a:pt x="4957717" y="2862898"/>
+                  </a:lnTo>
+                  <a:lnTo>
+                    <a:pt x="5031477" y="2869698"/>
+                  </a:lnTo>
+                  <a:lnTo>
+                    <a:pt x="5105237" y="2876424"/>
+                  </a:lnTo>
+                  <a:lnTo>
+                    <a:pt x="5178997" y="2883076"/>
+                  </a:lnTo>
+                  <a:lnTo>
+                    <a:pt x="5252757" y="2889655"/>
+                  </a:lnTo>
+                  <a:lnTo>
+                    <a:pt x="5326517" y="2896162"/>
+                  </a:lnTo>
+                  <a:lnTo>
+                    <a:pt x="5400277" y="2902597"/>
+                  </a:lnTo>
+                  <a:lnTo>
+                    <a:pt x="5474037" y="2908963"/>
+                  </a:lnTo>
+                  <a:lnTo>
+                    <a:pt x="5547797" y="2915258"/>
+                  </a:lnTo>
+                  <a:lnTo>
+                    <a:pt x="5621557" y="2921485"/>
+                  </a:lnTo>
+                  <a:lnTo>
+                    <a:pt x="5695317" y="2927643"/>
+                  </a:lnTo>
+                  <a:lnTo>
+                    <a:pt x="5769077" y="2933734"/>
+                  </a:lnTo>
+                  <a:lnTo>
+                    <a:pt x="5842837" y="2939758"/>
+                  </a:lnTo>
+                  <a:lnTo>
+                    <a:pt x="5916597" y="2945716"/>
+                  </a:lnTo>
+                  <a:lnTo>
+                    <a:pt x="5990357" y="2951609"/>
+                  </a:lnTo>
+                  <a:lnTo>
+                    <a:pt x="6064117" y="2957437"/>
+                  </a:lnTo>
+                  <a:lnTo>
+                    <a:pt x="6137877" y="2963202"/>
+                  </a:lnTo>
+                  <a:lnTo>
+                    <a:pt x="6211637" y="2968903"/>
+                  </a:lnTo>
+                  <a:lnTo>
+                    <a:pt x="6285397" y="2974542"/>
+                  </a:lnTo>
+                  <a:lnTo>
+                    <a:pt x="6359157" y="2980120"/>
+                  </a:lnTo>
+                  <a:lnTo>
+                    <a:pt x="6432917" y="2985636"/>
+                  </a:lnTo>
+                  <a:lnTo>
+                    <a:pt x="6506677" y="2991091"/>
+                  </a:lnTo>
+                  <a:lnTo>
+                    <a:pt x="6580438" y="2996487"/>
+                  </a:lnTo>
+                  <a:lnTo>
+                    <a:pt x="6654198" y="3001824"/>
+                  </a:lnTo>
+                  <a:lnTo>
+                    <a:pt x="6727958" y="3007103"/>
+                  </a:lnTo>
+                  <a:lnTo>
+                    <a:pt x="6801718" y="3012323"/>
                   </a:lnTo>
                 </a:path>
               </a:pathLst>
@@ -3922,309 +3922,309 @@
           </p:nvSpPr>
           <p:spPr>
             <a:xfrm>
-              <a:off x="817517" y="4093136"/>
-              <a:ext cx="7235830" cy="1312251"/>
+              <a:off x="817517" y="4168507"/>
+              <a:ext cx="7235830" cy="1251573"/>
             </a:xfrm>
             <a:custGeom>
               <a:avLst/>
               <a:pathLst>
-                <a:path w="7235830" h="1312251">
+                <a:path w="7235830" h="1251573">
                   <a:moveTo>
-                    <a:pt x="7235830" y="1312251"/>
+                    <a:pt x="7235830" y="1251573"/>
                   </a:moveTo>
                   <a:lnTo>
-                    <a:pt x="7162070" y="1307117"/>
-                  </a:lnTo>
-                  <a:lnTo>
-                    <a:pt x="7088310" y="1301799"/>
-                  </a:lnTo>
-                  <a:lnTo>
-                    <a:pt x="7014550" y="1296292"/>
-                  </a:lnTo>
-                  <a:lnTo>
-                    <a:pt x="6940789" y="1290588"/>
-                  </a:lnTo>
-                  <a:lnTo>
-                    <a:pt x="6867029" y="1284681"/>
-                  </a:lnTo>
-                  <a:lnTo>
-                    <a:pt x="6793269" y="1278562"/>
-                  </a:lnTo>
-                  <a:lnTo>
-                    <a:pt x="6719509" y="1272225"/>
-                  </a:lnTo>
-                  <a:lnTo>
-                    <a:pt x="6645749" y="1265662"/>
-                  </a:lnTo>
-                  <a:lnTo>
-                    <a:pt x="6571989" y="1258865"/>
-                  </a:lnTo>
-                  <a:lnTo>
-                    <a:pt x="6498229" y="1251825"/>
-                  </a:lnTo>
-                  <a:lnTo>
-                    <a:pt x="6424469" y="1244534"/>
-                  </a:lnTo>
-                  <a:lnTo>
-                    <a:pt x="6350709" y="1236982"/>
-                  </a:lnTo>
-                  <a:lnTo>
-                    <a:pt x="6276949" y="1229161"/>
-                  </a:lnTo>
-                  <a:lnTo>
-                    <a:pt x="6203189" y="1221061"/>
-                  </a:lnTo>
-                  <a:lnTo>
-                    <a:pt x="6129429" y="1212671"/>
-                  </a:lnTo>
-                  <a:lnTo>
-                    <a:pt x="6055669" y="1203982"/>
-                  </a:lnTo>
-                  <a:lnTo>
-                    <a:pt x="5981909" y="1194983"/>
-                  </a:lnTo>
-                  <a:lnTo>
-                    <a:pt x="5908149" y="1185662"/>
-                  </a:lnTo>
-                  <a:lnTo>
-                    <a:pt x="5834389" y="1176009"/>
-                  </a:lnTo>
-                  <a:lnTo>
-                    <a:pt x="5760629" y="1166011"/>
-                  </a:lnTo>
-                  <a:lnTo>
-                    <a:pt x="5686869" y="1155656"/>
-                  </a:lnTo>
-                  <a:lnTo>
-                    <a:pt x="5613109" y="1144932"/>
-                  </a:lnTo>
-                  <a:lnTo>
-                    <a:pt x="5539349" y="1133824"/>
-                  </a:lnTo>
-                  <a:lnTo>
-                    <a:pt x="5465589" y="1122320"/>
-                  </a:lnTo>
-                  <a:lnTo>
-                    <a:pt x="5391829" y="1110406"/>
-                  </a:lnTo>
-                  <a:lnTo>
-                    <a:pt x="5318069" y="1098066"/>
-                  </a:lnTo>
-                  <a:lnTo>
-                    <a:pt x="5244309" y="1085286"/>
-                  </a:lnTo>
-                  <a:lnTo>
-                    <a:pt x="5170549" y="1072049"/>
-                  </a:lnTo>
-                  <a:lnTo>
-                    <a:pt x="5096789" y="1058340"/>
-                  </a:lnTo>
-                  <a:lnTo>
-                    <a:pt x="5023029" y="1044142"/>
-                  </a:lnTo>
-                  <a:lnTo>
-                    <a:pt x="4949269" y="1029436"/>
-                  </a:lnTo>
-                  <a:lnTo>
-                    <a:pt x="4875509" y="1014206"/>
-                  </a:lnTo>
-                  <a:lnTo>
-                    <a:pt x="4801749" y="998432"/>
-                  </a:lnTo>
-                  <a:lnTo>
-                    <a:pt x="4727989" y="982095"/>
-                  </a:lnTo>
-                  <a:lnTo>
-                    <a:pt x="4654229" y="965174"/>
-                  </a:lnTo>
-                  <a:lnTo>
-                    <a:pt x="4580469" y="947650"/>
-                  </a:lnTo>
-                  <a:lnTo>
-                    <a:pt x="4506709" y="929500"/>
-                  </a:lnTo>
-                  <a:lnTo>
-                    <a:pt x="4432949" y="910702"/>
-                  </a:lnTo>
-                  <a:lnTo>
-                    <a:pt x="4359189" y="891233"/>
-                  </a:lnTo>
-                  <a:lnTo>
-                    <a:pt x="4285429" y="871068"/>
-                  </a:lnTo>
-                  <a:lnTo>
-                    <a:pt x="4211669" y="850185"/>
-                  </a:lnTo>
-                  <a:lnTo>
-                    <a:pt x="4137909" y="828555"/>
-                  </a:lnTo>
-                  <a:lnTo>
-                    <a:pt x="4064149" y="806154"/>
-                  </a:lnTo>
-                  <a:lnTo>
-                    <a:pt x="3990388" y="782952"/>
-                  </a:lnTo>
-                  <a:lnTo>
-                    <a:pt x="3916628" y="758923"/>
-                  </a:lnTo>
-                  <a:lnTo>
-                    <a:pt x="3842868" y="734035"/>
-                  </a:lnTo>
-                  <a:lnTo>
-                    <a:pt x="3769108" y="708259"/>
-                  </a:lnTo>
-                  <a:lnTo>
-                    <a:pt x="3695348" y="681563"/>
-                  </a:lnTo>
-                  <a:lnTo>
-                    <a:pt x="3621588" y="653914"/>
-                  </a:lnTo>
-                  <a:lnTo>
-                    <a:pt x="3547828" y="625278"/>
-                  </a:lnTo>
-                  <a:lnTo>
-                    <a:pt x="3474068" y="595620"/>
-                  </a:lnTo>
-                  <a:lnTo>
-                    <a:pt x="3400308" y="579702"/>
-                  </a:lnTo>
-                  <a:lnTo>
-                    <a:pt x="3326548" y="569997"/>
-                  </a:lnTo>
-                  <a:lnTo>
-                    <a:pt x="3252788" y="560185"/>
-                  </a:lnTo>
-                  <a:lnTo>
-                    <a:pt x="3179028" y="550264"/>
-                  </a:lnTo>
-                  <a:lnTo>
-                    <a:pt x="3105268" y="540233"/>
-                  </a:lnTo>
-                  <a:lnTo>
-                    <a:pt x="3031508" y="530090"/>
-                  </a:lnTo>
-                  <a:lnTo>
-                    <a:pt x="2957748" y="519836"/>
-                  </a:lnTo>
-                  <a:lnTo>
-                    <a:pt x="2883988" y="509468"/>
-                  </a:lnTo>
-                  <a:lnTo>
-                    <a:pt x="2810228" y="498985"/>
-                  </a:lnTo>
-                  <a:lnTo>
-                    <a:pt x="2736468" y="488387"/>
-                  </a:lnTo>
-                  <a:lnTo>
-                    <a:pt x="2662708" y="477670"/>
-                  </a:lnTo>
-                  <a:lnTo>
-                    <a:pt x="2588948" y="466835"/>
-                  </a:lnTo>
-                  <a:lnTo>
-                    <a:pt x="2515188" y="455881"/>
-                  </a:lnTo>
-                  <a:lnTo>
-                    <a:pt x="2441428" y="444804"/>
-                  </a:lnTo>
-                  <a:lnTo>
-                    <a:pt x="2367668" y="433606"/>
-                  </a:lnTo>
-                  <a:lnTo>
-                    <a:pt x="2293908" y="422283"/>
-                  </a:lnTo>
-                  <a:lnTo>
-                    <a:pt x="2220148" y="410834"/>
-                  </a:lnTo>
-                  <a:lnTo>
-                    <a:pt x="2146388" y="399259"/>
-                  </a:lnTo>
-                  <a:lnTo>
-                    <a:pt x="2072628" y="387556"/>
-                  </a:lnTo>
-                  <a:lnTo>
-                    <a:pt x="1998868" y="375723"/>
-                  </a:lnTo>
-                  <a:lnTo>
-                    <a:pt x="1925108" y="363760"/>
-                  </a:lnTo>
-                  <a:lnTo>
-                    <a:pt x="1851348" y="351663"/>
-                  </a:lnTo>
-                  <a:lnTo>
-                    <a:pt x="1777588" y="339433"/>
-                  </a:lnTo>
-                  <a:lnTo>
-                    <a:pt x="1703828" y="327067"/>
-                  </a:lnTo>
-                  <a:lnTo>
-                    <a:pt x="1630068" y="314565"/>
-                  </a:lnTo>
-                  <a:lnTo>
-                    <a:pt x="1556308" y="301923"/>
-                  </a:lnTo>
-                  <a:lnTo>
-                    <a:pt x="1482548" y="289142"/>
-                  </a:lnTo>
-                  <a:lnTo>
-                    <a:pt x="1408788" y="276220"/>
-                  </a:lnTo>
-                  <a:lnTo>
-                    <a:pt x="1335028" y="263154"/>
-                  </a:lnTo>
-                  <a:lnTo>
-                    <a:pt x="1261268" y="249943"/>
-                  </a:lnTo>
-                  <a:lnTo>
-                    <a:pt x="1187508" y="236587"/>
-                  </a:lnTo>
-                  <a:lnTo>
-                    <a:pt x="1113747" y="223082"/>
-                  </a:lnTo>
-                  <a:lnTo>
-                    <a:pt x="1039987" y="209428"/>
-                  </a:lnTo>
-                  <a:lnTo>
-                    <a:pt x="966227" y="195622"/>
-                  </a:lnTo>
-                  <a:lnTo>
-                    <a:pt x="892467" y="181664"/>
-                  </a:lnTo>
-                  <a:lnTo>
-                    <a:pt x="818707" y="167551"/>
-                  </a:lnTo>
-                  <a:lnTo>
-                    <a:pt x="744947" y="153282"/>
-                  </a:lnTo>
-                  <a:lnTo>
-                    <a:pt x="671187" y="138855"/>
-                  </a:lnTo>
-                  <a:lnTo>
-                    <a:pt x="597427" y="124268"/>
-                  </a:lnTo>
-                  <a:lnTo>
-                    <a:pt x="523667" y="109519"/>
-                  </a:lnTo>
-                  <a:lnTo>
-                    <a:pt x="449907" y="94607"/>
-                  </a:lnTo>
-                  <a:lnTo>
-                    <a:pt x="376147" y="79531"/>
-                  </a:lnTo>
-                  <a:lnTo>
-                    <a:pt x="302387" y="64287"/>
-                  </a:lnTo>
-                  <a:lnTo>
-                    <a:pt x="228627" y="48874"/>
-                  </a:lnTo>
-                  <a:lnTo>
-                    <a:pt x="154867" y="33290"/>
-                  </a:lnTo>
-                  <a:lnTo>
-                    <a:pt x="81107" y="17534"/>
-                  </a:lnTo>
-                  <a:lnTo>
-                    <a:pt x="7347" y="1604"/>
+                    <a:pt x="7162070" y="1246676"/>
+                  </a:lnTo>
+                  <a:lnTo>
+                    <a:pt x="7088310" y="1241605"/>
+                  </a:lnTo>
+                  <a:lnTo>
+                    <a:pt x="7014550" y="1236352"/>
+                  </a:lnTo>
+                  <a:lnTo>
+                    <a:pt x="6940789" y="1230912"/>
+                  </a:lnTo>
+                  <a:lnTo>
+                    <a:pt x="6867029" y="1225278"/>
+                  </a:lnTo>
+                  <a:lnTo>
+                    <a:pt x="6793269" y="1219442"/>
+                  </a:lnTo>
+                  <a:lnTo>
+                    <a:pt x="6719509" y="1213398"/>
+                  </a:lnTo>
+                  <a:lnTo>
+                    <a:pt x="6645749" y="1207139"/>
+                  </a:lnTo>
+                  <a:lnTo>
+                    <a:pt x="6571989" y="1200656"/>
+                  </a:lnTo>
+                  <a:lnTo>
+                    <a:pt x="6498229" y="1193941"/>
+                  </a:lnTo>
+                  <a:lnTo>
+                    <a:pt x="6424469" y="1186987"/>
+                  </a:lnTo>
+                  <a:lnTo>
+                    <a:pt x="6350709" y="1179785"/>
+                  </a:lnTo>
+                  <a:lnTo>
+                    <a:pt x="6276949" y="1172325"/>
+                  </a:lnTo>
+                  <a:lnTo>
+                    <a:pt x="6203189" y="1164599"/>
+                  </a:lnTo>
+                  <a:lnTo>
+                    <a:pt x="6129429" y="1156597"/>
+                  </a:lnTo>
+                  <a:lnTo>
+                    <a:pt x="6055669" y="1148310"/>
+                  </a:lnTo>
+                  <a:lnTo>
+                    <a:pt x="5981909" y="1139727"/>
+                  </a:lnTo>
+                  <a:lnTo>
+                    <a:pt x="5908149" y="1130837"/>
+                  </a:lnTo>
+                  <a:lnTo>
+                    <a:pt x="5834389" y="1121631"/>
+                  </a:lnTo>
+                  <a:lnTo>
+                    <a:pt x="5760629" y="1112095"/>
+                  </a:lnTo>
+                  <a:lnTo>
+                    <a:pt x="5686869" y="1102219"/>
+                  </a:lnTo>
+                  <a:lnTo>
+                    <a:pt x="5613109" y="1091990"/>
+                  </a:lnTo>
+                  <a:lnTo>
+                    <a:pt x="5539349" y="1081397"/>
+                  </a:lnTo>
+                  <a:lnTo>
+                    <a:pt x="5465589" y="1070425"/>
+                  </a:lnTo>
+                  <a:lnTo>
+                    <a:pt x="5391829" y="1059061"/>
+                  </a:lnTo>
+                  <a:lnTo>
+                    <a:pt x="5318069" y="1047292"/>
+                  </a:lnTo>
+                  <a:lnTo>
+                    <a:pt x="5244309" y="1035103"/>
+                  </a:lnTo>
+                  <a:lnTo>
+                    <a:pt x="5170549" y="1022478"/>
+                  </a:lnTo>
+                  <a:lnTo>
+                    <a:pt x="5096789" y="1009403"/>
+                  </a:lnTo>
+                  <a:lnTo>
+                    <a:pt x="5023029" y="995861"/>
+                  </a:lnTo>
+                  <a:lnTo>
+                    <a:pt x="4949269" y="981835"/>
+                  </a:lnTo>
+                  <a:lnTo>
+                    <a:pt x="4875509" y="967309"/>
+                  </a:lnTo>
+                  <a:lnTo>
+                    <a:pt x="4801749" y="952265"/>
+                  </a:lnTo>
+                  <a:lnTo>
+                    <a:pt x="4727989" y="936683"/>
+                  </a:lnTo>
+                  <a:lnTo>
+                    <a:pt x="4654229" y="920545"/>
+                  </a:lnTo>
+                  <a:lnTo>
+                    <a:pt x="4580469" y="903831"/>
+                  </a:lnTo>
+                  <a:lnTo>
+                    <a:pt x="4506709" y="886520"/>
+                  </a:lnTo>
+                  <a:lnTo>
+                    <a:pt x="4432949" y="868591"/>
+                  </a:lnTo>
+                  <a:lnTo>
+                    <a:pt x="4359189" y="850022"/>
+                  </a:lnTo>
+                  <a:lnTo>
+                    <a:pt x="4285429" y="830791"/>
+                  </a:lnTo>
+                  <a:lnTo>
+                    <a:pt x="4211669" y="810872"/>
+                  </a:lnTo>
+                  <a:lnTo>
+                    <a:pt x="4137909" y="790243"/>
+                  </a:lnTo>
+                  <a:lnTo>
+                    <a:pt x="4064149" y="768877"/>
+                  </a:lnTo>
+                  <a:lnTo>
+                    <a:pt x="3990388" y="746749"/>
+                  </a:lnTo>
+                  <a:lnTo>
+                    <a:pt x="3916628" y="723830"/>
+                  </a:lnTo>
+                  <a:lnTo>
+                    <a:pt x="3842868" y="700094"/>
+                  </a:lnTo>
+                  <a:lnTo>
+                    <a:pt x="3769108" y="675510"/>
+                  </a:lnTo>
+                  <a:lnTo>
+                    <a:pt x="3695348" y="650048"/>
+                  </a:lnTo>
+                  <a:lnTo>
+                    <a:pt x="3621588" y="623678"/>
+                  </a:lnTo>
+                  <a:lnTo>
+                    <a:pt x="3547828" y="596366"/>
+                  </a:lnTo>
+                  <a:lnTo>
+                    <a:pt x="3474068" y="568079"/>
+                  </a:lnTo>
+                  <a:lnTo>
+                    <a:pt x="3400308" y="552897"/>
+                  </a:lnTo>
+                  <a:lnTo>
+                    <a:pt x="3326548" y="543641"/>
+                  </a:lnTo>
+                  <a:lnTo>
+                    <a:pt x="3252788" y="534282"/>
+                  </a:lnTo>
+                  <a:lnTo>
+                    <a:pt x="3179028" y="524820"/>
+                  </a:lnTo>
+                  <a:lnTo>
+                    <a:pt x="3105268" y="515252"/>
+                  </a:lnTo>
+                  <a:lnTo>
+                    <a:pt x="3031508" y="505579"/>
+                  </a:lnTo>
+                  <a:lnTo>
+                    <a:pt x="2957748" y="495799"/>
+                  </a:lnTo>
+                  <a:lnTo>
+                    <a:pt x="2883988" y="485911"/>
+                  </a:lnTo>
+                  <a:lnTo>
+                    <a:pt x="2810228" y="475913"/>
+                  </a:lnTo>
+                  <a:lnTo>
+                    <a:pt x="2736468" y="465804"/>
+                  </a:lnTo>
+                  <a:lnTo>
+                    <a:pt x="2662708" y="455583"/>
+                  </a:lnTo>
+                  <a:lnTo>
+                    <a:pt x="2588948" y="445249"/>
+                  </a:lnTo>
+                  <a:lnTo>
+                    <a:pt x="2515188" y="434801"/>
+                  </a:lnTo>
+                  <a:lnTo>
+                    <a:pt x="2441428" y="424237"/>
+                  </a:lnTo>
+                  <a:lnTo>
+                    <a:pt x="2367668" y="413556"/>
+                  </a:lnTo>
+                  <a:lnTo>
+                    <a:pt x="2293908" y="402757"/>
+                  </a:lnTo>
+                  <a:lnTo>
+                    <a:pt x="2220148" y="391838"/>
+                  </a:lnTo>
+                  <a:lnTo>
+                    <a:pt x="2146388" y="380798"/>
+                  </a:lnTo>
+                  <a:lnTo>
+                    <a:pt x="2072628" y="369636"/>
+                  </a:lnTo>
+                  <a:lnTo>
+                    <a:pt x="1998868" y="358350"/>
+                  </a:lnTo>
+                  <a:lnTo>
+                    <a:pt x="1925108" y="346939"/>
+                  </a:lnTo>
+                  <a:lnTo>
+                    <a:pt x="1851348" y="335402"/>
+                  </a:lnTo>
+                  <a:lnTo>
+                    <a:pt x="1777588" y="323738"/>
+                  </a:lnTo>
+                  <a:lnTo>
+                    <a:pt x="1703828" y="311944"/>
+                  </a:lnTo>
+                  <a:lnTo>
+                    <a:pt x="1630068" y="300019"/>
+                  </a:lnTo>
+                  <a:lnTo>
+                    <a:pt x="1556308" y="287963"/>
+                  </a:lnTo>
+                  <a:lnTo>
+                    <a:pt x="1482548" y="275772"/>
+                  </a:lnTo>
+                  <a:lnTo>
+                    <a:pt x="1408788" y="263447"/>
+                  </a:lnTo>
+                  <a:lnTo>
+                    <a:pt x="1335028" y="250986"/>
+                  </a:lnTo>
+                  <a:lnTo>
+                    <a:pt x="1261268" y="238386"/>
+                  </a:lnTo>
+                  <a:lnTo>
+                    <a:pt x="1187508" y="225647"/>
+                  </a:lnTo>
+                  <a:lnTo>
+                    <a:pt x="1113747" y="212767"/>
+                  </a:lnTo>
+                  <a:lnTo>
+                    <a:pt x="1039987" y="199744"/>
+                  </a:lnTo>
+                  <a:lnTo>
+                    <a:pt x="966227" y="186577"/>
+                  </a:lnTo>
+                  <a:lnTo>
+                    <a:pt x="892467" y="173264"/>
+                  </a:lnTo>
+                  <a:lnTo>
+                    <a:pt x="818707" y="159804"/>
+                  </a:lnTo>
+                  <a:lnTo>
+                    <a:pt x="744947" y="146194"/>
+                  </a:lnTo>
+                  <a:lnTo>
+                    <a:pt x="671187" y="132434"/>
+                  </a:lnTo>
+                  <a:lnTo>
+                    <a:pt x="597427" y="118522"/>
+                  </a:lnTo>
+                  <a:lnTo>
+                    <a:pt x="523667" y="104455"/>
+                  </a:lnTo>
+                  <a:lnTo>
+                    <a:pt x="449907" y="90233"/>
+                  </a:lnTo>
+                  <a:lnTo>
+                    <a:pt x="376147" y="75853"/>
+                  </a:lnTo>
+                  <a:lnTo>
+                    <a:pt x="302387" y="61314"/>
+                  </a:lnTo>
+                  <a:lnTo>
+                    <a:pt x="228627" y="46614"/>
+                  </a:lnTo>
+                  <a:lnTo>
+                    <a:pt x="154867" y="31751"/>
+                  </a:lnTo>
+                  <a:lnTo>
+                    <a:pt x="81107" y="16724"/>
+                  </a:lnTo>
+                  <a:lnTo>
+                    <a:pt x="7347" y="1530"/>
                   </a:lnTo>
                   <a:lnTo>
                     <a:pt x="0" y="0"/>
@@ -4247,312 +4247,312 @@
           </p:nvSpPr>
           <p:spPr>
             <a:xfrm>
-              <a:off x="817517" y="2992331"/>
-              <a:ext cx="7235830" cy="2290254"/>
+              <a:off x="817517" y="3118603"/>
+              <a:ext cx="7235830" cy="2184354"/>
             </a:xfrm>
             <a:custGeom>
               <a:avLst/>
               <a:pathLst>
-                <a:path w="7235830" h="2290254">
+                <a:path w="7235830" h="2184354">
                   <a:moveTo>
                     <a:pt x="0" y="0"/>
                   </a:moveTo>
                   <a:lnTo>
-                    <a:pt x="7347" y="5923"/>
-                  </a:lnTo>
-                  <a:lnTo>
-                    <a:pt x="81107" y="64038"/>
-                  </a:lnTo>
-                  <a:lnTo>
-                    <a:pt x="154867" y="120828"/>
-                  </a:lnTo>
-                  <a:lnTo>
-                    <a:pt x="228627" y="176324"/>
-                  </a:lnTo>
-                  <a:lnTo>
-                    <a:pt x="302387" y="230556"/>
-                  </a:lnTo>
-                  <a:lnTo>
-                    <a:pt x="376147" y="283553"/>
-                  </a:lnTo>
-                  <a:lnTo>
-                    <a:pt x="449907" y="335342"/>
-                  </a:lnTo>
-                  <a:lnTo>
-                    <a:pt x="523667" y="385952"/>
-                  </a:lnTo>
-                  <a:lnTo>
-                    <a:pt x="597427" y="435408"/>
-                  </a:lnTo>
-                  <a:lnTo>
-                    <a:pt x="671187" y="483738"/>
-                  </a:lnTo>
-                  <a:lnTo>
-                    <a:pt x="744947" y="530967"/>
-                  </a:lnTo>
-                  <a:lnTo>
-                    <a:pt x="818707" y="577120"/>
-                  </a:lnTo>
-                  <a:lnTo>
-                    <a:pt x="892467" y="622221"/>
-                  </a:lnTo>
-                  <a:lnTo>
-                    <a:pt x="966227" y="666295"/>
-                  </a:lnTo>
-                  <a:lnTo>
-                    <a:pt x="1039987" y="709365"/>
-                  </a:lnTo>
-                  <a:lnTo>
-                    <a:pt x="1113747" y="751454"/>
-                  </a:lnTo>
-                  <a:lnTo>
-                    <a:pt x="1187508" y="792584"/>
-                  </a:lnTo>
-                  <a:lnTo>
-                    <a:pt x="1261268" y="832777"/>
-                  </a:lnTo>
-                  <a:lnTo>
-                    <a:pt x="1335028" y="872054"/>
-                  </a:lnTo>
-                  <a:lnTo>
-                    <a:pt x="1408788" y="910437"/>
-                  </a:lnTo>
-                  <a:lnTo>
-                    <a:pt x="1482548" y="947945"/>
-                  </a:lnTo>
-                  <a:lnTo>
-                    <a:pt x="1556308" y="984598"/>
-                  </a:lnTo>
-                  <a:lnTo>
-                    <a:pt x="1630068" y="1020417"/>
-                  </a:lnTo>
-                  <a:lnTo>
-                    <a:pt x="1703828" y="1055419"/>
-                  </a:lnTo>
-                  <a:lnTo>
-                    <a:pt x="1777588" y="1089624"/>
-                  </a:lnTo>
-                  <a:lnTo>
-                    <a:pt x="1851348" y="1123050"/>
-                  </a:lnTo>
-                  <a:lnTo>
-                    <a:pt x="1925108" y="1155715"/>
-                  </a:lnTo>
-                  <a:lnTo>
-                    <a:pt x="1998868" y="1187635"/>
-                  </a:lnTo>
-                  <a:lnTo>
-                    <a:pt x="2072628" y="1218828"/>
-                  </a:lnTo>
-                  <a:lnTo>
-                    <a:pt x="2146388" y="1249311"/>
-                  </a:lnTo>
-                  <a:lnTo>
-                    <a:pt x="2220148" y="1279099"/>
-                  </a:lnTo>
-                  <a:lnTo>
-                    <a:pt x="2293908" y="1308208"/>
-                  </a:lnTo>
-                  <a:lnTo>
-                    <a:pt x="2367668" y="1336655"/>
-                  </a:lnTo>
-                  <a:lnTo>
-                    <a:pt x="2441428" y="1364453"/>
-                  </a:lnTo>
-                  <a:lnTo>
-                    <a:pt x="2515188" y="1391618"/>
-                  </a:lnTo>
-                  <a:lnTo>
-                    <a:pt x="2588948" y="1418164"/>
-                  </a:lnTo>
-                  <a:lnTo>
-                    <a:pt x="2662708" y="1444105"/>
-                  </a:lnTo>
-                  <a:lnTo>
-                    <a:pt x="2736468" y="1469456"/>
-                  </a:lnTo>
-                  <a:lnTo>
-                    <a:pt x="2810228" y="1494229"/>
-                  </a:lnTo>
-                  <a:lnTo>
-                    <a:pt x="2883988" y="1518437"/>
-                  </a:lnTo>
-                  <a:lnTo>
-                    <a:pt x="2957748" y="1542094"/>
-                  </a:lnTo>
-                  <a:lnTo>
-                    <a:pt x="3031508" y="1565212"/>
-                  </a:lnTo>
-                  <a:lnTo>
-                    <a:pt x="3105268" y="1587804"/>
-                  </a:lnTo>
-                  <a:lnTo>
-                    <a:pt x="3179028" y="1609880"/>
-                  </a:lnTo>
-                  <a:lnTo>
-                    <a:pt x="3252788" y="1631454"/>
-                  </a:lnTo>
-                  <a:lnTo>
-                    <a:pt x="3326548" y="1652536"/>
-                  </a:lnTo>
-                  <a:lnTo>
-                    <a:pt x="3400308" y="1673138"/>
-                  </a:lnTo>
-                  <a:lnTo>
-                    <a:pt x="3474068" y="1693271"/>
-                  </a:lnTo>
-                  <a:lnTo>
-                    <a:pt x="3547828" y="1712945"/>
-                  </a:lnTo>
-                  <a:lnTo>
-                    <a:pt x="3621588" y="1732171"/>
-                  </a:lnTo>
-                  <a:lnTo>
-                    <a:pt x="3695348" y="1750959"/>
-                  </a:lnTo>
-                  <a:lnTo>
-                    <a:pt x="3769108" y="1769319"/>
-                  </a:lnTo>
-                  <a:lnTo>
-                    <a:pt x="3842868" y="1787260"/>
-                  </a:lnTo>
-                  <a:lnTo>
-                    <a:pt x="3916628" y="1804793"/>
-                  </a:lnTo>
-                  <a:lnTo>
-                    <a:pt x="3990388" y="1821927"/>
-                  </a:lnTo>
-                  <a:lnTo>
-                    <a:pt x="4064149" y="1838670"/>
-                  </a:lnTo>
-                  <a:lnTo>
-                    <a:pt x="4137909" y="1855031"/>
-                  </a:lnTo>
-                  <a:lnTo>
-                    <a:pt x="4211669" y="1871020"/>
-                  </a:lnTo>
-                  <a:lnTo>
-                    <a:pt x="4285429" y="1886645"/>
-                  </a:lnTo>
-                  <a:lnTo>
-                    <a:pt x="4359189" y="1901914"/>
-                  </a:lnTo>
-                  <a:lnTo>
-                    <a:pt x="4432949" y="1916835"/>
-                  </a:lnTo>
-                  <a:lnTo>
-                    <a:pt x="4506709" y="1931416"/>
-                  </a:lnTo>
-                  <a:lnTo>
-                    <a:pt x="4580469" y="1945665"/>
-                  </a:lnTo>
-                  <a:lnTo>
-                    <a:pt x="4654229" y="1959589"/>
-                  </a:lnTo>
-                  <a:lnTo>
-                    <a:pt x="4727989" y="1973196"/>
-                  </a:lnTo>
-                  <a:lnTo>
-                    <a:pt x="4801749" y="1986493"/>
-                  </a:lnTo>
-                  <a:lnTo>
-                    <a:pt x="4875509" y="1999487"/>
-                  </a:lnTo>
-                  <a:lnTo>
-                    <a:pt x="4949269" y="2012185"/>
-                  </a:lnTo>
-                  <a:lnTo>
-                    <a:pt x="5023029" y="2024594"/>
-                  </a:lnTo>
-                  <a:lnTo>
-                    <a:pt x="5096789" y="2036720"/>
-                  </a:lnTo>
-                  <a:lnTo>
-                    <a:pt x="5170549" y="2048570"/>
-                  </a:lnTo>
-                  <a:lnTo>
-                    <a:pt x="5244309" y="2060149"/>
-                  </a:lnTo>
-                  <a:lnTo>
-                    <a:pt x="5318069" y="2071465"/>
-                  </a:lnTo>
-                  <a:lnTo>
-                    <a:pt x="5391829" y="2082524"/>
-                  </a:lnTo>
-                  <a:lnTo>
-                    <a:pt x="5465589" y="2093330"/>
-                  </a:lnTo>
-                  <a:lnTo>
-                    <a:pt x="5539349" y="2103890"/>
-                  </a:lnTo>
-                  <a:lnTo>
-                    <a:pt x="5613109" y="2114210"/>
-                  </a:lnTo>
-                  <a:lnTo>
-                    <a:pt x="5686869" y="2124294"/>
-                  </a:lnTo>
-                  <a:lnTo>
-                    <a:pt x="5760629" y="2134149"/>
-                  </a:lnTo>
-                  <a:lnTo>
-                    <a:pt x="5834389" y="2143779"/>
-                  </a:lnTo>
-                  <a:lnTo>
-                    <a:pt x="5908149" y="2153190"/>
-                  </a:lnTo>
-                  <a:lnTo>
-                    <a:pt x="5981909" y="2162387"/>
-                  </a:lnTo>
-                  <a:lnTo>
-                    <a:pt x="6055669" y="2171374"/>
-                  </a:lnTo>
-                  <a:lnTo>
-                    <a:pt x="6129429" y="2180156"/>
-                  </a:lnTo>
-                  <a:lnTo>
-                    <a:pt x="6203189" y="2188738"/>
-                  </a:lnTo>
-                  <a:lnTo>
-                    <a:pt x="6276949" y="2197125"/>
-                  </a:lnTo>
-                  <a:lnTo>
-                    <a:pt x="6350709" y="2205320"/>
-                  </a:lnTo>
-                  <a:lnTo>
-                    <a:pt x="6424469" y="2213329"/>
-                  </a:lnTo>
-                  <a:lnTo>
-                    <a:pt x="6498229" y="2221156"/>
-                  </a:lnTo>
-                  <a:lnTo>
-                    <a:pt x="6571989" y="2228804"/>
-                  </a:lnTo>
-                  <a:lnTo>
-                    <a:pt x="6645749" y="2236278"/>
-                  </a:lnTo>
-                  <a:lnTo>
-                    <a:pt x="6719509" y="2243581"/>
-                  </a:lnTo>
-                  <a:lnTo>
-                    <a:pt x="6793269" y="2250719"/>
-                  </a:lnTo>
-                  <a:lnTo>
-                    <a:pt x="6867029" y="2257693"/>
-                  </a:lnTo>
-                  <a:lnTo>
-                    <a:pt x="6940789" y="2264509"/>
-                  </a:lnTo>
-                  <a:lnTo>
-                    <a:pt x="7014550" y="2271170"/>
-                  </a:lnTo>
-                  <a:lnTo>
-                    <a:pt x="7088310" y="2277678"/>
-                  </a:lnTo>
-                  <a:lnTo>
-                    <a:pt x="7162070" y="2284039"/>
-                  </a:lnTo>
-                  <a:lnTo>
-                    <a:pt x="7235830" y="2290254"/>
+                    <a:pt x="7347" y="5650"/>
+                  </a:lnTo>
+                  <a:lnTo>
+                    <a:pt x="81107" y="61076"/>
+                  </a:lnTo>
+                  <a:lnTo>
+                    <a:pt x="154867" y="115241"/>
+                  </a:lnTo>
+                  <a:lnTo>
+                    <a:pt x="228627" y="168171"/>
+                  </a:lnTo>
+                  <a:lnTo>
+                    <a:pt x="302387" y="219895"/>
+                  </a:lnTo>
+                  <a:lnTo>
+                    <a:pt x="376147" y="270442"/>
+                  </a:lnTo>
+                  <a:lnTo>
+                    <a:pt x="449907" y="319836"/>
+                  </a:lnTo>
+                  <a:lnTo>
+                    <a:pt x="523667" y="368105"/>
+                  </a:lnTo>
+                  <a:lnTo>
+                    <a:pt x="597427" y="415275"/>
+                  </a:lnTo>
+                  <a:lnTo>
+                    <a:pt x="671187" y="461370"/>
+                  </a:lnTo>
+                  <a:lnTo>
+                    <a:pt x="744947" y="506415"/>
+                  </a:lnTo>
+                  <a:lnTo>
+                    <a:pt x="818707" y="550434"/>
+                  </a:lnTo>
+                  <a:lnTo>
+                    <a:pt x="892467" y="593450"/>
+                  </a:lnTo>
+                  <a:lnTo>
+                    <a:pt x="966227" y="635486"/>
+                  </a:lnTo>
+                  <a:lnTo>
+                    <a:pt x="1039987" y="676564"/>
+                  </a:lnTo>
+                  <a:lnTo>
+                    <a:pt x="1113747" y="716707"/>
+                  </a:lnTo>
+                  <a:lnTo>
+                    <a:pt x="1187508" y="755935"/>
+                  </a:lnTo>
+                  <a:lnTo>
+                    <a:pt x="1261268" y="794269"/>
+                  </a:lnTo>
+                  <a:lnTo>
+                    <a:pt x="1335028" y="831731"/>
+                  </a:lnTo>
+                  <a:lnTo>
+                    <a:pt x="1408788" y="868338"/>
+                  </a:lnTo>
+                  <a:lnTo>
+                    <a:pt x="1482548" y="904112"/>
+                  </a:lnTo>
+                  <a:lnTo>
+                    <a:pt x="1556308" y="939071"/>
+                  </a:lnTo>
+                  <a:lnTo>
+                    <a:pt x="1630068" y="973233"/>
+                  </a:lnTo>
+                  <a:lnTo>
+                    <a:pt x="1703828" y="1006617"/>
+                  </a:lnTo>
+                  <a:lnTo>
+                    <a:pt x="1777588" y="1039241"/>
+                  </a:lnTo>
+                  <a:lnTo>
+                    <a:pt x="1851348" y="1071121"/>
+                  </a:lnTo>
+                  <a:lnTo>
+                    <a:pt x="1925108" y="1102275"/>
+                  </a:lnTo>
+                  <a:lnTo>
+                    <a:pt x="1998868" y="1132719"/>
+                  </a:lnTo>
+                  <a:lnTo>
+                    <a:pt x="2072628" y="1162470"/>
+                  </a:lnTo>
+                  <a:lnTo>
+                    <a:pt x="2146388" y="1191543"/>
+                  </a:lnTo>
+                  <a:lnTo>
+                    <a:pt x="2220148" y="1219954"/>
+                  </a:lnTo>
+                  <a:lnTo>
+                    <a:pt x="2293908" y="1247717"/>
+                  </a:lnTo>
+                  <a:lnTo>
+                    <a:pt x="2367668" y="1274848"/>
+                  </a:lnTo>
+                  <a:lnTo>
+                    <a:pt x="2441428" y="1301361"/>
+                  </a:lnTo>
+                  <a:lnTo>
+                    <a:pt x="2515188" y="1327270"/>
+                  </a:lnTo>
+                  <a:lnTo>
+                    <a:pt x="2588948" y="1352589"/>
+                  </a:lnTo>
+                  <a:lnTo>
+                    <a:pt x="2662708" y="1377330"/>
+                  </a:lnTo>
+                  <a:lnTo>
+                    <a:pt x="2736468" y="1401509"/>
+                  </a:lnTo>
+                  <a:lnTo>
+                    <a:pt x="2810228" y="1425136"/>
+                  </a:lnTo>
+                  <a:lnTo>
+                    <a:pt x="2883988" y="1448225"/>
+                  </a:lnTo>
+                  <a:lnTo>
+                    <a:pt x="2957748" y="1470788"/>
+                  </a:lnTo>
+                  <a:lnTo>
+                    <a:pt x="3031508" y="1492837"/>
+                  </a:lnTo>
+                  <a:lnTo>
+                    <a:pt x="3105268" y="1514384"/>
+                  </a:lnTo>
+                  <a:lnTo>
+                    <a:pt x="3179028" y="1535440"/>
+                  </a:lnTo>
+                  <a:lnTo>
+                    <a:pt x="3252788" y="1556016"/>
+                  </a:lnTo>
+                  <a:lnTo>
+                    <a:pt x="3326548" y="1576124"/>
+                  </a:lnTo>
+                  <a:lnTo>
+                    <a:pt x="3400308" y="1595773"/>
+                  </a:lnTo>
+                  <a:lnTo>
+                    <a:pt x="3474068" y="1614975"/>
+                  </a:lnTo>
+                  <a:lnTo>
+                    <a:pt x="3547828" y="1633739"/>
+                  </a:lnTo>
+                  <a:lnTo>
+                    <a:pt x="3621588" y="1652076"/>
+                  </a:lnTo>
+                  <a:lnTo>
+                    <a:pt x="3695348" y="1669995"/>
+                  </a:lnTo>
+                  <a:lnTo>
+                    <a:pt x="3769108" y="1687506"/>
+                  </a:lnTo>
+                  <a:lnTo>
+                    <a:pt x="3842868" y="1704618"/>
+                  </a:lnTo>
+                  <a:lnTo>
+                    <a:pt x="3916628" y="1721340"/>
+                  </a:lnTo>
+                  <a:lnTo>
+                    <a:pt x="3990388" y="1737681"/>
+                  </a:lnTo>
+                  <a:lnTo>
+                    <a:pt x="4064149" y="1753650"/>
+                  </a:lnTo>
+                  <a:lnTo>
+                    <a:pt x="4137909" y="1769255"/>
+                  </a:lnTo>
+                  <a:lnTo>
+                    <a:pt x="4211669" y="1784505"/>
+                  </a:lnTo>
+                  <a:lnTo>
+                    <a:pt x="4285429" y="1799407"/>
+                  </a:lnTo>
+                  <a:lnTo>
+                    <a:pt x="4359189" y="1813970"/>
+                  </a:lnTo>
+                  <a:lnTo>
+                    <a:pt x="4432949" y="1828201"/>
+                  </a:lnTo>
+                  <a:lnTo>
+                    <a:pt x="4506709" y="1842108"/>
+                  </a:lnTo>
+                  <a:lnTo>
+                    <a:pt x="4580469" y="1855698"/>
+                  </a:lnTo>
+                  <a:lnTo>
+                    <a:pt x="4654229" y="1868978"/>
+                  </a:lnTo>
+                  <a:lnTo>
+                    <a:pt x="4727989" y="1881956"/>
+                  </a:lnTo>
+                  <a:lnTo>
+                    <a:pt x="4801749" y="1894638"/>
+                  </a:lnTo>
+                  <a:lnTo>
+                    <a:pt x="4875509" y="1907031"/>
+                  </a:lnTo>
+                  <a:lnTo>
+                    <a:pt x="4949269" y="1919142"/>
+                  </a:lnTo>
+                  <a:lnTo>
+                    <a:pt x="5023029" y="1930977"/>
+                  </a:lnTo>
+                  <a:lnTo>
+                    <a:pt x="5096789" y="1942542"/>
+                  </a:lnTo>
+                  <a:lnTo>
+                    <a:pt x="5170549" y="1953844"/>
+                  </a:lnTo>
+                  <a:lnTo>
+                    <a:pt x="5244309" y="1964889"/>
+                  </a:lnTo>
+                  <a:lnTo>
+                    <a:pt x="5318069" y="1975682"/>
+                  </a:lnTo>
+                  <a:lnTo>
+                    <a:pt x="5391829" y="1986229"/>
+                  </a:lnTo>
+                  <a:lnTo>
+                    <a:pt x="5465589" y="1996535"/>
+                  </a:lnTo>
+                  <a:lnTo>
+                    <a:pt x="5539349" y="2006607"/>
+                  </a:lnTo>
+                  <a:lnTo>
+                    <a:pt x="5613109" y="2016450"/>
+                  </a:lnTo>
+                  <a:lnTo>
+                    <a:pt x="5686869" y="2026068"/>
+                  </a:lnTo>
+                  <a:lnTo>
+                    <a:pt x="5760629" y="2035467"/>
+                  </a:lnTo>
+                  <a:lnTo>
+                    <a:pt x="5834389" y="2044652"/>
+                  </a:lnTo>
+                  <a:lnTo>
+                    <a:pt x="5908149" y="2053628"/>
+                  </a:lnTo>
+                  <a:lnTo>
+                    <a:pt x="5981909" y="2062399"/>
+                  </a:lnTo>
+                  <a:lnTo>
+                    <a:pt x="6055669" y="2070970"/>
+                  </a:lnTo>
+                  <a:lnTo>
+                    <a:pt x="6129429" y="2079346"/>
+                  </a:lnTo>
+                  <a:lnTo>
+                    <a:pt x="6203189" y="2087532"/>
+                  </a:lnTo>
+                  <a:lnTo>
+                    <a:pt x="6276949" y="2095531"/>
+                  </a:lnTo>
+                  <a:lnTo>
+                    <a:pt x="6350709" y="2103347"/>
+                  </a:lnTo>
+                  <a:lnTo>
+                    <a:pt x="6424469" y="2110986"/>
+                  </a:lnTo>
+                  <a:lnTo>
+                    <a:pt x="6498229" y="2118450"/>
+                  </a:lnTo>
+                  <a:lnTo>
+                    <a:pt x="6571989" y="2125745"/>
+                  </a:lnTo>
+                  <a:lnTo>
+                    <a:pt x="6645749" y="2132873"/>
+                  </a:lnTo>
+                  <a:lnTo>
+                    <a:pt x="6719509" y="2139839"/>
+                  </a:lnTo>
+                  <a:lnTo>
+                    <a:pt x="6793269" y="2146646"/>
+                  </a:lnTo>
+                  <a:lnTo>
+                    <a:pt x="6867029" y="2153298"/>
+                  </a:lnTo>
+                  <a:lnTo>
+                    <a:pt x="6940789" y="2159799"/>
+                  </a:lnTo>
+                  <a:lnTo>
+                    <a:pt x="7014550" y="2166152"/>
+                  </a:lnTo>
+                  <a:lnTo>
+                    <a:pt x="7088310" y="2172359"/>
+                  </a:lnTo>
+                  <a:lnTo>
+                    <a:pt x="7162070" y="2178426"/>
+                  </a:lnTo>
+                  <a:lnTo>
+                    <a:pt x="7235830" y="2184354"/>
                   </a:lnTo>
                 </a:path>
               </a:pathLst>
@@ -4581,7 +4581,7 @@
           </p:nvSpPr>
           <p:spPr>
             <a:xfrm>
-              <a:off x="817517" y="4679530"/>
+              <a:off x="817517" y="4727786"/>
               <a:ext cx="7799693" cy="0"/>
             </a:xfrm>
             <a:custGeom>
@@ -4624,15 +4624,15 @@
           </p:nvSpPr>
           <p:spPr>
             <a:xfrm>
-              <a:off x="4269157" y="1896563"/>
-              <a:ext cx="0" cy="3826579"/>
+              <a:off x="4269157" y="2073503"/>
+              <a:ext cx="0" cy="3649639"/>
             </a:xfrm>
             <a:custGeom>
               <a:avLst/>
               <a:pathLst>
-                <a:path w="0" h="3826579">
+                <a:path w="0" h="3649639">
                   <a:moveTo>
-                    <a:pt x="0" y="3826579"/>
+                    <a:pt x="0" y="3649639"/>
                   </a:moveTo>
                   <a:lnTo>
                     <a:pt x="0" y="0"/>
@@ -4667,7 +4667,7 @@
           </p:nvSpPr>
           <p:spPr>
             <a:xfrm>
-              <a:off x="692708" y="5509156"/>
+              <a:off x="692708" y="5517199"/>
               <a:ext cx="62179" cy="80101"/>
             </a:xfrm>
             <a:prstGeom prst="rect">
@@ -4713,7 +4713,7 @@
           </p:nvSpPr>
           <p:spPr>
             <a:xfrm>
-              <a:off x="692708" y="4639479"/>
+              <a:off x="692708" y="4687735"/>
               <a:ext cx="62179" cy="80101"/>
             </a:xfrm>
             <a:prstGeom prst="rect">
@@ -4759,7 +4759,7 @@
           </p:nvSpPr>
           <p:spPr>
             <a:xfrm>
-              <a:off x="692708" y="3769802"/>
+              <a:off x="692708" y="3858272"/>
               <a:ext cx="62179" cy="80101"/>
             </a:xfrm>
             <a:prstGeom prst="rect">
@@ -4805,7 +4805,7 @@
           </p:nvSpPr>
           <p:spPr>
             <a:xfrm>
-              <a:off x="692708" y="2900125"/>
+              <a:off x="692708" y="3028808"/>
               <a:ext cx="62179" cy="80101"/>
             </a:xfrm>
             <a:prstGeom prst="rect">
@@ -4851,7 +4851,7 @@
           </p:nvSpPr>
           <p:spPr>
             <a:xfrm>
-              <a:off x="692708" y="2030448"/>
+              <a:off x="692708" y="2199345"/>
               <a:ext cx="62179" cy="80101"/>
             </a:xfrm>
             <a:prstGeom prst="rect">
@@ -5127,7 +5127,7 @@
           </p:nvSpPr>
           <p:spPr>
             <a:xfrm rot="-5400000">
-              <a:off x="68446" y="3759743"/>
+              <a:off x="68446" y="3848213"/>
               <a:ext cx="1016904" cy="100218"/>
             </a:xfrm>
             <a:prstGeom prst="rect">
@@ -5168,6 +5168,52 @@
         <p:sp>
           <p:nvSpPr>
             <p:cNvPr id="38" name="tx38"/>
+            <p:cNvSpPr/>
+            <p:nvPr/>
+          </p:nvSpPr>
+          <p:spPr>
+            <a:xfrm>
+              <a:off x="817517" y="1896563"/>
+              <a:ext cx="5626211" cy="82021"/>
+            </a:xfrm>
+            <a:prstGeom prst="rect">
+              <a:avLst/>
+            </a:prstGeom>
+            <a:noFill/>
+          </p:spPr>
+          <p:txBody>
+            <a:bodyPr lIns="0" rIns="0" tIns="0" bIns="0" anchorCtr="1" anchor="ctr" wrap="none"/>
+            <a:lstStyle/>
+            <a:p>
+              <a:pPr algn="l" marL="0" marR="0" indent="0">
+                <a:lnSpc>
+                  <a:spcPts val="900"/>
+                </a:lnSpc>
+                <a:spcBef>
+                  <a:spcPts val="0"/>
+                </a:spcBef>
+                <a:spcAft>
+                  <a:spcPts val="0"/>
+                </a:spcAft>
+              </a:pPr>
+              <a:r>
+                <a:rPr sz="900">
+                  <a:solidFill>
+                    <a:srgbClr val="404040">
+                      <a:alpha val="100000"/>
+                    </a:srgbClr>
+                  </a:solidFill>
+                  <a:latin typeface="Helvetica"/>
+                  <a:cs typeface="Helvetica"/>
+                </a:rPr>
+                <a:t>subHR per 0.1 ratio decline: 1.32 (1.14-1.52)  |  per IQR decline (Δ = 0.29): 2.25 (1.47-3.43)  |  IQR: [0.85, 1.15]</a:t>
+              </a:r>
+            </a:p>
+          </p:txBody>
+        </p:sp>
+        <p:sp>
+          <p:nvSpPr>
+            <p:cNvPr id="39" name="tx39"/>
             <p:cNvSpPr/>
             <p:nvPr/>
           </p:nvSpPr>

--- a/docs/pptx/whole/jx-linsubhr-ratio-aki2.pptx
+++ b/docs/pptx/whole/jx-linsubhr-ratio-aki2.pptx
@@ -5174,7 +5174,7 @@
           <p:spPr>
             <a:xfrm>
               <a:off x="817517" y="1896563"/>
-              <a:ext cx="5626211" cy="82021"/>
+              <a:ext cx="6236116" cy="82021"/>
             </a:xfrm>
             <a:prstGeom prst="rect">
               <a:avLst/>
@@ -5206,7 +5206,7 @@
                   <a:latin typeface="Helvetica"/>
                   <a:cs typeface="Helvetica"/>
                 </a:rPr>
-                <a:t>subHR per 0.1 ratio decline: 1.32 (1.14-1.52)  |  per IQR decline (Δ = 0.29): 2.25 (1.47-3.43)  |  IQR: [0.85, 1.15]</a:t>
+                <a:t>subHR per 0.1 ratio decline: 1.32 (1.14-1.52), p = &lt;0.001  |  per IQR decline (Δ = 0.29): 2.25 (1.47-3.43)  |  IQR: [0.85, 1.15]</a:t>
               </a:r>
             </a:p>
           </p:txBody>

--- a/docs/pptx/whole/jx-linsubhr-ratio-aki2.pptx
+++ b/docs/pptx/whole/jx-linsubhr-ratio-aki2.pptx
@@ -5174,7 +5174,7 @@
           <p:spPr>
             <a:xfrm>
               <a:off x="817517" y="1896563"/>
-              <a:ext cx="6236116" cy="82021"/>
+              <a:ext cx="6833128" cy="82021"/>
             </a:xfrm>
             <a:prstGeom prst="rect">
               <a:avLst/>
@@ -5206,7 +5206,7 @@
                   <a:latin typeface="Helvetica"/>
                   <a:cs typeface="Helvetica"/>
                 </a:rPr>
-                <a:t>subHR per 0.1 ratio decline: 1.32 (1.14-1.52), p = &lt;0.001  |  per IQR decline (Δ = 0.29): 2.25 (1.47-3.43)  |  IQR: [0.85, 1.15]</a:t>
+                <a:t>subHR per 0.1 ratio decline: 1.32 (1.14-1.52), p_Bonf = 0.001 (n = 6)  |  per IQR decline (Δ = 0.29): 2.25 (1.47-3.43)  |  IQR: [0.85, 1.15]</a:t>
               </a:r>
             </a:p>
           </p:txBody>

--- a/docs/pptx/whole/jx-linsubhr-ratio-aki2.pptx
+++ b/docs/pptx/whole/jx-linsubhr-ratio-aki2.pptx
@@ -2443,7 +2443,7 @@
           </p:nvSpPr>
           <p:spPr>
             <a:xfrm>
-              <a:off x="1615213" y="2073503"/>
+              <a:off x="1365633" y="2073503"/>
               <a:ext cx="0" cy="3649639"/>
             </a:xfrm>
             <a:custGeom>
@@ -2486,7 +2486,7 @@
           </p:nvSpPr>
           <p:spPr>
             <a:xfrm>
-              <a:off x="3387871" y="2073503"/>
+              <a:off x="3517243" y="2073503"/>
               <a:ext cx="0" cy="3649639"/>
             </a:xfrm>
             <a:custGeom>
@@ -2529,7 +2529,7 @@
           </p:nvSpPr>
           <p:spPr>
             <a:xfrm>
-              <a:off x="5160528" y="2073503"/>
+              <a:off x="5668852" y="2073503"/>
               <a:ext cx="0" cy="3649639"/>
             </a:xfrm>
             <a:custGeom>
@@ -2572,7 +2572,7 @@
           </p:nvSpPr>
           <p:spPr>
             <a:xfrm>
-              <a:off x="6933186" y="2073503"/>
+              <a:off x="7820461" y="2073503"/>
               <a:ext cx="0" cy="3649639"/>
             </a:xfrm>
             <a:custGeom>
@@ -2830,7 +2830,7 @@
           </p:nvSpPr>
           <p:spPr>
             <a:xfrm>
-              <a:off x="2501542" y="2073503"/>
+              <a:off x="2441438" y="2073503"/>
               <a:ext cx="0" cy="3649639"/>
             </a:xfrm>
             <a:custGeom>
@@ -2873,7 +2873,7 @@
           </p:nvSpPr>
           <p:spPr>
             <a:xfrm>
-              <a:off x="4274200" y="2073503"/>
+              <a:off x="4593047" y="2073503"/>
               <a:ext cx="0" cy="3649639"/>
             </a:xfrm>
             <a:custGeom>
@@ -2916,7 +2916,7 @@
           </p:nvSpPr>
           <p:spPr>
             <a:xfrm>
-              <a:off x="6046857" y="2073503"/>
+              <a:off x="6744657" y="2073503"/>
               <a:ext cx="0" cy="3649639"/>
             </a:xfrm>
             <a:custGeom>
@@ -2953,643 +2953,600 @@
         </p:sp>
         <p:sp>
           <p:nvSpPr>
-            <p:cNvPr id="20" name="pl20"/>
+            <p:cNvPr id="20" name="pg20"/>
             <p:cNvSpPr/>
             <p:nvPr/>
           </p:nvSpPr>
           <p:spPr>
             <a:xfrm>
-              <a:off x="7819515" y="2073503"/>
-              <a:ext cx="0" cy="3649639"/>
+              <a:off x="1172049" y="2073503"/>
+              <a:ext cx="7090630" cy="3346577"/>
             </a:xfrm>
             <a:custGeom>
               <a:avLst/>
               <a:pathLst>
-                <a:path w="0" h="3649639">
+                <a:path w="7090630" h="3346577">
                   <a:moveTo>
-                    <a:pt x="0" y="3649639"/>
+                    <a:pt x="486019" y="0"/>
                   </a:moveTo>
                   <a:lnTo>
-                    <a:pt x="0" y="0"/>
-                  </a:lnTo>
-                  <a:lnTo>
-                    <a:pt x="0" y="0"/>
-                  </a:lnTo>
-                </a:path>
-              </a:pathLst>
-            </a:custGeom>
-            <a:ln w="13550" cap="flat">
-              <a:solidFill>
-                <a:srgbClr val="EBEBEB">
-                  <a:alpha val="100000"/>
-                </a:srgbClr>
-              </a:solidFill>
-              <a:prstDash val="solid"/>
-              <a:round/>
-            </a:ln>
-          </p:spPr>
-          <p:txBody>
-            <a:bodyPr/>
-            <a:lstStyle/>
-            <a:p/>
-          </p:txBody>
-        </p:sp>
-        <p:sp>
-          <p:nvSpPr>
-            <p:cNvPr id="21" name="pg21"/>
-            <p:cNvSpPr/>
-            <p:nvPr/>
-          </p:nvSpPr>
-          <p:spPr>
-            <a:xfrm>
-              <a:off x="817517" y="2073503"/>
-              <a:ext cx="7235830" cy="3346577"/>
-            </a:xfrm>
-            <a:custGeom>
-              <a:avLst/>
-              <a:pathLst>
-                <a:path w="7235830" h="3346577">
-                  <a:moveTo>
-                    <a:pt x="434112" y="0"/>
-                  </a:moveTo>
-                  <a:lnTo>
-                    <a:pt x="449907" y="26430"/>
-                  </a:lnTo>
-                  <a:lnTo>
-                    <a:pt x="523667" y="145599"/>
-                  </a:lnTo>
-                  <a:lnTo>
-                    <a:pt x="597427" y="260659"/>
-                  </a:lnTo>
-                  <a:lnTo>
-                    <a:pt x="671187" y="371754"/>
-                  </a:lnTo>
-                  <a:lnTo>
-                    <a:pt x="744947" y="479019"/>
-                  </a:lnTo>
-                  <a:lnTo>
-                    <a:pt x="818707" y="582588"/>
-                  </a:lnTo>
-                  <a:lnTo>
-                    <a:pt x="892467" y="682586"/>
-                  </a:lnTo>
-                  <a:lnTo>
-                    <a:pt x="966227" y="779137"/>
-                  </a:lnTo>
-                  <a:lnTo>
-                    <a:pt x="1039987" y="872361"/>
-                  </a:lnTo>
-                  <a:lnTo>
-                    <a:pt x="1113747" y="962371"/>
-                  </a:lnTo>
-                  <a:lnTo>
-                    <a:pt x="1187508" y="1049279"/>
-                  </a:lnTo>
-                  <a:lnTo>
-                    <a:pt x="1261268" y="1133191"/>
-                  </a:lnTo>
-                  <a:lnTo>
-                    <a:pt x="1335028" y="1214211"/>
-                  </a:lnTo>
-                  <a:lnTo>
-                    <a:pt x="1408788" y="1292438"/>
-                  </a:lnTo>
-                  <a:lnTo>
-                    <a:pt x="1482548" y="1367969"/>
-                  </a:lnTo>
-                  <a:lnTo>
-                    <a:pt x="1556308" y="1440897"/>
-                  </a:lnTo>
-                  <a:lnTo>
-                    <a:pt x="1630068" y="1511311"/>
-                  </a:lnTo>
-                  <a:lnTo>
-                    <a:pt x="1703828" y="1579297"/>
-                  </a:lnTo>
-                  <a:lnTo>
-                    <a:pt x="1777588" y="1644941"/>
-                  </a:lnTo>
-                  <a:lnTo>
-                    <a:pt x="1851348" y="1708321"/>
-                  </a:lnTo>
-                  <a:lnTo>
-                    <a:pt x="1925108" y="1769517"/>
-                  </a:lnTo>
-                  <a:lnTo>
-                    <a:pt x="1998868" y="1828604"/>
-                  </a:lnTo>
-                  <a:lnTo>
-                    <a:pt x="2072628" y="1885654"/>
-                  </a:lnTo>
-                  <a:lnTo>
-                    <a:pt x="2146388" y="1940738"/>
-                  </a:lnTo>
-                  <a:lnTo>
-                    <a:pt x="2220148" y="1993923"/>
-                  </a:lnTo>
-                  <a:lnTo>
-                    <a:pt x="2293908" y="2045275"/>
-                  </a:lnTo>
-                  <a:lnTo>
-                    <a:pt x="2367668" y="2094857"/>
-                  </a:lnTo>
-                  <a:lnTo>
-                    <a:pt x="2441428" y="2142729"/>
-                  </a:lnTo>
-                  <a:lnTo>
-                    <a:pt x="2515188" y="2188952"/>
-                  </a:lnTo>
-                  <a:lnTo>
-                    <a:pt x="2588948" y="2233582"/>
-                  </a:lnTo>
-                  <a:lnTo>
-                    <a:pt x="2662708" y="2276673"/>
-                  </a:lnTo>
-                  <a:lnTo>
-                    <a:pt x="2736468" y="2318279"/>
-                  </a:lnTo>
-                  <a:lnTo>
-                    <a:pt x="2810228" y="2358451"/>
-                  </a:lnTo>
-                  <a:lnTo>
-                    <a:pt x="2883988" y="2397238"/>
-                  </a:lnTo>
-                  <a:lnTo>
-                    <a:pt x="2957748" y="2434688"/>
-                  </a:lnTo>
-                  <a:lnTo>
-                    <a:pt x="3031508" y="2470847"/>
-                  </a:lnTo>
-                  <a:lnTo>
-                    <a:pt x="3105268" y="2505760"/>
-                  </a:lnTo>
-                  <a:lnTo>
-                    <a:pt x="3179028" y="2539470"/>
-                  </a:lnTo>
-                  <a:lnTo>
-                    <a:pt x="3252788" y="2572018"/>
-                  </a:lnTo>
-                  <a:lnTo>
-                    <a:pt x="3326548" y="2603444"/>
-                  </a:lnTo>
-                  <a:lnTo>
-                    <a:pt x="3400308" y="2633786"/>
-                  </a:lnTo>
-                  <a:lnTo>
-                    <a:pt x="3474068" y="2657056"/>
-                  </a:lnTo>
-                  <a:lnTo>
-                    <a:pt x="3547828" y="2666111"/>
-                  </a:lnTo>
-                  <a:lnTo>
-                    <a:pt x="3621588" y="2675066"/>
-                  </a:lnTo>
-                  <a:lnTo>
-                    <a:pt x="3695348" y="2683923"/>
-                  </a:lnTo>
-                  <a:lnTo>
-                    <a:pt x="3769108" y="2692684"/>
-                  </a:lnTo>
-                  <a:lnTo>
-                    <a:pt x="3842868" y="2701348"/>
-                  </a:lnTo>
-                  <a:lnTo>
-                    <a:pt x="3916628" y="2709917"/>
-                  </a:lnTo>
-                  <a:lnTo>
-                    <a:pt x="3990388" y="2718393"/>
-                  </a:lnTo>
-                  <a:lnTo>
-                    <a:pt x="4064149" y="2726776"/>
-                  </a:lnTo>
-                  <a:lnTo>
-                    <a:pt x="4137909" y="2735067"/>
-                  </a:lnTo>
-                  <a:lnTo>
-                    <a:pt x="4211669" y="2743267"/>
-                  </a:lnTo>
-                  <a:lnTo>
-                    <a:pt x="4285429" y="2751377"/>
-                  </a:lnTo>
-                  <a:lnTo>
-                    <a:pt x="4359189" y="2759399"/>
-                  </a:lnTo>
-                  <a:lnTo>
-                    <a:pt x="4432949" y="2767332"/>
-                  </a:lnTo>
-                  <a:lnTo>
-                    <a:pt x="4506709" y="2775179"/>
-                  </a:lnTo>
-                  <a:lnTo>
-                    <a:pt x="4580469" y="2782940"/>
-                  </a:lnTo>
-                  <a:lnTo>
-                    <a:pt x="4654229" y="2790616"/>
-                  </a:lnTo>
-                  <a:lnTo>
-                    <a:pt x="4727989" y="2798207"/>
-                  </a:lnTo>
-                  <a:lnTo>
-                    <a:pt x="4801749" y="2805716"/>
-                  </a:lnTo>
-                  <a:lnTo>
-                    <a:pt x="4875509" y="2813142"/>
-                  </a:lnTo>
-                  <a:lnTo>
-                    <a:pt x="4949269" y="2820487"/>
-                  </a:lnTo>
-                  <a:lnTo>
-                    <a:pt x="5023029" y="2827752"/>
-                  </a:lnTo>
-                  <a:lnTo>
-                    <a:pt x="5096789" y="2834937"/>
-                  </a:lnTo>
-                  <a:lnTo>
-                    <a:pt x="5170549" y="2842043"/>
-                  </a:lnTo>
-                  <a:lnTo>
-                    <a:pt x="5244309" y="2849071"/>
-                  </a:lnTo>
-                  <a:lnTo>
-                    <a:pt x="5318069" y="2856023"/>
-                  </a:lnTo>
-                  <a:lnTo>
-                    <a:pt x="5391829" y="2862898"/>
-                  </a:lnTo>
-                  <a:lnTo>
-                    <a:pt x="5465589" y="2869698"/>
-                  </a:lnTo>
-                  <a:lnTo>
-                    <a:pt x="5539349" y="2876424"/>
-                  </a:lnTo>
-                  <a:lnTo>
-                    <a:pt x="5613109" y="2883076"/>
-                  </a:lnTo>
-                  <a:lnTo>
-                    <a:pt x="5686869" y="2889655"/>
-                  </a:lnTo>
-                  <a:lnTo>
-                    <a:pt x="5760629" y="2896162"/>
-                  </a:lnTo>
-                  <a:lnTo>
-                    <a:pt x="5834389" y="2902597"/>
-                  </a:lnTo>
-                  <a:lnTo>
-                    <a:pt x="5908149" y="2908963"/>
-                  </a:lnTo>
-                  <a:lnTo>
-                    <a:pt x="5981909" y="2915258"/>
-                  </a:lnTo>
-                  <a:lnTo>
-                    <a:pt x="6055669" y="2921485"/>
-                  </a:lnTo>
-                  <a:lnTo>
-                    <a:pt x="6129429" y="2927643"/>
-                  </a:lnTo>
-                  <a:lnTo>
-                    <a:pt x="6203189" y="2933734"/>
-                  </a:lnTo>
-                  <a:lnTo>
-                    <a:pt x="6276949" y="2939758"/>
-                  </a:lnTo>
-                  <a:lnTo>
-                    <a:pt x="6350709" y="2945716"/>
-                  </a:lnTo>
-                  <a:lnTo>
-                    <a:pt x="6424469" y="2951609"/>
-                  </a:lnTo>
-                  <a:lnTo>
-                    <a:pt x="6498229" y="2957437"/>
-                  </a:lnTo>
-                  <a:lnTo>
-                    <a:pt x="6571989" y="2963202"/>
-                  </a:lnTo>
-                  <a:lnTo>
-                    <a:pt x="6645749" y="2968903"/>
-                  </a:lnTo>
-                  <a:lnTo>
-                    <a:pt x="6719509" y="2974542"/>
-                  </a:lnTo>
-                  <a:lnTo>
-                    <a:pt x="6793269" y="2980120"/>
-                  </a:lnTo>
-                  <a:lnTo>
-                    <a:pt x="6867029" y="2985636"/>
-                  </a:lnTo>
-                  <a:lnTo>
-                    <a:pt x="6940789" y="2991091"/>
-                  </a:lnTo>
-                  <a:lnTo>
-                    <a:pt x="7014550" y="2996487"/>
-                  </a:lnTo>
-                  <a:lnTo>
-                    <a:pt x="7088310" y="3001824"/>
-                  </a:lnTo>
-                  <a:lnTo>
-                    <a:pt x="7162070" y="3007103"/>
-                  </a:lnTo>
-                  <a:lnTo>
-                    <a:pt x="7235830" y="3012323"/>
-                  </a:lnTo>
-                  <a:lnTo>
-                    <a:pt x="7235830" y="3346577"/>
-                  </a:lnTo>
-                  <a:lnTo>
-                    <a:pt x="7162070" y="3341681"/>
-                  </a:lnTo>
-                  <a:lnTo>
-                    <a:pt x="7088310" y="3336609"/>
-                  </a:lnTo>
-                  <a:lnTo>
-                    <a:pt x="7014550" y="3331356"/>
-                  </a:lnTo>
-                  <a:lnTo>
-                    <a:pt x="6940789" y="3325916"/>
-                  </a:lnTo>
-                  <a:lnTo>
-                    <a:pt x="6867029" y="3320282"/>
-                  </a:lnTo>
-                  <a:lnTo>
-                    <a:pt x="6793269" y="3314446"/>
-                  </a:lnTo>
-                  <a:lnTo>
-                    <a:pt x="6719509" y="3308403"/>
-                  </a:lnTo>
-                  <a:lnTo>
-                    <a:pt x="6645749" y="3302143"/>
-                  </a:lnTo>
-                  <a:lnTo>
-                    <a:pt x="6571989" y="3295660"/>
-                  </a:lnTo>
-                  <a:lnTo>
-                    <a:pt x="6498229" y="3288945"/>
-                  </a:lnTo>
-                  <a:lnTo>
-                    <a:pt x="6424469" y="3281991"/>
-                  </a:lnTo>
-                  <a:lnTo>
-                    <a:pt x="6350709" y="3274789"/>
-                  </a:lnTo>
-                  <a:lnTo>
-                    <a:pt x="6276949" y="3267329"/>
-                  </a:lnTo>
-                  <a:lnTo>
-                    <a:pt x="6203189" y="3259603"/>
-                  </a:lnTo>
-                  <a:lnTo>
-                    <a:pt x="6129429" y="3251602"/>
-                  </a:lnTo>
-                  <a:lnTo>
-                    <a:pt x="6055669" y="3243314"/>
-                  </a:lnTo>
-                  <a:lnTo>
-                    <a:pt x="5981909" y="3234731"/>
-                  </a:lnTo>
-                  <a:lnTo>
-                    <a:pt x="5908149" y="3225842"/>
-                  </a:lnTo>
-                  <a:lnTo>
-                    <a:pt x="5834389" y="3216635"/>
-                  </a:lnTo>
-                  <a:lnTo>
-                    <a:pt x="5760629" y="3207099"/>
-                  </a:lnTo>
-                  <a:lnTo>
-                    <a:pt x="5686869" y="3197223"/>
-                  </a:lnTo>
-                  <a:lnTo>
-                    <a:pt x="5613109" y="3186995"/>
-                  </a:lnTo>
-                  <a:lnTo>
-                    <a:pt x="5539349" y="3176401"/>
-                  </a:lnTo>
-                  <a:lnTo>
-                    <a:pt x="5465589" y="3165429"/>
-                  </a:lnTo>
-                  <a:lnTo>
-                    <a:pt x="5391829" y="3154065"/>
-                  </a:lnTo>
-                  <a:lnTo>
-                    <a:pt x="5318069" y="3142296"/>
-                  </a:lnTo>
-                  <a:lnTo>
-                    <a:pt x="5244309" y="3130107"/>
-                  </a:lnTo>
-                  <a:lnTo>
-                    <a:pt x="5170549" y="3117482"/>
-                  </a:lnTo>
-                  <a:lnTo>
-                    <a:pt x="5096789" y="3104407"/>
-                  </a:lnTo>
-                  <a:lnTo>
-                    <a:pt x="5023029" y="3090865"/>
-                  </a:lnTo>
-                  <a:lnTo>
-                    <a:pt x="4949269" y="3076840"/>
-                  </a:lnTo>
-                  <a:lnTo>
-                    <a:pt x="4875509" y="3062314"/>
-                  </a:lnTo>
-                  <a:lnTo>
-                    <a:pt x="4801749" y="3047269"/>
-                  </a:lnTo>
-                  <a:lnTo>
-                    <a:pt x="4727989" y="3031687"/>
-                  </a:lnTo>
-                  <a:lnTo>
-                    <a:pt x="4654229" y="3015549"/>
-                  </a:lnTo>
-                  <a:lnTo>
-                    <a:pt x="4580469" y="2998835"/>
-                  </a:lnTo>
-                  <a:lnTo>
-                    <a:pt x="4506709" y="2981524"/>
-                  </a:lnTo>
-                  <a:lnTo>
-                    <a:pt x="4432949" y="2963595"/>
-                  </a:lnTo>
-                  <a:lnTo>
-                    <a:pt x="4359189" y="2945027"/>
-                  </a:lnTo>
-                  <a:lnTo>
-                    <a:pt x="4285429" y="2925795"/>
-                  </a:lnTo>
-                  <a:lnTo>
-                    <a:pt x="4211669" y="2905877"/>
-                  </a:lnTo>
-                  <a:lnTo>
-                    <a:pt x="4137909" y="2885247"/>
-                  </a:lnTo>
-                  <a:lnTo>
-                    <a:pt x="4064149" y="2863882"/>
-                  </a:lnTo>
-                  <a:lnTo>
-                    <a:pt x="3990388" y="2841753"/>
-                  </a:lnTo>
-                  <a:lnTo>
-                    <a:pt x="3916628" y="2818835"/>
-                  </a:lnTo>
-                  <a:lnTo>
-                    <a:pt x="3842868" y="2795098"/>
-                  </a:lnTo>
-                  <a:lnTo>
-                    <a:pt x="3769108" y="2770514"/>
-                  </a:lnTo>
-                  <a:lnTo>
-                    <a:pt x="3695348" y="2745052"/>
-                  </a:lnTo>
-                  <a:lnTo>
-                    <a:pt x="3621588" y="2718682"/>
-                  </a:lnTo>
-                  <a:lnTo>
-                    <a:pt x="3547828" y="2691370"/>
-                  </a:lnTo>
-                  <a:lnTo>
-                    <a:pt x="3474068" y="2663083"/>
-                  </a:lnTo>
-                  <a:lnTo>
-                    <a:pt x="3400308" y="2647901"/>
-                  </a:lnTo>
-                  <a:lnTo>
-                    <a:pt x="3326548" y="2638645"/>
-                  </a:lnTo>
-                  <a:lnTo>
-                    <a:pt x="3252788" y="2629286"/>
-                  </a:lnTo>
-                  <a:lnTo>
-                    <a:pt x="3179028" y="2619824"/>
-                  </a:lnTo>
-                  <a:lnTo>
-                    <a:pt x="3105268" y="2610257"/>
-                  </a:lnTo>
-                  <a:lnTo>
-                    <a:pt x="3031508" y="2600584"/>
-                  </a:lnTo>
-                  <a:lnTo>
-                    <a:pt x="2957748" y="2590803"/>
-                  </a:lnTo>
-                  <a:lnTo>
-                    <a:pt x="2883988" y="2580915"/>
-                  </a:lnTo>
-                  <a:lnTo>
-                    <a:pt x="2810228" y="2570917"/>
-                  </a:lnTo>
-                  <a:lnTo>
-                    <a:pt x="2736468" y="2560808"/>
-                  </a:lnTo>
-                  <a:lnTo>
-                    <a:pt x="2662708" y="2550587"/>
-                  </a:lnTo>
-                  <a:lnTo>
-                    <a:pt x="2588948" y="2540253"/>
-                  </a:lnTo>
-                  <a:lnTo>
-                    <a:pt x="2515188" y="2529805"/>
-                  </a:lnTo>
-                  <a:lnTo>
-                    <a:pt x="2441428" y="2519241"/>
-                  </a:lnTo>
-                  <a:lnTo>
-                    <a:pt x="2367668" y="2508560"/>
-                  </a:lnTo>
-                  <a:lnTo>
-                    <a:pt x="2293908" y="2497761"/>
-                  </a:lnTo>
-                  <a:lnTo>
-                    <a:pt x="2220148" y="2486842"/>
-                  </a:lnTo>
-                  <a:lnTo>
-                    <a:pt x="2146388" y="2475802"/>
-                  </a:lnTo>
-                  <a:lnTo>
-                    <a:pt x="2072628" y="2464640"/>
-                  </a:lnTo>
-                  <a:lnTo>
-                    <a:pt x="1998868" y="2453354"/>
-                  </a:lnTo>
-                  <a:lnTo>
-                    <a:pt x="1925108" y="2441944"/>
-                  </a:lnTo>
-                  <a:lnTo>
-                    <a:pt x="1851348" y="2430407"/>
-                  </a:lnTo>
-                  <a:lnTo>
-                    <a:pt x="1777588" y="2418742"/>
-                  </a:lnTo>
-                  <a:lnTo>
-                    <a:pt x="1703828" y="2406948"/>
-                  </a:lnTo>
-                  <a:lnTo>
-                    <a:pt x="1630068" y="2395023"/>
-                  </a:lnTo>
-                  <a:lnTo>
-                    <a:pt x="1556308" y="2382967"/>
-                  </a:lnTo>
-                  <a:lnTo>
-                    <a:pt x="1482548" y="2370777"/>
-                  </a:lnTo>
-                  <a:lnTo>
-                    <a:pt x="1408788" y="2358452"/>
-                  </a:lnTo>
-                  <a:lnTo>
-                    <a:pt x="1335028" y="2345990"/>
-                  </a:lnTo>
-                  <a:lnTo>
-                    <a:pt x="1261268" y="2333390"/>
-                  </a:lnTo>
-                  <a:lnTo>
-                    <a:pt x="1187508" y="2320651"/>
-                  </a:lnTo>
-                  <a:lnTo>
-                    <a:pt x="1113747" y="2307771"/>
-                  </a:lnTo>
-                  <a:lnTo>
-                    <a:pt x="1039987" y="2294748"/>
-                  </a:lnTo>
-                  <a:lnTo>
-                    <a:pt x="966227" y="2281581"/>
-                  </a:lnTo>
-                  <a:lnTo>
-                    <a:pt x="892467" y="2268268"/>
-                  </a:lnTo>
-                  <a:lnTo>
-                    <a:pt x="818707" y="2254808"/>
-                  </a:lnTo>
-                  <a:lnTo>
-                    <a:pt x="744947" y="2241199"/>
-                  </a:lnTo>
-                  <a:lnTo>
-                    <a:pt x="671187" y="2227438"/>
-                  </a:lnTo>
-                  <a:lnTo>
-                    <a:pt x="597427" y="2213526"/>
-                  </a:lnTo>
-                  <a:lnTo>
-                    <a:pt x="523667" y="2199459"/>
-                  </a:lnTo>
-                  <a:lnTo>
-                    <a:pt x="449907" y="2185237"/>
-                  </a:lnTo>
-                  <a:lnTo>
-                    <a:pt x="376147" y="2170857"/>
-                  </a:lnTo>
-                  <a:lnTo>
-                    <a:pt x="302387" y="2156318"/>
-                  </a:lnTo>
-                  <a:lnTo>
-                    <a:pt x="228627" y="2141618"/>
-                  </a:lnTo>
-                  <a:lnTo>
-                    <a:pt x="154867" y="2126755"/>
-                  </a:lnTo>
-                  <a:lnTo>
-                    <a:pt x="81107" y="2111728"/>
-                  </a:lnTo>
-                  <a:lnTo>
-                    <a:pt x="7347" y="2096534"/>
-                  </a:lnTo>
-                  <a:lnTo>
-                    <a:pt x="0" y="2095004"/>
+                    <a:pt x="501357" y="26430"/>
+                  </a:lnTo>
+                  <a:lnTo>
+                    <a:pt x="572980" y="145599"/>
+                  </a:lnTo>
+                  <a:lnTo>
+                    <a:pt x="644602" y="260659"/>
+                  </a:lnTo>
+                  <a:lnTo>
+                    <a:pt x="716225" y="371754"/>
+                  </a:lnTo>
+                  <a:lnTo>
+                    <a:pt x="787847" y="479019"/>
+                  </a:lnTo>
+                  <a:lnTo>
+                    <a:pt x="859470" y="582588"/>
+                  </a:lnTo>
+                  <a:lnTo>
+                    <a:pt x="931092" y="682586"/>
+                  </a:lnTo>
+                  <a:lnTo>
+                    <a:pt x="1002715" y="779137"/>
+                  </a:lnTo>
+                  <a:lnTo>
+                    <a:pt x="1074337" y="872361"/>
+                  </a:lnTo>
+                  <a:lnTo>
+                    <a:pt x="1145960" y="962371"/>
+                  </a:lnTo>
+                  <a:lnTo>
+                    <a:pt x="1217582" y="1049279"/>
+                  </a:lnTo>
+                  <a:lnTo>
+                    <a:pt x="1289205" y="1133191"/>
+                  </a:lnTo>
+                  <a:lnTo>
+                    <a:pt x="1360827" y="1214211"/>
+                  </a:lnTo>
+                  <a:lnTo>
+                    <a:pt x="1432450" y="1292438"/>
+                  </a:lnTo>
+                  <a:lnTo>
+                    <a:pt x="1504073" y="1367969"/>
+                  </a:lnTo>
+                  <a:lnTo>
+                    <a:pt x="1575695" y="1440897"/>
+                  </a:lnTo>
+                  <a:lnTo>
+                    <a:pt x="1647318" y="1511311"/>
+                  </a:lnTo>
+                  <a:lnTo>
+                    <a:pt x="1718940" y="1579297"/>
+                  </a:lnTo>
+                  <a:lnTo>
+                    <a:pt x="1790563" y="1644941"/>
+                  </a:lnTo>
+                  <a:lnTo>
+                    <a:pt x="1862185" y="1708321"/>
+                  </a:lnTo>
+                  <a:lnTo>
+                    <a:pt x="1933808" y="1769517"/>
+                  </a:lnTo>
+                  <a:lnTo>
+                    <a:pt x="2005430" y="1828604"/>
+                  </a:lnTo>
+                  <a:lnTo>
+                    <a:pt x="2077053" y="1885654"/>
+                  </a:lnTo>
+                  <a:lnTo>
+                    <a:pt x="2148675" y="1940738"/>
+                  </a:lnTo>
+                  <a:lnTo>
+                    <a:pt x="2220298" y="1993923"/>
+                  </a:lnTo>
+                  <a:lnTo>
+                    <a:pt x="2291920" y="2045275"/>
+                  </a:lnTo>
+                  <a:lnTo>
+                    <a:pt x="2363543" y="2094857"/>
+                  </a:lnTo>
+                  <a:lnTo>
+                    <a:pt x="2435165" y="2142729"/>
+                  </a:lnTo>
+                  <a:lnTo>
+                    <a:pt x="2506788" y="2188952"/>
+                  </a:lnTo>
+                  <a:lnTo>
+                    <a:pt x="2578410" y="2233582"/>
+                  </a:lnTo>
+                  <a:lnTo>
+                    <a:pt x="2650033" y="2276673"/>
+                  </a:lnTo>
+                  <a:lnTo>
+                    <a:pt x="2721655" y="2318279"/>
+                  </a:lnTo>
+                  <a:lnTo>
+                    <a:pt x="2793278" y="2358451"/>
+                  </a:lnTo>
+                  <a:lnTo>
+                    <a:pt x="2864901" y="2397238"/>
+                  </a:lnTo>
+                  <a:lnTo>
+                    <a:pt x="2936523" y="2434688"/>
+                  </a:lnTo>
+                  <a:lnTo>
+                    <a:pt x="3008146" y="2470847"/>
+                  </a:lnTo>
+                  <a:lnTo>
+                    <a:pt x="3079768" y="2505760"/>
+                  </a:lnTo>
+                  <a:lnTo>
+                    <a:pt x="3151391" y="2539470"/>
+                  </a:lnTo>
+                  <a:lnTo>
+                    <a:pt x="3223013" y="2572018"/>
+                  </a:lnTo>
+                  <a:lnTo>
+                    <a:pt x="3294636" y="2603444"/>
+                  </a:lnTo>
+                  <a:lnTo>
+                    <a:pt x="3366258" y="2633786"/>
+                  </a:lnTo>
+                  <a:lnTo>
+                    <a:pt x="3437881" y="2657056"/>
+                  </a:lnTo>
+                  <a:lnTo>
+                    <a:pt x="3509503" y="2666111"/>
+                  </a:lnTo>
+                  <a:lnTo>
+                    <a:pt x="3581126" y="2675066"/>
+                  </a:lnTo>
+                  <a:lnTo>
+                    <a:pt x="3652748" y="2683923"/>
+                  </a:lnTo>
+                  <a:lnTo>
+                    <a:pt x="3724371" y="2692684"/>
+                  </a:lnTo>
+                  <a:lnTo>
+                    <a:pt x="3795993" y="2701348"/>
+                  </a:lnTo>
+                  <a:lnTo>
+                    <a:pt x="3867616" y="2709917"/>
+                  </a:lnTo>
+                  <a:lnTo>
+                    <a:pt x="3939238" y="2718393"/>
+                  </a:lnTo>
+                  <a:lnTo>
+                    <a:pt x="4010861" y="2726776"/>
+                  </a:lnTo>
+                  <a:lnTo>
+                    <a:pt x="4082483" y="2735067"/>
+                  </a:lnTo>
+                  <a:lnTo>
+                    <a:pt x="4154106" y="2743267"/>
+                  </a:lnTo>
+                  <a:lnTo>
+                    <a:pt x="4225729" y="2751377"/>
+                  </a:lnTo>
+                  <a:lnTo>
+                    <a:pt x="4297351" y="2759399"/>
+                  </a:lnTo>
+                  <a:lnTo>
+                    <a:pt x="4368974" y="2767332"/>
+                  </a:lnTo>
+                  <a:lnTo>
+                    <a:pt x="4440596" y="2775179"/>
+                  </a:lnTo>
+                  <a:lnTo>
+                    <a:pt x="4512219" y="2782940"/>
+                  </a:lnTo>
+                  <a:lnTo>
+                    <a:pt x="4583841" y="2790616"/>
+                  </a:lnTo>
+                  <a:lnTo>
+                    <a:pt x="4655464" y="2798207"/>
+                  </a:lnTo>
+                  <a:lnTo>
+                    <a:pt x="4727086" y="2805716"/>
+                  </a:lnTo>
+                  <a:lnTo>
+                    <a:pt x="4798709" y="2813142"/>
+                  </a:lnTo>
+                  <a:lnTo>
+                    <a:pt x="4870331" y="2820487"/>
+                  </a:lnTo>
+                  <a:lnTo>
+                    <a:pt x="4941954" y="2827752"/>
+                  </a:lnTo>
+                  <a:lnTo>
+                    <a:pt x="5013576" y="2834937"/>
+                  </a:lnTo>
+                  <a:lnTo>
+                    <a:pt x="5085199" y="2842043"/>
+                  </a:lnTo>
+                  <a:lnTo>
+                    <a:pt x="5156821" y="2849071"/>
+                  </a:lnTo>
+                  <a:lnTo>
+                    <a:pt x="5228444" y="2856023"/>
+                  </a:lnTo>
+                  <a:lnTo>
+                    <a:pt x="5300066" y="2862898"/>
+                  </a:lnTo>
+                  <a:lnTo>
+                    <a:pt x="5371689" y="2869698"/>
+                  </a:lnTo>
+                  <a:lnTo>
+                    <a:pt x="5443311" y="2876424"/>
+                  </a:lnTo>
+                  <a:lnTo>
+                    <a:pt x="5514934" y="2883076"/>
+                  </a:lnTo>
+                  <a:lnTo>
+                    <a:pt x="5586557" y="2889655"/>
+                  </a:lnTo>
+                  <a:lnTo>
+                    <a:pt x="5658179" y="2896162"/>
+                  </a:lnTo>
+                  <a:lnTo>
+                    <a:pt x="5729802" y="2902597"/>
+                  </a:lnTo>
+                  <a:lnTo>
+                    <a:pt x="5801424" y="2908963"/>
+                  </a:lnTo>
+                  <a:lnTo>
+                    <a:pt x="5873047" y="2915258"/>
+                  </a:lnTo>
+                  <a:lnTo>
+                    <a:pt x="5944669" y="2921485"/>
+                  </a:lnTo>
+                  <a:lnTo>
+                    <a:pt x="6016292" y="2927643"/>
+                  </a:lnTo>
+                  <a:lnTo>
+                    <a:pt x="6087914" y="2933734"/>
+                  </a:lnTo>
+                  <a:lnTo>
+                    <a:pt x="6159537" y="2939758"/>
+                  </a:lnTo>
+                  <a:lnTo>
+                    <a:pt x="6231159" y="2945716"/>
+                  </a:lnTo>
+                  <a:lnTo>
+                    <a:pt x="6302782" y="2951609"/>
+                  </a:lnTo>
+                  <a:lnTo>
+                    <a:pt x="6374404" y="2957437"/>
+                  </a:lnTo>
+                  <a:lnTo>
+                    <a:pt x="6446027" y="2963202"/>
+                  </a:lnTo>
+                  <a:lnTo>
+                    <a:pt x="6517649" y="2968903"/>
+                  </a:lnTo>
+                  <a:lnTo>
+                    <a:pt x="6589272" y="2974542"/>
+                  </a:lnTo>
+                  <a:lnTo>
+                    <a:pt x="6660894" y="2980120"/>
+                  </a:lnTo>
+                  <a:lnTo>
+                    <a:pt x="6732517" y="2985636"/>
+                  </a:lnTo>
+                  <a:lnTo>
+                    <a:pt x="6804139" y="2991091"/>
+                  </a:lnTo>
+                  <a:lnTo>
+                    <a:pt x="6875762" y="2996487"/>
+                  </a:lnTo>
+                  <a:lnTo>
+                    <a:pt x="6947385" y="3001824"/>
+                  </a:lnTo>
+                  <a:lnTo>
+                    <a:pt x="7019007" y="3007103"/>
+                  </a:lnTo>
+                  <a:lnTo>
+                    <a:pt x="7090630" y="3012323"/>
+                  </a:lnTo>
+                  <a:lnTo>
+                    <a:pt x="7090630" y="3346577"/>
+                  </a:lnTo>
+                  <a:lnTo>
+                    <a:pt x="7019007" y="3341681"/>
+                  </a:lnTo>
+                  <a:lnTo>
+                    <a:pt x="6947385" y="3336609"/>
+                  </a:lnTo>
+                  <a:lnTo>
+                    <a:pt x="6875762" y="3331356"/>
+                  </a:lnTo>
+                  <a:lnTo>
+                    <a:pt x="6804139" y="3325916"/>
+                  </a:lnTo>
+                  <a:lnTo>
+                    <a:pt x="6732517" y="3320282"/>
+                  </a:lnTo>
+                  <a:lnTo>
+                    <a:pt x="6660894" y="3314446"/>
+                  </a:lnTo>
+                  <a:lnTo>
+                    <a:pt x="6589272" y="3308403"/>
+                  </a:lnTo>
+                  <a:lnTo>
+                    <a:pt x="6517649" y="3302143"/>
+                  </a:lnTo>
+                  <a:lnTo>
+                    <a:pt x="6446027" y="3295660"/>
+                  </a:lnTo>
+                  <a:lnTo>
+                    <a:pt x="6374404" y="3288945"/>
+                  </a:lnTo>
+                  <a:lnTo>
+                    <a:pt x="6302782" y="3281991"/>
+                  </a:lnTo>
+                  <a:lnTo>
+                    <a:pt x="6231159" y="3274789"/>
+                  </a:lnTo>
+                  <a:lnTo>
+                    <a:pt x="6159537" y="3267329"/>
+                  </a:lnTo>
+                  <a:lnTo>
+                    <a:pt x="6087914" y="3259603"/>
+                  </a:lnTo>
+                  <a:lnTo>
+                    <a:pt x="6016292" y="3251602"/>
+                  </a:lnTo>
+                  <a:lnTo>
+                    <a:pt x="5944669" y="3243314"/>
+                  </a:lnTo>
+                  <a:lnTo>
+                    <a:pt x="5873047" y="3234731"/>
+                  </a:lnTo>
+                  <a:lnTo>
+                    <a:pt x="5801424" y="3225842"/>
+                  </a:lnTo>
+                  <a:lnTo>
+                    <a:pt x="5729802" y="3216635"/>
+                  </a:lnTo>
+                  <a:lnTo>
+                    <a:pt x="5658179" y="3207099"/>
+                  </a:lnTo>
+                  <a:lnTo>
+                    <a:pt x="5586557" y="3197223"/>
+                  </a:lnTo>
+                  <a:lnTo>
+                    <a:pt x="5514934" y="3186995"/>
+                  </a:lnTo>
+                  <a:lnTo>
+                    <a:pt x="5443311" y="3176401"/>
+                  </a:lnTo>
+                  <a:lnTo>
+                    <a:pt x="5371689" y="3165429"/>
+                  </a:lnTo>
+                  <a:lnTo>
+                    <a:pt x="5300066" y="3154065"/>
+                  </a:lnTo>
+                  <a:lnTo>
+                    <a:pt x="5228444" y="3142296"/>
+                  </a:lnTo>
+                  <a:lnTo>
+                    <a:pt x="5156821" y="3130107"/>
+                  </a:lnTo>
+                  <a:lnTo>
+                    <a:pt x="5085199" y="3117482"/>
+                  </a:lnTo>
+                  <a:lnTo>
+                    <a:pt x="5013576" y="3104407"/>
+                  </a:lnTo>
+                  <a:lnTo>
+                    <a:pt x="4941954" y="3090865"/>
+                  </a:lnTo>
+                  <a:lnTo>
+                    <a:pt x="4870331" y="3076840"/>
+                  </a:lnTo>
+                  <a:lnTo>
+                    <a:pt x="4798709" y="3062314"/>
+                  </a:lnTo>
+                  <a:lnTo>
+                    <a:pt x="4727086" y="3047269"/>
+                  </a:lnTo>
+                  <a:lnTo>
+                    <a:pt x="4655464" y="3031687"/>
+                  </a:lnTo>
+                  <a:lnTo>
+                    <a:pt x="4583841" y="3015549"/>
+                  </a:lnTo>
+                  <a:lnTo>
+                    <a:pt x="4512219" y="2998835"/>
+                  </a:lnTo>
+                  <a:lnTo>
+                    <a:pt x="4440596" y="2981524"/>
+                  </a:lnTo>
+                  <a:lnTo>
+                    <a:pt x="4368974" y="2963595"/>
+                  </a:lnTo>
+                  <a:lnTo>
+                    <a:pt x="4297351" y="2945027"/>
+                  </a:lnTo>
+                  <a:lnTo>
+                    <a:pt x="4225729" y="2925795"/>
+                  </a:lnTo>
+                  <a:lnTo>
+                    <a:pt x="4154106" y="2905877"/>
+                  </a:lnTo>
+                  <a:lnTo>
+                    <a:pt x="4082483" y="2885247"/>
+                  </a:lnTo>
+                  <a:lnTo>
+                    <a:pt x="4010861" y="2863882"/>
+                  </a:lnTo>
+                  <a:lnTo>
+                    <a:pt x="3939238" y="2841753"/>
+                  </a:lnTo>
+                  <a:lnTo>
+                    <a:pt x="3867616" y="2818835"/>
+                  </a:lnTo>
+                  <a:lnTo>
+                    <a:pt x="3795993" y="2795098"/>
+                  </a:lnTo>
+                  <a:lnTo>
+                    <a:pt x="3724371" y="2770514"/>
+                  </a:lnTo>
+                  <a:lnTo>
+                    <a:pt x="3652748" y="2745052"/>
+                  </a:lnTo>
+                  <a:lnTo>
+                    <a:pt x="3581126" y="2718682"/>
+                  </a:lnTo>
+                  <a:lnTo>
+                    <a:pt x="3509503" y="2691370"/>
+                  </a:lnTo>
+                  <a:lnTo>
+                    <a:pt x="3437881" y="2663083"/>
+                  </a:lnTo>
+                  <a:lnTo>
+                    <a:pt x="3366258" y="2647901"/>
+                  </a:lnTo>
+                  <a:lnTo>
+                    <a:pt x="3294636" y="2638645"/>
+                  </a:lnTo>
+                  <a:lnTo>
+                    <a:pt x="3223013" y="2629286"/>
+                  </a:lnTo>
+                  <a:lnTo>
+                    <a:pt x="3151391" y="2619824"/>
+                  </a:lnTo>
+                  <a:lnTo>
+                    <a:pt x="3079768" y="2610257"/>
+                  </a:lnTo>
+                  <a:lnTo>
+                    <a:pt x="3008146" y="2600584"/>
+                  </a:lnTo>
+                  <a:lnTo>
+                    <a:pt x="2936523" y="2590803"/>
+                  </a:lnTo>
+                  <a:lnTo>
+                    <a:pt x="2864901" y="2580915"/>
+                  </a:lnTo>
+                  <a:lnTo>
+                    <a:pt x="2793278" y="2570917"/>
+                  </a:lnTo>
+                  <a:lnTo>
+                    <a:pt x="2721655" y="2560808"/>
+                  </a:lnTo>
+                  <a:lnTo>
+                    <a:pt x="2650033" y="2550587"/>
+                  </a:lnTo>
+                  <a:lnTo>
+                    <a:pt x="2578410" y="2540253"/>
+                  </a:lnTo>
+                  <a:lnTo>
+                    <a:pt x="2506788" y="2529805"/>
+                  </a:lnTo>
+                  <a:lnTo>
+                    <a:pt x="2435165" y="2519241"/>
+                  </a:lnTo>
+                  <a:lnTo>
+                    <a:pt x="2363543" y="2508560"/>
+                  </a:lnTo>
+                  <a:lnTo>
+                    <a:pt x="2291920" y="2497761"/>
+                  </a:lnTo>
+                  <a:lnTo>
+                    <a:pt x="2220298" y="2486842"/>
+                  </a:lnTo>
+                  <a:lnTo>
+                    <a:pt x="2148675" y="2475802"/>
+                  </a:lnTo>
+                  <a:lnTo>
+                    <a:pt x="2077053" y="2464640"/>
+                  </a:lnTo>
+                  <a:lnTo>
+                    <a:pt x="2005430" y="2453354"/>
+                  </a:lnTo>
+                  <a:lnTo>
+                    <a:pt x="1933808" y="2441944"/>
+                  </a:lnTo>
+                  <a:lnTo>
+                    <a:pt x="1862185" y="2430407"/>
+                  </a:lnTo>
+                  <a:lnTo>
+                    <a:pt x="1790563" y="2418742"/>
+                  </a:lnTo>
+                  <a:lnTo>
+                    <a:pt x="1718940" y="2406948"/>
+                  </a:lnTo>
+                  <a:lnTo>
+                    <a:pt x="1647318" y="2395023"/>
+                  </a:lnTo>
+                  <a:lnTo>
+                    <a:pt x="1575695" y="2382967"/>
+                  </a:lnTo>
+                  <a:lnTo>
+                    <a:pt x="1504073" y="2370777"/>
+                  </a:lnTo>
+                  <a:lnTo>
+                    <a:pt x="1432450" y="2358452"/>
+                  </a:lnTo>
+                  <a:lnTo>
+                    <a:pt x="1360827" y="2345990"/>
+                  </a:lnTo>
+                  <a:lnTo>
+                    <a:pt x="1289205" y="2333390"/>
+                  </a:lnTo>
+                  <a:lnTo>
+                    <a:pt x="1217582" y="2320651"/>
+                  </a:lnTo>
+                  <a:lnTo>
+                    <a:pt x="1145960" y="2307771"/>
+                  </a:lnTo>
+                  <a:lnTo>
+                    <a:pt x="1074337" y="2294748"/>
+                  </a:lnTo>
+                  <a:lnTo>
+                    <a:pt x="1002715" y="2281581"/>
+                  </a:lnTo>
+                  <a:lnTo>
+                    <a:pt x="931092" y="2268268"/>
+                  </a:lnTo>
+                  <a:lnTo>
+                    <a:pt x="859470" y="2254808"/>
+                  </a:lnTo>
+                  <a:lnTo>
+                    <a:pt x="787847" y="2241199"/>
+                  </a:lnTo>
+                  <a:lnTo>
+                    <a:pt x="716225" y="2227438"/>
+                  </a:lnTo>
+                  <a:lnTo>
+                    <a:pt x="644602" y="2213526"/>
+                  </a:lnTo>
+                  <a:lnTo>
+                    <a:pt x="572980" y="2199459"/>
+                  </a:lnTo>
+                  <a:lnTo>
+                    <a:pt x="501357" y="2185237"/>
+                  </a:lnTo>
+                  <a:lnTo>
+                    <a:pt x="429735" y="2170857"/>
+                  </a:lnTo>
+                  <a:lnTo>
+                    <a:pt x="358112" y="2156318"/>
+                  </a:lnTo>
+                  <a:lnTo>
+                    <a:pt x="286490" y="2141618"/>
+                  </a:lnTo>
+                  <a:lnTo>
+                    <a:pt x="214867" y="2126755"/>
+                  </a:lnTo>
+                  <a:lnTo>
+                    <a:pt x="143245" y="2111728"/>
+                  </a:lnTo>
+                  <a:lnTo>
+                    <a:pt x="71622" y="2096534"/>
+                  </a:lnTo>
+                  <a:lnTo>
+                    <a:pt x="0" y="2081172"/>
                   </a:lnTo>
                   <a:close/>
                 </a:path>
@@ -3609,300 +3566,625 @@
         </p:sp>
         <p:sp>
           <p:nvSpPr>
+            <p:cNvPr id="21" name="pl21"/>
+            <p:cNvSpPr/>
+            <p:nvPr/>
+          </p:nvSpPr>
+          <p:spPr>
+            <a:xfrm>
+              <a:off x="1658069" y="2073503"/>
+              <a:ext cx="6604610" cy="3012323"/>
+            </a:xfrm>
+            <a:custGeom>
+              <a:avLst/>
+              <a:pathLst>
+                <a:path w="6604610" h="3012323">
+                  <a:moveTo>
+                    <a:pt x="0" y="0"/>
+                  </a:moveTo>
+                  <a:lnTo>
+                    <a:pt x="15338" y="26430"/>
+                  </a:lnTo>
+                  <a:lnTo>
+                    <a:pt x="86960" y="145599"/>
+                  </a:lnTo>
+                  <a:lnTo>
+                    <a:pt x="158583" y="260659"/>
+                  </a:lnTo>
+                  <a:lnTo>
+                    <a:pt x="230205" y="371754"/>
+                  </a:lnTo>
+                  <a:lnTo>
+                    <a:pt x="301828" y="479019"/>
+                  </a:lnTo>
+                  <a:lnTo>
+                    <a:pt x="373450" y="582588"/>
+                  </a:lnTo>
+                  <a:lnTo>
+                    <a:pt x="445073" y="682586"/>
+                  </a:lnTo>
+                  <a:lnTo>
+                    <a:pt x="516695" y="779137"/>
+                  </a:lnTo>
+                  <a:lnTo>
+                    <a:pt x="588318" y="872361"/>
+                  </a:lnTo>
+                  <a:lnTo>
+                    <a:pt x="659940" y="962371"/>
+                  </a:lnTo>
+                  <a:lnTo>
+                    <a:pt x="731563" y="1049279"/>
+                  </a:lnTo>
+                  <a:lnTo>
+                    <a:pt x="803185" y="1133191"/>
+                  </a:lnTo>
+                  <a:lnTo>
+                    <a:pt x="874808" y="1214211"/>
+                  </a:lnTo>
+                  <a:lnTo>
+                    <a:pt x="946430" y="1292438"/>
+                  </a:lnTo>
+                  <a:lnTo>
+                    <a:pt x="1018053" y="1367969"/>
+                  </a:lnTo>
+                  <a:lnTo>
+                    <a:pt x="1089675" y="1440897"/>
+                  </a:lnTo>
+                  <a:lnTo>
+                    <a:pt x="1161298" y="1511311"/>
+                  </a:lnTo>
+                  <a:lnTo>
+                    <a:pt x="1232920" y="1579297"/>
+                  </a:lnTo>
+                  <a:lnTo>
+                    <a:pt x="1304543" y="1644941"/>
+                  </a:lnTo>
+                  <a:lnTo>
+                    <a:pt x="1376166" y="1708321"/>
+                  </a:lnTo>
+                  <a:lnTo>
+                    <a:pt x="1447788" y="1769517"/>
+                  </a:lnTo>
+                  <a:lnTo>
+                    <a:pt x="1519411" y="1828604"/>
+                  </a:lnTo>
+                  <a:lnTo>
+                    <a:pt x="1591033" y="1885654"/>
+                  </a:lnTo>
+                  <a:lnTo>
+                    <a:pt x="1662656" y="1940738"/>
+                  </a:lnTo>
+                  <a:lnTo>
+                    <a:pt x="1734278" y="1993923"/>
+                  </a:lnTo>
+                  <a:lnTo>
+                    <a:pt x="1805901" y="2045275"/>
+                  </a:lnTo>
+                  <a:lnTo>
+                    <a:pt x="1877523" y="2094857"/>
+                  </a:lnTo>
+                  <a:lnTo>
+                    <a:pt x="1949146" y="2142729"/>
+                  </a:lnTo>
+                  <a:lnTo>
+                    <a:pt x="2020768" y="2188952"/>
+                  </a:lnTo>
+                  <a:lnTo>
+                    <a:pt x="2092391" y="2233582"/>
+                  </a:lnTo>
+                  <a:lnTo>
+                    <a:pt x="2164013" y="2276673"/>
+                  </a:lnTo>
+                  <a:lnTo>
+                    <a:pt x="2235636" y="2318279"/>
+                  </a:lnTo>
+                  <a:lnTo>
+                    <a:pt x="2307258" y="2358451"/>
+                  </a:lnTo>
+                  <a:lnTo>
+                    <a:pt x="2378881" y="2397238"/>
+                  </a:lnTo>
+                  <a:lnTo>
+                    <a:pt x="2450503" y="2434688"/>
+                  </a:lnTo>
+                  <a:lnTo>
+                    <a:pt x="2522126" y="2470847"/>
+                  </a:lnTo>
+                  <a:lnTo>
+                    <a:pt x="2593748" y="2505760"/>
+                  </a:lnTo>
+                  <a:lnTo>
+                    <a:pt x="2665371" y="2539470"/>
+                  </a:lnTo>
+                  <a:lnTo>
+                    <a:pt x="2736994" y="2572018"/>
+                  </a:lnTo>
+                  <a:lnTo>
+                    <a:pt x="2808616" y="2603444"/>
+                  </a:lnTo>
+                  <a:lnTo>
+                    <a:pt x="2880239" y="2633786"/>
+                  </a:lnTo>
+                  <a:lnTo>
+                    <a:pt x="2951861" y="2657056"/>
+                  </a:lnTo>
+                  <a:lnTo>
+                    <a:pt x="3023484" y="2666111"/>
+                  </a:lnTo>
+                  <a:lnTo>
+                    <a:pt x="3095106" y="2675066"/>
+                  </a:lnTo>
+                  <a:lnTo>
+                    <a:pt x="3166729" y="2683923"/>
+                  </a:lnTo>
+                  <a:lnTo>
+                    <a:pt x="3238351" y="2692684"/>
+                  </a:lnTo>
+                  <a:lnTo>
+                    <a:pt x="3309974" y="2701348"/>
+                  </a:lnTo>
+                  <a:lnTo>
+                    <a:pt x="3381596" y="2709917"/>
+                  </a:lnTo>
+                  <a:lnTo>
+                    <a:pt x="3453219" y="2718393"/>
+                  </a:lnTo>
+                  <a:lnTo>
+                    <a:pt x="3524841" y="2726776"/>
+                  </a:lnTo>
+                  <a:lnTo>
+                    <a:pt x="3596464" y="2735067"/>
+                  </a:lnTo>
+                  <a:lnTo>
+                    <a:pt x="3668086" y="2743267"/>
+                  </a:lnTo>
+                  <a:lnTo>
+                    <a:pt x="3739709" y="2751377"/>
+                  </a:lnTo>
+                  <a:lnTo>
+                    <a:pt x="3811331" y="2759399"/>
+                  </a:lnTo>
+                  <a:lnTo>
+                    <a:pt x="3882954" y="2767332"/>
+                  </a:lnTo>
+                  <a:lnTo>
+                    <a:pt x="3954576" y="2775179"/>
+                  </a:lnTo>
+                  <a:lnTo>
+                    <a:pt x="4026199" y="2782940"/>
+                  </a:lnTo>
+                  <a:lnTo>
+                    <a:pt x="4097822" y="2790616"/>
+                  </a:lnTo>
+                  <a:lnTo>
+                    <a:pt x="4169444" y="2798207"/>
+                  </a:lnTo>
+                  <a:lnTo>
+                    <a:pt x="4241067" y="2805716"/>
+                  </a:lnTo>
+                  <a:lnTo>
+                    <a:pt x="4312689" y="2813142"/>
+                  </a:lnTo>
+                  <a:lnTo>
+                    <a:pt x="4384312" y="2820487"/>
+                  </a:lnTo>
+                  <a:lnTo>
+                    <a:pt x="4455934" y="2827752"/>
+                  </a:lnTo>
+                  <a:lnTo>
+                    <a:pt x="4527557" y="2834937"/>
+                  </a:lnTo>
+                  <a:lnTo>
+                    <a:pt x="4599179" y="2842043"/>
+                  </a:lnTo>
+                  <a:lnTo>
+                    <a:pt x="4670802" y="2849071"/>
+                  </a:lnTo>
+                  <a:lnTo>
+                    <a:pt x="4742424" y="2856023"/>
+                  </a:lnTo>
+                  <a:lnTo>
+                    <a:pt x="4814047" y="2862898"/>
+                  </a:lnTo>
+                  <a:lnTo>
+                    <a:pt x="4885669" y="2869698"/>
+                  </a:lnTo>
+                  <a:lnTo>
+                    <a:pt x="4957292" y="2876424"/>
+                  </a:lnTo>
+                  <a:lnTo>
+                    <a:pt x="5028914" y="2883076"/>
+                  </a:lnTo>
+                  <a:lnTo>
+                    <a:pt x="5100537" y="2889655"/>
+                  </a:lnTo>
+                  <a:lnTo>
+                    <a:pt x="5172159" y="2896162"/>
+                  </a:lnTo>
+                  <a:lnTo>
+                    <a:pt x="5243782" y="2902597"/>
+                  </a:lnTo>
+                  <a:lnTo>
+                    <a:pt x="5315404" y="2908963"/>
+                  </a:lnTo>
+                  <a:lnTo>
+                    <a:pt x="5387027" y="2915258"/>
+                  </a:lnTo>
+                  <a:lnTo>
+                    <a:pt x="5458650" y="2921485"/>
+                  </a:lnTo>
+                  <a:lnTo>
+                    <a:pt x="5530272" y="2927643"/>
+                  </a:lnTo>
+                  <a:lnTo>
+                    <a:pt x="5601895" y="2933734"/>
+                  </a:lnTo>
+                  <a:lnTo>
+                    <a:pt x="5673517" y="2939758"/>
+                  </a:lnTo>
+                  <a:lnTo>
+                    <a:pt x="5745140" y="2945716"/>
+                  </a:lnTo>
+                  <a:lnTo>
+                    <a:pt x="5816762" y="2951609"/>
+                  </a:lnTo>
+                  <a:lnTo>
+                    <a:pt x="5888385" y="2957437"/>
+                  </a:lnTo>
+                  <a:lnTo>
+                    <a:pt x="5960007" y="2963202"/>
+                  </a:lnTo>
+                  <a:lnTo>
+                    <a:pt x="6031630" y="2968903"/>
+                  </a:lnTo>
+                  <a:lnTo>
+                    <a:pt x="6103252" y="2974542"/>
+                  </a:lnTo>
+                  <a:lnTo>
+                    <a:pt x="6174875" y="2980120"/>
+                  </a:lnTo>
+                  <a:lnTo>
+                    <a:pt x="6246497" y="2985636"/>
+                  </a:lnTo>
+                  <a:lnTo>
+                    <a:pt x="6318120" y="2991091"/>
+                  </a:lnTo>
+                  <a:lnTo>
+                    <a:pt x="6389742" y="2996487"/>
+                  </a:lnTo>
+                  <a:lnTo>
+                    <a:pt x="6461365" y="3001824"/>
+                  </a:lnTo>
+                  <a:lnTo>
+                    <a:pt x="6532987" y="3007103"/>
+                  </a:lnTo>
+                  <a:lnTo>
+                    <a:pt x="6604610" y="3012323"/>
+                  </a:lnTo>
+                </a:path>
+              </a:pathLst>
+            </a:custGeom>
+          </p:spPr>
+          <p:txBody>
+            <a:bodyPr/>
+            <a:lstStyle/>
+            <a:p/>
+          </p:txBody>
+        </p:sp>
+        <p:sp>
+          <p:nvSpPr>
             <p:cNvPr id="22" name="pl22"/>
             <p:cNvSpPr/>
             <p:nvPr/>
           </p:nvSpPr>
           <p:spPr>
             <a:xfrm>
-              <a:off x="1251629" y="2073503"/>
-              <a:ext cx="6801718" cy="3012323"/>
+              <a:off x="1172049" y="4154675"/>
+              <a:ext cx="7090630" cy="1265405"/>
             </a:xfrm>
             <a:custGeom>
               <a:avLst/>
               <a:pathLst>
-                <a:path w="6801718" h="3012323">
+                <a:path w="7090630" h="1265405">
                   <a:moveTo>
+                    <a:pt x="7090630" y="1265405"/>
+                  </a:moveTo>
+                  <a:lnTo>
+                    <a:pt x="7019007" y="1260508"/>
+                  </a:lnTo>
+                  <a:lnTo>
+                    <a:pt x="6947385" y="1255437"/>
+                  </a:lnTo>
+                  <a:lnTo>
+                    <a:pt x="6875762" y="1250184"/>
+                  </a:lnTo>
+                  <a:lnTo>
+                    <a:pt x="6804139" y="1244744"/>
+                  </a:lnTo>
+                  <a:lnTo>
+                    <a:pt x="6732517" y="1239109"/>
+                  </a:lnTo>
+                  <a:lnTo>
+                    <a:pt x="6660894" y="1233274"/>
+                  </a:lnTo>
+                  <a:lnTo>
+                    <a:pt x="6589272" y="1227230"/>
+                  </a:lnTo>
+                  <a:lnTo>
+                    <a:pt x="6517649" y="1220970"/>
+                  </a:lnTo>
+                  <a:lnTo>
+                    <a:pt x="6446027" y="1214487"/>
+                  </a:lnTo>
+                  <a:lnTo>
+                    <a:pt x="6374404" y="1207773"/>
+                  </a:lnTo>
+                  <a:lnTo>
+                    <a:pt x="6302782" y="1200819"/>
+                  </a:lnTo>
+                  <a:lnTo>
+                    <a:pt x="6231159" y="1193616"/>
+                  </a:lnTo>
+                  <a:lnTo>
+                    <a:pt x="6159537" y="1186157"/>
+                  </a:lnTo>
+                  <a:lnTo>
+                    <a:pt x="6087914" y="1178431"/>
+                  </a:lnTo>
+                  <a:lnTo>
+                    <a:pt x="6016292" y="1170429"/>
+                  </a:lnTo>
+                  <a:lnTo>
+                    <a:pt x="5944669" y="1162142"/>
+                  </a:lnTo>
+                  <a:lnTo>
+                    <a:pt x="5873047" y="1153559"/>
+                  </a:lnTo>
+                  <a:lnTo>
+                    <a:pt x="5801424" y="1144669"/>
+                  </a:lnTo>
+                  <a:lnTo>
+                    <a:pt x="5729802" y="1135462"/>
+                  </a:lnTo>
+                  <a:lnTo>
+                    <a:pt x="5658179" y="1125927"/>
+                  </a:lnTo>
+                  <a:lnTo>
+                    <a:pt x="5586557" y="1116051"/>
+                  </a:lnTo>
+                  <a:lnTo>
+                    <a:pt x="5514934" y="1105822"/>
+                  </a:lnTo>
+                  <a:lnTo>
+                    <a:pt x="5443311" y="1095228"/>
+                  </a:lnTo>
+                  <a:lnTo>
+                    <a:pt x="5371689" y="1084257"/>
+                  </a:lnTo>
+                  <a:lnTo>
+                    <a:pt x="5300066" y="1072893"/>
+                  </a:lnTo>
+                  <a:lnTo>
+                    <a:pt x="5228444" y="1061124"/>
+                  </a:lnTo>
+                  <a:lnTo>
+                    <a:pt x="5156821" y="1048934"/>
+                  </a:lnTo>
+                  <a:lnTo>
+                    <a:pt x="5085199" y="1036310"/>
+                  </a:lnTo>
+                  <a:lnTo>
+                    <a:pt x="5013576" y="1023235"/>
+                  </a:lnTo>
+                  <a:lnTo>
+                    <a:pt x="4941954" y="1009693"/>
+                  </a:lnTo>
+                  <a:lnTo>
+                    <a:pt x="4870331" y="995667"/>
+                  </a:lnTo>
+                  <a:lnTo>
+                    <a:pt x="4798709" y="981141"/>
+                  </a:lnTo>
+                  <a:lnTo>
+                    <a:pt x="4727086" y="966096"/>
+                  </a:lnTo>
+                  <a:lnTo>
+                    <a:pt x="4655464" y="950515"/>
+                  </a:lnTo>
+                  <a:lnTo>
+                    <a:pt x="4583841" y="934377"/>
+                  </a:lnTo>
+                  <a:lnTo>
+                    <a:pt x="4512219" y="917662"/>
+                  </a:lnTo>
+                  <a:lnTo>
+                    <a:pt x="4440596" y="900352"/>
+                  </a:lnTo>
+                  <a:lnTo>
+                    <a:pt x="4368974" y="882423"/>
+                  </a:lnTo>
+                  <a:lnTo>
+                    <a:pt x="4297351" y="863854"/>
+                  </a:lnTo>
+                  <a:lnTo>
+                    <a:pt x="4225729" y="844622"/>
+                  </a:lnTo>
+                  <a:lnTo>
+                    <a:pt x="4154106" y="824704"/>
+                  </a:lnTo>
+                  <a:lnTo>
+                    <a:pt x="4082483" y="804075"/>
+                  </a:lnTo>
+                  <a:lnTo>
+                    <a:pt x="4010861" y="782709"/>
+                  </a:lnTo>
+                  <a:lnTo>
+                    <a:pt x="3939238" y="760581"/>
+                  </a:lnTo>
+                  <a:lnTo>
+                    <a:pt x="3867616" y="737662"/>
+                  </a:lnTo>
+                  <a:lnTo>
+                    <a:pt x="3795993" y="713926"/>
+                  </a:lnTo>
+                  <a:lnTo>
+                    <a:pt x="3724371" y="689342"/>
+                  </a:lnTo>
+                  <a:lnTo>
+                    <a:pt x="3652748" y="663880"/>
+                  </a:lnTo>
+                  <a:lnTo>
+                    <a:pt x="3581126" y="637509"/>
+                  </a:lnTo>
+                  <a:lnTo>
+                    <a:pt x="3509503" y="610197"/>
+                  </a:lnTo>
+                  <a:lnTo>
+                    <a:pt x="3437881" y="581910"/>
+                  </a:lnTo>
+                  <a:lnTo>
+                    <a:pt x="3366258" y="566729"/>
+                  </a:lnTo>
+                  <a:lnTo>
+                    <a:pt x="3294636" y="557472"/>
+                  </a:lnTo>
+                  <a:lnTo>
+                    <a:pt x="3223013" y="548114"/>
+                  </a:lnTo>
+                  <a:lnTo>
+                    <a:pt x="3151391" y="538651"/>
+                  </a:lnTo>
+                  <a:lnTo>
+                    <a:pt x="3079768" y="529084"/>
+                  </a:lnTo>
+                  <a:lnTo>
+                    <a:pt x="3008146" y="519411"/>
+                  </a:lnTo>
+                  <a:lnTo>
+                    <a:pt x="2936523" y="509631"/>
+                  </a:lnTo>
+                  <a:lnTo>
+                    <a:pt x="2864901" y="499742"/>
+                  </a:lnTo>
+                  <a:lnTo>
+                    <a:pt x="2793278" y="489744"/>
+                  </a:lnTo>
+                  <a:lnTo>
+                    <a:pt x="2721655" y="479636"/>
+                  </a:lnTo>
+                  <a:lnTo>
+                    <a:pt x="2650033" y="469415"/>
+                  </a:lnTo>
+                  <a:lnTo>
+                    <a:pt x="2578410" y="459081"/>
+                  </a:lnTo>
+                  <a:lnTo>
+                    <a:pt x="2506788" y="448633"/>
+                  </a:lnTo>
+                  <a:lnTo>
+                    <a:pt x="2435165" y="438069"/>
+                  </a:lnTo>
+                  <a:lnTo>
+                    <a:pt x="2363543" y="427388"/>
+                  </a:lnTo>
+                  <a:lnTo>
+                    <a:pt x="2291920" y="416588"/>
+                  </a:lnTo>
+                  <a:lnTo>
+                    <a:pt x="2220298" y="405669"/>
+                  </a:lnTo>
+                  <a:lnTo>
+                    <a:pt x="2148675" y="394630"/>
+                  </a:lnTo>
+                  <a:lnTo>
+                    <a:pt x="2077053" y="383468"/>
+                  </a:lnTo>
+                  <a:lnTo>
+                    <a:pt x="2005430" y="372182"/>
+                  </a:lnTo>
+                  <a:lnTo>
+                    <a:pt x="1933808" y="360771"/>
+                  </a:lnTo>
+                  <a:lnTo>
+                    <a:pt x="1862185" y="349234"/>
+                  </a:lnTo>
+                  <a:lnTo>
+                    <a:pt x="1790563" y="337569"/>
+                  </a:lnTo>
+                  <a:lnTo>
+                    <a:pt x="1718940" y="325776"/>
+                  </a:lnTo>
+                  <a:lnTo>
+                    <a:pt x="1647318" y="313851"/>
+                  </a:lnTo>
+                  <a:lnTo>
+                    <a:pt x="1575695" y="301794"/>
+                  </a:lnTo>
+                  <a:lnTo>
+                    <a:pt x="1504073" y="289604"/>
+                  </a:lnTo>
+                  <a:lnTo>
+                    <a:pt x="1432450" y="277279"/>
+                  </a:lnTo>
+                  <a:lnTo>
+                    <a:pt x="1360827" y="264817"/>
+                  </a:lnTo>
+                  <a:lnTo>
+                    <a:pt x="1289205" y="252218"/>
+                  </a:lnTo>
+                  <a:lnTo>
+                    <a:pt x="1217582" y="239479"/>
+                  </a:lnTo>
+                  <a:lnTo>
+                    <a:pt x="1145960" y="226599"/>
+                  </a:lnTo>
+                  <a:lnTo>
+                    <a:pt x="1074337" y="213576"/>
+                  </a:lnTo>
+                  <a:lnTo>
+                    <a:pt x="1002715" y="200409"/>
+                  </a:lnTo>
+                  <a:lnTo>
+                    <a:pt x="931092" y="187096"/>
+                  </a:lnTo>
+                  <a:lnTo>
+                    <a:pt x="859470" y="173635"/>
+                  </a:lnTo>
+                  <a:lnTo>
+                    <a:pt x="787847" y="160026"/>
+                  </a:lnTo>
+                  <a:lnTo>
+                    <a:pt x="716225" y="146266"/>
+                  </a:lnTo>
+                  <a:lnTo>
+                    <a:pt x="644602" y="132353"/>
+                  </a:lnTo>
+                  <a:lnTo>
+                    <a:pt x="572980" y="118287"/>
+                  </a:lnTo>
+                  <a:lnTo>
+                    <a:pt x="501357" y="104065"/>
+                  </a:lnTo>
+                  <a:lnTo>
+                    <a:pt x="429735" y="89685"/>
+                  </a:lnTo>
+                  <a:lnTo>
+                    <a:pt x="358112" y="75146"/>
+                  </a:lnTo>
+                  <a:lnTo>
+                    <a:pt x="286490" y="60446"/>
+                  </a:lnTo>
+                  <a:lnTo>
+                    <a:pt x="214867" y="45583"/>
+                  </a:lnTo>
+                  <a:lnTo>
+                    <a:pt x="143245" y="30555"/>
+                  </a:lnTo>
+                  <a:lnTo>
+                    <a:pt x="71622" y="15362"/>
+                  </a:lnTo>
+                  <a:lnTo>
                     <a:pt x="0" y="0"/>
-                  </a:moveTo>
-                  <a:lnTo>
-                    <a:pt x="15795" y="26430"/>
-                  </a:lnTo>
-                  <a:lnTo>
-                    <a:pt x="89555" y="145599"/>
-                  </a:lnTo>
-                  <a:lnTo>
-                    <a:pt x="163315" y="260659"/>
-                  </a:lnTo>
-                  <a:lnTo>
-                    <a:pt x="237075" y="371754"/>
-                  </a:lnTo>
-                  <a:lnTo>
-                    <a:pt x="310835" y="479019"/>
-                  </a:lnTo>
-                  <a:lnTo>
-                    <a:pt x="384595" y="582588"/>
-                  </a:lnTo>
-                  <a:lnTo>
-                    <a:pt x="458355" y="682586"/>
-                  </a:lnTo>
-                  <a:lnTo>
-                    <a:pt x="532115" y="779137"/>
-                  </a:lnTo>
-                  <a:lnTo>
-                    <a:pt x="605875" y="872361"/>
-                  </a:lnTo>
-                  <a:lnTo>
-                    <a:pt x="679635" y="962371"/>
-                  </a:lnTo>
-                  <a:lnTo>
-                    <a:pt x="753396" y="1049279"/>
-                  </a:lnTo>
-                  <a:lnTo>
-                    <a:pt x="827156" y="1133191"/>
-                  </a:lnTo>
-                  <a:lnTo>
-                    <a:pt x="900916" y="1214211"/>
-                  </a:lnTo>
-                  <a:lnTo>
-                    <a:pt x="974676" y="1292438"/>
-                  </a:lnTo>
-                  <a:lnTo>
-                    <a:pt x="1048436" y="1367969"/>
-                  </a:lnTo>
-                  <a:lnTo>
-                    <a:pt x="1122196" y="1440897"/>
-                  </a:lnTo>
-                  <a:lnTo>
-                    <a:pt x="1195956" y="1511311"/>
-                  </a:lnTo>
-                  <a:lnTo>
-                    <a:pt x="1269716" y="1579297"/>
-                  </a:lnTo>
-                  <a:lnTo>
-                    <a:pt x="1343476" y="1644941"/>
-                  </a:lnTo>
-                  <a:lnTo>
-                    <a:pt x="1417236" y="1708321"/>
-                  </a:lnTo>
-                  <a:lnTo>
-                    <a:pt x="1490996" y="1769517"/>
-                  </a:lnTo>
-                  <a:lnTo>
-                    <a:pt x="1564756" y="1828604"/>
-                  </a:lnTo>
-                  <a:lnTo>
-                    <a:pt x="1638516" y="1885654"/>
-                  </a:lnTo>
-                  <a:lnTo>
-                    <a:pt x="1712276" y="1940738"/>
-                  </a:lnTo>
-                  <a:lnTo>
-                    <a:pt x="1786036" y="1993923"/>
-                  </a:lnTo>
-                  <a:lnTo>
-                    <a:pt x="1859796" y="2045275"/>
-                  </a:lnTo>
-                  <a:lnTo>
-                    <a:pt x="1933556" y="2094857"/>
-                  </a:lnTo>
-                  <a:lnTo>
-                    <a:pt x="2007316" y="2142729"/>
-                  </a:lnTo>
-                  <a:lnTo>
-                    <a:pt x="2081076" y="2188952"/>
-                  </a:lnTo>
-                  <a:lnTo>
-                    <a:pt x="2154836" y="2233582"/>
-                  </a:lnTo>
-                  <a:lnTo>
-                    <a:pt x="2228596" y="2276673"/>
-                  </a:lnTo>
-                  <a:lnTo>
-                    <a:pt x="2302356" y="2318279"/>
-                  </a:lnTo>
-                  <a:lnTo>
-                    <a:pt x="2376116" y="2358451"/>
-                  </a:lnTo>
-                  <a:lnTo>
-                    <a:pt x="2449876" y="2397238"/>
-                  </a:lnTo>
-                  <a:lnTo>
-                    <a:pt x="2523636" y="2434688"/>
-                  </a:lnTo>
-                  <a:lnTo>
-                    <a:pt x="2597396" y="2470847"/>
-                  </a:lnTo>
-                  <a:lnTo>
-                    <a:pt x="2671156" y="2505760"/>
-                  </a:lnTo>
-                  <a:lnTo>
-                    <a:pt x="2744916" y="2539470"/>
-                  </a:lnTo>
-                  <a:lnTo>
-                    <a:pt x="2818676" y="2572018"/>
-                  </a:lnTo>
-                  <a:lnTo>
-                    <a:pt x="2892436" y="2603444"/>
-                  </a:lnTo>
-                  <a:lnTo>
-                    <a:pt x="2966196" y="2633786"/>
-                  </a:lnTo>
-                  <a:lnTo>
-                    <a:pt x="3039956" y="2657056"/>
-                  </a:lnTo>
-                  <a:lnTo>
-                    <a:pt x="3113716" y="2666111"/>
-                  </a:lnTo>
-                  <a:lnTo>
-                    <a:pt x="3187476" y="2675066"/>
-                  </a:lnTo>
-                  <a:lnTo>
-                    <a:pt x="3261236" y="2683923"/>
-                  </a:lnTo>
-                  <a:lnTo>
-                    <a:pt x="3334996" y="2692684"/>
-                  </a:lnTo>
-                  <a:lnTo>
-                    <a:pt x="3408756" y="2701348"/>
-                  </a:lnTo>
-                  <a:lnTo>
-                    <a:pt x="3482516" y="2709917"/>
-                  </a:lnTo>
-                  <a:lnTo>
-                    <a:pt x="3556276" y="2718393"/>
-                  </a:lnTo>
-                  <a:lnTo>
-                    <a:pt x="3630037" y="2726776"/>
-                  </a:lnTo>
-                  <a:lnTo>
-                    <a:pt x="3703797" y="2735067"/>
-                  </a:lnTo>
-                  <a:lnTo>
-                    <a:pt x="3777557" y="2743267"/>
-                  </a:lnTo>
-                  <a:lnTo>
-                    <a:pt x="3851317" y="2751377"/>
-                  </a:lnTo>
-                  <a:lnTo>
-                    <a:pt x="3925077" y="2759399"/>
-                  </a:lnTo>
-                  <a:lnTo>
-                    <a:pt x="3998837" y="2767332"/>
-                  </a:lnTo>
-                  <a:lnTo>
-                    <a:pt x="4072597" y="2775179"/>
-                  </a:lnTo>
-                  <a:lnTo>
-                    <a:pt x="4146357" y="2782940"/>
-                  </a:lnTo>
-                  <a:lnTo>
-                    <a:pt x="4220117" y="2790616"/>
-                  </a:lnTo>
-                  <a:lnTo>
-                    <a:pt x="4293877" y="2798207"/>
-                  </a:lnTo>
-                  <a:lnTo>
-                    <a:pt x="4367637" y="2805716"/>
-                  </a:lnTo>
-                  <a:lnTo>
-                    <a:pt x="4441397" y="2813142"/>
-                  </a:lnTo>
-                  <a:lnTo>
-                    <a:pt x="4515157" y="2820487"/>
-                  </a:lnTo>
-                  <a:lnTo>
-                    <a:pt x="4588917" y="2827752"/>
-                  </a:lnTo>
-                  <a:lnTo>
-                    <a:pt x="4662677" y="2834937"/>
-                  </a:lnTo>
-                  <a:lnTo>
-                    <a:pt x="4736437" y="2842043"/>
-                  </a:lnTo>
-                  <a:lnTo>
-                    <a:pt x="4810197" y="2849071"/>
-                  </a:lnTo>
-                  <a:lnTo>
-                    <a:pt x="4883957" y="2856023"/>
-                  </a:lnTo>
-                  <a:lnTo>
-                    <a:pt x="4957717" y="2862898"/>
-                  </a:lnTo>
-                  <a:lnTo>
-                    <a:pt x="5031477" y="2869698"/>
-                  </a:lnTo>
-                  <a:lnTo>
-                    <a:pt x="5105237" y="2876424"/>
-                  </a:lnTo>
-                  <a:lnTo>
-                    <a:pt x="5178997" y="2883076"/>
-                  </a:lnTo>
-                  <a:lnTo>
-                    <a:pt x="5252757" y="2889655"/>
-                  </a:lnTo>
-                  <a:lnTo>
-                    <a:pt x="5326517" y="2896162"/>
-                  </a:lnTo>
-                  <a:lnTo>
-                    <a:pt x="5400277" y="2902597"/>
-                  </a:lnTo>
-                  <a:lnTo>
-                    <a:pt x="5474037" y="2908963"/>
-                  </a:lnTo>
-                  <a:lnTo>
-                    <a:pt x="5547797" y="2915258"/>
-                  </a:lnTo>
-                  <a:lnTo>
-                    <a:pt x="5621557" y="2921485"/>
-                  </a:lnTo>
-                  <a:lnTo>
-                    <a:pt x="5695317" y="2927643"/>
-                  </a:lnTo>
-                  <a:lnTo>
-                    <a:pt x="5769077" y="2933734"/>
-                  </a:lnTo>
-                  <a:lnTo>
-                    <a:pt x="5842837" y="2939758"/>
-                  </a:lnTo>
-                  <a:lnTo>
-                    <a:pt x="5916597" y="2945716"/>
-                  </a:lnTo>
-                  <a:lnTo>
-                    <a:pt x="5990357" y="2951609"/>
-                  </a:lnTo>
-                  <a:lnTo>
-                    <a:pt x="6064117" y="2957437"/>
-                  </a:lnTo>
-                  <a:lnTo>
-                    <a:pt x="6137877" y="2963202"/>
-                  </a:lnTo>
-                  <a:lnTo>
-                    <a:pt x="6211637" y="2968903"/>
-                  </a:lnTo>
-                  <a:lnTo>
-                    <a:pt x="6285397" y="2974542"/>
-                  </a:lnTo>
-                  <a:lnTo>
-                    <a:pt x="6359157" y="2980120"/>
-                  </a:lnTo>
-                  <a:lnTo>
-                    <a:pt x="6432917" y="2985636"/>
-                  </a:lnTo>
-                  <a:lnTo>
-                    <a:pt x="6506677" y="2991091"/>
-                  </a:lnTo>
-                  <a:lnTo>
-                    <a:pt x="6580438" y="2996487"/>
-                  </a:lnTo>
-                  <a:lnTo>
-                    <a:pt x="6654198" y="3001824"/>
-                  </a:lnTo>
-                  <a:lnTo>
-                    <a:pt x="6727958" y="3007103"/>
-                  </a:lnTo>
-                  <a:lnTo>
-                    <a:pt x="6801718" y="3012323"/>
                   </a:lnTo>
                 </a:path>
               </a:pathLst>
@@ -3922,637 +4204,312 @@
           </p:nvSpPr>
           <p:spPr>
             <a:xfrm>
-              <a:off x="817517" y="4168507"/>
-              <a:ext cx="7235830" cy="1251573"/>
+              <a:off x="1172049" y="3067534"/>
+              <a:ext cx="7090630" cy="2235423"/>
             </a:xfrm>
             <a:custGeom>
               <a:avLst/>
               <a:pathLst>
-                <a:path w="7235830" h="1251573">
-                  <a:moveTo>
-                    <a:pt x="7235830" y="1251573"/>
-                  </a:moveTo>
-                  <a:lnTo>
-                    <a:pt x="7162070" y="1246676"/>
-                  </a:lnTo>
-                  <a:lnTo>
-                    <a:pt x="7088310" y="1241605"/>
-                  </a:lnTo>
-                  <a:lnTo>
-                    <a:pt x="7014550" y="1236352"/>
-                  </a:lnTo>
-                  <a:lnTo>
-                    <a:pt x="6940789" y="1230912"/>
-                  </a:lnTo>
-                  <a:lnTo>
-                    <a:pt x="6867029" y="1225278"/>
-                  </a:lnTo>
-                  <a:lnTo>
-                    <a:pt x="6793269" y="1219442"/>
-                  </a:lnTo>
-                  <a:lnTo>
-                    <a:pt x="6719509" y="1213398"/>
-                  </a:lnTo>
-                  <a:lnTo>
-                    <a:pt x="6645749" y="1207139"/>
-                  </a:lnTo>
-                  <a:lnTo>
-                    <a:pt x="6571989" y="1200656"/>
-                  </a:lnTo>
-                  <a:lnTo>
-                    <a:pt x="6498229" y="1193941"/>
-                  </a:lnTo>
-                  <a:lnTo>
-                    <a:pt x="6424469" y="1186987"/>
-                  </a:lnTo>
-                  <a:lnTo>
-                    <a:pt x="6350709" y="1179785"/>
-                  </a:lnTo>
-                  <a:lnTo>
-                    <a:pt x="6276949" y="1172325"/>
-                  </a:lnTo>
-                  <a:lnTo>
-                    <a:pt x="6203189" y="1164599"/>
-                  </a:lnTo>
-                  <a:lnTo>
-                    <a:pt x="6129429" y="1156597"/>
-                  </a:lnTo>
-                  <a:lnTo>
-                    <a:pt x="6055669" y="1148310"/>
-                  </a:lnTo>
-                  <a:lnTo>
-                    <a:pt x="5981909" y="1139727"/>
-                  </a:lnTo>
-                  <a:lnTo>
-                    <a:pt x="5908149" y="1130837"/>
-                  </a:lnTo>
-                  <a:lnTo>
-                    <a:pt x="5834389" y="1121631"/>
-                  </a:lnTo>
-                  <a:lnTo>
-                    <a:pt x="5760629" y="1112095"/>
-                  </a:lnTo>
-                  <a:lnTo>
-                    <a:pt x="5686869" y="1102219"/>
-                  </a:lnTo>
-                  <a:lnTo>
-                    <a:pt x="5613109" y="1091990"/>
-                  </a:lnTo>
-                  <a:lnTo>
-                    <a:pt x="5539349" y="1081397"/>
-                  </a:lnTo>
-                  <a:lnTo>
-                    <a:pt x="5465589" y="1070425"/>
-                  </a:lnTo>
-                  <a:lnTo>
-                    <a:pt x="5391829" y="1059061"/>
-                  </a:lnTo>
-                  <a:lnTo>
-                    <a:pt x="5318069" y="1047292"/>
-                  </a:lnTo>
-                  <a:lnTo>
-                    <a:pt x="5244309" y="1035103"/>
-                  </a:lnTo>
-                  <a:lnTo>
-                    <a:pt x="5170549" y="1022478"/>
-                  </a:lnTo>
-                  <a:lnTo>
-                    <a:pt x="5096789" y="1009403"/>
-                  </a:lnTo>
-                  <a:lnTo>
-                    <a:pt x="5023029" y="995861"/>
-                  </a:lnTo>
-                  <a:lnTo>
-                    <a:pt x="4949269" y="981835"/>
-                  </a:lnTo>
-                  <a:lnTo>
-                    <a:pt x="4875509" y="967309"/>
-                  </a:lnTo>
-                  <a:lnTo>
-                    <a:pt x="4801749" y="952265"/>
-                  </a:lnTo>
-                  <a:lnTo>
-                    <a:pt x="4727989" y="936683"/>
-                  </a:lnTo>
-                  <a:lnTo>
-                    <a:pt x="4654229" y="920545"/>
-                  </a:lnTo>
-                  <a:lnTo>
-                    <a:pt x="4580469" y="903831"/>
-                  </a:lnTo>
-                  <a:lnTo>
-                    <a:pt x="4506709" y="886520"/>
-                  </a:lnTo>
-                  <a:lnTo>
-                    <a:pt x="4432949" y="868591"/>
-                  </a:lnTo>
-                  <a:lnTo>
-                    <a:pt x="4359189" y="850022"/>
-                  </a:lnTo>
-                  <a:lnTo>
-                    <a:pt x="4285429" y="830791"/>
-                  </a:lnTo>
-                  <a:lnTo>
-                    <a:pt x="4211669" y="810872"/>
-                  </a:lnTo>
-                  <a:lnTo>
-                    <a:pt x="4137909" y="790243"/>
-                  </a:lnTo>
-                  <a:lnTo>
-                    <a:pt x="4064149" y="768877"/>
-                  </a:lnTo>
-                  <a:lnTo>
-                    <a:pt x="3990388" y="746749"/>
-                  </a:lnTo>
-                  <a:lnTo>
-                    <a:pt x="3916628" y="723830"/>
-                  </a:lnTo>
-                  <a:lnTo>
-                    <a:pt x="3842868" y="700094"/>
-                  </a:lnTo>
-                  <a:lnTo>
-                    <a:pt x="3769108" y="675510"/>
-                  </a:lnTo>
-                  <a:lnTo>
-                    <a:pt x="3695348" y="650048"/>
-                  </a:lnTo>
-                  <a:lnTo>
-                    <a:pt x="3621588" y="623678"/>
-                  </a:lnTo>
-                  <a:lnTo>
-                    <a:pt x="3547828" y="596366"/>
-                  </a:lnTo>
-                  <a:lnTo>
-                    <a:pt x="3474068" y="568079"/>
-                  </a:lnTo>
-                  <a:lnTo>
-                    <a:pt x="3400308" y="552897"/>
-                  </a:lnTo>
-                  <a:lnTo>
-                    <a:pt x="3326548" y="543641"/>
-                  </a:lnTo>
-                  <a:lnTo>
-                    <a:pt x="3252788" y="534282"/>
-                  </a:lnTo>
-                  <a:lnTo>
-                    <a:pt x="3179028" y="524820"/>
-                  </a:lnTo>
-                  <a:lnTo>
-                    <a:pt x="3105268" y="515252"/>
-                  </a:lnTo>
-                  <a:lnTo>
-                    <a:pt x="3031508" y="505579"/>
-                  </a:lnTo>
-                  <a:lnTo>
-                    <a:pt x="2957748" y="495799"/>
-                  </a:lnTo>
-                  <a:lnTo>
-                    <a:pt x="2883988" y="485911"/>
-                  </a:lnTo>
-                  <a:lnTo>
-                    <a:pt x="2810228" y="475913"/>
-                  </a:lnTo>
-                  <a:lnTo>
-                    <a:pt x="2736468" y="465804"/>
-                  </a:lnTo>
-                  <a:lnTo>
-                    <a:pt x="2662708" y="455583"/>
-                  </a:lnTo>
-                  <a:lnTo>
-                    <a:pt x="2588948" y="445249"/>
-                  </a:lnTo>
-                  <a:lnTo>
-                    <a:pt x="2515188" y="434801"/>
-                  </a:lnTo>
-                  <a:lnTo>
-                    <a:pt x="2441428" y="424237"/>
-                  </a:lnTo>
-                  <a:lnTo>
-                    <a:pt x="2367668" y="413556"/>
-                  </a:lnTo>
-                  <a:lnTo>
-                    <a:pt x="2293908" y="402757"/>
-                  </a:lnTo>
-                  <a:lnTo>
-                    <a:pt x="2220148" y="391838"/>
-                  </a:lnTo>
-                  <a:lnTo>
-                    <a:pt x="2146388" y="380798"/>
-                  </a:lnTo>
-                  <a:lnTo>
-                    <a:pt x="2072628" y="369636"/>
-                  </a:lnTo>
-                  <a:lnTo>
-                    <a:pt x="1998868" y="358350"/>
-                  </a:lnTo>
-                  <a:lnTo>
-                    <a:pt x="1925108" y="346939"/>
-                  </a:lnTo>
-                  <a:lnTo>
-                    <a:pt x="1851348" y="335402"/>
-                  </a:lnTo>
-                  <a:lnTo>
-                    <a:pt x="1777588" y="323738"/>
-                  </a:lnTo>
-                  <a:lnTo>
-                    <a:pt x="1703828" y="311944"/>
-                  </a:lnTo>
-                  <a:lnTo>
-                    <a:pt x="1630068" y="300019"/>
-                  </a:lnTo>
-                  <a:lnTo>
-                    <a:pt x="1556308" y="287963"/>
-                  </a:lnTo>
-                  <a:lnTo>
-                    <a:pt x="1482548" y="275772"/>
-                  </a:lnTo>
-                  <a:lnTo>
-                    <a:pt x="1408788" y="263447"/>
-                  </a:lnTo>
-                  <a:lnTo>
-                    <a:pt x="1335028" y="250986"/>
-                  </a:lnTo>
-                  <a:lnTo>
-                    <a:pt x="1261268" y="238386"/>
-                  </a:lnTo>
-                  <a:lnTo>
-                    <a:pt x="1187508" y="225647"/>
-                  </a:lnTo>
-                  <a:lnTo>
-                    <a:pt x="1113747" y="212767"/>
-                  </a:lnTo>
-                  <a:lnTo>
-                    <a:pt x="1039987" y="199744"/>
-                  </a:lnTo>
-                  <a:lnTo>
-                    <a:pt x="966227" y="186577"/>
-                  </a:lnTo>
-                  <a:lnTo>
-                    <a:pt x="892467" y="173264"/>
-                  </a:lnTo>
-                  <a:lnTo>
-                    <a:pt x="818707" y="159804"/>
-                  </a:lnTo>
-                  <a:lnTo>
-                    <a:pt x="744947" y="146194"/>
-                  </a:lnTo>
-                  <a:lnTo>
-                    <a:pt x="671187" y="132434"/>
-                  </a:lnTo>
-                  <a:lnTo>
-                    <a:pt x="597427" y="118522"/>
-                  </a:lnTo>
-                  <a:lnTo>
-                    <a:pt x="523667" y="104455"/>
-                  </a:lnTo>
-                  <a:lnTo>
-                    <a:pt x="449907" y="90233"/>
-                  </a:lnTo>
-                  <a:lnTo>
-                    <a:pt x="376147" y="75853"/>
-                  </a:lnTo>
-                  <a:lnTo>
-                    <a:pt x="302387" y="61314"/>
-                  </a:lnTo>
-                  <a:lnTo>
-                    <a:pt x="228627" y="46614"/>
-                  </a:lnTo>
-                  <a:lnTo>
-                    <a:pt x="154867" y="31751"/>
-                  </a:lnTo>
-                  <a:lnTo>
-                    <a:pt x="81107" y="16724"/>
-                  </a:lnTo>
-                  <a:lnTo>
-                    <a:pt x="7347" y="1530"/>
-                  </a:lnTo>
-                  <a:lnTo>
-                    <a:pt x="0" y="0"/>
-                  </a:lnTo>
-                </a:path>
-              </a:pathLst>
-            </a:custGeom>
-          </p:spPr>
-          <p:txBody>
-            <a:bodyPr/>
-            <a:lstStyle/>
-            <a:p/>
-          </p:txBody>
-        </p:sp>
-        <p:sp>
-          <p:nvSpPr>
-            <p:cNvPr id="24" name="pl24"/>
-            <p:cNvSpPr/>
-            <p:nvPr/>
-          </p:nvSpPr>
-          <p:spPr>
-            <a:xfrm>
-              <a:off x="817517" y="3118603"/>
-              <a:ext cx="7235830" cy="2184354"/>
-            </a:xfrm>
-            <a:custGeom>
-              <a:avLst/>
-              <a:pathLst>
-                <a:path w="7235830" h="2184354">
+                <a:path w="7090630" h="2235423">
                   <a:moveTo>
                     <a:pt x="0" y="0"/>
                   </a:moveTo>
                   <a:lnTo>
-                    <a:pt x="7347" y="5650"/>
-                  </a:lnTo>
-                  <a:lnTo>
-                    <a:pt x="81107" y="61076"/>
-                  </a:lnTo>
-                  <a:lnTo>
-                    <a:pt x="154867" y="115241"/>
-                  </a:lnTo>
-                  <a:lnTo>
-                    <a:pt x="228627" y="168171"/>
-                  </a:lnTo>
-                  <a:lnTo>
-                    <a:pt x="302387" y="219895"/>
-                  </a:lnTo>
-                  <a:lnTo>
-                    <a:pt x="376147" y="270442"/>
-                  </a:lnTo>
-                  <a:lnTo>
-                    <a:pt x="449907" y="319836"/>
-                  </a:lnTo>
-                  <a:lnTo>
-                    <a:pt x="523667" y="368105"/>
-                  </a:lnTo>
-                  <a:lnTo>
-                    <a:pt x="597427" y="415275"/>
-                  </a:lnTo>
-                  <a:lnTo>
-                    <a:pt x="671187" y="461370"/>
-                  </a:lnTo>
-                  <a:lnTo>
-                    <a:pt x="744947" y="506415"/>
-                  </a:lnTo>
-                  <a:lnTo>
-                    <a:pt x="818707" y="550434"/>
-                  </a:lnTo>
-                  <a:lnTo>
-                    <a:pt x="892467" y="593450"/>
-                  </a:lnTo>
-                  <a:lnTo>
-                    <a:pt x="966227" y="635486"/>
-                  </a:lnTo>
-                  <a:lnTo>
-                    <a:pt x="1039987" y="676564"/>
-                  </a:lnTo>
-                  <a:lnTo>
-                    <a:pt x="1113747" y="716707"/>
-                  </a:lnTo>
-                  <a:lnTo>
-                    <a:pt x="1187508" y="755935"/>
-                  </a:lnTo>
-                  <a:lnTo>
-                    <a:pt x="1261268" y="794269"/>
-                  </a:lnTo>
-                  <a:lnTo>
-                    <a:pt x="1335028" y="831731"/>
-                  </a:lnTo>
-                  <a:lnTo>
-                    <a:pt x="1408788" y="868338"/>
-                  </a:lnTo>
-                  <a:lnTo>
-                    <a:pt x="1482548" y="904112"/>
-                  </a:lnTo>
-                  <a:lnTo>
-                    <a:pt x="1556308" y="939071"/>
-                  </a:lnTo>
-                  <a:lnTo>
-                    <a:pt x="1630068" y="973233"/>
-                  </a:lnTo>
-                  <a:lnTo>
-                    <a:pt x="1703828" y="1006617"/>
-                  </a:lnTo>
-                  <a:lnTo>
-                    <a:pt x="1777588" y="1039241"/>
-                  </a:lnTo>
-                  <a:lnTo>
-                    <a:pt x="1851348" y="1071121"/>
-                  </a:lnTo>
-                  <a:lnTo>
-                    <a:pt x="1925108" y="1102275"/>
-                  </a:lnTo>
-                  <a:lnTo>
-                    <a:pt x="1998868" y="1132719"/>
-                  </a:lnTo>
-                  <a:lnTo>
-                    <a:pt x="2072628" y="1162470"/>
-                  </a:lnTo>
-                  <a:lnTo>
-                    <a:pt x="2146388" y="1191543"/>
-                  </a:lnTo>
-                  <a:lnTo>
-                    <a:pt x="2220148" y="1219954"/>
-                  </a:lnTo>
-                  <a:lnTo>
-                    <a:pt x="2293908" y="1247717"/>
-                  </a:lnTo>
-                  <a:lnTo>
-                    <a:pt x="2367668" y="1274848"/>
-                  </a:lnTo>
-                  <a:lnTo>
-                    <a:pt x="2441428" y="1301361"/>
-                  </a:lnTo>
-                  <a:lnTo>
-                    <a:pt x="2515188" y="1327270"/>
-                  </a:lnTo>
-                  <a:lnTo>
-                    <a:pt x="2588948" y="1352589"/>
-                  </a:lnTo>
-                  <a:lnTo>
-                    <a:pt x="2662708" y="1377330"/>
-                  </a:lnTo>
-                  <a:lnTo>
-                    <a:pt x="2736468" y="1401509"/>
-                  </a:lnTo>
-                  <a:lnTo>
-                    <a:pt x="2810228" y="1425136"/>
-                  </a:lnTo>
-                  <a:lnTo>
-                    <a:pt x="2883988" y="1448225"/>
-                  </a:lnTo>
-                  <a:lnTo>
-                    <a:pt x="2957748" y="1470788"/>
-                  </a:lnTo>
-                  <a:lnTo>
-                    <a:pt x="3031508" y="1492837"/>
-                  </a:lnTo>
-                  <a:lnTo>
-                    <a:pt x="3105268" y="1514384"/>
-                  </a:lnTo>
-                  <a:lnTo>
-                    <a:pt x="3179028" y="1535440"/>
-                  </a:lnTo>
-                  <a:lnTo>
-                    <a:pt x="3252788" y="1556016"/>
-                  </a:lnTo>
-                  <a:lnTo>
-                    <a:pt x="3326548" y="1576124"/>
-                  </a:lnTo>
-                  <a:lnTo>
-                    <a:pt x="3400308" y="1595773"/>
-                  </a:lnTo>
-                  <a:lnTo>
-                    <a:pt x="3474068" y="1614975"/>
-                  </a:lnTo>
-                  <a:lnTo>
-                    <a:pt x="3547828" y="1633739"/>
-                  </a:lnTo>
-                  <a:lnTo>
-                    <a:pt x="3621588" y="1652076"/>
-                  </a:lnTo>
-                  <a:lnTo>
-                    <a:pt x="3695348" y="1669995"/>
-                  </a:lnTo>
-                  <a:lnTo>
-                    <a:pt x="3769108" y="1687506"/>
-                  </a:lnTo>
-                  <a:lnTo>
-                    <a:pt x="3842868" y="1704618"/>
-                  </a:lnTo>
-                  <a:lnTo>
-                    <a:pt x="3916628" y="1721340"/>
-                  </a:lnTo>
-                  <a:lnTo>
-                    <a:pt x="3990388" y="1737681"/>
-                  </a:lnTo>
-                  <a:lnTo>
-                    <a:pt x="4064149" y="1753650"/>
-                  </a:lnTo>
-                  <a:lnTo>
-                    <a:pt x="4137909" y="1769255"/>
-                  </a:lnTo>
-                  <a:lnTo>
-                    <a:pt x="4211669" y="1784505"/>
-                  </a:lnTo>
-                  <a:lnTo>
-                    <a:pt x="4285429" y="1799407"/>
-                  </a:lnTo>
-                  <a:lnTo>
-                    <a:pt x="4359189" y="1813970"/>
-                  </a:lnTo>
-                  <a:lnTo>
-                    <a:pt x="4432949" y="1828201"/>
-                  </a:lnTo>
-                  <a:lnTo>
-                    <a:pt x="4506709" y="1842108"/>
-                  </a:lnTo>
-                  <a:lnTo>
-                    <a:pt x="4580469" y="1855698"/>
-                  </a:lnTo>
-                  <a:lnTo>
-                    <a:pt x="4654229" y="1868978"/>
-                  </a:lnTo>
-                  <a:lnTo>
-                    <a:pt x="4727989" y="1881956"/>
-                  </a:lnTo>
-                  <a:lnTo>
-                    <a:pt x="4801749" y="1894638"/>
-                  </a:lnTo>
-                  <a:lnTo>
-                    <a:pt x="4875509" y="1907031"/>
-                  </a:lnTo>
-                  <a:lnTo>
-                    <a:pt x="4949269" y="1919142"/>
-                  </a:lnTo>
-                  <a:lnTo>
-                    <a:pt x="5023029" y="1930977"/>
-                  </a:lnTo>
-                  <a:lnTo>
-                    <a:pt x="5096789" y="1942542"/>
-                  </a:lnTo>
-                  <a:lnTo>
-                    <a:pt x="5170549" y="1953844"/>
-                  </a:lnTo>
-                  <a:lnTo>
-                    <a:pt x="5244309" y="1964889"/>
-                  </a:lnTo>
-                  <a:lnTo>
-                    <a:pt x="5318069" y="1975682"/>
-                  </a:lnTo>
-                  <a:lnTo>
-                    <a:pt x="5391829" y="1986229"/>
-                  </a:lnTo>
-                  <a:lnTo>
-                    <a:pt x="5465589" y="1996535"/>
-                  </a:lnTo>
-                  <a:lnTo>
-                    <a:pt x="5539349" y="2006607"/>
-                  </a:lnTo>
-                  <a:lnTo>
-                    <a:pt x="5613109" y="2016450"/>
-                  </a:lnTo>
-                  <a:lnTo>
-                    <a:pt x="5686869" y="2026068"/>
-                  </a:lnTo>
-                  <a:lnTo>
-                    <a:pt x="5760629" y="2035467"/>
-                  </a:lnTo>
-                  <a:lnTo>
-                    <a:pt x="5834389" y="2044652"/>
-                  </a:lnTo>
-                  <a:lnTo>
-                    <a:pt x="5908149" y="2053628"/>
-                  </a:lnTo>
-                  <a:lnTo>
-                    <a:pt x="5981909" y="2062399"/>
-                  </a:lnTo>
-                  <a:lnTo>
-                    <a:pt x="6055669" y="2070970"/>
-                  </a:lnTo>
-                  <a:lnTo>
-                    <a:pt x="6129429" y="2079346"/>
-                  </a:lnTo>
-                  <a:lnTo>
-                    <a:pt x="6203189" y="2087532"/>
-                  </a:lnTo>
-                  <a:lnTo>
-                    <a:pt x="6276949" y="2095531"/>
-                  </a:lnTo>
-                  <a:lnTo>
-                    <a:pt x="6350709" y="2103347"/>
-                  </a:lnTo>
-                  <a:lnTo>
-                    <a:pt x="6424469" y="2110986"/>
-                  </a:lnTo>
-                  <a:lnTo>
-                    <a:pt x="6498229" y="2118450"/>
-                  </a:lnTo>
-                  <a:lnTo>
-                    <a:pt x="6571989" y="2125745"/>
-                  </a:lnTo>
-                  <a:lnTo>
-                    <a:pt x="6645749" y="2132873"/>
-                  </a:lnTo>
-                  <a:lnTo>
-                    <a:pt x="6719509" y="2139839"/>
-                  </a:lnTo>
-                  <a:lnTo>
-                    <a:pt x="6793269" y="2146646"/>
-                  </a:lnTo>
-                  <a:lnTo>
-                    <a:pt x="6867029" y="2153298"/>
-                  </a:lnTo>
-                  <a:lnTo>
-                    <a:pt x="6940789" y="2159799"/>
-                  </a:lnTo>
-                  <a:lnTo>
-                    <a:pt x="7014550" y="2166152"/>
-                  </a:lnTo>
-                  <a:lnTo>
-                    <a:pt x="7088310" y="2172359"/>
-                  </a:lnTo>
-                  <a:lnTo>
-                    <a:pt x="7162070" y="2178426"/>
-                  </a:lnTo>
-                  <a:lnTo>
-                    <a:pt x="7235830" y="2184354"/>
+                    <a:pt x="71622" y="56719"/>
+                  </a:lnTo>
+                  <a:lnTo>
+                    <a:pt x="143245" y="112145"/>
+                  </a:lnTo>
+                  <a:lnTo>
+                    <a:pt x="214867" y="166310"/>
+                  </a:lnTo>
+                  <a:lnTo>
+                    <a:pt x="286490" y="219240"/>
+                  </a:lnTo>
+                  <a:lnTo>
+                    <a:pt x="358112" y="270964"/>
+                  </a:lnTo>
+                  <a:lnTo>
+                    <a:pt x="429735" y="321510"/>
+                  </a:lnTo>
+                  <a:lnTo>
+                    <a:pt x="501357" y="370905"/>
+                  </a:lnTo>
+                  <a:lnTo>
+                    <a:pt x="572980" y="419174"/>
+                  </a:lnTo>
+                  <a:lnTo>
+                    <a:pt x="644602" y="466344"/>
+                  </a:lnTo>
+                  <a:lnTo>
+                    <a:pt x="716225" y="512439"/>
+                  </a:lnTo>
+                  <a:lnTo>
+                    <a:pt x="787847" y="557484"/>
+                  </a:lnTo>
+                  <a:lnTo>
+                    <a:pt x="859470" y="601503"/>
+                  </a:lnTo>
+                  <a:lnTo>
+                    <a:pt x="931092" y="644519"/>
+                  </a:lnTo>
+                  <a:lnTo>
+                    <a:pt x="1002715" y="686555"/>
+                  </a:lnTo>
+                  <a:lnTo>
+                    <a:pt x="1074337" y="727633"/>
+                  </a:lnTo>
+                  <a:lnTo>
+                    <a:pt x="1145960" y="767776"/>
+                  </a:lnTo>
+                  <a:lnTo>
+                    <a:pt x="1217582" y="807004"/>
+                  </a:lnTo>
+                  <a:lnTo>
+                    <a:pt x="1289205" y="845338"/>
+                  </a:lnTo>
+                  <a:lnTo>
+                    <a:pt x="1360827" y="882800"/>
+                  </a:lnTo>
+                  <a:lnTo>
+                    <a:pt x="1432450" y="919407"/>
+                  </a:lnTo>
+                  <a:lnTo>
+                    <a:pt x="1504073" y="955181"/>
+                  </a:lnTo>
+                  <a:lnTo>
+                    <a:pt x="1575695" y="990140"/>
+                  </a:lnTo>
+                  <a:lnTo>
+                    <a:pt x="1647318" y="1024302"/>
+                  </a:lnTo>
+                  <a:lnTo>
+                    <a:pt x="1718940" y="1057686"/>
+                  </a:lnTo>
+                  <a:lnTo>
+                    <a:pt x="1790563" y="1090310"/>
+                  </a:lnTo>
+                  <a:lnTo>
+                    <a:pt x="1862185" y="1122190"/>
+                  </a:lnTo>
+                  <a:lnTo>
+                    <a:pt x="1933808" y="1153344"/>
+                  </a:lnTo>
+                  <a:lnTo>
+                    <a:pt x="2005430" y="1183788"/>
+                  </a:lnTo>
+                  <a:lnTo>
+                    <a:pt x="2077053" y="1213539"/>
+                  </a:lnTo>
+                  <a:lnTo>
+                    <a:pt x="2148675" y="1242612"/>
+                  </a:lnTo>
+                  <a:lnTo>
+                    <a:pt x="2220298" y="1271023"/>
+                  </a:lnTo>
+                  <a:lnTo>
+                    <a:pt x="2291920" y="1298786"/>
+                  </a:lnTo>
+                  <a:lnTo>
+                    <a:pt x="2363543" y="1325917"/>
+                  </a:lnTo>
+                  <a:lnTo>
+                    <a:pt x="2435165" y="1352430"/>
+                  </a:lnTo>
+                  <a:lnTo>
+                    <a:pt x="2506788" y="1378339"/>
+                  </a:lnTo>
+                  <a:lnTo>
+                    <a:pt x="2578410" y="1403658"/>
+                  </a:lnTo>
+                  <a:lnTo>
+                    <a:pt x="2650033" y="1428399"/>
+                  </a:lnTo>
+                  <a:lnTo>
+                    <a:pt x="2721655" y="1452578"/>
+                  </a:lnTo>
+                  <a:lnTo>
+                    <a:pt x="2793278" y="1476205"/>
+                  </a:lnTo>
+                  <a:lnTo>
+                    <a:pt x="2864901" y="1499294"/>
+                  </a:lnTo>
+                  <a:lnTo>
+                    <a:pt x="2936523" y="1521857"/>
+                  </a:lnTo>
+                  <a:lnTo>
+                    <a:pt x="3008146" y="1543906"/>
+                  </a:lnTo>
+                  <a:lnTo>
+                    <a:pt x="3079768" y="1565453"/>
+                  </a:lnTo>
+                  <a:lnTo>
+                    <a:pt x="3151391" y="1586509"/>
+                  </a:lnTo>
+                  <a:lnTo>
+                    <a:pt x="3223013" y="1607085"/>
+                  </a:lnTo>
+                  <a:lnTo>
+                    <a:pt x="3294636" y="1627193"/>
+                  </a:lnTo>
+                  <a:lnTo>
+                    <a:pt x="3366258" y="1646842"/>
+                  </a:lnTo>
+                  <a:lnTo>
+                    <a:pt x="3437881" y="1666044"/>
+                  </a:lnTo>
+                  <a:lnTo>
+                    <a:pt x="3509503" y="1684808"/>
+                  </a:lnTo>
+                  <a:lnTo>
+                    <a:pt x="3581126" y="1703145"/>
+                  </a:lnTo>
+                  <a:lnTo>
+                    <a:pt x="3652748" y="1721064"/>
+                  </a:lnTo>
+                  <a:lnTo>
+                    <a:pt x="3724371" y="1738575"/>
+                  </a:lnTo>
+                  <a:lnTo>
+                    <a:pt x="3795993" y="1755687"/>
+                  </a:lnTo>
+                  <a:lnTo>
+                    <a:pt x="3867616" y="1772409"/>
+                  </a:lnTo>
+                  <a:lnTo>
+                    <a:pt x="3939238" y="1788750"/>
+                  </a:lnTo>
+                  <a:lnTo>
+                    <a:pt x="4010861" y="1804719"/>
+                  </a:lnTo>
+                  <a:lnTo>
+                    <a:pt x="4082483" y="1820324"/>
+                  </a:lnTo>
+                  <a:lnTo>
+                    <a:pt x="4154106" y="1835574"/>
+                  </a:lnTo>
+                  <a:lnTo>
+                    <a:pt x="4225729" y="1850476"/>
+                  </a:lnTo>
+                  <a:lnTo>
+                    <a:pt x="4297351" y="1865039"/>
+                  </a:lnTo>
+                  <a:lnTo>
+                    <a:pt x="4368974" y="1879270"/>
+                  </a:lnTo>
+                  <a:lnTo>
+                    <a:pt x="4440596" y="1893177"/>
+                  </a:lnTo>
+                  <a:lnTo>
+                    <a:pt x="4512219" y="1906767"/>
+                  </a:lnTo>
+                  <a:lnTo>
+                    <a:pt x="4583841" y="1920047"/>
+                  </a:lnTo>
+                  <a:lnTo>
+                    <a:pt x="4655464" y="1933025"/>
+                  </a:lnTo>
+                  <a:lnTo>
+                    <a:pt x="4727086" y="1945707"/>
+                  </a:lnTo>
+                  <a:lnTo>
+                    <a:pt x="4798709" y="1958100"/>
+                  </a:lnTo>
+                  <a:lnTo>
+                    <a:pt x="4870331" y="1970211"/>
+                  </a:lnTo>
+                  <a:lnTo>
+                    <a:pt x="4941954" y="1982046"/>
+                  </a:lnTo>
+                  <a:lnTo>
+                    <a:pt x="5013576" y="1993611"/>
+                  </a:lnTo>
+                  <a:lnTo>
+                    <a:pt x="5085199" y="2004913"/>
+                  </a:lnTo>
+                  <a:lnTo>
+                    <a:pt x="5156821" y="2015958"/>
+                  </a:lnTo>
+                  <a:lnTo>
+                    <a:pt x="5228444" y="2026751"/>
+                  </a:lnTo>
+                  <a:lnTo>
+                    <a:pt x="5300066" y="2037298"/>
+                  </a:lnTo>
+                  <a:lnTo>
+                    <a:pt x="5371689" y="2047604"/>
+                  </a:lnTo>
+                  <a:lnTo>
+                    <a:pt x="5443311" y="2057676"/>
+                  </a:lnTo>
+                  <a:lnTo>
+                    <a:pt x="5514934" y="2067519"/>
+                  </a:lnTo>
+                  <a:lnTo>
+                    <a:pt x="5586557" y="2077137"/>
+                  </a:lnTo>
+                  <a:lnTo>
+                    <a:pt x="5658179" y="2086536"/>
+                  </a:lnTo>
+                  <a:lnTo>
+                    <a:pt x="5729802" y="2095721"/>
+                  </a:lnTo>
+                  <a:lnTo>
+                    <a:pt x="5801424" y="2104697"/>
+                  </a:lnTo>
+                  <a:lnTo>
+                    <a:pt x="5873047" y="2113468"/>
+                  </a:lnTo>
+                  <a:lnTo>
+                    <a:pt x="5944669" y="2122039"/>
+                  </a:lnTo>
+                  <a:lnTo>
+                    <a:pt x="6016292" y="2130415"/>
+                  </a:lnTo>
+                  <a:lnTo>
+                    <a:pt x="6087914" y="2138601"/>
+                  </a:lnTo>
+                  <a:lnTo>
+                    <a:pt x="6159537" y="2146600"/>
+                  </a:lnTo>
+                  <a:lnTo>
+                    <a:pt x="6231159" y="2154416"/>
+                  </a:lnTo>
+                  <a:lnTo>
+                    <a:pt x="6302782" y="2162055"/>
+                  </a:lnTo>
+                  <a:lnTo>
+                    <a:pt x="6374404" y="2169519"/>
+                  </a:lnTo>
+                  <a:lnTo>
+                    <a:pt x="6446027" y="2176814"/>
+                  </a:lnTo>
+                  <a:lnTo>
+                    <a:pt x="6517649" y="2183942"/>
+                  </a:lnTo>
+                  <a:lnTo>
+                    <a:pt x="6589272" y="2190908"/>
+                  </a:lnTo>
+                  <a:lnTo>
+                    <a:pt x="6660894" y="2197715"/>
+                  </a:lnTo>
+                  <a:lnTo>
+                    <a:pt x="6732517" y="2204367"/>
+                  </a:lnTo>
+                  <a:lnTo>
+                    <a:pt x="6804139" y="2210868"/>
+                  </a:lnTo>
+                  <a:lnTo>
+                    <a:pt x="6875762" y="2217221"/>
+                  </a:lnTo>
+                  <a:lnTo>
+                    <a:pt x="6947385" y="2223428"/>
+                  </a:lnTo>
+                  <a:lnTo>
+                    <a:pt x="7019007" y="2229495"/>
+                  </a:lnTo>
+                  <a:lnTo>
+                    <a:pt x="7090630" y="2235423"/>
                   </a:lnTo>
                 </a:path>
               </a:pathLst>
@@ -4575,7 +4532,7 @@
         </p:sp>
         <p:sp>
           <p:nvSpPr>
-            <p:cNvPr id="25" name="pl25"/>
+            <p:cNvPr id="24" name="pl24"/>
             <p:cNvSpPr/>
             <p:nvPr/>
           </p:nvSpPr>
@@ -4618,13 +4575,13 @@
         </p:sp>
         <p:sp>
           <p:nvSpPr>
-            <p:cNvPr id="26" name="pl26"/>
+            <p:cNvPr id="25" name="pl25"/>
             <p:cNvSpPr/>
             <p:nvPr/>
           </p:nvSpPr>
           <p:spPr>
             <a:xfrm>
-              <a:off x="4269157" y="2073503"/>
+              <a:off x="4588151" y="2073503"/>
               <a:ext cx="0" cy="3649639"/>
             </a:xfrm>
             <a:custGeom>
@@ -4661,7 +4618,7 @@
         </p:sp>
         <p:sp>
           <p:nvSpPr>
-            <p:cNvPr id="27" name="tx27"/>
+            <p:cNvPr id="26" name="tx26"/>
             <p:cNvSpPr/>
             <p:nvPr/>
           </p:nvSpPr>
@@ -4707,7 +4664,7 @@
         </p:sp>
         <p:sp>
           <p:nvSpPr>
-            <p:cNvPr id="28" name="tx28"/>
+            <p:cNvPr id="27" name="tx27"/>
             <p:cNvSpPr/>
             <p:nvPr/>
           </p:nvSpPr>
@@ -4753,7 +4710,7 @@
         </p:sp>
         <p:sp>
           <p:nvSpPr>
-            <p:cNvPr id="29" name="tx29"/>
+            <p:cNvPr id="28" name="tx28"/>
             <p:cNvSpPr/>
             <p:nvPr/>
           </p:nvSpPr>
@@ -4799,7 +4756,7 @@
         </p:sp>
         <p:sp>
           <p:nvSpPr>
-            <p:cNvPr id="30" name="tx30"/>
+            <p:cNvPr id="29" name="tx29"/>
             <p:cNvSpPr/>
             <p:nvPr/>
           </p:nvSpPr>
@@ -4845,7 +4802,7 @@
         </p:sp>
         <p:sp>
           <p:nvSpPr>
-            <p:cNvPr id="31" name="tx31"/>
+            <p:cNvPr id="30" name="tx30"/>
             <p:cNvSpPr/>
             <p:nvPr/>
           </p:nvSpPr>
@@ -4891,14 +4848,14 @@
         </p:sp>
         <p:sp>
           <p:nvSpPr>
-            <p:cNvPr id="32" name="tx32"/>
+            <p:cNvPr id="31" name="tx31"/>
             <p:cNvSpPr/>
             <p:nvPr/>
           </p:nvSpPr>
           <p:spPr>
             <a:xfrm>
-              <a:off x="2423864" y="5785772"/>
-              <a:ext cx="155356" cy="80101"/>
+              <a:off x="2360651" y="5785772"/>
+              <a:ext cx="161574" cy="80101"/>
             </a:xfrm>
             <a:prstGeom prst="rect">
               <a:avLst/>
@@ -4930,21 +4887,21 @@
                   <a:latin typeface="Helvetica"/>
                   <a:cs typeface="Helvetica"/>
                 </a:rPr>
-                <a:t>0.8</a:t>
+                <a:t>-25</a:t>
               </a:r>
             </a:p>
           </p:txBody>
         </p:sp>
         <p:sp>
           <p:nvSpPr>
-            <p:cNvPr id="33" name="tx33"/>
+            <p:cNvPr id="32" name="tx32"/>
             <p:cNvSpPr/>
             <p:nvPr/>
           </p:nvSpPr>
           <p:spPr>
             <a:xfrm>
-              <a:off x="4196521" y="5785772"/>
-              <a:ext cx="155356" cy="80101"/>
+              <a:off x="4561958" y="5785772"/>
+              <a:ext cx="62179" cy="80101"/>
             </a:xfrm>
             <a:prstGeom prst="rect">
               <a:avLst/>
@@ -4976,21 +4933,21 @@
                   <a:latin typeface="Helvetica"/>
                   <a:cs typeface="Helvetica"/>
                 </a:rPr>
-                <a:t>1.0</a:t>
+                <a:t>0</a:t>
               </a:r>
             </a:p>
           </p:txBody>
         </p:sp>
         <p:sp>
           <p:nvSpPr>
-            <p:cNvPr id="34" name="tx34"/>
+            <p:cNvPr id="33" name="tx33"/>
             <p:cNvSpPr/>
             <p:nvPr/>
           </p:nvSpPr>
           <p:spPr>
             <a:xfrm>
-              <a:off x="5969179" y="5785772"/>
-              <a:ext cx="155356" cy="80101"/>
+              <a:off x="6682478" y="5785772"/>
+              <a:ext cx="124358" cy="80101"/>
             </a:xfrm>
             <a:prstGeom prst="rect">
               <a:avLst/>
@@ -5022,67 +4979,21 @@
                   <a:latin typeface="Helvetica"/>
                   <a:cs typeface="Helvetica"/>
                 </a:rPr>
-                <a:t>1.2</a:t>
+                <a:t>25</a:t>
               </a:r>
             </a:p>
           </p:txBody>
         </p:sp>
         <p:sp>
           <p:nvSpPr>
-            <p:cNvPr id="35" name="tx35"/>
+            <p:cNvPr id="34" name="tx34"/>
             <p:cNvSpPr/>
             <p:nvPr/>
           </p:nvSpPr>
           <p:spPr>
             <a:xfrm>
-              <a:off x="7741836" y="5785772"/>
-              <a:ext cx="155356" cy="80101"/>
-            </a:xfrm>
-            <a:prstGeom prst="rect">
-              <a:avLst/>
-            </a:prstGeom>
-            <a:noFill/>
-          </p:spPr>
-          <p:txBody>
-            <a:bodyPr lIns="0" rIns="0" tIns="0" bIns="0" anchorCtr="1" anchor="ctr" wrap="none"/>
-            <a:lstStyle/>
-            <a:p>
-              <a:pPr algn="l" marL="0" marR="0" indent="0">
-                <a:lnSpc>
-                  <a:spcPts val="880"/>
-                </a:lnSpc>
-                <a:spcBef>
-                  <a:spcPts val="0"/>
-                </a:spcBef>
-                <a:spcAft>
-                  <a:spcPts val="0"/>
-                </a:spcAft>
-              </a:pPr>
-              <a:r>
-                <a:rPr sz="880">
-                  <a:solidFill>
-                    <a:srgbClr val="4D4D4D">
-                      <a:alpha val="100000"/>
-                    </a:srgbClr>
-                  </a:solidFill>
-                  <a:latin typeface="Helvetica"/>
-                  <a:cs typeface="Helvetica"/>
-                </a:rPr>
-                <a:t>1.4</a:t>
-              </a:r>
-            </a:p>
-          </p:txBody>
-        </p:sp>
-        <p:sp>
-          <p:nvSpPr>
-            <p:cNvPr id="36" name="tx36"/>
-            <p:cNvSpPr/>
-            <p:nvPr/>
-          </p:nvSpPr>
-          <p:spPr>
-            <a:xfrm>
-              <a:off x="3879271" y="5925448"/>
-              <a:ext cx="1676186" cy="100218"/>
+              <a:off x="2928340" y="5925448"/>
+              <a:ext cx="3578047" cy="100218"/>
             </a:xfrm>
             <a:prstGeom prst="rect">
               <a:avLst/>
@@ -5114,14 +5025,14 @@
                   <a:latin typeface="Helvetica"/>
                   <a:cs typeface="Helvetica"/>
                 </a:rPr>
-                <a:t>CKD-EPI Cr-Cys / CG ratio</a:t>
+                <a:t>eGFR difference (%): 100 × (CKD-EPI Cr-Cys − CG) / CG</a:t>
               </a:r>
             </a:p>
           </p:txBody>
         </p:sp>
         <p:sp>
           <p:nvSpPr>
-            <p:cNvPr id="37" name="tx37"/>
+            <p:cNvPr id="35" name="tx35"/>
             <p:cNvSpPr/>
             <p:nvPr/>
           </p:nvSpPr>
@@ -5167,14 +5078,14 @@
         </p:sp>
         <p:sp>
           <p:nvSpPr>
-            <p:cNvPr id="38" name="tx38"/>
+            <p:cNvPr id="36" name="tx36"/>
             <p:cNvSpPr/>
             <p:nvPr/>
           </p:nvSpPr>
           <p:spPr>
             <a:xfrm>
               <a:off x="817517" y="1896563"/>
-              <a:ext cx="6833128" cy="82021"/>
+              <a:ext cx="6985375" cy="82021"/>
             </a:xfrm>
             <a:prstGeom prst="rect">
               <a:avLst/>
@@ -5206,14 +5117,14 @@
                   <a:latin typeface="Helvetica"/>
                   <a:cs typeface="Helvetica"/>
                 </a:rPr>
-                <a:t>subHR per 0.1 ratio decline: 1.32 (1.14-1.52), p_Bonf = 0.001 (n = 6)  |  per IQR decline (Δ = 0.29): 2.25 (1.47-3.43)  |  IQR: [0.85, 1.15]</a:t>
+                <a:t>subHR per 10 % decline: 1.32 (1.14-1.52), p_Bonf = 0.001 (n = 6)  |  per IQR decline (Δ = 29.3 %): 2.25 (1.47-3.43)  |  IQR: [-14.6, 14.7] %</a:t>
               </a:r>
             </a:p>
           </p:txBody>
         </p:sp>
         <p:sp>
           <p:nvSpPr>
-            <p:cNvPr id="39" name="tx39"/>
+            <p:cNvPr id="37" name="tx37"/>
             <p:cNvSpPr/>
             <p:nvPr/>
           </p:nvSpPr>

--- a/docs/pptx/whole/jx-linsubhr-ratio-aki2.pptx
+++ b/docs/pptx/whole/jx-linsubhr-ratio-aki2.pptx
@@ -2265,34 +2265,26 @@
         </p:sp>
         <p:sp>
           <p:nvSpPr>
-            <p:cNvPr id="4" name="pl4"/>
+            <p:cNvPr id="4" name="rc4"/>
             <p:cNvSpPr/>
             <p:nvPr/>
           </p:nvSpPr>
           <p:spPr>
             <a:xfrm>
-              <a:off x="817517" y="5142518"/>
-              <a:ext cx="7799693" cy="0"/>
+              <a:off x="457200" y="1600200"/>
+              <a:ext cx="8229600" cy="4525962"/>
             </a:xfrm>
-            <a:custGeom>
+            <a:prstGeom prst="rect">
               <a:avLst/>
-              <a:pathLst>
-                <a:path w="7799693" h="0">
-                  <a:moveTo>
-                    <a:pt x="0" y="0"/>
-                  </a:moveTo>
-                  <a:lnTo>
-                    <a:pt x="7799693" y="0"/>
-                  </a:lnTo>
-                  <a:lnTo>
-                    <a:pt x="7799693" y="0"/>
-                  </a:lnTo>
-                </a:path>
-              </a:pathLst>
-            </a:custGeom>
-            <a:ln w="6775" cap="flat">
+            </a:prstGeom>
+            <a:solidFill>
+              <a:srgbClr val="FFFFFF">
+                <a:alpha val="100000"/>
+              </a:srgbClr>
+            </a:solidFill>
+            <a:ln w="13550" cap="rnd">
               <a:solidFill>
-                <a:srgbClr val="EBEBEB">
+                <a:srgbClr val="FFFFFF">
                   <a:alpha val="100000"/>
                 </a:srgbClr>
               </a:solidFill>
@@ -2314,21 +2306,21 @@
           </p:nvSpPr>
           <p:spPr>
             <a:xfrm>
-              <a:off x="817517" y="4313054"/>
-              <a:ext cx="7799693" cy="0"/>
+              <a:off x="887106" y="3250627"/>
+              <a:ext cx="7660515" cy="0"/>
             </a:xfrm>
             <a:custGeom>
               <a:avLst/>
               <a:pathLst>
-                <a:path w="7799693" h="0">
+                <a:path w="7660515" h="0">
                   <a:moveTo>
                     <a:pt x="0" y="0"/>
                   </a:moveTo>
                   <a:lnTo>
-                    <a:pt x="7799693" y="0"/>
-                  </a:lnTo>
-                  <a:lnTo>
-                    <a:pt x="7799693" y="0"/>
+                    <a:pt x="7660515" y="0"/>
+                  </a:lnTo>
+                  <a:lnTo>
+                    <a:pt x="7660515" y="0"/>
                   </a:lnTo>
                 </a:path>
               </a:pathLst>
@@ -2357,21 +2349,21 @@
           </p:nvSpPr>
           <p:spPr>
             <a:xfrm>
-              <a:off x="817517" y="3483591"/>
-              <a:ext cx="7799693" cy="0"/>
+              <a:off x="887106" y="2951293"/>
+              <a:ext cx="7660515" cy="0"/>
             </a:xfrm>
             <a:custGeom>
               <a:avLst/>
               <a:pathLst>
-                <a:path w="7799693" h="0">
+                <a:path w="7660515" h="0">
                   <a:moveTo>
                     <a:pt x="0" y="0"/>
                   </a:moveTo>
                   <a:lnTo>
-                    <a:pt x="7799693" y="0"/>
-                  </a:lnTo>
-                  <a:lnTo>
-                    <a:pt x="7799693" y="0"/>
+                    <a:pt x="7660515" y="0"/>
+                  </a:lnTo>
+                  <a:lnTo>
+                    <a:pt x="7660515" y="0"/>
                   </a:lnTo>
                 </a:path>
               </a:pathLst>
@@ -2400,21 +2392,21 @@
           </p:nvSpPr>
           <p:spPr>
             <a:xfrm>
-              <a:off x="817517" y="2654127"/>
-              <a:ext cx="7799693" cy="0"/>
+              <a:off x="887106" y="2651959"/>
+              <a:ext cx="7660515" cy="0"/>
             </a:xfrm>
             <a:custGeom>
               <a:avLst/>
               <a:pathLst>
-                <a:path w="7799693" h="0">
+                <a:path w="7660515" h="0">
                   <a:moveTo>
                     <a:pt x="0" y="0"/>
                   </a:moveTo>
                   <a:lnTo>
-                    <a:pt x="7799693" y="0"/>
-                  </a:lnTo>
-                  <a:lnTo>
-                    <a:pt x="7799693" y="0"/>
+                    <a:pt x="7660515" y="0"/>
+                  </a:lnTo>
+                  <a:lnTo>
+                    <a:pt x="7660515" y="0"/>
                   </a:lnTo>
                 </a:path>
               </a:pathLst>
@@ -2443,21 +2435,21 @@
           </p:nvSpPr>
           <p:spPr>
             <a:xfrm>
-              <a:off x="1365633" y="2073503"/>
-              <a:ext cx="0" cy="3649639"/>
+              <a:off x="887106" y="2352625"/>
+              <a:ext cx="7660515" cy="0"/>
             </a:xfrm>
             <a:custGeom>
               <a:avLst/>
               <a:pathLst>
-                <a:path w="0" h="3649639">
+                <a:path w="7660515" h="0">
                   <a:moveTo>
-                    <a:pt x="0" y="3649639"/>
+                    <a:pt x="0" y="0"/>
                   </a:moveTo>
                   <a:lnTo>
-                    <a:pt x="0" y="0"/>
-                  </a:lnTo>
-                  <a:lnTo>
-                    <a:pt x="0" y="0"/>
+                    <a:pt x="7660515" y="0"/>
+                  </a:lnTo>
+                  <a:lnTo>
+                    <a:pt x="7660515" y="0"/>
                   </a:lnTo>
                 </a:path>
               </a:pathLst>
@@ -2486,15 +2478,15 @@
           </p:nvSpPr>
           <p:spPr>
             <a:xfrm>
-              <a:off x="3517243" y="2073503"/>
-              <a:ext cx="0" cy="3649639"/>
+              <a:off x="1425442" y="2143092"/>
+              <a:ext cx="0" cy="1317069"/>
             </a:xfrm>
             <a:custGeom>
               <a:avLst/>
               <a:pathLst>
-                <a:path w="0" h="3649639">
+                <a:path w="0" h="1317069">
                   <a:moveTo>
-                    <a:pt x="0" y="3649639"/>
+                    <a:pt x="0" y="1317069"/>
                   </a:moveTo>
                   <a:lnTo>
                     <a:pt x="0" y="0"/>
@@ -2529,15 +2521,15 @@
           </p:nvSpPr>
           <p:spPr>
             <a:xfrm>
-              <a:off x="5668852" y="2073503"/>
-              <a:ext cx="0" cy="3649639"/>
+              <a:off x="3538658" y="2143092"/>
+              <a:ext cx="0" cy="1317069"/>
             </a:xfrm>
             <a:custGeom>
               <a:avLst/>
               <a:pathLst>
-                <a:path w="0" h="3649639">
+                <a:path w="0" h="1317069">
                   <a:moveTo>
-                    <a:pt x="0" y="3649639"/>
+                    <a:pt x="0" y="1317069"/>
                   </a:moveTo>
                   <a:lnTo>
                     <a:pt x="0" y="0"/>
@@ -2572,15 +2564,15 @@
           </p:nvSpPr>
           <p:spPr>
             <a:xfrm>
-              <a:off x="7820461" y="2073503"/>
-              <a:ext cx="0" cy="3649639"/>
+              <a:off x="5651874" y="2143092"/>
+              <a:ext cx="0" cy="1317069"/>
             </a:xfrm>
             <a:custGeom>
               <a:avLst/>
               <a:pathLst>
-                <a:path w="0" h="3649639">
+                <a:path w="0" h="1317069">
                   <a:moveTo>
-                    <a:pt x="0" y="3649639"/>
+                    <a:pt x="0" y="1317069"/>
                   </a:moveTo>
                   <a:lnTo>
                     <a:pt x="0" y="0"/>
@@ -2615,26 +2607,26 @@
           </p:nvSpPr>
           <p:spPr>
             <a:xfrm>
-              <a:off x="817517" y="5557249"/>
-              <a:ext cx="7799693" cy="0"/>
+              <a:off x="7765090" y="2143092"/>
+              <a:ext cx="0" cy="1317069"/>
             </a:xfrm>
             <a:custGeom>
               <a:avLst/>
               <a:pathLst>
-                <a:path w="7799693" h="0">
+                <a:path w="0" h="1317069">
                   <a:moveTo>
+                    <a:pt x="0" y="1317069"/>
+                  </a:moveTo>
+                  <a:lnTo>
                     <a:pt x="0" y="0"/>
-                  </a:moveTo>
-                  <a:lnTo>
-                    <a:pt x="7799693" y="0"/>
-                  </a:lnTo>
-                  <a:lnTo>
-                    <a:pt x="7799693" y="0"/>
+                  </a:lnTo>
+                  <a:lnTo>
+                    <a:pt x="0" y="0"/>
                   </a:lnTo>
                 </a:path>
               </a:pathLst>
             </a:custGeom>
-            <a:ln w="13550" cap="flat">
+            <a:ln w="6775" cap="flat">
               <a:solidFill>
                 <a:srgbClr val="EBEBEB">
                   <a:alpha val="100000"/>
@@ -2658,21 +2650,21 @@
           </p:nvSpPr>
           <p:spPr>
             <a:xfrm>
-              <a:off x="817517" y="4727786"/>
-              <a:ext cx="7799693" cy="0"/>
+              <a:off x="887106" y="3400294"/>
+              <a:ext cx="7660515" cy="0"/>
             </a:xfrm>
             <a:custGeom>
               <a:avLst/>
               <a:pathLst>
-                <a:path w="7799693" h="0">
+                <a:path w="7660515" h="0">
                   <a:moveTo>
                     <a:pt x="0" y="0"/>
                   </a:moveTo>
                   <a:lnTo>
-                    <a:pt x="7799693" y="0"/>
-                  </a:lnTo>
-                  <a:lnTo>
-                    <a:pt x="7799693" y="0"/>
+                    <a:pt x="7660515" y="0"/>
+                  </a:lnTo>
+                  <a:lnTo>
+                    <a:pt x="7660515" y="0"/>
                   </a:lnTo>
                 </a:path>
               </a:pathLst>
@@ -2701,21 +2693,21 @@
           </p:nvSpPr>
           <p:spPr>
             <a:xfrm>
-              <a:off x="817517" y="3898322"/>
-              <a:ext cx="7799693" cy="0"/>
+              <a:off x="887106" y="3100960"/>
+              <a:ext cx="7660515" cy="0"/>
             </a:xfrm>
             <a:custGeom>
               <a:avLst/>
               <a:pathLst>
-                <a:path w="7799693" h="0">
+                <a:path w="7660515" h="0">
                   <a:moveTo>
                     <a:pt x="0" y="0"/>
                   </a:moveTo>
                   <a:lnTo>
-                    <a:pt x="7799693" y="0"/>
-                  </a:lnTo>
-                  <a:lnTo>
-                    <a:pt x="7799693" y="0"/>
+                    <a:pt x="7660515" y="0"/>
+                  </a:lnTo>
+                  <a:lnTo>
+                    <a:pt x="7660515" y="0"/>
                   </a:lnTo>
                 </a:path>
               </a:pathLst>
@@ -2744,21 +2736,21 @@
           </p:nvSpPr>
           <p:spPr>
             <a:xfrm>
-              <a:off x="817517" y="3068859"/>
-              <a:ext cx="7799693" cy="0"/>
+              <a:off x="887106" y="2801626"/>
+              <a:ext cx="7660515" cy="0"/>
             </a:xfrm>
             <a:custGeom>
               <a:avLst/>
               <a:pathLst>
-                <a:path w="7799693" h="0">
+                <a:path w="7660515" h="0">
                   <a:moveTo>
                     <a:pt x="0" y="0"/>
                   </a:moveTo>
                   <a:lnTo>
-                    <a:pt x="7799693" y="0"/>
-                  </a:lnTo>
-                  <a:lnTo>
-                    <a:pt x="7799693" y="0"/>
+                    <a:pt x="7660515" y="0"/>
+                  </a:lnTo>
+                  <a:lnTo>
+                    <a:pt x="7660515" y="0"/>
                   </a:lnTo>
                 </a:path>
               </a:pathLst>
@@ -2787,21 +2779,21 @@
           </p:nvSpPr>
           <p:spPr>
             <a:xfrm>
-              <a:off x="817517" y="2239395"/>
-              <a:ext cx="7799693" cy="0"/>
+              <a:off x="887106" y="2502292"/>
+              <a:ext cx="7660515" cy="0"/>
             </a:xfrm>
             <a:custGeom>
               <a:avLst/>
               <a:pathLst>
-                <a:path w="7799693" h="0">
+                <a:path w="7660515" h="0">
                   <a:moveTo>
                     <a:pt x="0" y="0"/>
                   </a:moveTo>
                   <a:lnTo>
-                    <a:pt x="7799693" y="0"/>
-                  </a:lnTo>
-                  <a:lnTo>
-                    <a:pt x="7799693" y="0"/>
+                    <a:pt x="7660515" y="0"/>
+                  </a:lnTo>
+                  <a:lnTo>
+                    <a:pt x="7660515" y="0"/>
                   </a:lnTo>
                 </a:path>
               </a:pathLst>
@@ -2830,21 +2822,21 @@
           </p:nvSpPr>
           <p:spPr>
             <a:xfrm>
-              <a:off x="2441438" y="2073503"/>
-              <a:ext cx="0" cy="3649639"/>
+              <a:off x="887106" y="2202958"/>
+              <a:ext cx="7660515" cy="0"/>
             </a:xfrm>
             <a:custGeom>
               <a:avLst/>
               <a:pathLst>
-                <a:path w="0" h="3649639">
+                <a:path w="7660515" h="0">
                   <a:moveTo>
-                    <a:pt x="0" y="3649639"/>
+                    <a:pt x="0" y="0"/>
                   </a:moveTo>
                   <a:lnTo>
-                    <a:pt x="0" y="0"/>
-                  </a:lnTo>
-                  <a:lnTo>
-                    <a:pt x="0" y="0"/>
+                    <a:pt x="7660515" y="0"/>
+                  </a:lnTo>
+                  <a:lnTo>
+                    <a:pt x="7660515" y="0"/>
                   </a:lnTo>
                 </a:path>
               </a:pathLst>
@@ -2873,15 +2865,15 @@
           </p:nvSpPr>
           <p:spPr>
             <a:xfrm>
-              <a:off x="4593047" y="2073503"/>
-              <a:ext cx="0" cy="3649639"/>
+              <a:off x="2482050" y="2143092"/>
+              <a:ext cx="0" cy="1317069"/>
             </a:xfrm>
             <a:custGeom>
               <a:avLst/>
               <a:pathLst>
-                <a:path w="0" h="3649639">
+                <a:path w="0" h="1317069">
                   <a:moveTo>
-                    <a:pt x="0" y="3649639"/>
+                    <a:pt x="0" y="1317069"/>
                   </a:moveTo>
                   <a:lnTo>
                     <a:pt x="0" y="0"/>
@@ -2916,15 +2908,15 @@
           </p:nvSpPr>
           <p:spPr>
             <a:xfrm>
-              <a:off x="6744657" y="2073503"/>
-              <a:ext cx="0" cy="3649639"/>
+              <a:off x="4595266" y="2143092"/>
+              <a:ext cx="0" cy="1317069"/>
             </a:xfrm>
             <a:custGeom>
               <a:avLst/>
               <a:pathLst>
-                <a:path w="0" h="3649639">
+                <a:path w="0" h="1317069">
                   <a:moveTo>
-                    <a:pt x="0" y="3649639"/>
+                    <a:pt x="0" y="1317069"/>
                   </a:moveTo>
                   <a:lnTo>
                     <a:pt x="0" y="0"/>
@@ -2953,600 +2945,643 @@
         </p:sp>
         <p:sp>
           <p:nvSpPr>
-            <p:cNvPr id="20" name="pg20"/>
+            <p:cNvPr id="20" name="pl20"/>
             <p:cNvSpPr/>
             <p:nvPr/>
           </p:nvSpPr>
           <p:spPr>
             <a:xfrm>
-              <a:off x="1172049" y="2073503"/>
-              <a:ext cx="7090630" cy="3346577"/>
+              <a:off x="6708482" y="2143092"/>
+              <a:ext cx="0" cy="1317069"/>
             </a:xfrm>
             <a:custGeom>
               <a:avLst/>
               <a:pathLst>
-                <a:path w="7090630" h="3346577">
+                <a:path w="0" h="1317069">
                   <a:moveTo>
-                    <a:pt x="486019" y="0"/>
+                    <a:pt x="0" y="1317069"/>
                   </a:moveTo>
                   <a:lnTo>
-                    <a:pt x="501357" y="26430"/>
-                  </a:lnTo>
-                  <a:lnTo>
-                    <a:pt x="572980" y="145599"/>
-                  </a:lnTo>
-                  <a:lnTo>
-                    <a:pt x="644602" y="260659"/>
-                  </a:lnTo>
-                  <a:lnTo>
-                    <a:pt x="716225" y="371754"/>
-                  </a:lnTo>
-                  <a:lnTo>
-                    <a:pt x="787847" y="479019"/>
-                  </a:lnTo>
-                  <a:lnTo>
-                    <a:pt x="859470" y="582588"/>
-                  </a:lnTo>
-                  <a:lnTo>
-                    <a:pt x="931092" y="682586"/>
-                  </a:lnTo>
-                  <a:lnTo>
-                    <a:pt x="1002715" y="779137"/>
-                  </a:lnTo>
-                  <a:lnTo>
-                    <a:pt x="1074337" y="872361"/>
-                  </a:lnTo>
-                  <a:lnTo>
-                    <a:pt x="1145960" y="962371"/>
-                  </a:lnTo>
-                  <a:lnTo>
-                    <a:pt x="1217582" y="1049279"/>
-                  </a:lnTo>
-                  <a:lnTo>
-                    <a:pt x="1289205" y="1133191"/>
-                  </a:lnTo>
-                  <a:lnTo>
-                    <a:pt x="1360827" y="1214211"/>
-                  </a:lnTo>
-                  <a:lnTo>
-                    <a:pt x="1432450" y="1292438"/>
-                  </a:lnTo>
-                  <a:lnTo>
-                    <a:pt x="1504073" y="1367969"/>
-                  </a:lnTo>
-                  <a:lnTo>
-                    <a:pt x="1575695" y="1440897"/>
-                  </a:lnTo>
-                  <a:lnTo>
-                    <a:pt x="1647318" y="1511311"/>
-                  </a:lnTo>
-                  <a:lnTo>
-                    <a:pt x="1718940" y="1579297"/>
-                  </a:lnTo>
-                  <a:lnTo>
-                    <a:pt x="1790563" y="1644941"/>
-                  </a:lnTo>
-                  <a:lnTo>
-                    <a:pt x="1862185" y="1708321"/>
-                  </a:lnTo>
-                  <a:lnTo>
-                    <a:pt x="1933808" y="1769517"/>
-                  </a:lnTo>
-                  <a:lnTo>
-                    <a:pt x="2005430" y="1828604"/>
-                  </a:lnTo>
-                  <a:lnTo>
-                    <a:pt x="2077053" y="1885654"/>
-                  </a:lnTo>
-                  <a:lnTo>
-                    <a:pt x="2148675" y="1940738"/>
-                  </a:lnTo>
-                  <a:lnTo>
-                    <a:pt x="2220298" y="1993923"/>
-                  </a:lnTo>
-                  <a:lnTo>
-                    <a:pt x="2291920" y="2045275"/>
-                  </a:lnTo>
-                  <a:lnTo>
-                    <a:pt x="2363543" y="2094857"/>
-                  </a:lnTo>
-                  <a:lnTo>
-                    <a:pt x="2435165" y="2142729"/>
-                  </a:lnTo>
-                  <a:lnTo>
-                    <a:pt x="2506788" y="2188952"/>
-                  </a:lnTo>
-                  <a:lnTo>
-                    <a:pt x="2578410" y="2233582"/>
-                  </a:lnTo>
-                  <a:lnTo>
-                    <a:pt x="2650033" y="2276673"/>
-                  </a:lnTo>
-                  <a:lnTo>
-                    <a:pt x="2721655" y="2318279"/>
-                  </a:lnTo>
-                  <a:lnTo>
-                    <a:pt x="2793278" y="2358451"/>
-                  </a:lnTo>
-                  <a:lnTo>
-                    <a:pt x="2864901" y="2397238"/>
-                  </a:lnTo>
-                  <a:lnTo>
-                    <a:pt x="2936523" y="2434688"/>
-                  </a:lnTo>
-                  <a:lnTo>
-                    <a:pt x="3008146" y="2470847"/>
-                  </a:lnTo>
-                  <a:lnTo>
-                    <a:pt x="3079768" y="2505760"/>
-                  </a:lnTo>
-                  <a:lnTo>
-                    <a:pt x="3151391" y="2539470"/>
-                  </a:lnTo>
-                  <a:lnTo>
-                    <a:pt x="3223013" y="2572018"/>
-                  </a:lnTo>
-                  <a:lnTo>
-                    <a:pt x="3294636" y="2603444"/>
-                  </a:lnTo>
-                  <a:lnTo>
-                    <a:pt x="3366258" y="2633786"/>
-                  </a:lnTo>
-                  <a:lnTo>
-                    <a:pt x="3437881" y="2657056"/>
-                  </a:lnTo>
-                  <a:lnTo>
-                    <a:pt x="3509503" y="2666111"/>
-                  </a:lnTo>
-                  <a:lnTo>
-                    <a:pt x="3581126" y="2675066"/>
-                  </a:lnTo>
-                  <a:lnTo>
-                    <a:pt x="3652748" y="2683923"/>
-                  </a:lnTo>
-                  <a:lnTo>
-                    <a:pt x="3724371" y="2692684"/>
-                  </a:lnTo>
-                  <a:lnTo>
-                    <a:pt x="3795993" y="2701348"/>
-                  </a:lnTo>
-                  <a:lnTo>
-                    <a:pt x="3867616" y="2709917"/>
-                  </a:lnTo>
-                  <a:lnTo>
-                    <a:pt x="3939238" y="2718393"/>
-                  </a:lnTo>
-                  <a:lnTo>
-                    <a:pt x="4010861" y="2726776"/>
-                  </a:lnTo>
-                  <a:lnTo>
-                    <a:pt x="4082483" y="2735067"/>
-                  </a:lnTo>
-                  <a:lnTo>
-                    <a:pt x="4154106" y="2743267"/>
-                  </a:lnTo>
-                  <a:lnTo>
-                    <a:pt x="4225729" y="2751377"/>
-                  </a:lnTo>
-                  <a:lnTo>
-                    <a:pt x="4297351" y="2759399"/>
-                  </a:lnTo>
-                  <a:lnTo>
-                    <a:pt x="4368974" y="2767332"/>
-                  </a:lnTo>
-                  <a:lnTo>
-                    <a:pt x="4440596" y="2775179"/>
-                  </a:lnTo>
-                  <a:lnTo>
-                    <a:pt x="4512219" y="2782940"/>
-                  </a:lnTo>
-                  <a:lnTo>
-                    <a:pt x="4583841" y="2790616"/>
-                  </a:lnTo>
-                  <a:lnTo>
-                    <a:pt x="4655464" y="2798207"/>
-                  </a:lnTo>
-                  <a:lnTo>
-                    <a:pt x="4727086" y="2805716"/>
-                  </a:lnTo>
-                  <a:lnTo>
-                    <a:pt x="4798709" y="2813142"/>
-                  </a:lnTo>
-                  <a:lnTo>
-                    <a:pt x="4870331" y="2820487"/>
-                  </a:lnTo>
-                  <a:lnTo>
-                    <a:pt x="4941954" y="2827752"/>
-                  </a:lnTo>
-                  <a:lnTo>
-                    <a:pt x="5013576" y="2834937"/>
-                  </a:lnTo>
-                  <a:lnTo>
-                    <a:pt x="5085199" y="2842043"/>
-                  </a:lnTo>
-                  <a:lnTo>
-                    <a:pt x="5156821" y="2849071"/>
-                  </a:lnTo>
-                  <a:lnTo>
-                    <a:pt x="5228444" y="2856023"/>
-                  </a:lnTo>
-                  <a:lnTo>
-                    <a:pt x="5300066" y="2862898"/>
-                  </a:lnTo>
-                  <a:lnTo>
-                    <a:pt x="5371689" y="2869698"/>
-                  </a:lnTo>
-                  <a:lnTo>
-                    <a:pt x="5443311" y="2876424"/>
-                  </a:lnTo>
-                  <a:lnTo>
-                    <a:pt x="5514934" y="2883076"/>
-                  </a:lnTo>
-                  <a:lnTo>
-                    <a:pt x="5586557" y="2889655"/>
-                  </a:lnTo>
-                  <a:lnTo>
-                    <a:pt x="5658179" y="2896162"/>
-                  </a:lnTo>
-                  <a:lnTo>
-                    <a:pt x="5729802" y="2902597"/>
-                  </a:lnTo>
-                  <a:lnTo>
-                    <a:pt x="5801424" y="2908963"/>
-                  </a:lnTo>
-                  <a:lnTo>
-                    <a:pt x="5873047" y="2915258"/>
-                  </a:lnTo>
-                  <a:lnTo>
-                    <a:pt x="5944669" y="2921485"/>
-                  </a:lnTo>
-                  <a:lnTo>
-                    <a:pt x="6016292" y="2927643"/>
-                  </a:lnTo>
-                  <a:lnTo>
-                    <a:pt x="6087914" y="2933734"/>
-                  </a:lnTo>
-                  <a:lnTo>
-                    <a:pt x="6159537" y="2939758"/>
-                  </a:lnTo>
-                  <a:lnTo>
-                    <a:pt x="6231159" y="2945716"/>
-                  </a:lnTo>
-                  <a:lnTo>
-                    <a:pt x="6302782" y="2951609"/>
-                  </a:lnTo>
-                  <a:lnTo>
-                    <a:pt x="6374404" y="2957437"/>
-                  </a:lnTo>
-                  <a:lnTo>
-                    <a:pt x="6446027" y="2963202"/>
-                  </a:lnTo>
-                  <a:lnTo>
-                    <a:pt x="6517649" y="2968903"/>
-                  </a:lnTo>
-                  <a:lnTo>
-                    <a:pt x="6589272" y="2974542"/>
-                  </a:lnTo>
-                  <a:lnTo>
-                    <a:pt x="6660894" y="2980120"/>
-                  </a:lnTo>
-                  <a:lnTo>
-                    <a:pt x="6732517" y="2985636"/>
-                  </a:lnTo>
-                  <a:lnTo>
-                    <a:pt x="6804139" y="2991091"/>
-                  </a:lnTo>
-                  <a:lnTo>
-                    <a:pt x="6875762" y="2996487"/>
-                  </a:lnTo>
-                  <a:lnTo>
-                    <a:pt x="6947385" y="3001824"/>
-                  </a:lnTo>
-                  <a:lnTo>
-                    <a:pt x="7019007" y="3007103"/>
-                  </a:lnTo>
-                  <a:lnTo>
-                    <a:pt x="7090630" y="3012323"/>
-                  </a:lnTo>
-                  <a:lnTo>
-                    <a:pt x="7090630" y="3346577"/>
-                  </a:lnTo>
-                  <a:lnTo>
-                    <a:pt x="7019007" y="3341681"/>
-                  </a:lnTo>
-                  <a:lnTo>
-                    <a:pt x="6947385" y="3336609"/>
-                  </a:lnTo>
-                  <a:lnTo>
-                    <a:pt x="6875762" y="3331356"/>
-                  </a:lnTo>
-                  <a:lnTo>
-                    <a:pt x="6804139" y="3325916"/>
-                  </a:lnTo>
-                  <a:lnTo>
-                    <a:pt x="6732517" y="3320282"/>
-                  </a:lnTo>
-                  <a:lnTo>
-                    <a:pt x="6660894" y="3314446"/>
-                  </a:lnTo>
-                  <a:lnTo>
-                    <a:pt x="6589272" y="3308403"/>
-                  </a:lnTo>
-                  <a:lnTo>
-                    <a:pt x="6517649" y="3302143"/>
-                  </a:lnTo>
-                  <a:lnTo>
-                    <a:pt x="6446027" y="3295660"/>
-                  </a:lnTo>
-                  <a:lnTo>
-                    <a:pt x="6374404" y="3288945"/>
-                  </a:lnTo>
-                  <a:lnTo>
-                    <a:pt x="6302782" y="3281991"/>
-                  </a:lnTo>
-                  <a:lnTo>
-                    <a:pt x="6231159" y="3274789"/>
-                  </a:lnTo>
-                  <a:lnTo>
-                    <a:pt x="6159537" y="3267329"/>
-                  </a:lnTo>
-                  <a:lnTo>
-                    <a:pt x="6087914" y="3259603"/>
-                  </a:lnTo>
-                  <a:lnTo>
-                    <a:pt x="6016292" y="3251602"/>
-                  </a:lnTo>
-                  <a:lnTo>
-                    <a:pt x="5944669" y="3243314"/>
-                  </a:lnTo>
-                  <a:lnTo>
-                    <a:pt x="5873047" y="3234731"/>
-                  </a:lnTo>
-                  <a:lnTo>
-                    <a:pt x="5801424" y="3225842"/>
-                  </a:lnTo>
-                  <a:lnTo>
-                    <a:pt x="5729802" y="3216635"/>
-                  </a:lnTo>
-                  <a:lnTo>
-                    <a:pt x="5658179" y="3207099"/>
-                  </a:lnTo>
-                  <a:lnTo>
-                    <a:pt x="5586557" y="3197223"/>
-                  </a:lnTo>
-                  <a:lnTo>
-                    <a:pt x="5514934" y="3186995"/>
-                  </a:lnTo>
-                  <a:lnTo>
-                    <a:pt x="5443311" y="3176401"/>
-                  </a:lnTo>
-                  <a:lnTo>
-                    <a:pt x="5371689" y="3165429"/>
-                  </a:lnTo>
-                  <a:lnTo>
-                    <a:pt x="5300066" y="3154065"/>
-                  </a:lnTo>
-                  <a:lnTo>
-                    <a:pt x="5228444" y="3142296"/>
-                  </a:lnTo>
-                  <a:lnTo>
-                    <a:pt x="5156821" y="3130107"/>
-                  </a:lnTo>
-                  <a:lnTo>
-                    <a:pt x="5085199" y="3117482"/>
-                  </a:lnTo>
-                  <a:lnTo>
-                    <a:pt x="5013576" y="3104407"/>
-                  </a:lnTo>
-                  <a:lnTo>
-                    <a:pt x="4941954" y="3090865"/>
-                  </a:lnTo>
-                  <a:lnTo>
-                    <a:pt x="4870331" y="3076840"/>
-                  </a:lnTo>
-                  <a:lnTo>
-                    <a:pt x="4798709" y="3062314"/>
-                  </a:lnTo>
-                  <a:lnTo>
-                    <a:pt x="4727086" y="3047269"/>
-                  </a:lnTo>
-                  <a:lnTo>
-                    <a:pt x="4655464" y="3031687"/>
-                  </a:lnTo>
-                  <a:lnTo>
-                    <a:pt x="4583841" y="3015549"/>
-                  </a:lnTo>
-                  <a:lnTo>
-                    <a:pt x="4512219" y="2998835"/>
-                  </a:lnTo>
-                  <a:lnTo>
-                    <a:pt x="4440596" y="2981524"/>
-                  </a:lnTo>
-                  <a:lnTo>
-                    <a:pt x="4368974" y="2963595"/>
-                  </a:lnTo>
-                  <a:lnTo>
-                    <a:pt x="4297351" y="2945027"/>
-                  </a:lnTo>
-                  <a:lnTo>
-                    <a:pt x="4225729" y="2925795"/>
-                  </a:lnTo>
-                  <a:lnTo>
-                    <a:pt x="4154106" y="2905877"/>
-                  </a:lnTo>
-                  <a:lnTo>
-                    <a:pt x="4082483" y="2885247"/>
-                  </a:lnTo>
-                  <a:lnTo>
-                    <a:pt x="4010861" y="2863882"/>
-                  </a:lnTo>
-                  <a:lnTo>
-                    <a:pt x="3939238" y="2841753"/>
-                  </a:lnTo>
-                  <a:lnTo>
-                    <a:pt x="3867616" y="2818835"/>
-                  </a:lnTo>
-                  <a:lnTo>
-                    <a:pt x="3795993" y="2795098"/>
-                  </a:lnTo>
-                  <a:lnTo>
-                    <a:pt x="3724371" y="2770514"/>
-                  </a:lnTo>
-                  <a:lnTo>
-                    <a:pt x="3652748" y="2745052"/>
-                  </a:lnTo>
-                  <a:lnTo>
-                    <a:pt x="3581126" y="2718682"/>
-                  </a:lnTo>
-                  <a:lnTo>
-                    <a:pt x="3509503" y="2691370"/>
-                  </a:lnTo>
-                  <a:lnTo>
-                    <a:pt x="3437881" y="2663083"/>
-                  </a:lnTo>
-                  <a:lnTo>
-                    <a:pt x="3366258" y="2647901"/>
-                  </a:lnTo>
-                  <a:lnTo>
-                    <a:pt x="3294636" y="2638645"/>
-                  </a:lnTo>
-                  <a:lnTo>
-                    <a:pt x="3223013" y="2629286"/>
-                  </a:lnTo>
-                  <a:lnTo>
-                    <a:pt x="3151391" y="2619824"/>
-                  </a:lnTo>
-                  <a:lnTo>
-                    <a:pt x="3079768" y="2610257"/>
-                  </a:lnTo>
-                  <a:lnTo>
-                    <a:pt x="3008146" y="2600584"/>
-                  </a:lnTo>
-                  <a:lnTo>
-                    <a:pt x="2936523" y="2590803"/>
-                  </a:lnTo>
-                  <a:lnTo>
-                    <a:pt x="2864901" y="2580915"/>
-                  </a:lnTo>
-                  <a:lnTo>
-                    <a:pt x="2793278" y="2570917"/>
-                  </a:lnTo>
-                  <a:lnTo>
-                    <a:pt x="2721655" y="2560808"/>
-                  </a:lnTo>
-                  <a:lnTo>
-                    <a:pt x="2650033" y="2550587"/>
-                  </a:lnTo>
-                  <a:lnTo>
-                    <a:pt x="2578410" y="2540253"/>
-                  </a:lnTo>
-                  <a:lnTo>
-                    <a:pt x="2506788" y="2529805"/>
-                  </a:lnTo>
-                  <a:lnTo>
-                    <a:pt x="2435165" y="2519241"/>
-                  </a:lnTo>
-                  <a:lnTo>
-                    <a:pt x="2363543" y="2508560"/>
-                  </a:lnTo>
-                  <a:lnTo>
-                    <a:pt x="2291920" y="2497761"/>
-                  </a:lnTo>
-                  <a:lnTo>
-                    <a:pt x="2220298" y="2486842"/>
-                  </a:lnTo>
-                  <a:lnTo>
-                    <a:pt x="2148675" y="2475802"/>
-                  </a:lnTo>
-                  <a:lnTo>
-                    <a:pt x="2077053" y="2464640"/>
-                  </a:lnTo>
-                  <a:lnTo>
-                    <a:pt x="2005430" y="2453354"/>
-                  </a:lnTo>
-                  <a:lnTo>
-                    <a:pt x="1933808" y="2441944"/>
-                  </a:lnTo>
-                  <a:lnTo>
-                    <a:pt x="1862185" y="2430407"/>
-                  </a:lnTo>
-                  <a:lnTo>
-                    <a:pt x="1790563" y="2418742"/>
-                  </a:lnTo>
-                  <a:lnTo>
-                    <a:pt x="1718940" y="2406948"/>
-                  </a:lnTo>
-                  <a:lnTo>
-                    <a:pt x="1647318" y="2395023"/>
-                  </a:lnTo>
-                  <a:lnTo>
-                    <a:pt x="1575695" y="2382967"/>
-                  </a:lnTo>
-                  <a:lnTo>
-                    <a:pt x="1504073" y="2370777"/>
-                  </a:lnTo>
-                  <a:lnTo>
-                    <a:pt x="1432450" y="2358452"/>
-                  </a:lnTo>
-                  <a:lnTo>
-                    <a:pt x="1360827" y="2345990"/>
-                  </a:lnTo>
-                  <a:lnTo>
-                    <a:pt x="1289205" y="2333390"/>
-                  </a:lnTo>
-                  <a:lnTo>
-                    <a:pt x="1217582" y="2320651"/>
-                  </a:lnTo>
-                  <a:lnTo>
-                    <a:pt x="1145960" y="2307771"/>
-                  </a:lnTo>
-                  <a:lnTo>
-                    <a:pt x="1074337" y="2294748"/>
-                  </a:lnTo>
-                  <a:lnTo>
-                    <a:pt x="1002715" y="2281581"/>
-                  </a:lnTo>
-                  <a:lnTo>
-                    <a:pt x="931092" y="2268268"/>
-                  </a:lnTo>
-                  <a:lnTo>
-                    <a:pt x="859470" y="2254808"/>
-                  </a:lnTo>
-                  <a:lnTo>
-                    <a:pt x="787847" y="2241199"/>
-                  </a:lnTo>
-                  <a:lnTo>
-                    <a:pt x="716225" y="2227438"/>
-                  </a:lnTo>
-                  <a:lnTo>
-                    <a:pt x="644602" y="2213526"/>
-                  </a:lnTo>
-                  <a:lnTo>
-                    <a:pt x="572980" y="2199459"/>
-                  </a:lnTo>
-                  <a:lnTo>
-                    <a:pt x="501357" y="2185237"/>
-                  </a:lnTo>
-                  <a:lnTo>
-                    <a:pt x="429735" y="2170857"/>
-                  </a:lnTo>
-                  <a:lnTo>
-                    <a:pt x="358112" y="2156318"/>
-                  </a:lnTo>
-                  <a:lnTo>
-                    <a:pt x="286490" y="2141618"/>
-                  </a:lnTo>
-                  <a:lnTo>
-                    <a:pt x="214867" y="2126755"/>
-                  </a:lnTo>
-                  <a:lnTo>
-                    <a:pt x="143245" y="2111728"/>
-                  </a:lnTo>
-                  <a:lnTo>
-                    <a:pt x="71622" y="2096534"/>
-                  </a:lnTo>
-                  <a:lnTo>
-                    <a:pt x="0" y="2081172"/>
+                    <a:pt x="0" y="0"/>
+                  </a:lnTo>
+                  <a:lnTo>
+                    <a:pt x="0" y="0"/>
+                  </a:lnTo>
+                </a:path>
+              </a:pathLst>
+            </a:custGeom>
+            <a:ln w="13550" cap="flat">
+              <a:solidFill>
+                <a:srgbClr val="EBEBEB">
+                  <a:alpha val="100000"/>
+                </a:srgbClr>
+              </a:solidFill>
+              <a:prstDash val="solid"/>
+              <a:round/>
+            </a:ln>
+          </p:spPr>
+          <p:txBody>
+            <a:bodyPr/>
+            <a:lstStyle/>
+            <a:p/>
+          </p:txBody>
+        </p:sp>
+        <p:sp>
+          <p:nvSpPr>
+            <p:cNvPr id="21" name="pg21"/>
+            <p:cNvSpPr/>
+            <p:nvPr/>
+          </p:nvSpPr>
+          <p:spPr>
+            <a:xfrm>
+              <a:off x="1235312" y="2143092"/>
+              <a:ext cx="6964104" cy="1207701"/>
+            </a:xfrm>
+            <a:custGeom>
+              <a:avLst/>
+              <a:pathLst>
+                <a:path w="6964104" h="1207701">
+                  <a:moveTo>
+                    <a:pt x="477347" y="0"/>
+                  </a:moveTo>
+                  <a:lnTo>
+                    <a:pt x="492411" y="9538"/>
+                  </a:lnTo>
+                  <a:lnTo>
+                    <a:pt x="562755" y="52543"/>
+                  </a:lnTo>
+                  <a:lnTo>
+                    <a:pt x="633100" y="94065"/>
+                  </a:lnTo>
+                  <a:lnTo>
+                    <a:pt x="703444" y="134157"/>
+                  </a:lnTo>
+                  <a:lnTo>
+                    <a:pt x="773789" y="172867"/>
+                  </a:lnTo>
+                  <a:lnTo>
+                    <a:pt x="844133" y="210242"/>
+                  </a:lnTo>
+                  <a:lnTo>
+                    <a:pt x="914478" y="246329"/>
+                  </a:lnTo>
+                  <a:lnTo>
+                    <a:pt x="984822" y="281172"/>
+                  </a:lnTo>
+                  <a:lnTo>
+                    <a:pt x="1055167" y="314814"/>
+                  </a:lnTo>
+                  <a:lnTo>
+                    <a:pt x="1125511" y="347297"/>
+                  </a:lnTo>
+                  <a:lnTo>
+                    <a:pt x="1195856" y="378660"/>
+                  </a:lnTo>
+                  <a:lnTo>
+                    <a:pt x="1266200" y="408942"/>
+                  </a:lnTo>
+                  <a:lnTo>
+                    <a:pt x="1336545" y="438180"/>
+                  </a:lnTo>
+                  <a:lnTo>
+                    <a:pt x="1406889" y="466410"/>
+                  </a:lnTo>
+                  <a:lnTo>
+                    <a:pt x="1477234" y="493668"/>
+                  </a:lnTo>
+                  <a:lnTo>
+                    <a:pt x="1547578" y="519985"/>
+                  </a:lnTo>
+                  <a:lnTo>
+                    <a:pt x="1617923" y="545396"/>
+                  </a:lnTo>
+                  <a:lnTo>
+                    <a:pt x="1688267" y="569931"/>
+                  </a:lnTo>
+                  <a:lnTo>
+                    <a:pt x="1758612" y="593620"/>
+                  </a:lnTo>
+                  <a:lnTo>
+                    <a:pt x="1828956" y="616493"/>
+                  </a:lnTo>
+                  <a:lnTo>
+                    <a:pt x="1899301" y="638577"/>
+                  </a:lnTo>
+                  <a:lnTo>
+                    <a:pt x="1969645" y="659900"/>
+                  </a:lnTo>
+                  <a:lnTo>
+                    <a:pt x="2039990" y="680488"/>
+                  </a:lnTo>
+                  <a:lnTo>
+                    <a:pt x="2110334" y="700366"/>
+                  </a:lnTo>
+                  <a:lnTo>
+                    <a:pt x="2180679" y="719560"/>
+                  </a:lnTo>
+                  <a:lnTo>
+                    <a:pt x="2251023" y="738091"/>
+                  </a:lnTo>
+                  <a:lnTo>
+                    <a:pt x="2321368" y="755984"/>
+                  </a:lnTo>
+                  <a:lnTo>
+                    <a:pt x="2391712" y="773260"/>
+                  </a:lnTo>
+                  <a:lnTo>
+                    <a:pt x="2462057" y="789941"/>
+                  </a:lnTo>
+                  <a:lnTo>
+                    <a:pt x="2532401" y="806047"/>
+                  </a:lnTo>
+                  <a:lnTo>
+                    <a:pt x="2602746" y="821597"/>
+                  </a:lnTo>
+                  <a:lnTo>
+                    <a:pt x="2673090" y="836612"/>
+                  </a:lnTo>
+                  <a:lnTo>
+                    <a:pt x="2743435" y="851109"/>
+                  </a:lnTo>
+                  <a:lnTo>
+                    <a:pt x="2813779" y="865106"/>
+                  </a:lnTo>
+                  <a:lnTo>
+                    <a:pt x="2884124" y="878621"/>
+                  </a:lnTo>
+                  <a:lnTo>
+                    <a:pt x="2954468" y="891670"/>
+                  </a:lnTo>
+                  <a:lnTo>
+                    <a:pt x="3024813" y="904270"/>
+                  </a:lnTo>
+                  <a:lnTo>
+                    <a:pt x="3095157" y="916435"/>
+                  </a:lnTo>
+                  <a:lnTo>
+                    <a:pt x="3165502" y="928180"/>
+                  </a:lnTo>
+                  <a:lnTo>
+                    <a:pt x="3235846" y="939521"/>
+                  </a:lnTo>
+                  <a:lnTo>
+                    <a:pt x="3306191" y="950471"/>
+                  </a:lnTo>
+                  <a:lnTo>
+                    <a:pt x="3376535" y="958869"/>
+                  </a:lnTo>
+                  <a:lnTo>
+                    <a:pt x="3446880" y="962136"/>
+                  </a:lnTo>
+                  <a:lnTo>
+                    <a:pt x="3517224" y="965368"/>
+                  </a:lnTo>
+                  <a:lnTo>
+                    <a:pt x="3587569" y="968564"/>
+                  </a:lnTo>
+                  <a:lnTo>
+                    <a:pt x="3657913" y="971726"/>
+                  </a:lnTo>
+                  <a:lnTo>
+                    <a:pt x="3728257" y="974853"/>
+                  </a:lnTo>
+                  <a:lnTo>
+                    <a:pt x="3798602" y="977945"/>
+                  </a:lnTo>
+                  <a:lnTo>
+                    <a:pt x="3868946" y="981004"/>
+                  </a:lnTo>
+                  <a:lnTo>
+                    <a:pt x="3939291" y="984029"/>
+                  </a:lnTo>
+                  <a:lnTo>
+                    <a:pt x="4009635" y="987021"/>
+                  </a:lnTo>
+                  <a:lnTo>
+                    <a:pt x="4079980" y="989980"/>
+                  </a:lnTo>
+                  <a:lnTo>
+                    <a:pt x="4150324" y="992907"/>
+                  </a:lnTo>
+                  <a:lnTo>
+                    <a:pt x="4220669" y="995802"/>
+                  </a:lnTo>
+                  <a:lnTo>
+                    <a:pt x="4291013" y="998665"/>
+                  </a:lnTo>
+                  <a:lnTo>
+                    <a:pt x="4361358" y="1001496"/>
+                  </a:lnTo>
+                  <a:lnTo>
+                    <a:pt x="4431702" y="1004297"/>
+                  </a:lnTo>
+                  <a:lnTo>
+                    <a:pt x="4502047" y="1007067"/>
+                  </a:lnTo>
+                  <a:lnTo>
+                    <a:pt x="4572391" y="1009807"/>
+                  </a:lnTo>
+                  <a:lnTo>
+                    <a:pt x="4642736" y="1012517"/>
+                  </a:lnTo>
+                  <a:lnTo>
+                    <a:pt x="4713080" y="1015197"/>
+                  </a:lnTo>
+                  <a:lnTo>
+                    <a:pt x="4783425" y="1017847"/>
+                  </a:lnTo>
+                  <a:lnTo>
+                    <a:pt x="4853769" y="1020469"/>
+                  </a:lnTo>
+                  <a:lnTo>
+                    <a:pt x="4924114" y="1023062"/>
+                  </a:lnTo>
+                  <a:lnTo>
+                    <a:pt x="4994458" y="1025626"/>
+                  </a:lnTo>
+                  <a:lnTo>
+                    <a:pt x="5064803" y="1028163"/>
+                  </a:lnTo>
+                  <a:lnTo>
+                    <a:pt x="5135147" y="1030671"/>
+                  </a:lnTo>
+                  <a:lnTo>
+                    <a:pt x="5205492" y="1033152"/>
+                  </a:lnTo>
+                  <a:lnTo>
+                    <a:pt x="5275836" y="1035606"/>
+                  </a:lnTo>
+                  <a:lnTo>
+                    <a:pt x="5346181" y="1038033"/>
+                  </a:lnTo>
+                  <a:lnTo>
+                    <a:pt x="5416525" y="1040434"/>
+                  </a:lnTo>
+                  <a:lnTo>
+                    <a:pt x="5486870" y="1042808"/>
+                  </a:lnTo>
+                  <a:lnTo>
+                    <a:pt x="5557214" y="1045156"/>
+                  </a:lnTo>
+                  <a:lnTo>
+                    <a:pt x="5627559" y="1047479"/>
+                  </a:lnTo>
+                  <a:lnTo>
+                    <a:pt x="5697903" y="1049776"/>
+                  </a:lnTo>
+                  <a:lnTo>
+                    <a:pt x="5768248" y="1052048"/>
+                  </a:lnTo>
+                  <a:lnTo>
+                    <a:pt x="5838592" y="1054295"/>
+                  </a:lnTo>
+                  <a:lnTo>
+                    <a:pt x="5908937" y="1056517"/>
+                  </a:lnTo>
+                  <a:lnTo>
+                    <a:pt x="5979281" y="1058715"/>
+                  </a:lnTo>
+                  <a:lnTo>
+                    <a:pt x="6049626" y="1060889"/>
+                  </a:lnTo>
+                  <a:lnTo>
+                    <a:pt x="6119970" y="1063039"/>
+                  </a:lnTo>
+                  <a:lnTo>
+                    <a:pt x="6190315" y="1065166"/>
+                  </a:lnTo>
+                  <a:lnTo>
+                    <a:pt x="6260659" y="1067269"/>
+                  </a:lnTo>
+                  <a:lnTo>
+                    <a:pt x="6331004" y="1069350"/>
+                  </a:lnTo>
+                  <a:lnTo>
+                    <a:pt x="6401348" y="1071407"/>
+                  </a:lnTo>
+                  <a:lnTo>
+                    <a:pt x="6471693" y="1073442"/>
+                  </a:lnTo>
+                  <a:lnTo>
+                    <a:pt x="6542037" y="1075455"/>
+                  </a:lnTo>
+                  <a:lnTo>
+                    <a:pt x="6612382" y="1077445"/>
+                  </a:lnTo>
+                  <a:lnTo>
+                    <a:pt x="6682726" y="1079414"/>
+                  </a:lnTo>
+                  <a:lnTo>
+                    <a:pt x="6753071" y="1081361"/>
+                  </a:lnTo>
+                  <a:lnTo>
+                    <a:pt x="6823415" y="1083287"/>
+                  </a:lnTo>
+                  <a:lnTo>
+                    <a:pt x="6893760" y="1085192"/>
+                  </a:lnTo>
+                  <a:lnTo>
+                    <a:pt x="6964104" y="1087076"/>
+                  </a:lnTo>
+                  <a:lnTo>
+                    <a:pt x="6964104" y="1207701"/>
+                  </a:lnTo>
+                  <a:lnTo>
+                    <a:pt x="6893760" y="1205934"/>
+                  </a:lnTo>
+                  <a:lnTo>
+                    <a:pt x="6823415" y="1204103"/>
+                  </a:lnTo>
+                  <a:lnTo>
+                    <a:pt x="6753071" y="1202208"/>
+                  </a:lnTo>
+                  <a:lnTo>
+                    <a:pt x="6682726" y="1200245"/>
+                  </a:lnTo>
+                  <a:lnTo>
+                    <a:pt x="6612382" y="1198211"/>
+                  </a:lnTo>
+                  <a:lnTo>
+                    <a:pt x="6542037" y="1196105"/>
+                  </a:lnTo>
+                  <a:lnTo>
+                    <a:pt x="6471693" y="1193924"/>
+                  </a:lnTo>
+                  <a:lnTo>
+                    <a:pt x="6401348" y="1191665"/>
+                  </a:lnTo>
+                  <a:lnTo>
+                    <a:pt x="6331004" y="1189326"/>
+                  </a:lnTo>
+                  <a:lnTo>
+                    <a:pt x="6260659" y="1186903"/>
+                  </a:lnTo>
+                  <a:lnTo>
+                    <a:pt x="6190315" y="1184393"/>
+                  </a:lnTo>
+                  <a:lnTo>
+                    <a:pt x="6119970" y="1181794"/>
+                  </a:lnTo>
+                  <a:lnTo>
+                    <a:pt x="6049626" y="1179102"/>
+                  </a:lnTo>
+                  <a:lnTo>
+                    <a:pt x="5979281" y="1176314"/>
+                  </a:lnTo>
+                  <a:lnTo>
+                    <a:pt x="5908937" y="1173426"/>
+                  </a:lnTo>
+                  <a:lnTo>
+                    <a:pt x="5838592" y="1170436"/>
+                  </a:lnTo>
+                  <a:lnTo>
+                    <a:pt x="5768248" y="1167338"/>
+                  </a:lnTo>
+                  <a:lnTo>
+                    <a:pt x="5697903" y="1164130"/>
+                  </a:lnTo>
+                  <a:lnTo>
+                    <a:pt x="5627559" y="1160808"/>
+                  </a:lnTo>
+                  <a:lnTo>
+                    <a:pt x="5557214" y="1157366"/>
+                  </a:lnTo>
+                  <a:lnTo>
+                    <a:pt x="5486870" y="1153802"/>
+                  </a:lnTo>
+                  <a:lnTo>
+                    <a:pt x="5416525" y="1150111"/>
+                  </a:lnTo>
+                  <a:lnTo>
+                    <a:pt x="5346181" y="1146288"/>
+                  </a:lnTo>
+                  <a:lnTo>
+                    <a:pt x="5275836" y="1142329"/>
+                  </a:lnTo>
+                  <a:lnTo>
+                    <a:pt x="5205492" y="1138228"/>
+                  </a:lnTo>
+                  <a:lnTo>
+                    <a:pt x="5135147" y="1133980"/>
+                  </a:lnTo>
+                  <a:lnTo>
+                    <a:pt x="5064803" y="1129582"/>
+                  </a:lnTo>
+                  <a:lnTo>
+                    <a:pt x="4994458" y="1125026"/>
+                  </a:lnTo>
+                  <a:lnTo>
+                    <a:pt x="4924114" y="1120307"/>
+                  </a:lnTo>
+                  <a:lnTo>
+                    <a:pt x="4853769" y="1115420"/>
+                  </a:lnTo>
+                  <a:lnTo>
+                    <a:pt x="4783425" y="1110359"/>
+                  </a:lnTo>
+                  <a:lnTo>
+                    <a:pt x="4713080" y="1105117"/>
+                  </a:lnTo>
+                  <a:lnTo>
+                    <a:pt x="4642736" y="1099687"/>
+                  </a:lnTo>
+                  <a:lnTo>
+                    <a:pt x="4572391" y="1094064"/>
+                  </a:lnTo>
+                  <a:lnTo>
+                    <a:pt x="4502047" y="1088240"/>
+                  </a:lnTo>
+                  <a:lnTo>
+                    <a:pt x="4431702" y="1082209"/>
+                  </a:lnTo>
+                  <a:lnTo>
+                    <a:pt x="4361358" y="1075962"/>
+                  </a:lnTo>
+                  <a:lnTo>
+                    <a:pt x="4291013" y="1069492"/>
+                  </a:lnTo>
+                  <a:lnTo>
+                    <a:pt x="4220669" y="1062790"/>
+                  </a:lnTo>
+                  <a:lnTo>
+                    <a:pt x="4150324" y="1055850"/>
+                  </a:lnTo>
+                  <a:lnTo>
+                    <a:pt x="4079980" y="1048662"/>
+                  </a:lnTo>
+                  <a:lnTo>
+                    <a:pt x="4009635" y="1041218"/>
+                  </a:lnTo>
+                  <a:lnTo>
+                    <a:pt x="3939291" y="1033507"/>
+                  </a:lnTo>
+                  <a:lnTo>
+                    <a:pt x="3868946" y="1025522"/>
+                  </a:lnTo>
+                  <a:lnTo>
+                    <a:pt x="3798602" y="1017251"/>
+                  </a:lnTo>
+                  <a:lnTo>
+                    <a:pt x="3728257" y="1008685"/>
+                  </a:lnTo>
+                  <a:lnTo>
+                    <a:pt x="3657913" y="999813"/>
+                  </a:lnTo>
+                  <a:lnTo>
+                    <a:pt x="3587569" y="990625"/>
+                  </a:lnTo>
+                  <a:lnTo>
+                    <a:pt x="3517224" y="981108"/>
+                  </a:lnTo>
+                  <a:lnTo>
+                    <a:pt x="3446880" y="971252"/>
+                  </a:lnTo>
+                  <a:lnTo>
+                    <a:pt x="3376535" y="961044"/>
+                  </a:lnTo>
+                  <a:lnTo>
+                    <a:pt x="3306191" y="955565"/>
+                  </a:lnTo>
+                  <a:lnTo>
+                    <a:pt x="3235846" y="952225"/>
+                  </a:lnTo>
+                  <a:lnTo>
+                    <a:pt x="3165502" y="948847"/>
+                  </a:lnTo>
+                  <a:lnTo>
+                    <a:pt x="3095157" y="945432"/>
+                  </a:lnTo>
+                  <a:lnTo>
+                    <a:pt x="3024813" y="941980"/>
+                  </a:lnTo>
+                  <a:lnTo>
+                    <a:pt x="2954468" y="938489"/>
+                  </a:lnTo>
+                  <a:lnTo>
+                    <a:pt x="2884124" y="934960"/>
+                  </a:lnTo>
+                  <a:lnTo>
+                    <a:pt x="2813779" y="931391"/>
+                  </a:lnTo>
+                  <a:lnTo>
+                    <a:pt x="2743435" y="927783"/>
+                  </a:lnTo>
+                  <a:lnTo>
+                    <a:pt x="2673090" y="924135"/>
+                  </a:lnTo>
+                  <a:lnTo>
+                    <a:pt x="2602746" y="920447"/>
+                  </a:lnTo>
+                  <a:lnTo>
+                    <a:pt x="2532401" y="916717"/>
+                  </a:lnTo>
+                  <a:lnTo>
+                    <a:pt x="2462057" y="912947"/>
+                  </a:lnTo>
+                  <a:lnTo>
+                    <a:pt x="2391712" y="909135"/>
+                  </a:lnTo>
+                  <a:lnTo>
+                    <a:pt x="2321368" y="905280"/>
+                  </a:lnTo>
+                  <a:lnTo>
+                    <a:pt x="2251023" y="901383"/>
+                  </a:lnTo>
+                  <a:lnTo>
+                    <a:pt x="2180679" y="897442"/>
+                  </a:lnTo>
+                  <a:lnTo>
+                    <a:pt x="2110334" y="893458"/>
+                  </a:lnTo>
+                  <a:lnTo>
+                    <a:pt x="2039990" y="889430"/>
+                  </a:lnTo>
+                  <a:lnTo>
+                    <a:pt x="1969645" y="885358"/>
+                  </a:lnTo>
+                  <a:lnTo>
+                    <a:pt x="1899301" y="881240"/>
+                  </a:lnTo>
+                  <a:lnTo>
+                    <a:pt x="1828956" y="877076"/>
+                  </a:lnTo>
+                  <a:lnTo>
+                    <a:pt x="1758612" y="872867"/>
+                  </a:lnTo>
+                  <a:lnTo>
+                    <a:pt x="1688267" y="868611"/>
+                  </a:lnTo>
+                  <a:lnTo>
+                    <a:pt x="1617923" y="864307"/>
+                  </a:lnTo>
+                  <a:lnTo>
+                    <a:pt x="1547578" y="859956"/>
+                  </a:lnTo>
+                  <a:lnTo>
+                    <a:pt x="1477234" y="855557"/>
+                  </a:lnTo>
+                  <a:lnTo>
+                    <a:pt x="1406889" y="851109"/>
+                  </a:lnTo>
+                  <a:lnTo>
+                    <a:pt x="1336545" y="846612"/>
+                  </a:lnTo>
+                  <a:lnTo>
+                    <a:pt x="1266200" y="842065"/>
+                  </a:lnTo>
+                  <a:lnTo>
+                    <a:pt x="1195856" y="837468"/>
+                  </a:lnTo>
+                  <a:lnTo>
+                    <a:pt x="1125511" y="832820"/>
+                  </a:lnTo>
+                  <a:lnTo>
+                    <a:pt x="1055167" y="828120"/>
+                  </a:lnTo>
+                  <a:lnTo>
+                    <a:pt x="984822" y="823369"/>
+                  </a:lnTo>
+                  <a:lnTo>
+                    <a:pt x="914478" y="818564"/>
+                  </a:lnTo>
+                  <a:lnTo>
+                    <a:pt x="844133" y="813707"/>
+                  </a:lnTo>
+                  <a:lnTo>
+                    <a:pt x="773789" y="808795"/>
+                  </a:lnTo>
+                  <a:lnTo>
+                    <a:pt x="703444" y="803830"/>
+                  </a:lnTo>
+                  <a:lnTo>
+                    <a:pt x="633100" y="798809"/>
+                  </a:lnTo>
+                  <a:lnTo>
+                    <a:pt x="562755" y="793733"/>
+                  </a:lnTo>
+                  <a:lnTo>
+                    <a:pt x="492411" y="788600"/>
+                  </a:lnTo>
+                  <a:lnTo>
+                    <a:pt x="422066" y="783411"/>
+                  </a:lnTo>
+                  <a:lnTo>
+                    <a:pt x="351722" y="778164"/>
+                  </a:lnTo>
+                  <a:lnTo>
+                    <a:pt x="281377" y="772859"/>
+                  </a:lnTo>
+                  <a:lnTo>
+                    <a:pt x="211033" y="767496"/>
+                  </a:lnTo>
+                  <a:lnTo>
+                    <a:pt x="140688" y="762073"/>
+                  </a:lnTo>
+                  <a:lnTo>
+                    <a:pt x="70344" y="756590"/>
+                  </a:lnTo>
+                  <a:lnTo>
+                    <a:pt x="0" y="751046"/>
                   </a:lnTo>
                   <a:close/>
                 </a:path>
@@ -3566,625 +3601,300 @@
         </p:sp>
         <p:sp>
           <p:nvSpPr>
-            <p:cNvPr id="21" name="pl21"/>
-            <p:cNvSpPr/>
-            <p:nvPr/>
-          </p:nvSpPr>
-          <p:spPr>
-            <a:xfrm>
-              <a:off x="1658069" y="2073503"/>
-              <a:ext cx="6604610" cy="3012323"/>
-            </a:xfrm>
-            <a:custGeom>
-              <a:avLst/>
-              <a:pathLst>
-                <a:path w="6604610" h="3012323">
-                  <a:moveTo>
-                    <a:pt x="0" y="0"/>
-                  </a:moveTo>
-                  <a:lnTo>
-                    <a:pt x="15338" y="26430"/>
-                  </a:lnTo>
-                  <a:lnTo>
-                    <a:pt x="86960" y="145599"/>
-                  </a:lnTo>
-                  <a:lnTo>
-                    <a:pt x="158583" y="260659"/>
-                  </a:lnTo>
-                  <a:lnTo>
-                    <a:pt x="230205" y="371754"/>
-                  </a:lnTo>
-                  <a:lnTo>
-                    <a:pt x="301828" y="479019"/>
-                  </a:lnTo>
-                  <a:lnTo>
-                    <a:pt x="373450" y="582588"/>
-                  </a:lnTo>
-                  <a:lnTo>
-                    <a:pt x="445073" y="682586"/>
-                  </a:lnTo>
-                  <a:lnTo>
-                    <a:pt x="516695" y="779137"/>
-                  </a:lnTo>
-                  <a:lnTo>
-                    <a:pt x="588318" y="872361"/>
-                  </a:lnTo>
-                  <a:lnTo>
-                    <a:pt x="659940" y="962371"/>
-                  </a:lnTo>
-                  <a:lnTo>
-                    <a:pt x="731563" y="1049279"/>
-                  </a:lnTo>
-                  <a:lnTo>
-                    <a:pt x="803185" y="1133191"/>
-                  </a:lnTo>
-                  <a:lnTo>
-                    <a:pt x="874808" y="1214211"/>
-                  </a:lnTo>
-                  <a:lnTo>
-                    <a:pt x="946430" y="1292438"/>
-                  </a:lnTo>
-                  <a:lnTo>
-                    <a:pt x="1018053" y="1367969"/>
-                  </a:lnTo>
-                  <a:lnTo>
-                    <a:pt x="1089675" y="1440897"/>
-                  </a:lnTo>
-                  <a:lnTo>
-                    <a:pt x="1161298" y="1511311"/>
-                  </a:lnTo>
-                  <a:lnTo>
-                    <a:pt x="1232920" y="1579297"/>
-                  </a:lnTo>
-                  <a:lnTo>
-                    <a:pt x="1304543" y="1644941"/>
-                  </a:lnTo>
-                  <a:lnTo>
-                    <a:pt x="1376166" y="1708321"/>
-                  </a:lnTo>
-                  <a:lnTo>
-                    <a:pt x="1447788" y="1769517"/>
-                  </a:lnTo>
-                  <a:lnTo>
-                    <a:pt x="1519411" y="1828604"/>
-                  </a:lnTo>
-                  <a:lnTo>
-                    <a:pt x="1591033" y="1885654"/>
-                  </a:lnTo>
-                  <a:lnTo>
-                    <a:pt x="1662656" y="1940738"/>
-                  </a:lnTo>
-                  <a:lnTo>
-                    <a:pt x="1734278" y="1993923"/>
-                  </a:lnTo>
-                  <a:lnTo>
-                    <a:pt x="1805901" y="2045275"/>
-                  </a:lnTo>
-                  <a:lnTo>
-                    <a:pt x="1877523" y="2094857"/>
-                  </a:lnTo>
-                  <a:lnTo>
-                    <a:pt x="1949146" y="2142729"/>
-                  </a:lnTo>
-                  <a:lnTo>
-                    <a:pt x="2020768" y="2188952"/>
-                  </a:lnTo>
-                  <a:lnTo>
-                    <a:pt x="2092391" y="2233582"/>
-                  </a:lnTo>
-                  <a:lnTo>
-                    <a:pt x="2164013" y="2276673"/>
-                  </a:lnTo>
-                  <a:lnTo>
-                    <a:pt x="2235636" y="2318279"/>
-                  </a:lnTo>
-                  <a:lnTo>
-                    <a:pt x="2307258" y="2358451"/>
-                  </a:lnTo>
-                  <a:lnTo>
-                    <a:pt x="2378881" y="2397238"/>
-                  </a:lnTo>
-                  <a:lnTo>
-                    <a:pt x="2450503" y="2434688"/>
-                  </a:lnTo>
-                  <a:lnTo>
-                    <a:pt x="2522126" y="2470847"/>
-                  </a:lnTo>
-                  <a:lnTo>
-                    <a:pt x="2593748" y="2505760"/>
-                  </a:lnTo>
-                  <a:lnTo>
-                    <a:pt x="2665371" y="2539470"/>
-                  </a:lnTo>
-                  <a:lnTo>
-                    <a:pt x="2736994" y="2572018"/>
-                  </a:lnTo>
-                  <a:lnTo>
-                    <a:pt x="2808616" y="2603444"/>
-                  </a:lnTo>
-                  <a:lnTo>
-                    <a:pt x="2880239" y="2633786"/>
-                  </a:lnTo>
-                  <a:lnTo>
-                    <a:pt x="2951861" y="2657056"/>
-                  </a:lnTo>
-                  <a:lnTo>
-                    <a:pt x="3023484" y="2666111"/>
-                  </a:lnTo>
-                  <a:lnTo>
-                    <a:pt x="3095106" y="2675066"/>
-                  </a:lnTo>
-                  <a:lnTo>
-                    <a:pt x="3166729" y="2683923"/>
-                  </a:lnTo>
-                  <a:lnTo>
-                    <a:pt x="3238351" y="2692684"/>
-                  </a:lnTo>
-                  <a:lnTo>
-                    <a:pt x="3309974" y="2701348"/>
-                  </a:lnTo>
-                  <a:lnTo>
-                    <a:pt x="3381596" y="2709917"/>
-                  </a:lnTo>
-                  <a:lnTo>
-                    <a:pt x="3453219" y="2718393"/>
-                  </a:lnTo>
-                  <a:lnTo>
-                    <a:pt x="3524841" y="2726776"/>
-                  </a:lnTo>
-                  <a:lnTo>
-                    <a:pt x="3596464" y="2735067"/>
-                  </a:lnTo>
-                  <a:lnTo>
-                    <a:pt x="3668086" y="2743267"/>
-                  </a:lnTo>
-                  <a:lnTo>
-                    <a:pt x="3739709" y="2751377"/>
-                  </a:lnTo>
-                  <a:lnTo>
-                    <a:pt x="3811331" y="2759399"/>
-                  </a:lnTo>
-                  <a:lnTo>
-                    <a:pt x="3882954" y="2767332"/>
-                  </a:lnTo>
-                  <a:lnTo>
-                    <a:pt x="3954576" y="2775179"/>
-                  </a:lnTo>
-                  <a:lnTo>
-                    <a:pt x="4026199" y="2782940"/>
-                  </a:lnTo>
-                  <a:lnTo>
-                    <a:pt x="4097822" y="2790616"/>
-                  </a:lnTo>
-                  <a:lnTo>
-                    <a:pt x="4169444" y="2798207"/>
-                  </a:lnTo>
-                  <a:lnTo>
-                    <a:pt x="4241067" y="2805716"/>
-                  </a:lnTo>
-                  <a:lnTo>
-                    <a:pt x="4312689" y="2813142"/>
-                  </a:lnTo>
-                  <a:lnTo>
-                    <a:pt x="4384312" y="2820487"/>
-                  </a:lnTo>
-                  <a:lnTo>
-                    <a:pt x="4455934" y="2827752"/>
-                  </a:lnTo>
-                  <a:lnTo>
-                    <a:pt x="4527557" y="2834937"/>
-                  </a:lnTo>
-                  <a:lnTo>
-                    <a:pt x="4599179" y="2842043"/>
-                  </a:lnTo>
-                  <a:lnTo>
-                    <a:pt x="4670802" y="2849071"/>
-                  </a:lnTo>
-                  <a:lnTo>
-                    <a:pt x="4742424" y="2856023"/>
-                  </a:lnTo>
-                  <a:lnTo>
-                    <a:pt x="4814047" y="2862898"/>
-                  </a:lnTo>
-                  <a:lnTo>
-                    <a:pt x="4885669" y="2869698"/>
-                  </a:lnTo>
-                  <a:lnTo>
-                    <a:pt x="4957292" y="2876424"/>
-                  </a:lnTo>
-                  <a:lnTo>
-                    <a:pt x="5028914" y="2883076"/>
-                  </a:lnTo>
-                  <a:lnTo>
-                    <a:pt x="5100537" y="2889655"/>
-                  </a:lnTo>
-                  <a:lnTo>
-                    <a:pt x="5172159" y="2896162"/>
-                  </a:lnTo>
-                  <a:lnTo>
-                    <a:pt x="5243782" y="2902597"/>
-                  </a:lnTo>
-                  <a:lnTo>
-                    <a:pt x="5315404" y="2908963"/>
-                  </a:lnTo>
-                  <a:lnTo>
-                    <a:pt x="5387027" y="2915258"/>
-                  </a:lnTo>
-                  <a:lnTo>
-                    <a:pt x="5458650" y="2921485"/>
-                  </a:lnTo>
-                  <a:lnTo>
-                    <a:pt x="5530272" y="2927643"/>
-                  </a:lnTo>
-                  <a:lnTo>
-                    <a:pt x="5601895" y="2933734"/>
-                  </a:lnTo>
-                  <a:lnTo>
-                    <a:pt x="5673517" y="2939758"/>
-                  </a:lnTo>
-                  <a:lnTo>
-                    <a:pt x="5745140" y="2945716"/>
-                  </a:lnTo>
-                  <a:lnTo>
-                    <a:pt x="5816762" y="2951609"/>
-                  </a:lnTo>
-                  <a:lnTo>
-                    <a:pt x="5888385" y="2957437"/>
-                  </a:lnTo>
-                  <a:lnTo>
-                    <a:pt x="5960007" y="2963202"/>
-                  </a:lnTo>
-                  <a:lnTo>
-                    <a:pt x="6031630" y="2968903"/>
-                  </a:lnTo>
-                  <a:lnTo>
-                    <a:pt x="6103252" y="2974542"/>
-                  </a:lnTo>
-                  <a:lnTo>
-                    <a:pt x="6174875" y="2980120"/>
-                  </a:lnTo>
-                  <a:lnTo>
-                    <a:pt x="6246497" y="2985636"/>
-                  </a:lnTo>
-                  <a:lnTo>
-                    <a:pt x="6318120" y="2991091"/>
-                  </a:lnTo>
-                  <a:lnTo>
-                    <a:pt x="6389742" y="2996487"/>
-                  </a:lnTo>
-                  <a:lnTo>
-                    <a:pt x="6461365" y="3001824"/>
-                  </a:lnTo>
-                  <a:lnTo>
-                    <a:pt x="6532987" y="3007103"/>
-                  </a:lnTo>
-                  <a:lnTo>
-                    <a:pt x="6604610" y="3012323"/>
-                  </a:lnTo>
-                </a:path>
-              </a:pathLst>
-            </a:custGeom>
-          </p:spPr>
-          <p:txBody>
-            <a:bodyPr/>
-            <a:lstStyle/>
-            <a:p/>
-          </p:txBody>
-        </p:sp>
-        <p:sp>
-          <p:nvSpPr>
             <p:cNvPr id="22" name="pl22"/>
             <p:cNvSpPr/>
             <p:nvPr/>
           </p:nvSpPr>
           <p:spPr>
             <a:xfrm>
-              <a:off x="1172049" y="4154675"/>
-              <a:ext cx="7090630" cy="1265405"/>
+              <a:off x="1712659" y="2143092"/>
+              <a:ext cx="6486757" cy="1087076"/>
             </a:xfrm>
             <a:custGeom>
               <a:avLst/>
               <a:pathLst>
-                <a:path w="7090630" h="1265405">
+                <a:path w="6486757" h="1087076">
                   <a:moveTo>
-                    <a:pt x="7090630" y="1265405"/>
+                    <a:pt x="0" y="0"/>
                   </a:moveTo>
                   <a:lnTo>
-                    <a:pt x="7019007" y="1260508"/>
-                  </a:lnTo>
-                  <a:lnTo>
-                    <a:pt x="6947385" y="1255437"/>
-                  </a:lnTo>
-                  <a:lnTo>
-                    <a:pt x="6875762" y="1250184"/>
-                  </a:lnTo>
-                  <a:lnTo>
-                    <a:pt x="6804139" y="1244744"/>
-                  </a:lnTo>
-                  <a:lnTo>
-                    <a:pt x="6732517" y="1239109"/>
-                  </a:lnTo>
-                  <a:lnTo>
-                    <a:pt x="6660894" y="1233274"/>
-                  </a:lnTo>
-                  <a:lnTo>
-                    <a:pt x="6589272" y="1227230"/>
-                  </a:lnTo>
-                  <a:lnTo>
-                    <a:pt x="6517649" y="1220970"/>
-                  </a:lnTo>
-                  <a:lnTo>
-                    <a:pt x="6446027" y="1214487"/>
-                  </a:lnTo>
-                  <a:lnTo>
-                    <a:pt x="6374404" y="1207773"/>
-                  </a:lnTo>
-                  <a:lnTo>
-                    <a:pt x="6302782" y="1200819"/>
-                  </a:lnTo>
-                  <a:lnTo>
-                    <a:pt x="6231159" y="1193616"/>
-                  </a:lnTo>
-                  <a:lnTo>
-                    <a:pt x="6159537" y="1186157"/>
-                  </a:lnTo>
-                  <a:lnTo>
-                    <a:pt x="6087914" y="1178431"/>
-                  </a:lnTo>
-                  <a:lnTo>
-                    <a:pt x="6016292" y="1170429"/>
-                  </a:lnTo>
-                  <a:lnTo>
-                    <a:pt x="5944669" y="1162142"/>
-                  </a:lnTo>
-                  <a:lnTo>
-                    <a:pt x="5873047" y="1153559"/>
-                  </a:lnTo>
-                  <a:lnTo>
-                    <a:pt x="5801424" y="1144669"/>
-                  </a:lnTo>
-                  <a:lnTo>
-                    <a:pt x="5729802" y="1135462"/>
-                  </a:lnTo>
-                  <a:lnTo>
-                    <a:pt x="5658179" y="1125927"/>
-                  </a:lnTo>
-                  <a:lnTo>
-                    <a:pt x="5586557" y="1116051"/>
-                  </a:lnTo>
-                  <a:lnTo>
-                    <a:pt x="5514934" y="1105822"/>
-                  </a:lnTo>
-                  <a:lnTo>
-                    <a:pt x="5443311" y="1095228"/>
-                  </a:lnTo>
-                  <a:lnTo>
-                    <a:pt x="5371689" y="1084257"/>
-                  </a:lnTo>
-                  <a:lnTo>
-                    <a:pt x="5300066" y="1072893"/>
-                  </a:lnTo>
-                  <a:lnTo>
-                    <a:pt x="5228444" y="1061124"/>
-                  </a:lnTo>
-                  <a:lnTo>
-                    <a:pt x="5156821" y="1048934"/>
-                  </a:lnTo>
-                  <a:lnTo>
-                    <a:pt x="5085199" y="1036310"/>
-                  </a:lnTo>
-                  <a:lnTo>
-                    <a:pt x="5013576" y="1023235"/>
-                  </a:lnTo>
-                  <a:lnTo>
-                    <a:pt x="4941954" y="1009693"/>
-                  </a:lnTo>
-                  <a:lnTo>
-                    <a:pt x="4870331" y="995667"/>
-                  </a:lnTo>
-                  <a:lnTo>
-                    <a:pt x="4798709" y="981141"/>
-                  </a:lnTo>
-                  <a:lnTo>
-                    <a:pt x="4727086" y="966096"/>
-                  </a:lnTo>
-                  <a:lnTo>
-                    <a:pt x="4655464" y="950515"/>
-                  </a:lnTo>
-                  <a:lnTo>
-                    <a:pt x="4583841" y="934377"/>
-                  </a:lnTo>
-                  <a:lnTo>
-                    <a:pt x="4512219" y="917662"/>
-                  </a:lnTo>
-                  <a:lnTo>
-                    <a:pt x="4440596" y="900352"/>
-                  </a:lnTo>
-                  <a:lnTo>
-                    <a:pt x="4368974" y="882423"/>
-                  </a:lnTo>
-                  <a:lnTo>
-                    <a:pt x="4297351" y="863854"/>
-                  </a:lnTo>
-                  <a:lnTo>
-                    <a:pt x="4225729" y="844622"/>
-                  </a:lnTo>
-                  <a:lnTo>
-                    <a:pt x="4154106" y="824704"/>
-                  </a:lnTo>
-                  <a:lnTo>
-                    <a:pt x="4082483" y="804075"/>
-                  </a:lnTo>
-                  <a:lnTo>
-                    <a:pt x="4010861" y="782709"/>
-                  </a:lnTo>
-                  <a:lnTo>
-                    <a:pt x="3939238" y="760581"/>
-                  </a:lnTo>
-                  <a:lnTo>
-                    <a:pt x="3867616" y="737662"/>
-                  </a:lnTo>
-                  <a:lnTo>
-                    <a:pt x="3795993" y="713926"/>
-                  </a:lnTo>
-                  <a:lnTo>
-                    <a:pt x="3724371" y="689342"/>
-                  </a:lnTo>
-                  <a:lnTo>
-                    <a:pt x="3652748" y="663880"/>
-                  </a:lnTo>
-                  <a:lnTo>
-                    <a:pt x="3581126" y="637509"/>
-                  </a:lnTo>
-                  <a:lnTo>
-                    <a:pt x="3509503" y="610197"/>
-                  </a:lnTo>
-                  <a:lnTo>
-                    <a:pt x="3437881" y="581910"/>
-                  </a:lnTo>
-                  <a:lnTo>
-                    <a:pt x="3366258" y="566729"/>
-                  </a:lnTo>
-                  <a:lnTo>
-                    <a:pt x="3294636" y="557472"/>
-                  </a:lnTo>
-                  <a:lnTo>
-                    <a:pt x="3223013" y="548114"/>
-                  </a:lnTo>
-                  <a:lnTo>
-                    <a:pt x="3151391" y="538651"/>
-                  </a:lnTo>
-                  <a:lnTo>
-                    <a:pt x="3079768" y="529084"/>
-                  </a:lnTo>
-                  <a:lnTo>
-                    <a:pt x="3008146" y="519411"/>
-                  </a:lnTo>
-                  <a:lnTo>
-                    <a:pt x="2936523" y="509631"/>
-                  </a:lnTo>
-                  <a:lnTo>
-                    <a:pt x="2864901" y="499742"/>
-                  </a:lnTo>
-                  <a:lnTo>
-                    <a:pt x="2793278" y="489744"/>
-                  </a:lnTo>
-                  <a:lnTo>
-                    <a:pt x="2721655" y="479636"/>
-                  </a:lnTo>
-                  <a:lnTo>
-                    <a:pt x="2650033" y="469415"/>
-                  </a:lnTo>
-                  <a:lnTo>
-                    <a:pt x="2578410" y="459081"/>
-                  </a:lnTo>
-                  <a:lnTo>
-                    <a:pt x="2506788" y="448633"/>
-                  </a:lnTo>
-                  <a:lnTo>
-                    <a:pt x="2435165" y="438069"/>
-                  </a:lnTo>
-                  <a:lnTo>
-                    <a:pt x="2363543" y="427388"/>
-                  </a:lnTo>
-                  <a:lnTo>
-                    <a:pt x="2291920" y="416588"/>
-                  </a:lnTo>
-                  <a:lnTo>
-                    <a:pt x="2220298" y="405669"/>
-                  </a:lnTo>
-                  <a:lnTo>
-                    <a:pt x="2148675" y="394630"/>
-                  </a:lnTo>
-                  <a:lnTo>
-                    <a:pt x="2077053" y="383468"/>
-                  </a:lnTo>
-                  <a:lnTo>
-                    <a:pt x="2005430" y="372182"/>
-                  </a:lnTo>
-                  <a:lnTo>
-                    <a:pt x="1933808" y="360771"/>
-                  </a:lnTo>
-                  <a:lnTo>
-                    <a:pt x="1862185" y="349234"/>
-                  </a:lnTo>
-                  <a:lnTo>
-                    <a:pt x="1790563" y="337569"/>
-                  </a:lnTo>
-                  <a:lnTo>
-                    <a:pt x="1718940" y="325776"/>
-                  </a:lnTo>
-                  <a:lnTo>
-                    <a:pt x="1647318" y="313851"/>
-                  </a:lnTo>
-                  <a:lnTo>
-                    <a:pt x="1575695" y="301794"/>
-                  </a:lnTo>
-                  <a:lnTo>
-                    <a:pt x="1504073" y="289604"/>
-                  </a:lnTo>
-                  <a:lnTo>
-                    <a:pt x="1432450" y="277279"/>
-                  </a:lnTo>
-                  <a:lnTo>
-                    <a:pt x="1360827" y="264817"/>
-                  </a:lnTo>
-                  <a:lnTo>
-                    <a:pt x="1289205" y="252218"/>
-                  </a:lnTo>
-                  <a:lnTo>
-                    <a:pt x="1217582" y="239479"/>
-                  </a:lnTo>
-                  <a:lnTo>
-                    <a:pt x="1145960" y="226599"/>
-                  </a:lnTo>
-                  <a:lnTo>
-                    <a:pt x="1074337" y="213576"/>
-                  </a:lnTo>
-                  <a:lnTo>
-                    <a:pt x="1002715" y="200409"/>
-                  </a:lnTo>
-                  <a:lnTo>
-                    <a:pt x="931092" y="187096"/>
-                  </a:lnTo>
-                  <a:lnTo>
-                    <a:pt x="859470" y="173635"/>
-                  </a:lnTo>
-                  <a:lnTo>
-                    <a:pt x="787847" y="160026"/>
-                  </a:lnTo>
-                  <a:lnTo>
-                    <a:pt x="716225" y="146266"/>
-                  </a:lnTo>
-                  <a:lnTo>
-                    <a:pt x="644602" y="132353"/>
-                  </a:lnTo>
-                  <a:lnTo>
-                    <a:pt x="572980" y="118287"/>
-                  </a:lnTo>
-                  <a:lnTo>
-                    <a:pt x="501357" y="104065"/>
-                  </a:lnTo>
-                  <a:lnTo>
-                    <a:pt x="429735" y="89685"/>
-                  </a:lnTo>
-                  <a:lnTo>
-                    <a:pt x="358112" y="75146"/>
-                  </a:lnTo>
-                  <a:lnTo>
-                    <a:pt x="286490" y="60446"/>
-                  </a:lnTo>
-                  <a:lnTo>
-                    <a:pt x="214867" y="45583"/>
-                  </a:lnTo>
-                  <a:lnTo>
-                    <a:pt x="143245" y="30555"/>
-                  </a:lnTo>
-                  <a:lnTo>
-                    <a:pt x="71622" y="15362"/>
-                  </a:lnTo>
-                  <a:lnTo>
-                    <a:pt x="0" y="0"/>
+                    <a:pt x="15064" y="9538"/>
+                  </a:lnTo>
+                  <a:lnTo>
+                    <a:pt x="85408" y="52543"/>
+                  </a:lnTo>
+                  <a:lnTo>
+                    <a:pt x="155753" y="94065"/>
+                  </a:lnTo>
+                  <a:lnTo>
+                    <a:pt x="226097" y="134157"/>
+                  </a:lnTo>
+                  <a:lnTo>
+                    <a:pt x="296442" y="172867"/>
+                  </a:lnTo>
+                  <a:lnTo>
+                    <a:pt x="366786" y="210242"/>
+                  </a:lnTo>
+                  <a:lnTo>
+                    <a:pt x="437131" y="246329"/>
+                  </a:lnTo>
+                  <a:lnTo>
+                    <a:pt x="507475" y="281172"/>
+                  </a:lnTo>
+                  <a:lnTo>
+                    <a:pt x="577820" y="314814"/>
+                  </a:lnTo>
+                  <a:lnTo>
+                    <a:pt x="648164" y="347297"/>
+                  </a:lnTo>
+                  <a:lnTo>
+                    <a:pt x="718509" y="378660"/>
+                  </a:lnTo>
+                  <a:lnTo>
+                    <a:pt x="788853" y="408942"/>
+                  </a:lnTo>
+                  <a:lnTo>
+                    <a:pt x="859198" y="438180"/>
+                  </a:lnTo>
+                  <a:lnTo>
+                    <a:pt x="929542" y="466410"/>
+                  </a:lnTo>
+                  <a:lnTo>
+                    <a:pt x="999887" y="493668"/>
+                  </a:lnTo>
+                  <a:lnTo>
+                    <a:pt x="1070231" y="519985"/>
+                  </a:lnTo>
+                  <a:lnTo>
+                    <a:pt x="1140576" y="545396"/>
+                  </a:lnTo>
+                  <a:lnTo>
+                    <a:pt x="1210920" y="569931"/>
+                  </a:lnTo>
+                  <a:lnTo>
+                    <a:pt x="1281265" y="593620"/>
+                  </a:lnTo>
+                  <a:lnTo>
+                    <a:pt x="1351609" y="616493"/>
+                  </a:lnTo>
+                  <a:lnTo>
+                    <a:pt x="1421954" y="638577"/>
+                  </a:lnTo>
+                  <a:lnTo>
+                    <a:pt x="1492298" y="659900"/>
+                  </a:lnTo>
+                  <a:lnTo>
+                    <a:pt x="1562643" y="680488"/>
+                  </a:lnTo>
+                  <a:lnTo>
+                    <a:pt x="1632987" y="700366"/>
+                  </a:lnTo>
+                  <a:lnTo>
+                    <a:pt x="1703332" y="719560"/>
+                  </a:lnTo>
+                  <a:lnTo>
+                    <a:pt x="1773676" y="738091"/>
+                  </a:lnTo>
+                  <a:lnTo>
+                    <a:pt x="1844021" y="755984"/>
+                  </a:lnTo>
+                  <a:lnTo>
+                    <a:pt x="1914365" y="773260"/>
+                  </a:lnTo>
+                  <a:lnTo>
+                    <a:pt x="1984710" y="789941"/>
+                  </a:lnTo>
+                  <a:lnTo>
+                    <a:pt x="2055054" y="806047"/>
+                  </a:lnTo>
+                  <a:lnTo>
+                    <a:pt x="2125399" y="821597"/>
+                  </a:lnTo>
+                  <a:lnTo>
+                    <a:pt x="2195743" y="836612"/>
+                  </a:lnTo>
+                  <a:lnTo>
+                    <a:pt x="2266088" y="851109"/>
+                  </a:lnTo>
+                  <a:lnTo>
+                    <a:pt x="2336432" y="865106"/>
+                  </a:lnTo>
+                  <a:lnTo>
+                    <a:pt x="2406777" y="878621"/>
+                  </a:lnTo>
+                  <a:lnTo>
+                    <a:pt x="2477121" y="891670"/>
+                  </a:lnTo>
+                  <a:lnTo>
+                    <a:pt x="2547465" y="904270"/>
+                  </a:lnTo>
+                  <a:lnTo>
+                    <a:pt x="2617810" y="916435"/>
+                  </a:lnTo>
+                  <a:lnTo>
+                    <a:pt x="2688154" y="928180"/>
+                  </a:lnTo>
+                  <a:lnTo>
+                    <a:pt x="2758499" y="939521"/>
+                  </a:lnTo>
+                  <a:lnTo>
+                    <a:pt x="2828843" y="950471"/>
+                  </a:lnTo>
+                  <a:lnTo>
+                    <a:pt x="2899188" y="958869"/>
+                  </a:lnTo>
+                  <a:lnTo>
+                    <a:pt x="2969532" y="962136"/>
+                  </a:lnTo>
+                  <a:lnTo>
+                    <a:pt x="3039877" y="965368"/>
+                  </a:lnTo>
+                  <a:lnTo>
+                    <a:pt x="3110221" y="968564"/>
+                  </a:lnTo>
+                  <a:lnTo>
+                    <a:pt x="3180566" y="971726"/>
+                  </a:lnTo>
+                  <a:lnTo>
+                    <a:pt x="3250910" y="974853"/>
+                  </a:lnTo>
+                  <a:lnTo>
+                    <a:pt x="3321255" y="977945"/>
+                  </a:lnTo>
+                  <a:lnTo>
+                    <a:pt x="3391599" y="981004"/>
+                  </a:lnTo>
+                  <a:lnTo>
+                    <a:pt x="3461944" y="984029"/>
+                  </a:lnTo>
+                  <a:lnTo>
+                    <a:pt x="3532288" y="987021"/>
+                  </a:lnTo>
+                  <a:lnTo>
+                    <a:pt x="3602633" y="989980"/>
+                  </a:lnTo>
+                  <a:lnTo>
+                    <a:pt x="3672977" y="992907"/>
+                  </a:lnTo>
+                  <a:lnTo>
+                    <a:pt x="3743322" y="995802"/>
+                  </a:lnTo>
+                  <a:lnTo>
+                    <a:pt x="3813666" y="998665"/>
+                  </a:lnTo>
+                  <a:lnTo>
+                    <a:pt x="3884011" y="1001496"/>
+                  </a:lnTo>
+                  <a:lnTo>
+                    <a:pt x="3954355" y="1004297"/>
+                  </a:lnTo>
+                  <a:lnTo>
+                    <a:pt x="4024700" y="1007067"/>
+                  </a:lnTo>
+                  <a:lnTo>
+                    <a:pt x="4095044" y="1009807"/>
+                  </a:lnTo>
+                  <a:lnTo>
+                    <a:pt x="4165389" y="1012517"/>
+                  </a:lnTo>
+                  <a:lnTo>
+                    <a:pt x="4235733" y="1015197"/>
+                  </a:lnTo>
+                  <a:lnTo>
+                    <a:pt x="4306078" y="1017847"/>
+                  </a:lnTo>
+                  <a:lnTo>
+                    <a:pt x="4376422" y="1020469"/>
+                  </a:lnTo>
+                  <a:lnTo>
+                    <a:pt x="4446767" y="1023062"/>
+                  </a:lnTo>
+                  <a:lnTo>
+                    <a:pt x="4517111" y="1025626"/>
+                  </a:lnTo>
+                  <a:lnTo>
+                    <a:pt x="4587456" y="1028163"/>
+                  </a:lnTo>
+                  <a:lnTo>
+                    <a:pt x="4657800" y="1030671"/>
+                  </a:lnTo>
+                  <a:lnTo>
+                    <a:pt x="4728145" y="1033152"/>
+                  </a:lnTo>
+                  <a:lnTo>
+                    <a:pt x="4798489" y="1035606"/>
+                  </a:lnTo>
+                  <a:lnTo>
+                    <a:pt x="4868834" y="1038033"/>
+                  </a:lnTo>
+                  <a:lnTo>
+                    <a:pt x="4939178" y="1040434"/>
+                  </a:lnTo>
+                  <a:lnTo>
+                    <a:pt x="5009523" y="1042808"/>
+                  </a:lnTo>
+                  <a:lnTo>
+                    <a:pt x="5079867" y="1045156"/>
+                  </a:lnTo>
+                  <a:lnTo>
+                    <a:pt x="5150212" y="1047479"/>
+                  </a:lnTo>
+                  <a:lnTo>
+                    <a:pt x="5220556" y="1049776"/>
+                  </a:lnTo>
+                  <a:lnTo>
+                    <a:pt x="5290901" y="1052048"/>
+                  </a:lnTo>
+                  <a:lnTo>
+                    <a:pt x="5361245" y="1054295"/>
+                  </a:lnTo>
+                  <a:lnTo>
+                    <a:pt x="5431590" y="1056517"/>
+                  </a:lnTo>
+                  <a:lnTo>
+                    <a:pt x="5501934" y="1058715"/>
+                  </a:lnTo>
+                  <a:lnTo>
+                    <a:pt x="5572279" y="1060889"/>
+                  </a:lnTo>
+                  <a:lnTo>
+                    <a:pt x="5642623" y="1063039"/>
+                  </a:lnTo>
+                  <a:lnTo>
+                    <a:pt x="5712968" y="1065166"/>
+                  </a:lnTo>
+                  <a:lnTo>
+                    <a:pt x="5783312" y="1067269"/>
+                  </a:lnTo>
+                  <a:lnTo>
+                    <a:pt x="5853657" y="1069350"/>
+                  </a:lnTo>
+                  <a:lnTo>
+                    <a:pt x="5924001" y="1071407"/>
+                  </a:lnTo>
+                  <a:lnTo>
+                    <a:pt x="5994346" y="1073442"/>
+                  </a:lnTo>
+                  <a:lnTo>
+                    <a:pt x="6064690" y="1075455"/>
+                  </a:lnTo>
+                  <a:lnTo>
+                    <a:pt x="6135035" y="1077445"/>
+                  </a:lnTo>
+                  <a:lnTo>
+                    <a:pt x="6205379" y="1079414"/>
+                  </a:lnTo>
+                  <a:lnTo>
+                    <a:pt x="6275723" y="1081361"/>
+                  </a:lnTo>
+                  <a:lnTo>
+                    <a:pt x="6346068" y="1083287"/>
+                  </a:lnTo>
+                  <a:lnTo>
+                    <a:pt x="6416412" y="1085192"/>
+                  </a:lnTo>
+                  <a:lnTo>
+                    <a:pt x="6486757" y="1087076"/>
                   </a:lnTo>
                 </a:path>
               </a:pathLst>
@@ -4204,312 +3914,637 @@
           </p:nvSpPr>
           <p:spPr>
             <a:xfrm>
-              <a:off x="1172049" y="3067534"/>
-              <a:ext cx="7090630" cy="2235423"/>
+              <a:off x="1235312" y="2894138"/>
+              <a:ext cx="6964104" cy="456655"/>
             </a:xfrm>
             <a:custGeom>
               <a:avLst/>
               <a:pathLst>
-                <a:path w="7090630" h="2235423">
+                <a:path w="6964104" h="456655">
+                  <a:moveTo>
+                    <a:pt x="6964104" y="456655"/>
+                  </a:moveTo>
+                  <a:lnTo>
+                    <a:pt x="6893760" y="454887"/>
+                  </a:lnTo>
+                  <a:lnTo>
+                    <a:pt x="6823415" y="453057"/>
+                  </a:lnTo>
+                  <a:lnTo>
+                    <a:pt x="6753071" y="451162"/>
+                  </a:lnTo>
+                  <a:lnTo>
+                    <a:pt x="6682726" y="449198"/>
+                  </a:lnTo>
+                  <a:lnTo>
+                    <a:pt x="6612382" y="447165"/>
+                  </a:lnTo>
+                  <a:lnTo>
+                    <a:pt x="6542037" y="445059"/>
+                  </a:lnTo>
+                  <a:lnTo>
+                    <a:pt x="6471693" y="442878"/>
+                  </a:lnTo>
+                  <a:lnTo>
+                    <a:pt x="6401348" y="440619"/>
+                  </a:lnTo>
+                  <a:lnTo>
+                    <a:pt x="6331004" y="438280"/>
+                  </a:lnTo>
+                  <a:lnTo>
+                    <a:pt x="6260659" y="435857"/>
+                  </a:lnTo>
+                  <a:lnTo>
+                    <a:pt x="6190315" y="433347"/>
+                  </a:lnTo>
+                  <a:lnTo>
+                    <a:pt x="6119970" y="430748"/>
+                  </a:lnTo>
+                  <a:lnTo>
+                    <a:pt x="6049626" y="428056"/>
+                  </a:lnTo>
+                  <a:lnTo>
+                    <a:pt x="5979281" y="425268"/>
+                  </a:lnTo>
+                  <a:lnTo>
+                    <a:pt x="5908937" y="422380"/>
+                  </a:lnTo>
+                  <a:lnTo>
+                    <a:pt x="5838592" y="419389"/>
+                  </a:lnTo>
+                  <a:lnTo>
+                    <a:pt x="5768248" y="416292"/>
+                  </a:lnTo>
+                  <a:lnTo>
+                    <a:pt x="5697903" y="413084"/>
+                  </a:lnTo>
+                  <a:lnTo>
+                    <a:pt x="5627559" y="409761"/>
+                  </a:lnTo>
+                  <a:lnTo>
+                    <a:pt x="5557214" y="406320"/>
+                  </a:lnTo>
+                  <a:lnTo>
+                    <a:pt x="5486870" y="402756"/>
+                  </a:lnTo>
+                  <a:lnTo>
+                    <a:pt x="5416525" y="399065"/>
+                  </a:lnTo>
+                  <a:lnTo>
+                    <a:pt x="5346181" y="395242"/>
+                  </a:lnTo>
+                  <a:lnTo>
+                    <a:pt x="5275836" y="391282"/>
+                  </a:lnTo>
+                  <a:lnTo>
+                    <a:pt x="5205492" y="387182"/>
+                  </a:lnTo>
+                  <a:lnTo>
+                    <a:pt x="5135147" y="382934"/>
+                  </a:lnTo>
+                  <a:lnTo>
+                    <a:pt x="5064803" y="378535"/>
+                  </a:lnTo>
+                  <a:lnTo>
+                    <a:pt x="4994458" y="373980"/>
+                  </a:lnTo>
+                  <a:lnTo>
+                    <a:pt x="4924114" y="369261"/>
+                  </a:lnTo>
+                  <a:lnTo>
+                    <a:pt x="4853769" y="364374"/>
+                  </a:lnTo>
+                  <a:lnTo>
+                    <a:pt x="4783425" y="359313"/>
+                  </a:lnTo>
+                  <a:lnTo>
+                    <a:pt x="4713080" y="354070"/>
+                  </a:lnTo>
+                  <a:lnTo>
+                    <a:pt x="4642736" y="348641"/>
+                  </a:lnTo>
+                  <a:lnTo>
+                    <a:pt x="4572391" y="343018"/>
+                  </a:lnTo>
+                  <a:lnTo>
+                    <a:pt x="4502047" y="337194"/>
+                  </a:lnTo>
+                  <a:lnTo>
+                    <a:pt x="4431702" y="331162"/>
+                  </a:lnTo>
+                  <a:lnTo>
+                    <a:pt x="4361358" y="324915"/>
+                  </a:lnTo>
+                  <a:lnTo>
+                    <a:pt x="4291013" y="318445"/>
+                  </a:lnTo>
+                  <a:lnTo>
+                    <a:pt x="4220669" y="311744"/>
+                  </a:lnTo>
+                  <a:lnTo>
+                    <a:pt x="4150324" y="304804"/>
+                  </a:lnTo>
+                  <a:lnTo>
+                    <a:pt x="4079980" y="297616"/>
+                  </a:lnTo>
+                  <a:lnTo>
+                    <a:pt x="4009635" y="290171"/>
+                  </a:lnTo>
+                  <a:lnTo>
+                    <a:pt x="3939291" y="282461"/>
+                  </a:lnTo>
+                  <a:lnTo>
+                    <a:pt x="3868946" y="274475"/>
+                  </a:lnTo>
+                  <a:lnTo>
+                    <a:pt x="3798602" y="266205"/>
+                  </a:lnTo>
+                  <a:lnTo>
+                    <a:pt x="3728257" y="257639"/>
+                  </a:lnTo>
+                  <a:lnTo>
+                    <a:pt x="3657913" y="248767"/>
+                  </a:lnTo>
+                  <a:lnTo>
+                    <a:pt x="3587569" y="239578"/>
+                  </a:lnTo>
+                  <a:lnTo>
+                    <a:pt x="3517224" y="230062"/>
+                  </a:lnTo>
+                  <a:lnTo>
+                    <a:pt x="3446880" y="220206"/>
+                  </a:lnTo>
+                  <a:lnTo>
+                    <a:pt x="3376535" y="209997"/>
+                  </a:lnTo>
+                  <a:lnTo>
+                    <a:pt x="3306191" y="204519"/>
+                  </a:lnTo>
+                  <a:lnTo>
+                    <a:pt x="3235846" y="201178"/>
+                  </a:lnTo>
+                  <a:lnTo>
+                    <a:pt x="3165502" y="197801"/>
+                  </a:lnTo>
+                  <a:lnTo>
+                    <a:pt x="3095157" y="194386"/>
+                  </a:lnTo>
+                  <a:lnTo>
+                    <a:pt x="3024813" y="190934"/>
+                  </a:lnTo>
+                  <a:lnTo>
+                    <a:pt x="2954468" y="187443"/>
+                  </a:lnTo>
+                  <a:lnTo>
+                    <a:pt x="2884124" y="183913"/>
+                  </a:lnTo>
+                  <a:lnTo>
+                    <a:pt x="2813779" y="180345"/>
+                  </a:lnTo>
+                  <a:lnTo>
+                    <a:pt x="2743435" y="176737"/>
+                  </a:lnTo>
+                  <a:lnTo>
+                    <a:pt x="2673090" y="173089"/>
+                  </a:lnTo>
+                  <a:lnTo>
+                    <a:pt x="2602746" y="169400"/>
+                  </a:lnTo>
+                  <a:lnTo>
+                    <a:pt x="2532401" y="165671"/>
+                  </a:lnTo>
+                  <a:lnTo>
+                    <a:pt x="2462057" y="161901"/>
+                  </a:lnTo>
+                  <a:lnTo>
+                    <a:pt x="2391712" y="158088"/>
+                  </a:lnTo>
+                  <a:lnTo>
+                    <a:pt x="2321368" y="154234"/>
+                  </a:lnTo>
+                  <a:lnTo>
+                    <a:pt x="2251023" y="150337"/>
+                  </a:lnTo>
+                  <a:lnTo>
+                    <a:pt x="2180679" y="146396"/>
+                  </a:lnTo>
+                  <a:lnTo>
+                    <a:pt x="2110334" y="142412"/>
+                  </a:lnTo>
+                  <a:lnTo>
+                    <a:pt x="2039990" y="138384"/>
+                  </a:lnTo>
+                  <a:lnTo>
+                    <a:pt x="1969645" y="134311"/>
+                  </a:lnTo>
+                  <a:lnTo>
+                    <a:pt x="1899301" y="130194"/>
+                  </a:lnTo>
+                  <a:lnTo>
+                    <a:pt x="1828956" y="126030"/>
+                  </a:lnTo>
+                  <a:lnTo>
+                    <a:pt x="1758612" y="121821"/>
+                  </a:lnTo>
+                  <a:lnTo>
+                    <a:pt x="1688267" y="117564"/>
+                  </a:lnTo>
+                  <a:lnTo>
+                    <a:pt x="1617923" y="113261"/>
+                  </a:lnTo>
+                  <a:lnTo>
+                    <a:pt x="1547578" y="108910"/>
+                  </a:lnTo>
+                  <a:lnTo>
+                    <a:pt x="1477234" y="104511"/>
+                  </a:lnTo>
+                  <a:lnTo>
+                    <a:pt x="1406889" y="100063"/>
+                  </a:lnTo>
+                  <a:lnTo>
+                    <a:pt x="1336545" y="95566"/>
+                  </a:lnTo>
+                  <a:lnTo>
+                    <a:pt x="1266200" y="91019"/>
+                  </a:lnTo>
+                  <a:lnTo>
+                    <a:pt x="1195856" y="86422"/>
+                  </a:lnTo>
+                  <a:lnTo>
+                    <a:pt x="1125511" y="81774"/>
+                  </a:lnTo>
+                  <a:lnTo>
+                    <a:pt x="1055167" y="77074"/>
+                  </a:lnTo>
+                  <a:lnTo>
+                    <a:pt x="984822" y="72322"/>
+                  </a:lnTo>
+                  <a:lnTo>
+                    <a:pt x="914478" y="67518"/>
+                  </a:lnTo>
+                  <a:lnTo>
+                    <a:pt x="844133" y="62661"/>
+                  </a:lnTo>
+                  <a:lnTo>
+                    <a:pt x="773789" y="57749"/>
+                  </a:lnTo>
+                  <a:lnTo>
+                    <a:pt x="703444" y="52784"/>
+                  </a:lnTo>
+                  <a:lnTo>
+                    <a:pt x="633100" y="47763"/>
+                  </a:lnTo>
+                  <a:lnTo>
+                    <a:pt x="562755" y="42687"/>
+                  </a:lnTo>
+                  <a:lnTo>
+                    <a:pt x="492411" y="37554"/>
+                  </a:lnTo>
+                  <a:lnTo>
+                    <a:pt x="422066" y="32365"/>
+                  </a:lnTo>
+                  <a:lnTo>
+                    <a:pt x="351722" y="27118"/>
+                  </a:lnTo>
+                  <a:lnTo>
+                    <a:pt x="281377" y="21813"/>
+                  </a:lnTo>
+                  <a:lnTo>
+                    <a:pt x="211033" y="16449"/>
+                  </a:lnTo>
+                  <a:lnTo>
+                    <a:pt x="140688" y="11026"/>
+                  </a:lnTo>
+                  <a:lnTo>
+                    <a:pt x="70344" y="5543"/>
+                  </a:lnTo>
+                  <a:lnTo>
+                    <a:pt x="0" y="0"/>
+                  </a:lnTo>
+                </a:path>
+              </a:pathLst>
+            </a:custGeom>
+          </p:spPr>
+          <p:txBody>
+            <a:bodyPr/>
+            <a:lstStyle/>
+            <a:p/>
+          </p:txBody>
+        </p:sp>
+        <p:sp>
+          <p:nvSpPr>
+            <p:cNvPr id="24" name="pl24"/>
+            <p:cNvSpPr/>
+            <p:nvPr/>
+          </p:nvSpPr>
+          <p:spPr>
+            <a:xfrm>
+              <a:off x="1235312" y="2501814"/>
+              <a:ext cx="6964104" cy="806711"/>
+            </a:xfrm>
+            <a:custGeom>
+              <a:avLst/>
+              <a:pathLst>
+                <a:path w="6964104" h="806711">
                   <a:moveTo>
                     <a:pt x="0" y="0"/>
                   </a:moveTo>
                   <a:lnTo>
-                    <a:pt x="71622" y="56719"/>
-                  </a:lnTo>
-                  <a:lnTo>
-                    <a:pt x="143245" y="112145"/>
-                  </a:lnTo>
-                  <a:lnTo>
-                    <a:pt x="214867" y="166310"/>
-                  </a:lnTo>
-                  <a:lnTo>
-                    <a:pt x="286490" y="219240"/>
-                  </a:lnTo>
-                  <a:lnTo>
-                    <a:pt x="358112" y="270964"/>
-                  </a:lnTo>
-                  <a:lnTo>
-                    <a:pt x="429735" y="321510"/>
-                  </a:lnTo>
-                  <a:lnTo>
-                    <a:pt x="501357" y="370905"/>
-                  </a:lnTo>
-                  <a:lnTo>
-                    <a:pt x="572980" y="419174"/>
-                  </a:lnTo>
-                  <a:lnTo>
-                    <a:pt x="644602" y="466344"/>
-                  </a:lnTo>
-                  <a:lnTo>
-                    <a:pt x="716225" y="512439"/>
-                  </a:lnTo>
-                  <a:lnTo>
-                    <a:pt x="787847" y="557484"/>
-                  </a:lnTo>
-                  <a:lnTo>
-                    <a:pt x="859470" y="601503"/>
-                  </a:lnTo>
-                  <a:lnTo>
-                    <a:pt x="931092" y="644519"/>
-                  </a:lnTo>
-                  <a:lnTo>
-                    <a:pt x="1002715" y="686555"/>
-                  </a:lnTo>
-                  <a:lnTo>
-                    <a:pt x="1074337" y="727633"/>
-                  </a:lnTo>
-                  <a:lnTo>
-                    <a:pt x="1145960" y="767776"/>
-                  </a:lnTo>
-                  <a:lnTo>
-                    <a:pt x="1217582" y="807004"/>
-                  </a:lnTo>
-                  <a:lnTo>
-                    <a:pt x="1289205" y="845338"/>
-                  </a:lnTo>
-                  <a:lnTo>
-                    <a:pt x="1360827" y="882800"/>
-                  </a:lnTo>
-                  <a:lnTo>
-                    <a:pt x="1432450" y="919407"/>
-                  </a:lnTo>
-                  <a:lnTo>
-                    <a:pt x="1504073" y="955181"/>
-                  </a:lnTo>
-                  <a:lnTo>
-                    <a:pt x="1575695" y="990140"/>
-                  </a:lnTo>
-                  <a:lnTo>
-                    <a:pt x="1647318" y="1024302"/>
-                  </a:lnTo>
-                  <a:lnTo>
-                    <a:pt x="1718940" y="1057686"/>
-                  </a:lnTo>
-                  <a:lnTo>
-                    <a:pt x="1790563" y="1090310"/>
-                  </a:lnTo>
-                  <a:lnTo>
-                    <a:pt x="1862185" y="1122190"/>
-                  </a:lnTo>
-                  <a:lnTo>
-                    <a:pt x="1933808" y="1153344"/>
-                  </a:lnTo>
-                  <a:lnTo>
-                    <a:pt x="2005430" y="1183788"/>
-                  </a:lnTo>
-                  <a:lnTo>
-                    <a:pt x="2077053" y="1213539"/>
-                  </a:lnTo>
-                  <a:lnTo>
-                    <a:pt x="2148675" y="1242612"/>
-                  </a:lnTo>
-                  <a:lnTo>
-                    <a:pt x="2220298" y="1271023"/>
-                  </a:lnTo>
-                  <a:lnTo>
-                    <a:pt x="2291920" y="1298786"/>
-                  </a:lnTo>
-                  <a:lnTo>
-                    <a:pt x="2363543" y="1325917"/>
-                  </a:lnTo>
-                  <a:lnTo>
-                    <a:pt x="2435165" y="1352430"/>
-                  </a:lnTo>
-                  <a:lnTo>
-                    <a:pt x="2506788" y="1378339"/>
-                  </a:lnTo>
-                  <a:lnTo>
-                    <a:pt x="2578410" y="1403658"/>
-                  </a:lnTo>
-                  <a:lnTo>
-                    <a:pt x="2650033" y="1428399"/>
-                  </a:lnTo>
-                  <a:lnTo>
-                    <a:pt x="2721655" y="1452578"/>
-                  </a:lnTo>
-                  <a:lnTo>
-                    <a:pt x="2793278" y="1476205"/>
-                  </a:lnTo>
-                  <a:lnTo>
-                    <a:pt x="2864901" y="1499294"/>
-                  </a:lnTo>
-                  <a:lnTo>
-                    <a:pt x="2936523" y="1521857"/>
-                  </a:lnTo>
-                  <a:lnTo>
-                    <a:pt x="3008146" y="1543906"/>
-                  </a:lnTo>
-                  <a:lnTo>
-                    <a:pt x="3079768" y="1565453"/>
-                  </a:lnTo>
-                  <a:lnTo>
-                    <a:pt x="3151391" y="1586509"/>
-                  </a:lnTo>
-                  <a:lnTo>
-                    <a:pt x="3223013" y="1607085"/>
-                  </a:lnTo>
-                  <a:lnTo>
-                    <a:pt x="3294636" y="1627193"/>
-                  </a:lnTo>
-                  <a:lnTo>
-                    <a:pt x="3366258" y="1646842"/>
-                  </a:lnTo>
-                  <a:lnTo>
-                    <a:pt x="3437881" y="1666044"/>
-                  </a:lnTo>
-                  <a:lnTo>
-                    <a:pt x="3509503" y="1684808"/>
-                  </a:lnTo>
-                  <a:lnTo>
-                    <a:pt x="3581126" y="1703145"/>
-                  </a:lnTo>
-                  <a:lnTo>
-                    <a:pt x="3652748" y="1721064"/>
-                  </a:lnTo>
-                  <a:lnTo>
-                    <a:pt x="3724371" y="1738575"/>
-                  </a:lnTo>
-                  <a:lnTo>
-                    <a:pt x="3795993" y="1755687"/>
-                  </a:lnTo>
-                  <a:lnTo>
-                    <a:pt x="3867616" y="1772409"/>
-                  </a:lnTo>
-                  <a:lnTo>
-                    <a:pt x="3939238" y="1788750"/>
-                  </a:lnTo>
-                  <a:lnTo>
-                    <a:pt x="4010861" y="1804719"/>
-                  </a:lnTo>
-                  <a:lnTo>
-                    <a:pt x="4082483" y="1820324"/>
-                  </a:lnTo>
-                  <a:lnTo>
-                    <a:pt x="4154106" y="1835574"/>
-                  </a:lnTo>
-                  <a:lnTo>
-                    <a:pt x="4225729" y="1850476"/>
-                  </a:lnTo>
-                  <a:lnTo>
-                    <a:pt x="4297351" y="1865039"/>
-                  </a:lnTo>
-                  <a:lnTo>
-                    <a:pt x="4368974" y="1879270"/>
-                  </a:lnTo>
-                  <a:lnTo>
-                    <a:pt x="4440596" y="1893177"/>
-                  </a:lnTo>
-                  <a:lnTo>
-                    <a:pt x="4512219" y="1906767"/>
-                  </a:lnTo>
-                  <a:lnTo>
-                    <a:pt x="4583841" y="1920047"/>
-                  </a:lnTo>
-                  <a:lnTo>
-                    <a:pt x="4655464" y="1933025"/>
-                  </a:lnTo>
-                  <a:lnTo>
-                    <a:pt x="4727086" y="1945707"/>
-                  </a:lnTo>
-                  <a:lnTo>
-                    <a:pt x="4798709" y="1958100"/>
-                  </a:lnTo>
-                  <a:lnTo>
-                    <a:pt x="4870331" y="1970211"/>
-                  </a:lnTo>
-                  <a:lnTo>
-                    <a:pt x="4941954" y="1982046"/>
-                  </a:lnTo>
-                  <a:lnTo>
-                    <a:pt x="5013576" y="1993611"/>
-                  </a:lnTo>
-                  <a:lnTo>
-                    <a:pt x="5085199" y="2004913"/>
-                  </a:lnTo>
-                  <a:lnTo>
-                    <a:pt x="5156821" y="2015958"/>
-                  </a:lnTo>
-                  <a:lnTo>
-                    <a:pt x="5228444" y="2026751"/>
-                  </a:lnTo>
-                  <a:lnTo>
-                    <a:pt x="5300066" y="2037298"/>
-                  </a:lnTo>
-                  <a:lnTo>
-                    <a:pt x="5371689" y="2047604"/>
-                  </a:lnTo>
-                  <a:lnTo>
-                    <a:pt x="5443311" y="2057676"/>
-                  </a:lnTo>
-                  <a:lnTo>
-                    <a:pt x="5514934" y="2067519"/>
-                  </a:lnTo>
-                  <a:lnTo>
-                    <a:pt x="5586557" y="2077137"/>
-                  </a:lnTo>
-                  <a:lnTo>
-                    <a:pt x="5658179" y="2086536"/>
-                  </a:lnTo>
-                  <a:lnTo>
-                    <a:pt x="5729802" y="2095721"/>
-                  </a:lnTo>
-                  <a:lnTo>
-                    <a:pt x="5801424" y="2104697"/>
-                  </a:lnTo>
-                  <a:lnTo>
-                    <a:pt x="5873047" y="2113468"/>
-                  </a:lnTo>
-                  <a:lnTo>
-                    <a:pt x="5944669" y="2122039"/>
-                  </a:lnTo>
-                  <a:lnTo>
-                    <a:pt x="6016292" y="2130415"/>
-                  </a:lnTo>
-                  <a:lnTo>
-                    <a:pt x="6087914" y="2138601"/>
-                  </a:lnTo>
-                  <a:lnTo>
-                    <a:pt x="6159537" y="2146600"/>
-                  </a:lnTo>
-                  <a:lnTo>
-                    <a:pt x="6231159" y="2154416"/>
-                  </a:lnTo>
-                  <a:lnTo>
-                    <a:pt x="6302782" y="2162055"/>
-                  </a:lnTo>
-                  <a:lnTo>
-                    <a:pt x="6374404" y="2169519"/>
-                  </a:lnTo>
-                  <a:lnTo>
-                    <a:pt x="6446027" y="2176814"/>
-                  </a:lnTo>
-                  <a:lnTo>
-                    <a:pt x="6517649" y="2183942"/>
-                  </a:lnTo>
-                  <a:lnTo>
-                    <a:pt x="6589272" y="2190908"/>
-                  </a:lnTo>
-                  <a:lnTo>
-                    <a:pt x="6660894" y="2197715"/>
-                  </a:lnTo>
-                  <a:lnTo>
-                    <a:pt x="6732517" y="2204367"/>
-                  </a:lnTo>
-                  <a:lnTo>
-                    <a:pt x="6804139" y="2210868"/>
-                  </a:lnTo>
-                  <a:lnTo>
-                    <a:pt x="6875762" y="2217221"/>
-                  </a:lnTo>
-                  <a:lnTo>
-                    <a:pt x="6947385" y="2223428"/>
-                  </a:lnTo>
-                  <a:lnTo>
-                    <a:pt x="7019007" y="2229495"/>
-                  </a:lnTo>
-                  <a:lnTo>
-                    <a:pt x="7090630" y="2235423"/>
+                    <a:pt x="70344" y="20468"/>
+                  </a:lnTo>
+                  <a:lnTo>
+                    <a:pt x="140688" y="40470"/>
+                  </a:lnTo>
+                  <a:lnTo>
+                    <a:pt x="211033" y="60017"/>
+                  </a:lnTo>
+                  <a:lnTo>
+                    <a:pt x="281377" y="79118"/>
+                  </a:lnTo>
+                  <a:lnTo>
+                    <a:pt x="351722" y="97784"/>
+                  </a:lnTo>
+                  <a:lnTo>
+                    <a:pt x="422066" y="116025"/>
+                  </a:lnTo>
+                  <a:lnTo>
+                    <a:pt x="492411" y="133851"/>
+                  </a:lnTo>
+                  <a:lnTo>
+                    <a:pt x="562755" y="151270"/>
+                  </a:lnTo>
+                  <a:lnTo>
+                    <a:pt x="633100" y="168292"/>
+                  </a:lnTo>
+                  <a:lnTo>
+                    <a:pt x="703444" y="184927"/>
+                  </a:lnTo>
+                  <a:lnTo>
+                    <a:pt x="773789" y="201183"/>
+                  </a:lnTo>
+                  <a:lnTo>
+                    <a:pt x="844133" y="217068"/>
+                  </a:lnTo>
+                  <a:lnTo>
+                    <a:pt x="914478" y="232591"/>
+                  </a:lnTo>
+                  <a:lnTo>
+                    <a:pt x="984822" y="247761"/>
+                  </a:lnTo>
+                  <a:lnTo>
+                    <a:pt x="1055167" y="262585"/>
+                  </a:lnTo>
+                  <a:lnTo>
+                    <a:pt x="1125511" y="277072"/>
+                  </a:lnTo>
+                  <a:lnTo>
+                    <a:pt x="1195856" y="291228"/>
+                  </a:lnTo>
+                  <a:lnTo>
+                    <a:pt x="1266200" y="305062"/>
+                  </a:lnTo>
+                  <a:lnTo>
+                    <a:pt x="1336545" y="318581"/>
+                  </a:lnTo>
+                  <a:lnTo>
+                    <a:pt x="1406889" y="331792"/>
+                  </a:lnTo>
+                  <a:lnTo>
+                    <a:pt x="1477234" y="344702"/>
+                  </a:lnTo>
+                  <a:lnTo>
+                    <a:pt x="1547578" y="357318"/>
+                  </a:lnTo>
+                  <a:lnTo>
+                    <a:pt x="1617923" y="369646"/>
+                  </a:lnTo>
+                  <a:lnTo>
+                    <a:pt x="1688267" y="381694"/>
+                  </a:lnTo>
+                  <a:lnTo>
+                    <a:pt x="1758612" y="393467"/>
+                  </a:lnTo>
+                  <a:lnTo>
+                    <a:pt x="1828956" y="404972"/>
+                  </a:lnTo>
+                  <a:lnTo>
+                    <a:pt x="1899301" y="416214"/>
+                  </a:lnTo>
+                  <a:lnTo>
+                    <a:pt x="1969645" y="427201"/>
+                  </a:lnTo>
+                  <a:lnTo>
+                    <a:pt x="2039990" y="437937"/>
+                  </a:lnTo>
+                  <a:lnTo>
+                    <a:pt x="2110334" y="448429"/>
+                  </a:lnTo>
+                  <a:lnTo>
+                    <a:pt x="2180679" y="458682"/>
+                  </a:lnTo>
+                  <a:lnTo>
+                    <a:pt x="2251023" y="468701"/>
+                  </a:lnTo>
+                  <a:lnTo>
+                    <a:pt x="2321368" y="478492"/>
+                  </a:lnTo>
+                  <a:lnTo>
+                    <a:pt x="2391712" y="488060"/>
+                  </a:lnTo>
+                  <a:lnTo>
+                    <a:pt x="2462057" y="497410"/>
+                  </a:lnTo>
+                  <a:lnTo>
+                    <a:pt x="2532401" y="506547"/>
+                  </a:lnTo>
+                  <a:lnTo>
+                    <a:pt x="2602746" y="515475"/>
+                  </a:lnTo>
+                  <a:lnTo>
+                    <a:pt x="2673090" y="524201"/>
+                  </a:lnTo>
+                  <a:lnTo>
+                    <a:pt x="2743435" y="532727"/>
+                  </a:lnTo>
+                  <a:lnTo>
+                    <a:pt x="2813779" y="541060"/>
+                  </a:lnTo>
+                  <a:lnTo>
+                    <a:pt x="2884124" y="549202"/>
+                  </a:lnTo>
+                  <a:lnTo>
+                    <a:pt x="2954468" y="557159"/>
+                  </a:lnTo>
+                  <a:lnTo>
+                    <a:pt x="3024813" y="564935"/>
+                  </a:lnTo>
+                  <a:lnTo>
+                    <a:pt x="3095157" y="572533"/>
+                  </a:lnTo>
+                  <a:lnTo>
+                    <a:pt x="3165502" y="579959"/>
+                  </a:lnTo>
+                  <a:lnTo>
+                    <a:pt x="3235846" y="587215"/>
+                  </a:lnTo>
+                  <a:lnTo>
+                    <a:pt x="3306191" y="594306"/>
+                  </a:lnTo>
+                  <a:lnTo>
+                    <a:pt x="3376535" y="601236"/>
+                  </a:lnTo>
+                  <a:lnTo>
+                    <a:pt x="3446880" y="608007"/>
+                  </a:lnTo>
+                  <a:lnTo>
+                    <a:pt x="3517224" y="614625"/>
+                  </a:lnTo>
+                  <a:lnTo>
+                    <a:pt x="3587569" y="621091"/>
+                  </a:lnTo>
+                  <a:lnTo>
+                    <a:pt x="3657913" y="627411"/>
+                  </a:lnTo>
+                  <a:lnTo>
+                    <a:pt x="3728257" y="633586"/>
+                  </a:lnTo>
+                  <a:lnTo>
+                    <a:pt x="3798602" y="639620"/>
+                  </a:lnTo>
+                  <a:lnTo>
+                    <a:pt x="3868946" y="645518"/>
+                  </a:lnTo>
+                  <a:lnTo>
+                    <a:pt x="3939291" y="651280"/>
+                  </a:lnTo>
+                  <a:lnTo>
+                    <a:pt x="4009635" y="656912"/>
+                  </a:lnTo>
+                  <a:lnTo>
+                    <a:pt x="4079980" y="662415"/>
+                  </a:lnTo>
+                  <a:lnTo>
+                    <a:pt x="4150324" y="667793"/>
+                  </a:lnTo>
+                  <a:lnTo>
+                    <a:pt x="4220669" y="673048"/>
+                  </a:lnTo>
+                  <a:lnTo>
+                    <a:pt x="4291013" y="678184"/>
+                  </a:lnTo>
+                  <a:lnTo>
+                    <a:pt x="4361358" y="683203"/>
+                  </a:lnTo>
+                  <a:lnTo>
+                    <a:pt x="4431702" y="688107"/>
+                  </a:lnTo>
+                  <a:lnTo>
+                    <a:pt x="4502047" y="692899"/>
+                  </a:lnTo>
+                  <a:lnTo>
+                    <a:pt x="4572391" y="697583"/>
+                  </a:lnTo>
+                  <a:lnTo>
+                    <a:pt x="4642736" y="702160"/>
+                  </a:lnTo>
+                  <a:lnTo>
+                    <a:pt x="4713080" y="706632"/>
+                  </a:lnTo>
+                  <a:lnTo>
+                    <a:pt x="4783425" y="711003"/>
+                  </a:lnTo>
+                  <a:lnTo>
+                    <a:pt x="4853769" y="715273"/>
+                  </a:lnTo>
+                  <a:lnTo>
+                    <a:pt x="4924114" y="719447"/>
+                  </a:lnTo>
+                  <a:lnTo>
+                    <a:pt x="4994458" y="723526"/>
+                  </a:lnTo>
+                  <a:lnTo>
+                    <a:pt x="5064803" y="727511"/>
+                  </a:lnTo>
+                  <a:lnTo>
+                    <a:pt x="5135147" y="731406"/>
+                  </a:lnTo>
+                  <a:lnTo>
+                    <a:pt x="5205492" y="735212"/>
+                  </a:lnTo>
+                  <a:lnTo>
+                    <a:pt x="5275836" y="738932"/>
+                  </a:lnTo>
+                  <a:lnTo>
+                    <a:pt x="5346181" y="742567"/>
+                  </a:lnTo>
+                  <a:lnTo>
+                    <a:pt x="5416525" y="746118"/>
+                  </a:lnTo>
+                  <a:lnTo>
+                    <a:pt x="5486870" y="749589"/>
+                  </a:lnTo>
+                  <a:lnTo>
+                    <a:pt x="5557214" y="752981"/>
+                  </a:lnTo>
+                  <a:lnTo>
+                    <a:pt x="5627559" y="756296"/>
+                  </a:lnTo>
+                  <a:lnTo>
+                    <a:pt x="5697903" y="759535"/>
+                  </a:lnTo>
+                  <a:lnTo>
+                    <a:pt x="5768248" y="762700"/>
+                  </a:lnTo>
+                  <a:lnTo>
+                    <a:pt x="5838592" y="765794"/>
+                  </a:lnTo>
+                  <a:lnTo>
+                    <a:pt x="5908937" y="768816"/>
+                  </a:lnTo>
+                  <a:lnTo>
+                    <a:pt x="5979281" y="771770"/>
+                  </a:lnTo>
+                  <a:lnTo>
+                    <a:pt x="6049626" y="774657"/>
+                  </a:lnTo>
+                  <a:lnTo>
+                    <a:pt x="6119970" y="777478"/>
+                  </a:lnTo>
+                  <a:lnTo>
+                    <a:pt x="6190315" y="780234"/>
+                  </a:lnTo>
+                  <a:lnTo>
+                    <a:pt x="6260659" y="782928"/>
+                  </a:lnTo>
+                  <a:lnTo>
+                    <a:pt x="6331004" y="785561"/>
+                  </a:lnTo>
+                  <a:lnTo>
+                    <a:pt x="6401348" y="788133"/>
+                  </a:lnTo>
+                  <a:lnTo>
+                    <a:pt x="6471693" y="790647"/>
+                  </a:lnTo>
+                  <a:lnTo>
+                    <a:pt x="6542037" y="793103"/>
+                  </a:lnTo>
+                  <a:lnTo>
+                    <a:pt x="6612382" y="795504"/>
+                  </a:lnTo>
+                  <a:lnTo>
+                    <a:pt x="6682726" y="797850"/>
+                  </a:lnTo>
+                  <a:lnTo>
+                    <a:pt x="6753071" y="800142"/>
+                  </a:lnTo>
+                  <a:lnTo>
+                    <a:pt x="6823415" y="802383"/>
+                  </a:lnTo>
+                  <a:lnTo>
+                    <a:pt x="6893760" y="804572"/>
+                  </a:lnTo>
+                  <a:lnTo>
+                    <a:pt x="6964104" y="806711"/>
                   </a:lnTo>
                 </a:path>
               </a:pathLst>
@@ -4532,27 +4567,27 @@
         </p:sp>
         <p:sp>
           <p:nvSpPr>
-            <p:cNvPr id="24" name="pl24"/>
+            <p:cNvPr id="25" name="pl25"/>
             <p:cNvSpPr/>
             <p:nvPr/>
           </p:nvSpPr>
           <p:spPr>
             <a:xfrm>
-              <a:off x="817517" y="4727786"/>
-              <a:ext cx="7799693" cy="0"/>
+              <a:off x="887106" y="3100960"/>
+              <a:ext cx="7660515" cy="0"/>
             </a:xfrm>
             <a:custGeom>
               <a:avLst/>
               <a:pathLst>
-                <a:path w="7799693" h="0">
+                <a:path w="7660515" h="0">
                   <a:moveTo>
                     <a:pt x="0" y="0"/>
                   </a:moveTo>
                   <a:lnTo>
-                    <a:pt x="7799693" y="0"/>
-                  </a:lnTo>
-                  <a:lnTo>
-                    <a:pt x="7799693" y="0"/>
+                    <a:pt x="7660515" y="0"/>
+                  </a:lnTo>
+                  <a:lnTo>
+                    <a:pt x="7660515" y="0"/>
                   </a:lnTo>
                 </a:path>
               </a:pathLst>
@@ -4575,21 +4610,21 @@
         </p:sp>
         <p:sp>
           <p:nvSpPr>
-            <p:cNvPr id="25" name="pl25"/>
+            <p:cNvPr id="26" name="pl26"/>
             <p:cNvSpPr/>
             <p:nvPr/>
           </p:nvSpPr>
           <p:spPr>
             <a:xfrm>
-              <a:off x="4588151" y="2073503"/>
-              <a:ext cx="0" cy="3649639"/>
+              <a:off x="4590457" y="2143092"/>
+              <a:ext cx="0" cy="1317069"/>
             </a:xfrm>
             <a:custGeom>
               <a:avLst/>
               <a:pathLst>
-                <a:path w="0" h="3649639">
+                <a:path w="0" h="1317069">
                   <a:moveTo>
-                    <a:pt x="0" y="3649639"/>
+                    <a:pt x="0" y="1317069"/>
                   </a:moveTo>
                   <a:lnTo>
                     <a:pt x="0" y="0"/>
@@ -4618,13 +4653,13 @@
         </p:sp>
         <p:sp>
           <p:nvSpPr>
-            <p:cNvPr id="26" name="tx26"/>
+            <p:cNvPr id="27" name="tx27"/>
             <p:cNvSpPr/>
             <p:nvPr/>
           </p:nvSpPr>
           <p:spPr>
             <a:xfrm>
-              <a:off x="692708" y="5517199"/>
+              <a:off x="762297" y="3360243"/>
               <a:ext cx="62179" cy="80101"/>
             </a:xfrm>
             <a:prstGeom prst="rect">
@@ -4664,13 +4699,13 @@
         </p:sp>
         <p:sp>
           <p:nvSpPr>
-            <p:cNvPr id="27" name="tx27"/>
+            <p:cNvPr id="28" name="tx28"/>
             <p:cNvSpPr/>
             <p:nvPr/>
           </p:nvSpPr>
           <p:spPr>
             <a:xfrm>
-              <a:off x="692708" y="4687735"/>
+              <a:off x="762297" y="3060909"/>
               <a:ext cx="62179" cy="80101"/>
             </a:xfrm>
             <a:prstGeom prst="rect">
@@ -4710,13 +4745,13 @@
         </p:sp>
         <p:sp>
           <p:nvSpPr>
-            <p:cNvPr id="28" name="tx28"/>
+            <p:cNvPr id="29" name="tx29"/>
             <p:cNvSpPr/>
             <p:nvPr/>
           </p:nvSpPr>
           <p:spPr>
             <a:xfrm>
-              <a:off x="692708" y="3858272"/>
+              <a:off x="762297" y="2761575"/>
               <a:ext cx="62179" cy="80101"/>
             </a:xfrm>
             <a:prstGeom prst="rect">
@@ -4756,13 +4791,13 @@
         </p:sp>
         <p:sp>
           <p:nvSpPr>
-            <p:cNvPr id="29" name="tx29"/>
+            <p:cNvPr id="30" name="tx30"/>
             <p:cNvSpPr/>
             <p:nvPr/>
           </p:nvSpPr>
           <p:spPr>
             <a:xfrm>
-              <a:off x="692708" y="3028808"/>
+              <a:off x="762297" y="2462242"/>
               <a:ext cx="62179" cy="80101"/>
             </a:xfrm>
             <a:prstGeom prst="rect">
@@ -4802,13 +4837,13 @@
         </p:sp>
         <p:sp>
           <p:nvSpPr>
-            <p:cNvPr id="30" name="tx30"/>
+            <p:cNvPr id="31" name="tx31"/>
             <p:cNvSpPr/>
             <p:nvPr/>
           </p:nvSpPr>
           <p:spPr>
             <a:xfrm>
-              <a:off x="692708" y="2199345"/>
+              <a:off x="762297" y="2162908"/>
               <a:ext cx="62179" cy="80101"/>
             </a:xfrm>
             <a:prstGeom prst="rect">
@@ -4848,13 +4883,13 @@
         </p:sp>
         <p:sp>
           <p:nvSpPr>
-            <p:cNvPr id="31" name="tx31"/>
+            <p:cNvPr id="32" name="tx32"/>
             <p:cNvSpPr/>
             <p:nvPr/>
           </p:nvSpPr>
           <p:spPr>
             <a:xfrm>
-              <a:off x="2360651" y="5785772"/>
+              <a:off x="2401262" y="3522791"/>
               <a:ext cx="161574" cy="80101"/>
             </a:xfrm>
             <a:prstGeom prst="rect">
@@ -4894,13 +4929,13 @@
         </p:sp>
         <p:sp>
           <p:nvSpPr>
-            <p:cNvPr id="32" name="tx32"/>
+            <p:cNvPr id="33" name="tx33"/>
             <p:cNvSpPr/>
             <p:nvPr/>
           </p:nvSpPr>
           <p:spPr>
             <a:xfrm>
-              <a:off x="4561958" y="5785772"/>
+              <a:off x="4564176" y="3522791"/>
               <a:ext cx="62179" cy="80101"/>
             </a:xfrm>
             <a:prstGeom prst="rect">
@@ -4940,13 +4975,13 @@
         </p:sp>
         <p:sp>
           <p:nvSpPr>
-            <p:cNvPr id="33" name="tx33"/>
+            <p:cNvPr id="34" name="tx34"/>
             <p:cNvSpPr/>
             <p:nvPr/>
           </p:nvSpPr>
           <p:spPr>
             <a:xfrm>
-              <a:off x="6682478" y="5785772"/>
+              <a:off x="6646302" y="3522791"/>
               <a:ext cx="124358" cy="80101"/>
             </a:xfrm>
             <a:prstGeom prst="rect">
@@ -4986,13 +5021,13 @@
         </p:sp>
         <p:sp>
           <p:nvSpPr>
-            <p:cNvPr id="34" name="tx34"/>
+            <p:cNvPr id="35" name="tx35"/>
             <p:cNvSpPr/>
             <p:nvPr/>
           </p:nvSpPr>
           <p:spPr>
             <a:xfrm>
-              <a:off x="2928340" y="5925448"/>
+              <a:off x="2928340" y="3662467"/>
               <a:ext cx="3578047" cy="100218"/>
             </a:xfrm>
             <a:prstGeom prst="rect">
@@ -5032,13 +5067,13 @@
         </p:sp>
         <p:sp>
           <p:nvSpPr>
-            <p:cNvPr id="35" name="tx35"/>
+            <p:cNvPr id="36" name="tx36"/>
             <p:cNvSpPr/>
             <p:nvPr/>
           </p:nvSpPr>
           <p:spPr>
             <a:xfrm rot="-5400000">
-              <a:off x="68446" y="3848213"/>
+              <a:off x="138035" y="2751517"/>
               <a:ext cx="1016904" cy="100218"/>
             </a:xfrm>
             <a:prstGeom prst="rect">
@@ -5078,13 +5113,13 @@
         </p:sp>
         <p:sp>
           <p:nvSpPr>
-            <p:cNvPr id="36" name="tx36"/>
+            <p:cNvPr id="37" name="tx37"/>
             <p:cNvSpPr/>
             <p:nvPr/>
           </p:nvSpPr>
           <p:spPr>
             <a:xfrm>
-              <a:off x="817517" y="1896563"/>
+              <a:off x="887106" y="1966152"/>
               <a:ext cx="6985375" cy="82021"/>
             </a:xfrm>
             <a:prstGeom prst="rect">
@@ -5124,13 +5159,3667 @@
         </p:sp>
         <p:sp>
           <p:nvSpPr>
-            <p:cNvPr id="37" name="tx37"/>
+            <p:cNvPr id="38" name="tx38"/>
             <p:cNvSpPr/>
             <p:nvPr/>
           </p:nvSpPr>
           <p:spPr>
             <a:xfrm>
-              <a:off x="817517" y="1669789"/>
+              <a:off x="887106" y="1739378"/>
+              <a:ext cx="921898" cy="120152"/>
+            </a:xfrm>
+            <a:prstGeom prst="rect">
+              <a:avLst/>
+            </a:prstGeom>
+            <a:noFill/>
+          </p:spPr>
+          <p:txBody>
+            <a:bodyPr lIns="0" rIns="0" tIns="0" bIns="0" anchorCtr="1" anchor="ctr" wrap="none"/>
+            <a:lstStyle/>
+            <a:p>
+              <a:pPr algn="l" marL="0" marR="0" indent="0">
+                <a:lnSpc>
+                  <a:spcPts val="1320"/>
+                </a:lnSpc>
+                <a:spcBef>
+                  <a:spcPts val="0"/>
+                </a:spcBef>
+                <a:spcAft>
+                  <a:spcPts val="0"/>
+                </a:spcAft>
+              </a:pPr>
+              <a:r>
+                <a:rPr sz="1320">
+                  <a:solidFill>
+                    <a:srgbClr val="000000">
+                      <a:alpha val="100000"/>
+                    </a:srgbClr>
+                  </a:solidFill>
+                  <a:latin typeface="Helvetica"/>
+                  <a:cs typeface="Helvetica"/>
+                </a:rPr>
+                <a:t>AKI Grade 2</a:t>
+              </a:r>
+            </a:p>
+          </p:txBody>
+        </p:sp>
+        <p:sp>
+          <p:nvSpPr>
+            <p:cNvPr id="39" name="pl39"/>
+            <p:cNvSpPr/>
+            <p:nvPr/>
+          </p:nvSpPr>
+          <p:spPr>
+            <a:xfrm>
+              <a:off x="887106" y="5444019"/>
+              <a:ext cx="7660515" cy="0"/>
+            </a:xfrm>
+            <a:custGeom>
+              <a:avLst/>
+              <a:pathLst>
+                <a:path w="7660515" h="0">
+                  <a:moveTo>
+                    <a:pt x="0" y="0"/>
+                  </a:moveTo>
+                  <a:lnTo>
+                    <a:pt x="7660515" y="0"/>
+                  </a:lnTo>
+                  <a:lnTo>
+                    <a:pt x="7660515" y="0"/>
+                  </a:lnTo>
+                </a:path>
+              </a:pathLst>
+            </a:custGeom>
+            <a:ln w="6775" cap="flat">
+              <a:solidFill>
+                <a:srgbClr val="EBEBEB">
+                  <a:alpha val="100000"/>
+                </a:srgbClr>
+              </a:solidFill>
+              <a:prstDash val="solid"/>
+              <a:round/>
+            </a:ln>
+          </p:spPr>
+          <p:txBody>
+            <a:bodyPr/>
+            <a:lstStyle/>
+            <a:p/>
+          </p:txBody>
+        </p:sp>
+        <p:sp>
+          <p:nvSpPr>
+            <p:cNvPr id="40" name="pl40"/>
+            <p:cNvSpPr/>
+            <p:nvPr/>
+          </p:nvSpPr>
+          <p:spPr>
+            <a:xfrm>
+              <a:off x="887106" y="5144686"/>
+              <a:ext cx="7660515" cy="0"/>
+            </a:xfrm>
+            <a:custGeom>
+              <a:avLst/>
+              <a:pathLst>
+                <a:path w="7660515" h="0">
+                  <a:moveTo>
+                    <a:pt x="0" y="0"/>
+                  </a:moveTo>
+                  <a:lnTo>
+                    <a:pt x="7660515" y="0"/>
+                  </a:lnTo>
+                  <a:lnTo>
+                    <a:pt x="7660515" y="0"/>
+                  </a:lnTo>
+                </a:path>
+              </a:pathLst>
+            </a:custGeom>
+            <a:ln w="6775" cap="flat">
+              <a:solidFill>
+                <a:srgbClr val="EBEBEB">
+                  <a:alpha val="100000"/>
+                </a:srgbClr>
+              </a:solidFill>
+              <a:prstDash val="solid"/>
+              <a:round/>
+            </a:ln>
+          </p:spPr>
+          <p:txBody>
+            <a:bodyPr/>
+            <a:lstStyle/>
+            <a:p/>
+          </p:txBody>
+        </p:sp>
+        <p:sp>
+          <p:nvSpPr>
+            <p:cNvPr id="41" name="pl41"/>
+            <p:cNvSpPr/>
+            <p:nvPr/>
+          </p:nvSpPr>
+          <p:spPr>
+            <a:xfrm>
+              <a:off x="887106" y="4845352"/>
+              <a:ext cx="7660515" cy="0"/>
+            </a:xfrm>
+            <a:custGeom>
+              <a:avLst/>
+              <a:pathLst>
+                <a:path w="7660515" h="0">
+                  <a:moveTo>
+                    <a:pt x="0" y="0"/>
+                  </a:moveTo>
+                  <a:lnTo>
+                    <a:pt x="7660515" y="0"/>
+                  </a:lnTo>
+                  <a:lnTo>
+                    <a:pt x="7660515" y="0"/>
+                  </a:lnTo>
+                </a:path>
+              </a:pathLst>
+            </a:custGeom>
+            <a:ln w="6775" cap="flat">
+              <a:solidFill>
+                <a:srgbClr val="EBEBEB">
+                  <a:alpha val="100000"/>
+                </a:srgbClr>
+              </a:solidFill>
+              <a:prstDash val="solid"/>
+              <a:round/>
+            </a:ln>
+          </p:spPr>
+          <p:txBody>
+            <a:bodyPr/>
+            <a:lstStyle/>
+            <a:p/>
+          </p:txBody>
+        </p:sp>
+        <p:sp>
+          <p:nvSpPr>
+            <p:cNvPr id="42" name="pl42"/>
+            <p:cNvSpPr/>
+            <p:nvPr/>
+          </p:nvSpPr>
+          <p:spPr>
+            <a:xfrm>
+              <a:off x="887106" y="4546018"/>
+              <a:ext cx="7660515" cy="0"/>
+            </a:xfrm>
+            <a:custGeom>
+              <a:avLst/>
+              <a:pathLst>
+                <a:path w="7660515" h="0">
+                  <a:moveTo>
+                    <a:pt x="0" y="0"/>
+                  </a:moveTo>
+                  <a:lnTo>
+                    <a:pt x="7660515" y="0"/>
+                  </a:lnTo>
+                  <a:lnTo>
+                    <a:pt x="7660515" y="0"/>
+                  </a:lnTo>
+                </a:path>
+              </a:pathLst>
+            </a:custGeom>
+            <a:ln w="6775" cap="flat">
+              <a:solidFill>
+                <a:srgbClr val="EBEBEB">
+                  <a:alpha val="100000"/>
+                </a:srgbClr>
+              </a:solidFill>
+              <a:prstDash val="solid"/>
+              <a:round/>
+            </a:ln>
+          </p:spPr>
+          <p:txBody>
+            <a:bodyPr/>
+            <a:lstStyle/>
+            <a:p/>
+          </p:txBody>
+        </p:sp>
+        <p:sp>
+          <p:nvSpPr>
+            <p:cNvPr id="43" name="pl43"/>
+            <p:cNvSpPr/>
+            <p:nvPr/>
+          </p:nvSpPr>
+          <p:spPr>
+            <a:xfrm>
+              <a:off x="1636763" y="4336484"/>
+              <a:ext cx="0" cy="1317069"/>
+            </a:xfrm>
+            <a:custGeom>
+              <a:avLst/>
+              <a:pathLst>
+                <a:path w="0" h="1317069">
+                  <a:moveTo>
+                    <a:pt x="0" y="1317069"/>
+                  </a:moveTo>
+                  <a:lnTo>
+                    <a:pt x="0" y="0"/>
+                  </a:lnTo>
+                  <a:lnTo>
+                    <a:pt x="0" y="0"/>
+                  </a:lnTo>
+                </a:path>
+              </a:pathLst>
+            </a:custGeom>
+            <a:ln w="6775" cap="flat">
+              <a:solidFill>
+                <a:srgbClr val="EBEBEB">
+                  <a:alpha val="100000"/>
+                </a:srgbClr>
+              </a:solidFill>
+              <a:prstDash val="solid"/>
+              <a:round/>
+            </a:ln>
+          </p:spPr>
+          <p:txBody>
+            <a:bodyPr/>
+            <a:lstStyle/>
+            <a:p/>
+          </p:txBody>
+        </p:sp>
+        <p:sp>
+          <p:nvSpPr>
+            <p:cNvPr id="44" name="pl44"/>
+            <p:cNvSpPr/>
+            <p:nvPr/>
+          </p:nvSpPr>
+          <p:spPr>
+            <a:xfrm>
+              <a:off x="2482050" y="4336484"/>
+              <a:ext cx="0" cy="1317069"/>
+            </a:xfrm>
+            <a:custGeom>
+              <a:avLst/>
+              <a:pathLst>
+                <a:path w="0" h="1317069">
+                  <a:moveTo>
+                    <a:pt x="0" y="1317069"/>
+                  </a:moveTo>
+                  <a:lnTo>
+                    <a:pt x="0" y="0"/>
+                  </a:lnTo>
+                  <a:lnTo>
+                    <a:pt x="0" y="0"/>
+                  </a:lnTo>
+                </a:path>
+              </a:pathLst>
+            </a:custGeom>
+            <a:ln w="6775" cap="flat">
+              <a:solidFill>
+                <a:srgbClr val="EBEBEB">
+                  <a:alpha val="100000"/>
+                </a:srgbClr>
+              </a:solidFill>
+              <a:prstDash val="solid"/>
+              <a:round/>
+            </a:ln>
+          </p:spPr>
+          <p:txBody>
+            <a:bodyPr/>
+            <a:lstStyle/>
+            <a:p/>
+          </p:txBody>
+        </p:sp>
+        <p:sp>
+          <p:nvSpPr>
+            <p:cNvPr id="45" name="pl45"/>
+            <p:cNvSpPr/>
+            <p:nvPr/>
+          </p:nvSpPr>
+          <p:spPr>
+            <a:xfrm>
+              <a:off x="3327336" y="4336484"/>
+              <a:ext cx="0" cy="1317069"/>
+            </a:xfrm>
+            <a:custGeom>
+              <a:avLst/>
+              <a:pathLst>
+                <a:path w="0" h="1317069">
+                  <a:moveTo>
+                    <a:pt x="0" y="1317069"/>
+                  </a:moveTo>
+                  <a:lnTo>
+                    <a:pt x="0" y="0"/>
+                  </a:lnTo>
+                  <a:lnTo>
+                    <a:pt x="0" y="0"/>
+                  </a:lnTo>
+                </a:path>
+              </a:pathLst>
+            </a:custGeom>
+            <a:ln w="6775" cap="flat">
+              <a:solidFill>
+                <a:srgbClr val="EBEBEB">
+                  <a:alpha val="100000"/>
+                </a:srgbClr>
+              </a:solidFill>
+              <a:prstDash val="solid"/>
+              <a:round/>
+            </a:ln>
+          </p:spPr>
+          <p:txBody>
+            <a:bodyPr/>
+            <a:lstStyle/>
+            <a:p/>
+          </p:txBody>
+        </p:sp>
+        <p:sp>
+          <p:nvSpPr>
+            <p:cNvPr id="46" name="pl46"/>
+            <p:cNvSpPr/>
+            <p:nvPr/>
+          </p:nvSpPr>
+          <p:spPr>
+            <a:xfrm>
+              <a:off x="4172622" y="4336484"/>
+              <a:ext cx="0" cy="1317069"/>
+            </a:xfrm>
+            <a:custGeom>
+              <a:avLst/>
+              <a:pathLst>
+                <a:path w="0" h="1317069">
+                  <a:moveTo>
+                    <a:pt x="0" y="1317069"/>
+                  </a:moveTo>
+                  <a:lnTo>
+                    <a:pt x="0" y="0"/>
+                  </a:lnTo>
+                  <a:lnTo>
+                    <a:pt x="0" y="0"/>
+                  </a:lnTo>
+                </a:path>
+              </a:pathLst>
+            </a:custGeom>
+            <a:ln w="6775" cap="flat">
+              <a:solidFill>
+                <a:srgbClr val="EBEBEB">
+                  <a:alpha val="100000"/>
+                </a:srgbClr>
+              </a:solidFill>
+              <a:prstDash val="solid"/>
+              <a:round/>
+            </a:ln>
+          </p:spPr>
+          <p:txBody>
+            <a:bodyPr/>
+            <a:lstStyle/>
+            <a:p/>
+          </p:txBody>
+        </p:sp>
+        <p:sp>
+          <p:nvSpPr>
+            <p:cNvPr id="47" name="pl47"/>
+            <p:cNvSpPr/>
+            <p:nvPr/>
+          </p:nvSpPr>
+          <p:spPr>
+            <a:xfrm>
+              <a:off x="5017909" y="4336484"/>
+              <a:ext cx="0" cy="1317069"/>
+            </a:xfrm>
+            <a:custGeom>
+              <a:avLst/>
+              <a:pathLst>
+                <a:path w="0" h="1317069">
+                  <a:moveTo>
+                    <a:pt x="0" y="1317069"/>
+                  </a:moveTo>
+                  <a:lnTo>
+                    <a:pt x="0" y="0"/>
+                  </a:lnTo>
+                  <a:lnTo>
+                    <a:pt x="0" y="0"/>
+                  </a:lnTo>
+                </a:path>
+              </a:pathLst>
+            </a:custGeom>
+            <a:ln w="6775" cap="flat">
+              <a:solidFill>
+                <a:srgbClr val="EBEBEB">
+                  <a:alpha val="100000"/>
+                </a:srgbClr>
+              </a:solidFill>
+              <a:prstDash val="solid"/>
+              <a:round/>
+            </a:ln>
+          </p:spPr>
+          <p:txBody>
+            <a:bodyPr/>
+            <a:lstStyle/>
+            <a:p/>
+          </p:txBody>
+        </p:sp>
+        <p:sp>
+          <p:nvSpPr>
+            <p:cNvPr id="48" name="pl48"/>
+            <p:cNvSpPr/>
+            <p:nvPr/>
+          </p:nvSpPr>
+          <p:spPr>
+            <a:xfrm>
+              <a:off x="5863195" y="4336484"/>
+              <a:ext cx="0" cy="1317069"/>
+            </a:xfrm>
+            <a:custGeom>
+              <a:avLst/>
+              <a:pathLst>
+                <a:path w="0" h="1317069">
+                  <a:moveTo>
+                    <a:pt x="0" y="1317069"/>
+                  </a:moveTo>
+                  <a:lnTo>
+                    <a:pt x="0" y="0"/>
+                  </a:lnTo>
+                  <a:lnTo>
+                    <a:pt x="0" y="0"/>
+                  </a:lnTo>
+                </a:path>
+              </a:pathLst>
+            </a:custGeom>
+            <a:ln w="6775" cap="flat">
+              <a:solidFill>
+                <a:srgbClr val="EBEBEB">
+                  <a:alpha val="100000"/>
+                </a:srgbClr>
+              </a:solidFill>
+              <a:prstDash val="solid"/>
+              <a:round/>
+            </a:ln>
+          </p:spPr>
+          <p:txBody>
+            <a:bodyPr/>
+            <a:lstStyle/>
+            <a:p/>
+          </p:txBody>
+        </p:sp>
+        <p:sp>
+          <p:nvSpPr>
+            <p:cNvPr id="49" name="pl49"/>
+            <p:cNvSpPr/>
+            <p:nvPr/>
+          </p:nvSpPr>
+          <p:spPr>
+            <a:xfrm>
+              <a:off x="6708482" y="4336484"/>
+              <a:ext cx="0" cy="1317069"/>
+            </a:xfrm>
+            <a:custGeom>
+              <a:avLst/>
+              <a:pathLst>
+                <a:path w="0" h="1317069">
+                  <a:moveTo>
+                    <a:pt x="0" y="1317069"/>
+                  </a:moveTo>
+                  <a:lnTo>
+                    <a:pt x="0" y="0"/>
+                  </a:lnTo>
+                  <a:lnTo>
+                    <a:pt x="0" y="0"/>
+                  </a:lnTo>
+                </a:path>
+              </a:pathLst>
+            </a:custGeom>
+            <a:ln w="6775" cap="flat">
+              <a:solidFill>
+                <a:srgbClr val="EBEBEB">
+                  <a:alpha val="100000"/>
+                </a:srgbClr>
+              </a:solidFill>
+              <a:prstDash val="solid"/>
+              <a:round/>
+            </a:ln>
+          </p:spPr>
+          <p:txBody>
+            <a:bodyPr/>
+            <a:lstStyle/>
+            <a:p/>
+          </p:txBody>
+        </p:sp>
+        <p:sp>
+          <p:nvSpPr>
+            <p:cNvPr id="50" name="pl50"/>
+            <p:cNvSpPr/>
+            <p:nvPr/>
+          </p:nvSpPr>
+          <p:spPr>
+            <a:xfrm>
+              <a:off x="7553768" y="4336484"/>
+              <a:ext cx="0" cy="1317069"/>
+            </a:xfrm>
+            <a:custGeom>
+              <a:avLst/>
+              <a:pathLst>
+                <a:path w="0" h="1317069">
+                  <a:moveTo>
+                    <a:pt x="0" y="1317069"/>
+                  </a:moveTo>
+                  <a:lnTo>
+                    <a:pt x="0" y="0"/>
+                  </a:lnTo>
+                  <a:lnTo>
+                    <a:pt x="0" y="0"/>
+                  </a:lnTo>
+                </a:path>
+              </a:pathLst>
+            </a:custGeom>
+            <a:ln w="6775" cap="flat">
+              <a:solidFill>
+                <a:srgbClr val="EBEBEB">
+                  <a:alpha val="100000"/>
+                </a:srgbClr>
+              </a:solidFill>
+              <a:prstDash val="solid"/>
+              <a:round/>
+            </a:ln>
+          </p:spPr>
+          <p:txBody>
+            <a:bodyPr/>
+            <a:lstStyle/>
+            <a:p/>
+          </p:txBody>
+        </p:sp>
+        <p:sp>
+          <p:nvSpPr>
+            <p:cNvPr id="51" name="pl51"/>
+            <p:cNvSpPr/>
+            <p:nvPr/>
+          </p:nvSpPr>
+          <p:spPr>
+            <a:xfrm>
+              <a:off x="8399054" y="4336484"/>
+              <a:ext cx="0" cy="1317069"/>
+            </a:xfrm>
+            <a:custGeom>
+              <a:avLst/>
+              <a:pathLst>
+                <a:path w="0" h="1317069">
+                  <a:moveTo>
+                    <a:pt x="0" y="1317069"/>
+                  </a:moveTo>
+                  <a:lnTo>
+                    <a:pt x="0" y="0"/>
+                  </a:lnTo>
+                  <a:lnTo>
+                    <a:pt x="0" y="0"/>
+                  </a:lnTo>
+                </a:path>
+              </a:pathLst>
+            </a:custGeom>
+            <a:ln w="6775" cap="flat">
+              <a:solidFill>
+                <a:srgbClr val="EBEBEB">
+                  <a:alpha val="100000"/>
+                </a:srgbClr>
+              </a:solidFill>
+              <a:prstDash val="solid"/>
+              <a:round/>
+            </a:ln>
+          </p:spPr>
+          <p:txBody>
+            <a:bodyPr/>
+            <a:lstStyle/>
+            <a:p/>
+          </p:txBody>
+        </p:sp>
+        <p:sp>
+          <p:nvSpPr>
+            <p:cNvPr id="52" name="pl52"/>
+            <p:cNvSpPr/>
+            <p:nvPr/>
+          </p:nvSpPr>
+          <p:spPr>
+            <a:xfrm>
+              <a:off x="887106" y="5593686"/>
+              <a:ext cx="7660515" cy="0"/>
+            </a:xfrm>
+            <a:custGeom>
+              <a:avLst/>
+              <a:pathLst>
+                <a:path w="7660515" h="0">
+                  <a:moveTo>
+                    <a:pt x="0" y="0"/>
+                  </a:moveTo>
+                  <a:lnTo>
+                    <a:pt x="7660515" y="0"/>
+                  </a:lnTo>
+                  <a:lnTo>
+                    <a:pt x="7660515" y="0"/>
+                  </a:lnTo>
+                </a:path>
+              </a:pathLst>
+            </a:custGeom>
+            <a:ln w="13550" cap="flat">
+              <a:solidFill>
+                <a:srgbClr val="EBEBEB">
+                  <a:alpha val="100000"/>
+                </a:srgbClr>
+              </a:solidFill>
+              <a:prstDash val="solid"/>
+              <a:round/>
+            </a:ln>
+          </p:spPr>
+          <p:txBody>
+            <a:bodyPr/>
+            <a:lstStyle/>
+            <a:p/>
+          </p:txBody>
+        </p:sp>
+        <p:sp>
+          <p:nvSpPr>
+            <p:cNvPr id="53" name="pl53"/>
+            <p:cNvSpPr/>
+            <p:nvPr/>
+          </p:nvSpPr>
+          <p:spPr>
+            <a:xfrm>
+              <a:off x="887106" y="5294352"/>
+              <a:ext cx="7660515" cy="0"/>
+            </a:xfrm>
+            <a:custGeom>
+              <a:avLst/>
+              <a:pathLst>
+                <a:path w="7660515" h="0">
+                  <a:moveTo>
+                    <a:pt x="0" y="0"/>
+                  </a:moveTo>
+                  <a:lnTo>
+                    <a:pt x="7660515" y="0"/>
+                  </a:lnTo>
+                  <a:lnTo>
+                    <a:pt x="7660515" y="0"/>
+                  </a:lnTo>
+                </a:path>
+              </a:pathLst>
+            </a:custGeom>
+            <a:ln w="13550" cap="flat">
+              <a:solidFill>
+                <a:srgbClr val="EBEBEB">
+                  <a:alpha val="100000"/>
+                </a:srgbClr>
+              </a:solidFill>
+              <a:prstDash val="solid"/>
+              <a:round/>
+            </a:ln>
+          </p:spPr>
+          <p:txBody>
+            <a:bodyPr/>
+            <a:lstStyle/>
+            <a:p/>
+          </p:txBody>
+        </p:sp>
+        <p:sp>
+          <p:nvSpPr>
+            <p:cNvPr id="54" name="pl54"/>
+            <p:cNvSpPr/>
+            <p:nvPr/>
+          </p:nvSpPr>
+          <p:spPr>
+            <a:xfrm>
+              <a:off x="887106" y="4995019"/>
+              <a:ext cx="7660515" cy="0"/>
+            </a:xfrm>
+            <a:custGeom>
+              <a:avLst/>
+              <a:pathLst>
+                <a:path w="7660515" h="0">
+                  <a:moveTo>
+                    <a:pt x="0" y="0"/>
+                  </a:moveTo>
+                  <a:lnTo>
+                    <a:pt x="7660515" y="0"/>
+                  </a:lnTo>
+                  <a:lnTo>
+                    <a:pt x="7660515" y="0"/>
+                  </a:lnTo>
+                </a:path>
+              </a:pathLst>
+            </a:custGeom>
+            <a:ln w="13550" cap="flat">
+              <a:solidFill>
+                <a:srgbClr val="EBEBEB">
+                  <a:alpha val="100000"/>
+                </a:srgbClr>
+              </a:solidFill>
+              <a:prstDash val="solid"/>
+              <a:round/>
+            </a:ln>
+          </p:spPr>
+          <p:txBody>
+            <a:bodyPr/>
+            <a:lstStyle/>
+            <a:p/>
+          </p:txBody>
+        </p:sp>
+        <p:sp>
+          <p:nvSpPr>
+            <p:cNvPr id="55" name="pl55"/>
+            <p:cNvSpPr/>
+            <p:nvPr/>
+          </p:nvSpPr>
+          <p:spPr>
+            <a:xfrm>
+              <a:off x="887106" y="4695685"/>
+              <a:ext cx="7660515" cy="0"/>
+            </a:xfrm>
+            <a:custGeom>
+              <a:avLst/>
+              <a:pathLst>
+                <a:path w="7660515" h="0">
+                  <a:moveTo>
+                    <a:pt x="0" y="0"/>
+                  </a:moveTo>
+                  <a:lnTo>
+                    <a:pt x="7660515" y="0"/>
+                  </a:lnTo>
+                  <a:lnTo>
+                    <a:pt x="7660515" y="0"/>
+                  </a:lnTo>
+                </a:path>
+              </a:pathLst>
+            </a:custGeom>
+            <a:ln w="13550" cap="flat">
+              <a:solidFill>
+                <a:srgbClr val="EBEBEB">
+                  <a:alpha val="100000"/>
+                </a:srgbClr>
+              </a:solidFill>
+              <a:prstDash val="solid"/>
+              <a:round/>
+            </a:ln>
+          </p:spPr>
+          <p:txBody>
+            <a:bodyPr/>
+            <a:lstStyle/>
+            <a:p/>
+          </p:txBody>
+        </p:sp>
+        <p:sp>
+          <p:nvSpPr>
+            <p:cNvPr id="56" name="pl56"/>
+            <p:cNvSpPr/>
+            <p:nvPr/>
+          </p:nvSpPr>
+          <p:spPr>
+            <a:xfrm>
+              <a:off x="887106" y="4396351"/>
+              <a:ext cx="7660515" cy="0"/>
+            </a:xfrm>
+            <a:custGeom>
+              <a:avLst/>
+              <a:pathLst>
+                <a:path w="7660515" h="0">
+                  <a:moveTo>
+                    <a:pt x="0" y="0"/>
+                  </a:moveTo>
+                  <a:lnTo>
+                    <a:pt x="7660515" y="0"/>
+                  </a:lnTo>
+                  <a:lnTo>
+                    <a:pt x="7660515" y="0"/>
+                  </a:lnTo>
+                </a:path>
+              </a:pathLst>
+            </a:custGeom>
+            <a:ln w="13550" cap="flat">
+              <a:solidFill>
+                <a:srgbClr val="EBEBEB">
+                  <a:alpha val="100000"/>
+                </a:srgbClr>
+              </a:solidFill>
+              <a:prstDash val="solid"/>
+              <a:round/>
+            </a:ln>
+          </p:spPr>
+          <p:txBody>
+            <a:bodyPr/>
+            <a:lstStyle/>
+            <a:p/>
+          </p:txBody>
+        </p:sp>
+        <p:sp>
+          <p:nvSpPr>
+            <p:cNvPr id="57" name="pl57"/>
+            <p:cNvSpPr/>
+            <p:nvPr/>
+          </p:nvSpPr>
+          <p:spPr>
+            <a:xfrm>
+              <a:off x="1214120" y="4336484"/>
+              <a:ext cx="0" cy="1317069"/>
+            </a:xfrm>
+            <a:custGeom>
+              <a:avLst/>
+              <a:pathLst>
+                <a:path w="0" h="1317069">
+                  <a:moveTo>
+                    <a:pt x="0" y="1317069"/>
+                  </a:moveTo>
+                  <a:lnTo>
+                    <a:pt x="0" y="0"/>
+                  </a:lnTo>
+                  <a:lnTo>
+                    <a:pt x="0" y="0"/>
+                  </a:lnTo>
+                </a:path>
+              </a:pathLst>
+            </a:custGeom>
+            <a:ln w="13550" cap="flat">
+              <a:solidFill>
+                <a:srgbClr val="EBEBEB">
+                  <a:alpha val="100000"/>
+                </a:srgbClr>
+              </a:solidFill>
+              <a:prstDash val="solid"/>
+              <a:round/>
+            </a:ln>
+          </p:spPr>
+          <p:txBody>
+            <a:bodyPr/>
+            <a:lstStyle/>
+            <a:p/>
+          </p:txBody>
+        </p:sp>
+        <p:sp>
+          <p:nvSpPr>
+            <p:cNvPr id="58" name="pl58"/>
+            <p:cNvSpPr/>
+            <p:nvPr/>
+          </p:nvSpPr>
+          <p:spPr>
+            <a:xfrm>
+              <a:off x="2059406" y="4336484"/>
+              <a:ext cx="0" cy="1317069"/>
+            </a:xfrm>
+            <a:custGeom>
+              <a:avLst/>
+              <a:pathLst>
+                <a:path w="0" h="1317069">
+                  <a:moveTo>
+                    <a:pt x="0" y="1317069"/>
+                  </a:moveTo>
+                  <a:lnTo>
+                    <a:pt x="0" y="0"/>
+                  </a:lnTo>
+                  <a:lnTo>
+                    <a:pt x="0" y="0"/>
+                  </a:lnTo>
+                </a:path>
+              </a:pathLst>
+            </a:custGeom>
+            <a:ln w="13550" cap="flat">
+              <a:solidFill>
+                <a:srgbClr val="EBEBEB">
+                  <a:alpha val="100000"/>
+                </a:srgbClr>
+              </a:solidFill>
+              <a:prstDash val="solid"/>
+              <a:round/>
+            </a:ln>
+          </p:spPr>
+          <p:txBody>
+            <a:bodyPr/>
+            <a:lstStyle/>
+            <a:p/>
+          </p:txBody>
+        </p:sp>
+        <p:sp>
+          <p:nvSpPr>
+            <p:cNvPr id="59" name="pl59"/>
+            <p:cNvSpPr/>
+            <p:nvPr/>
+          </p:nvSpPr>
+          <p:spPr>
+            <a:xfrm>
+              <a:off x="2904693" y="4336484"/>
+              <a:ext cx="0" cy="1317069"/>
+            </a:xfrm>
+            <a:custGeom>
+              <a:avLst/>
+              <a:pathLst>
+                <a:path w="0" h="1317069">
+                  <a:moveTo>
+                    <a:pt x="0" y="1317069"/>
+                  </a:moveTo>
+                  <a:lnTo>
+                    <a:pt x="0" y="0"/>
+                  </a:lnTo>
+                  <a:lnTo>
+                    <a:pt x="0" y="0"/>
+                  </a:lnTo>
+                </a:path>
+              </a:pathLst>
+            </a:custGeom>
+            <a:ln w="13550" cap="flat">
+              <a:solidFill>
+                <a:srgbClr val="EBEBEB">
+                  <a:alpha val="100000"/>
+                </a:srgbClr>
+              </a:solidFill>
+              <a:prstDash val="solid"/>
+              <a:round/>
+            </a:ln>
+          </p:spPr>
+          <p:txBody>
+            <a:bodyPr/>
+            <a:lstStyle/>
+            <a:p/>
+          </p:txBody>
+        </p:sp>
+        <p:sp>
+          <p:nvSpPr>
+            <p:cNvPr id="60" name="pl60"/>
+            <p:cNvSpPr/>
+            <p:nvPr/>
+          </p:nvSpPr>
+          <p:spPr>
+            <a:xfrm>
+              <a:off x="3749979" y="4336484"/>
+              <a:ext cx="0" cy="1317069"/>
+            </a:xfrm>
+            <a:custGeom>
+              <a:avLst/>
+              <a:pathLst>
+                <a:path w="0" h="1317069">
+                  <a:moveTo>
+                    <a:pt x="0" y="1317069"/>
+                  </a:moveTo>
+                  <a:lnTo>
+                    <a:pt x="0" y="0"/>
+                  </a:lnTo>
+                  <a:lnTo>
+                    <a:pt x="0" y="0"/>
+                  </a:lnTo>
+                </a:path>
+              </a:pathLst>
+            </a:custGeom>
+            <a:ln w="13550" cap="flat">
+              <a:solidFill>
+                <a:srgbClr val="EBEBEB">
+                  <a:alpha val="100000"/>
+                </a:srgbClr>
+              </a:solidFill>
+              <a:prstDash val="solid"/>
+              <a:round/>
+            </a:ln>
+          </p:spPr>
+          <p:txBody>
+            <a:bodyPr/>
+            <a:lstStyle/>
+            <a:p/>
+          </p:txBody>
+        </p:sp>
+        <p:sp>
+          <p:nvSpPr>
+            <p:cNvPr id="61" name="pl61"/>
+            <p:cNvSpPr/>
+            <p:nvPr/>
+          </p:nvSpPr>
+          <p:spPr>
+            <a:xfrm>
+              <a:off x="4595266" y="4336484"/>
+              <a:ext cx="0" cy="1317069"/>
+            </a:xfrm>
+            <a:custGeom>
+              <a:avLst/>
+              <a:pathLst>
+                <a:path w="0" h="1317069">
+                  <a:moveTo>
+                    <a:pt x="0" y="1317069"/>
+                  </a:moveTo>
+                  <a:lnTo>
+                    <a:pt x="0" y="0"/>
+                  </a:lnTo>
+                  <a:lnTo>
+                    <a:pt x="0" y="0"/>
+                  </a:lnTo>
+                </a:path>
+              </a:pathLst>
+            </a:custGeom>
+            <a:ln w="13550" cap="flat">
+              <a:solidFill>
+                <a:srgbClr val="EBEBEB">
+                  <a:alpha val="100000"/>
+                </a:srgbClr>
+              </a:solidFill>
+              <a:prstDash val="solid"/>
+              <a:round/>
+            </a:ln>
+          </p:spPr>
+          <p:txBody>
+            <a:bodyPr/>
+            <a:lstStyle/>
+            <a:p/>
+          </p:txBody>
+        </p:sp>
+        <p:sp>
+          <p:nvSpPr>
+            <p:cNvPr id="62" name="pl62"/>
+            <p:cNvSpPr/>
+            <p:nvPr/>
+          </p:nvSpPr>
+          <p:spPr>
+            <a:xfrm>
+              <a:off x="5440552" y="4336484"/>
+              <a:ext cx="0" cy="1317069"/>
+            </a:xfrm>
+            <a:custGeom>
+              <a:avLst/>
+              <a:pathLst>
+                <a:path w="0" h="1317069">
+                  <a:moveTo>
+                    <a:pt x="0" y="1317069"/>
+                  </a:moveTo>
+                  <a:lnTo>
+                    <a:pt x="0" y="0"/>
+                  </a:lnTo>
+                  <a:lnTo>
+                    <a:pt x="0" y="0"/>
+                  </a:lnTo>
+                </a:path>
+              </a:pathLst>
+            </a:custGeom>
+            <a:ln w="13550" cap="flat">
+              <a:solidFill>
+                <a:srgbClr val="EBEBEB">
+                  <a:alpha val="100000"/>
+                </a:srgbClr>
+              </a:solidFill>
+              <a:prstDash val="solid"/>
+              <a:round/>
+            </a:ln>
+          </p:spPr>
+          <p:txBody>
+            <a:bodyPr/>
+            <a:lstStyle/>
+            <a:p/>
+          </p:txBody>
+        </p:sp>
+        <p:sp>
+          <p:nvSpPr>
+            <p:cNvPr id="63" name="pl63"/>
+            <p:cNvSpPr/>
+            <p:nvPr/>
+          </p:nvSpPr>
+          <p:spPr>
+            <a:xfrm>
+              <a:off x="6285838" y="4336484"/>
+              <a:ext cx="0" cy="1317069"/>
+            </a:xfrm>
+            <a:custGeom>
+              <a:avLst/>
+              <a:pathLst>
+                <a:path w="0" h="1317069">
+                  <a:moveTo>
+                    <a:pt x="0" y="1317069"/>
+                  </a:moveTo>
+                  <a:lnTo>
+                    <a:pt x="0" y="0"/>
+                  </a:lnTo>
+                  <a:lnTo>
+                    <a:pt x="0" y="0"/>
+                  </a:lnTo>
+                </a:path>
+              </a:pathLst>
+            </a:custGeom>
+            <a:ln w="13550" cap="flat">
+              <a:solidFill>
+                <a:srgbClr val="EBEBEB">
+                  <a:alpha val="100000"/>
+                </a:srgbClr>
+              </a:solidFill>
+              <a:prstDash val="solid"/>
+              <a:round/>
+            </a:ln>
+          </p:spPr>
+          <p:txBody>
+            <a:bodyPr/>
+            <a:lstStyle/>
+            <a:p/>
+          </p:txBody>
+        </p:sp>
+        <p:sp>
+          <p:nvSpPr>
+            <p:cNvPr id="64" name="pl64"/>
+            <p:cNvSpPr/>
+            <p:nvPr/>
+          </p:nvSpPr>
+          <p:spPr>
+            <a:xfrm>
+              <a:off x="7131125" y="4336484"/>
+              <a:ext cx="0" cy="1317069"/>
+            </a:xfrm>
+            <a:custGeom>
+              <a:avLst/>
+              <a:pathLst>
+                <a:path w="0" h="1317069">
+                  <a:moveTo>
+                    <a:pt x="0" y="1317069"/>
+                  </a:moveTo>
+                  <a:lnTo>
+                    <a:pt x="0" y="0"/>
+                  </a:lnTo>
+                  <a:lnTo>
+                    <a:pt x="0" y="0"/>
+                  </a:lnTo>
+                </a:path>
+              </a:pathLst>
+            </a:custGeom>
+            <a:ln w="13550" cap="flat">
+              <a:solidFill>
+                <a:srgbClr val="EBEBEB">
+                  <a:alpha val="100000"/>
+                </a:srgbClr>
+              </a:solidFill>
+              <a:prstDash val="solid"/>
+              <a:round/>
+            </a:ln>
+          </p:spPr>
+          <p:txBody>
+            <a:bodyPr/>
+            <a:lstStyle/>
+            <a:p/>
+          </p:txBody>
+        </p:sp>
+        <p:sp>
+          <p:nvSpPr>
+            <p:cNvPr id="65" name="pl65"/>
+            <p:cNvSpPr/>
+            <p:nvPr/>
+          </p:nvSpPr>
+          <p:spPr>
+            <a:xfrm>
+              <a:off x="7976411" y="4336484"/>
+              <a:ext cx="0" cy="1317069"/>
+            </a:xfrm>
+            <a:custGeom>
+              <a:avLst/>
+              <a:pathLst>
+                <a:path w="0" h="1317069">
+                  <a:moveTo>
+                    <a:pt x="0" y="1317069"/>
+                  </a:moveTo>
+                  <a:lnTo>
+                    <a:pt x="0" y="0"/>
+                  </a:lnTo>
+                  <a:lnTo>
+                    <a:pt x="0" y="0"/>
+                  </a:lnTo>
+                </a:path>
+              </a:pathLst>
+            </a:custGeom>
+            <a:ln w="13550" cap="flat">
+              <a:solidFill>
+                <a:srgbClr val="EBEBEB">
+                  <a:alpha val="100000"/>
+                </a:srgbClr>
+              </a:solidFill>
+              <a:prstDash val="solid"/>
+              <a:round/>
+            </a:ln>
+          </p:spPr>
+          <p:txBody>
+            <a:bodyPr/>
+            <a:lstStyle/>
+            <a:p/>
+          </p:txBody>
+        </p:sp>
+        <p:sp>
+          <p:nvSpPr>
+            <p:cNvPr id="66" name="pg66"/>
+            <p:cNvSpPr/>
+            <p:nvPr/>
+          </p:nvSpPr>
+          <p:spPr>
+            <a:xfrm>
+              <a:off x="1235312" y="4336484"/>
+              <a:ext cx="6964104" cy="1207701"/>
+            </a:xfrm>
+            <a:custGeom>
+              <a:avLst/>
+              <a:pathLst>
+                <a:path w="6964104" h="1207701">
+                  <a:moveTo>
+                    <a:pt x="477347" y="0"/>
+                  </a:moveTo>
+                  <a:lnTo>
+                    <a:pt x="492411" y="9538"/>
+                  </a:lnTo>
+                  <a:lnTo>
+                    <a:pt x="562755" y="52543"/>
+                  </a:lnTo>
+                  <a:lnTo>
+                    <a:pt x="633100" y="94065"/>
+                  </a:lnTo>
+                  <a:lnTo>
+                    <a:pt x="703444" y="134157"/>
+                  </a:lnTo>
+                  <a:lnTo>
+                    <a:pt x="773789" y="172867"/>
+                  </a:lnTo>
+                  <a:lnTo>
+                    <a:pt x="844133" y="210242"/>
+                  </a:lnTo>
+                  <a:lnTo>
+                    <a:pt x="914478" y="246329"/>
+                  </a:lnTo>
+                  <a:lnTo>
+                    <a:pt x="984822" y="281172"/>
+                  </a:lnTo>
+                  <a:lnTo>
+                    <a:pt x="1055167" y="314814"/>
+                  </a:lnTo>
+                  <a:lnTo>
+                    <a:pt x="1125511" y="347297"/>
+                  </a:lnTo>
+                  <a:lnTo>
+                    <a:pt x="1195856" y="378660"/>
+                  </a:lnTo>
+                  <a:lnTo>
+                    <a:pt x="1266200" y="408942"/>
+                  </a:lnTo>
+                  <a:lnTo>
+                    <a:pt x="1336545" y="438180"/>
+                  </a:lnTo>
+                  <a:lnTo>
+                    <a:pt x="1406889" y="466410"/>
+                  </a:lnTo>
+                  <a:lnTo>
+                    <a:pt x="1477234" y="493668"/>
+                  </a:lnTo>
+                  <a:lnTo>
+                    <a:pt x="1547578" y="519985"/>
+                  </a:lnTo>
+                  <a:lnTo>
+                    <a:pt x="1617923" y="545396"/>
+                  </a:lnTo>
+                  <a:lnTo>
+                    <a:pt x="1688267" y="569931"/>
+                  </a:lnTo>
+                  <a:lnTo>
+                    <a:pt x="1758612" y="593620"/>
+                  </a:lnTo>
+                  <a:lnTo>
+                    <a:pt x="1828956" y="616493"/>
+                  </a:lnTo>
+                  <a:lnTo>
+                    <a:pt x="1899301" y="638577"/>
+                  </a:lnTo>
+                  <a:lnTo>
+                    <a:pt x="1969645" y="659900"/>
+                  </a:lnTo>
+                  <a:lnTo>
+                    <a:pt x="2039990" y="680488"/>
+                  </a:lnTo>
+                  <a:lnTo>
+                    <a:pt x="2110334" y="700366"/>
+                  </a:lnTo>
+                  <a:lnTo>
+                    <a:pt x="2180679" y="719560"/>
+                  </a:lnTo>
+                  <a:lnTo>
+                    <a:pt x="2251023" y="738091"/>
+                  </a:lnTo>
+                  <a:lnTo>
+                    <a:pt x="2321368" y="755984"/>
+                  </a:lnTo>
+                  <a:lnTo>
+                    <a:pt x="2391712" y="773260"/>
+                  </a:lnTo>
+                  <a:lnTo>
+                    <a:pt x="2462057" y="789941"/>
+                  </a:lnTo>
+                  <a:lnTo>
+                    <a:pt x="2532401" y="806047"/>
+                  </a:lnTo>
+                  <a:lnTo>
+                    <a:pt x="2602746" y="821597"/>
+                  </a:lnTo>
+                  <a:lnTo>
+                    <a:pt x="2673090" y="836612"/>
+                  </a:lnTo>
+                  <a:lnTo>
+                    <a:pt x="2743435" y="851109"/>
+                  </a:lnTo>
+                  <a:lnTo>
+                    <a:pt x="2813779" y="865106"/>
+                  </a:lnTo>
+                  <a:lnTo>
+                    <a:pt x="2884124" y="878621"/>
+                  </a:lnTo>
+                  <a:lnTo>
+                    <a:pt x="2954468" y="891670"/>
+                  </a:lnTo>
+                  <a:lnTo>
+                    <a:pt x="3024813" y="904270"/>
+                  </a:lnTo>
+                  <a:lnTo>
+                    <a:pt x="3095157" y="916435"/>
+                  </a:lnTo>
+                  <a:lnTo>
+                    <a:pt x="3165502" y="928180"/>
+                  </a:lnTo>
+                  <a:lnTo>
+                    <a:pt x="3235846" y="939521"/>
+                  </a:lnTo>
+                  <a:lnTo>
+                    <a:pt x="3306191" y="950471"/>
+                  </a:lnTo>
+                  <a:lnTo>
+                    <a:pt x="3376535" y="958869"/>
+                  </a:lnTo>
+                  <a:lnTo>
+                    <a:pt x="3446880" y="962136"/>
+                  </a:lnTo>
+                  <a:lnTo>
+                    <a:pt x="3517224" y="965368"/>
+                  </a:lnTo>
+                  <a:lnTo>
+                    <a:pt x="3587569" y="968564"/>
+                  </a:lnTo>
+                  <a:lnTo>
+                    <a:pt x="3657913" y="971726"/>
+                  </a:lnTo>
+                  <a:lnTo>
+                    <a:pt x="3728257" y="974853"/>
+                  </a:lnTo>
+                  <a:lnTo>
+                    <a:pt x="3798602" y="977945"/>
+                  </a:lnTo>
+                  <a:lnTo>
+                    <a:pt x="3868946" y="981004"/>
+                  </a:lnTo>
+                  <a:lnTo>
+                    <a:pt x="3939291" y="984029"/>
+                  </a:lnTo>
+                  <a:lnTo>
+                    <a:pt x="4009635" y="987021"/>
+                  </a:lnTo>
+                  <a:lnTo>
+                    <a:pt x="4079980" y="989980"/>
+                  </a:lnTo>
+                  <a:lnTo>
+                    <a:pt x="4150324" y="992907"/>
+                  </a:lnTo>
+                  <a:lnTo>
+                    <a:pt x="4220669" y="995802"/>
+                  </a:lnTo>
+                  <a:lnTo>
+                    <a:pt x="4291013" y="998665"/>
+                  </a:lnTo>
+                  <a:lnTo>
+                    <a:pt x="4361358" y="1001496"/>
+                  </a:lnTo>
+                  <a:lnTo>
+                    <a:pt x="4431702" y="1004297"/>
+                  </a:lnTo>
+                  <a:lnTo>
+                    <a:pt x="4502047" y="1007067"/>
+                  </a:lnTo>
+                  <a:lnTo>
+                    <a:pt x="4572391" y="1009807"/>
+                  </a:lnTo>
+                  <a:lnTo>
+                    <a:pt x="4642736" y="1012517"/>
+                  </a:lnTo>
+                  <a:lnTo>
+                    <a:pt x="4713080" y="1015197"/>
+                  </a:lnTo>
+                  <a:lnTo>
+                    <a:pt x="4783425" y="1017847"/>
+                  </a:lnTo>
+                  <a:lnTo>
+                    <a:pt x="4853769" y="1020469"/>
+                  </a:lnTo>
+                  <a:lnTo>
+                    <a:pt x="4924114" y="1023062"/>
+                  </a:lnTo>
+                  <a:lnTo>
+                    <a:pt x="4994458" y="1025626"/>
+                  </a:lnTo>
+                  <a:lnTo>
+                    <a:pt x="5064803" y="1028163"/>
+                  </a:lnTo>
+                  <a:lnTo>
+                    <a:pt x="5135147" y="1030671"/>
+                  </a:lnTo>
+                  <a:lnTo>
+                    <a:pt x="5205492" y="1033152"/>
+                  </a:lnTo>
+                  <a:lnTo>
+                    <a:pt x="5275836" y="1035606"/>
+                  </a:lnTo>
+                  <a:lnTo>
+                    <a:pt x="5346181" y="1038033"/>
+                  </a:lnTo>
+                  <a:lnTo>
+                    <a:pt x="5416525" y="1040434"/>
+                  </a:lnTo>
+                  <a:lnTo>
+                    <a:pt x="5486870" y="1042808"/>
+                  </a:lnTo>
+                  <a:lnTo>
+                    <a:pt x="5557214" y="1045156"/>
+                  </a:lnTo>
+                  <a:lnTo>
+                    <a:pt x="5627559" y="1047479"/>
+                  </a:lnTo>
+                  <a:lnTo>
+                    <a:pt x="5697903" y="1049776"/>
+                  </a:lnTo>
+                  <a:lnTo>
+                    <a:pt x="5768248" y="1052048"/>
+                  </a:lnTo>
+                  <a:lnTo>
+                    <a:pt x="5838592" y="1054295"/>
+                  </a:lnTo>
+                  <a:lnTo>
+                    <a:pt x="5908937" y="1056517"/>
+                  </a:lnTo>
+                  <a:lnTo>
+                    <a:pt x="5979281" y="1058715"/>
+                  </a:lnTo>
+                  <a:lnTo>
+                    <a:pt x="6049626" y="1060889"/>
+                  </a:lnTo>
+                  <a:lnTo>
+                    <a:pt x="6119970" y="1063039"/>
+                  </a:lnTo>
+                  <a:lnTo>
+                    <a:pt x="6190315" y="1065166"/>
+                  </a:lnTo>
+                  <a:lnTo>
+                    <a:pt x="6260659" y="1067269"/>
+                  </a:lnTo>
+                  <a:lnTo>
+                    <a:pt x="6331004" y="1069350"/>
+                  </a:lnTo>
+                  <a:lnTo>
+                    <a:pt x="6401348" y="1071407"/>
+                  </a:lnTo>
+                  <a:lnTo>
+                    <a:pt x="6471693" y="1073442"/>
+                  </a:lnTo>
+                  <a:lnTo>
+                    <a:pt x="6542037" y="1075455"/>
+                  </a:lnTo>
+                  <a:lnTo>
+                    <a:pt x="6612382" y="1077445"/>
+                  </a:lnTo>
+                  <a:lnTo>
+                    <a:pt x="6682726" y="1079414"/>
+                  </a:lnTo>
+                  <a:lnTo>
+                    <a:pt x="6753071" y="1081361"/>
+                  </a:lnTo>
+                  <a:lnTo>
+                    <a:pt x="6823415" y="1083287"/>
+                  </a:lnTo>
+                  <a:lnTo>
+                    <a:pt x="6893760" y="1085192"/>
+                  </a:lnTo>
+                  <a:lnTo>
+                    <a:pt x="6964104" y="1087076"/>
+                  </a:lnTo>
+                  <a:lnTo>
+                    <a:pt x="6964104" y="1207701"/>
+                  </a:lnTo>
+                  <a:lnTo>
+                    <a:pt x="6893760" y="1205934"/>
+                  </a:lnTo>
+                  <a:lnTo>
+                    <a:pt x="6823415" y="1204103"/>
+                  </a:lnTo>
+                  <a:lnTo>
+                    <a:pt x="6753071" y="1202208"/>
+                  </a:lnTo>
+                  <a:lnTo>
+                    <a:pt x="6682726" y="1200245"/>
+                  </a:lnTo>
+                  <a:lnTo>
+                    <a:pt x="6612382" y="1198211"/>
+                  </a:lnTo>
+                  <a:lnTo>
+                    <a:pt x="6542037" y="1196105"/>
+                  </a:lnTo>
+                  <a:lnTo>
+                    <a:pt x="6471693" y="1193924"/>
+                  </a:lnTo>
+                  <a:lnTo>
+                    <a:pt x="6401348" y="1191665"/>
+                  </a:lnTo>
+                  <a:lnTo>
+                    <a:pt x="6331004" y="1189326"/>
+                  </a:lnTo>
+                  <a:lnTo>
+                    <a:pt x="6260659" y="1186903"/>
+                  </a:lnTo>
+                  <a:lnTo>
+                    <a:pt x="6190315" y="1184393"/>
+                  </a:lnTo>
+                  <a:lnTo>
+                    <a:pt x="6119970" y="1181794"/>
+                  </a:lnTo>
+                  <a:lnTo>
+                    <a:pt x="6049626" y="1179102"/>
+                  </a:lnTo>
+                  <a:lnTo>
+                    <a:pt x="5979281" y="1176314"/>
+                  </a:lnTo>
+                  <a:lnTo>
+                    <a:pt x="5908937" y="1173426"/>
+                  </a:lnTo>
+                  <a:lnTo>
+                    <a:pt x="5838592" y="1170436"/>
+                  </a:lnTo>
+                  <a:lnTo>
+                    <a:pt x="5768248" y="1167338"/>
+                  </a:lnTo>
+                  <a:lnTo>
+                    <a:pt x="5697903" y="1164130"/>
+                  </a:lnTo>
+                  <a:lnTo>
+                    <a:pt x="5627559" y="1160808"/>
+                  </a:lnTo>
+                  <a:lnTo>
+                    <a:pt x="5557214" y="1157366"/>
+                  </a:lnTo>
+                  <a:lnTo>
+                    <a:pt x="5486870" y="1153802"/>
+                  </a:lnTo>
+                  <a:lnTo>
+                    <a:pt x="5416525" y="1150111"/>
+                  </a:lnTo>
+                  <a:lnTo>
+                    <a:pt x="5346181" y="1146288"/>
+                  </a:lnTo>
+                  <a:lnTo>
+                    <a:pt x="5275836" y="1142329"/>
+                  </a:lnTo>
+                  <a:lnTo>
+                    <a:pt x="5205492" y="1138228"/>
+                  </a:lnTo>
+                  <a:lnTo>
+                    <a:pt x="5135147" y="1133980"/>
+                  </a:lnTo>
+                  <a:lnTo>
+                    <a:pt x="5064803" y="1129582"/>
+                  </a:lnTo>
+                  <a:lnTo>
+                    <a:pt x="4994458" y="1125026"/>
+                  </a:lnTo>
+                  <a:lnTo>
+                    <a:pt x="4924114" y="1120307"/>
+                  </a:lnTo>
+                  <a:lnTo>
+                    <a:pt x="4853769" y="1115420"/>
+                  </a:lnTo>
+                  <a:lnTo>
+                    <a:pt x="4783425" y="1110359"/>
+                  </a:lnTo>
+                  <a:lnTo>
+                    <a:pt x="4713080" y="1105117"/>
+                  </a:lnTo>
+                  <a:lnTo>
+                    <a:pt x="4642736" y="1099687"/>
+                  </a:lnTo>
+                  <a:lnTo>
+                    <a:pt x="4572391" y="1094064"/>
+                  </a:lnTo>
+                  <a:lnTo>
+                    <a:pt x="4502047" y="1088240"/>
+                  </a:lnTo>
+                  <a:lnTo>
+                    <a:pt x="4431702" y="1082209"/>
+                  </a:lnTo>
+                  <a:lnTo>
+                    <a:pt x="4361358" y="1075962"/>
+                  </a:lnTo>
+                  <a:lnTo>
+                    <a:pt x="4291013" y="1069492"/>
+                  </a:lnTo>
+                  <a:lnTo>
+                    <a:pt x="4220669" y="1062790"/>
+                  </a:lnTo>
+                  <a:lnTo>
+                    <a:pt x="4150324" y="1055850"/>
+                  </a:lnTo>
+                  <a:lnTo>
+                    <a:pt x="4079980" y="1048662"/>
+                  </a:lnTo>
+                  <a:lnTo>
+                    <a:pt x="4009635" y="1041218"/>
+                  </a:lnTo>
+                  <a:lnTo>
+                    <a:pt x="3939291" y="1033507"/>
+                  </a:lnTo>
+                  <a:lnTo>
+                    <a:pt x="3868946" y="1025522"/>
+                  </a:lnTo>
+                  <a:lnTo>
+                    <a:pt x="3798602" y="1017251"/>
+                  </a:lnTo>
+                  <a:lnTo>
+                    <a:pt x="3728257" y="1008685"/>
+                  </a:lnTo>
+                  <a:lnTo>
+                    <a:pt x="3657913" y="999813"/>
+                  </a:lnTo>
+                  <a:lnTo>
+                    <a:pt x="3587569" y="990625"/>
+                  </a:lnTo>
+                  <a:lnTo>
+                    <a:pt x="3517224" y="981108"/>
+                  </a:lnTo>
+                  <a:lnTo>
+                    <a:pt x="3446880" y="971252"/>
+                  </a:lnTo>
+                  <a:lnTo>
+                    <a:pt x="3376535" y="961044"/>
+                  </a:lnTo>
+                  <a:lnTo>
+                    <a:pt x="3306191" y="955565"/>
+                  </a:lnTo>
+                  <a:lnTo>
+                    <a:pt x="3235846" y="952225"/>
+                  </a:lnTo>
+                  <a:lnTo>
+                    <a:pt x="3165502" y="948847"/>
+                  </a:lnTo>
+                  <a:lnTo>
+                    <a:pt x="3095157" y="945432"/>
+                  </a:lnTo>
+                  <a:lnTo>
+                    <a:pt x="3024813" y="941980"/>
+                  </a:lnTo>
+                  <a:lnTo>
+                    <a:pt x="2954468" y="938489"/>
+                  </a:lnTo>
+                  <a:lnTo>
+                    <a:pt x="2884124" y="934960"/>
+                  </a:lnTo>
+                  <a:lnTo>
+                    <a:pt x="2813779" y="931391"/>
+                  </a:lnTo>
+                  <a:lnTo>
+                    <a:pt x="2743435" y="927783"/>
+                  </a:lnTo>
+                  <a:lnTo>
+                    <a:pt x="2673090" y="924135"/>
+                  </a:lnTo>
+                  <a:lnTo>
+                    <a:pt x="2602746" y="920447"/>
+                  </a:lnTo>
+                  <a:lnTo>
+                    <a:pt x="2532401" y="916717"/>
+                  </a:lnTo>
+                  <a:lnTo>
+                    <a:pt x="2462057" y="912947"/>
+                  </a:lnTo>
+                  <a:lnTo>
+                    <a:pt x="2391712" y="909135"/>
+                  </a:lnTo>
+                  <a:lnTo>
+                    <a:pt x="2321368" y="905280"/>
+                  </a:lnTo>
+                  <a:lnTo>
+                    <a:pt x="2251023" y="901383"/>
+                  </a:lnTo>
+                  <a:lnTo>
+                    <a:pt x="2180679" y="897442"/>
+                  </a:lnTo>
+                  <a:lnTo>
+                    <a:pt x="2110334" y="893458"/>
+                  </a:lnTo>
+                  <a:lnTo>
+                    <a:pt x="2039990" y="889430"/>
+                  </a:lnTo>
+                  <a:lnTo>
+                    <a:pt x="1969645" y="885358"/>
+                  </a:lnTo>
+                  <a:lnTo>
+                    <a:pt x="1899301" y="881240"/>
+                  </a:lnTo>
+                  <a:lnTo>
+                    <a:pt x="1828956" y="877076"/>
+                  </a:lnTo>
+                  <a:lnTo>
+                    <a:pt x="1758612" y="872867"/>
+                  </a:lnTo>
+                  <a:lnTo>
+                    <a:pt x="1688267" y="868611"/>
+                  </a:lnTo>
+                  <a:lnTo>
+                    <a:pt x="1617923" y="864307"/>
+                  </a:lnTo>
+                  <a:lnTo>
+                    <a:pt x="1547578" y="859956"/>
+                  </a:lnTo>
+                  <a:lnTo>
+                    <a:pt x="1477234" y="855557"/>
+                  </a:lnTo>
+                  <a:lnTo>
+                    <a:pt x="1406889" y="851109"/>
+                  </a:lnTo>
+                  <a:lnTo>
+                    <a:pt x="1336545" y="846612"/>
+                  </a:lnTo>
+                  <a:lnTo>
+                    <a:pt x="1266200" y="842065"/>
+                  </a:lnTo>
+                  <a:lnTo>
+                    <a:pt x="1195856" y="837468"/>
+                  </a:lnTo>
+                  <a:lnTo>
+                    <a:pt x="1125511" y="832820"/>
+                  </a:lnTo>
+                  <a:lnTo>
+                    <a:pt x="1055167" y="828120"/>
+                  </a:lnTo>
+                  <a:lnTo>
+                    <a:pt x="984822" y="823369"/>
+                  </a:lnTo>
+                  <a:lnTo>
+                    <a:pt x="914478" y="818564"/>
+                  </a:lnTo>
+                  <a:lnTo>
+                    <a:pt x="844133" y="813707"/>
+                  </a:lnTo>
+                  <a:lnTo>
+                    <a:pt x="773789" y="808795"/>
+                  </a:lnTo>
+                  <a:lnTo>
+                    <a:pt x="703444" y="803830"/>
+                  </a:lnTo>
+                  <a:lnTo>
+                    <a:pt x="633100" y="798809"/>
+                  </a:lnTo>
+                  <a:lnTo>
+                    <a:pt x="562755" y="793733"/>
+                  </a:lnTo>
+                  <a:lnTo>
+                    <a:pt x="492411" y="788600"/>
+                  </a:lnTo>
+                  <a:lnTo>
+                    <a:pt x="422066" y="783411"/>
+                  </a:lnTo>
+                  <a:lnTo>
+                    <a:pt x="351722" y="778164"/>
+                  </a:lnTo>
+                  <a:lnTo>
+                    <a:pt x="281377" y="772859"/>
+                  </a:lnTo>
+                  <a:lnTo>
+                    <a:pt x="211033" y="767496"/>
+                  </a:lnTo>
+                  <a:lnTo>
+                    <a:pt x="140688" y="762073"/>
+                  </a:lnTo>
+                  <a:lnTo>
+                    <a:pt x="70344" y="756590"/>
+                  </a:lnTo>
+                  <a:lnTo>
+                    <a:pt x="0" y="751046"/>
+                  </a:lnTo>
+                  <a:close/>
+                </a:path>
+              </a:pathLst>
+            </a:custGeom>
+            <a:solidFill>
+              <a:srgbClr val="FF8C00">
+                <a:alpha val="20000"/>
+              </a:srgbClr>
+            </a:solidFill>
+          </p:spPr>
+          <p:txBody>
+            <a:bodyPr/>
+            <a:lstStyle/>
+            <a:p/>
+          </p:txBody>
+        </p:sp>
+        <p:sp>
+          <p:nvSpPr>
+            <p:cNvPr id="67" name="pl67"/>
+            <p:cNvSpPr/>
+            <p:nvPr/>
+          </p:nvSpPr>
+          <p:spPr>
+            <a:xfrm>
+              <a:off x="1712659" y="4336484"/>
+              <a:ext cx="6486757" cy="1087076"/>
+            </a:xfrm>
+            <a:custGeom>
+              <a:avLst/>
+              <a:pathLst>
+                <a:path w="6486757" h="1087076">
+                  <a:moveTo>
+                    <a:pt x="0" y="0"/>
+                  </a:moveTo>
+                  <a:lnTo>
+                    <a:pt x="15064" y="9538"/>
+                  </a:lnTo>
+                  <a:lnTo>
+                    <a:pt x="85408" y="52543"/>
+                  </a:lnTo>
+                  <a:lnTo>
+                    <a:pt x="155753" y="94065"/>
+                  </a:lnTo>
+                  <a:lnTo>
+                    <a:pt x="226097" y="134157"/>
+                  </a:lnTo>
+                  <a:lnTo>
+                    <a:pt x="296442" y="172867"/>
+                  </a:lnTo>
+                  <a:lnTo>
+                    <a:pt x="366786" y="210242"/>
+                  </a:lnTo>
+                  <a:lnTo>
+                    <a:pt x="437131" y="246329"/>
+                  </a:lnTo>
+                  <a:lnTo>
+                    <a:pt x="507475" y="281172"/>
+                  </a:lnTo>
+                  <a:lnTo>
+                    <a:pt x="577820" y="314814"/>
+                  </a:lnTo>
+                  <a:lnTo>
+                    <a:pt x="648164" y="347297"/>
+                  </a:lnTo>
+                  <a:lnTo>
+                    <a:pt x="718509" y="378660"/>
+                  </a:lnTo>
+                  <a:lnTo>
+                    <a:pt x="788853" y="408942"/>
+                  </a:lnTo>
+                  <a:lnTo>
+                    <a:pt x="859198" y="438180"/>
+                  </a:lnTo>
+                  <a:lnTo>
+                    <a:pt x="929542" y="466410"/>
+                  </a:lnTo>
+                  <a:lnTo>
+                    <a:pt x="999887" y="493668"/>
+                  </a:lnTo>
+                  <a:lnTo>
+                    <a:pt x="1070231" y="519985"/>
+                  </a:lnTo>
+                  <a:lnTo>
+                    <a:pt x="1140576" y="545396"/>
+                  </a:lnTo>
+                  <a:lnTo>
+                    <a:pt x="1210920" y="569931"/>
+                  </a:lnTo>
+                  <a:lnTo>
+                    <a:pt x="1281265" y="593620"/>
+                  </a:lnTo>
+                  <a:lnTo>
+                    <a:pt x="1351609" y="616493"/>
+                  </a:lnTo>
+                  <a:lnTo>
+                    <a:pt x="1421954" y="638577"/>
+                  </a:lnTo>
+                  <a:lnTo>
+                    <a:pt x="1492298" y="659900"/>
+                  </a:lnTo>
+                  <a:lnTo>
+                    <a:pt x="1562643" y="680488"/>
+                  </a:lnTo>
+                  <a:lnTo>
+                    <a:pt x="1632987" y="700366"/>
+                  </a:lnTo>
+                  <a:lnTo>
+                    <a:pt x="1703332" y="719560"/>
+                  </a:lnTo>
+                  <a:lnTo>
+                    <a:pt x="1773676" y="738091"/>
+                  </a:lnTo>
+                  <a:lnTo>
+                    <a:pt x="1844021" y="755984"/>
+                  </a:lnTo>
+                  <a:lnTo>
+                    <a:pt x="1914365" y="773260"/>
+                  </a:lnTo>
+                  <a:lnTo>
+                    <a:pt x="1984710" y="789941"/>
+                  </a:lnTo>
+                  <a:lnTo>
+                    <a:pt x="2055054" y="806047"/>
+                  </a:lnTo>
+                  <a:lnTo>
+                    <a:pt x="2125399" y="821597"/>
+                  </a:lnTo>
+                  <a:lnTo>
+                    <a:pt x="2195743" y="836612"/>
+                  </a:lnTo>
+                  <a:lnTo>
+                    <a:pt x="2266088" y="851109"/>
+                  </a:lnTo>
+                  <a:lnTo>
+                    <a:pt x="2336432" y="865106"/>
+                  </a:lnTo>
+                  <a:lnTo>
+                    <a:pt x="2406777" y="878621"/>
+                  </a:lnTo>
+                  <a:lnTo>
+                    <a:pt x="2477121" y="891670"/>
+                  </a:lnTo>
+                  <a:lnTo>
+                    <a:pt x="2547465" y="904270"/>
+                  </a:lnTo>
+                  <a:lnTo>
+                    <a:pt x="2617810" y="916435"/>
+                  </a:lnTo>
+                  <a:lnTo>
+                    <a:pt x="2688154" y="928180"/>
+                  </a:lnTo>
+                  <a:lnTo>
+                    <a:pt x="2758499" y="939521"/>
+                  </a:lnTo>
+                  <a:lnTo>
+                    <a:pt x="2828843" y="950471"/>
+                  </a:lnTo>
+                  <a:lnTo>
+                    <a:pt x="2899188" y="958869"/>
+                  </a:lnTo>
+                  <a:lnTo>
+                    <a:pt x="2969532" y="962136"/>
+                  </a:lnTo>
+                  <a:lnTo>
+                    <a:pt x="3039877" y="965368"/>
+                  </a:lnTo>
+                  <a:lnTo>
+                    <a:pt x="3110221" y="968564"/>
+                  </a:lnTo>
+                  <a:lnTo>
+                    <a:pt x="3180566" y="971726"/>
+                  </a:lnTo>
+                  <a:lnTo>
+                    <a:pt x="3250910" y="974853"/>
+                  </a:lnTo>
+                  <a:lnTo>
+                    <a:pt x="3321255" y="977945"/>
+                  </a:lnTo>
+                  <a:lnTo>
+                    <a:pt x="3391599" y="981004"/>
+                  </a:lnTo>
+                  <a:lnTo>
+                    <a:pt x="3461944" y="984029"/>
+                  </a:lnTo>
+                  <a:lnTo>
+                    <a:pt x="3532288" y="987021"/>
+                  </a:lnTo>
+                  <a:lnTo>
+                    <a:pt x="3602633" y="989980"/>
+                  </a:lnTo>
+                  <a:lnTo>
+                    <a:pt x="3672977" y="992907"/>
+                  </a:lnTo>
+                  <a:lnTo>
+                    <a:pt x="3743322" y="995802"/>
+                  </a:lnTo>
+                  <a:lnTo>
+                    <a:pt x="3813666" y="998665"/>
+                  </a:lnTo>
+                  <a:lnTo>
+                    <a:pt x="3884011" y="1001496"/>
+                  </a:lnTo>
+                  <a:lnTo>
+                    <a:pt x="3954355" y="1004297"/>
+                  </a:lnTo>
+                  <a:lnTo>
+                    <a:pt x="4024700" y="1007067"/>
+                  </a:lnTo>
+                  <a:lnTo>
+                    <a:pt x="4095044" y="1009807"/>
+                  </a:lnTo>
+                  <a:lnTo>
+                    <a:pt x="4165389" y="1012517"/>
+                  </a:lnTo>
+                  <a:lnTo>
+                    <a:pt x="4235733" y="1015197"/>
+                  </a:lnTo>
+                  <a:lnTo>
+                    <a:pt x="4306078" y="1017847"/>
+                  </a:lnTo>
+                  <a:lnTo>
+                    <a:pt x="4376422" y="1020469"/>
+                  </a:lnTo>
+                  <a:lnTo>
+                    <a:pt x="4446767" y="1023062"/>
+                  </a:lnTo>
+                  <a:lnTo>
+                    <a:pt x="4517111" y="1025626"/>
+                  </a:lnTo>
+                  <a:lnTo>
+                    <a:pt x="4587456" y="1028163"/>
+                  </a:lnTo>
+                  <a:lnTo>
+                    <a:pt x="4657800" y="1030671"/>
+                  </a:lnTo>
+                  <a:lnTo>
+                    <a:pt x="4728145" y="1033152"/>
+                  </a:lnTo>
+                  <a:lnTo>
+                    <a:pt x="4798489" y="1035606"/>
+                  </a:lnTo>
+                  <a:lnTo>
+                    <a:pt x="4868834" y="1038033"/>
+                  </a:lnTo>
+                  <a:lnTo>
+                    <a:pt x="4939178" y="1040434"/>
+                  </a:lnTo>
+                  <a:lnTo>
+                    <a:pt x="5009523" y="1042808"/>
+                  </a:lnTo>
+                  <a:lnTo>
+                    <a:pt x="5079867" y="1045156"/>
+                  </a:lnTo>
+                  <a:lnTo>
+                    <a:pt x="5150212" y="1047479"/>
+                  </a:lnTo>
+                  <a:lnTo>
+                    <a:pt x="5220556" y="1049776"/>
+                  </a:lnTo>
+                  <a:lnTo>
+                    <a:pt x="5290901" y="1052048"/>
+                  </a:lnTo>
+                  <a:lnTo>
+                    <a:pt x="5361245" y="1054295"/>
+                  </a:lnTo>
+                  <a:lnTo>
+                    <a:pt x="5431590" y="1056517"/>
+                  </a:lnTo>
+                  <a:lnTo>
+                    <a:pt x="5501934" y="1058715"/>
+                  </a:lnTo>
+                  <a:lnTo>
+                    <a:pt x="5572279" y="1060889"/>
+                  </a:lnTo>
+                  <a:lnTo>
+                    <a:pt x="5642623" y="1063039"/>
+                  </a:lnTo>
+                  <a:lnTo>
+                    <a:pt x="5712968" y="1065166"/>
+                  </a:lnTo>
+                  <a:lnTo>
+                    <a:pt x="5783312" y="1067269"/>
+                  </a:lnTo>
+                  <a:lnTo>
+                    <a:pt x="5853657" y="1069350"/>
+                  </a:lnTo>
+                  <a:lnTo>
+                    <a:pt x="5924001" y="1071407"/>
+                  </a:lnTo>
+                  <a:lnTo>
+                    <a:pt x="5994346" y="1073442"/>
+                  </a:lnTo>
+                  <a:lnTo>
+                    <a:pt x="6064690" y="1075455"/>
+                  </a:lnTo>
+                  <a:lnTo>
+                    <a:pt x="6135035" y="1077445"/>
+                  </a:lnTo>
+                  <a:lnTo>
+                    <a:pt x="6205379" y="1079414"/>
+                  </a:lnTo>
+                  <a:lnTo>
+                    <a:pt x="6275723" y="1081361"/>
+                  </a:lnTo>
+                  <a:lnTo>
+                    <a:pt x="6346068" y="1083287"/>
+                  </a:lnTo>
+                  <a:lnTo>
+                    <a:pt x="6416412" y="1085192"/>
+                  </a:lnTo>
+                  <a:lnTo>
+                    <a:pt x="6486757" y="1087076"/>
+                  </a:lnTo>
+                </a:path>
+              </a:pathLst>
+            </a:custGeom>
+          </p:spPr>
+          <p:txBody>
+            <a:bodyPr/>
+            <a:lstStyle/>
+            <a:p/>
+          </p:txBody>
+        </p:sp>
+        <p:sp>
+          <p:nvSpPr>
+            <p:cNvPr id="68" name="pl68"/>
+            <p:cNvSpPr/>
+            <p:nvPr/>
+          </p:nvSpPr>
+          <p:spPr>
+            <a:xfrm>
+              <a:off x="1235312" y="5087530"/>
+              <a:ext cx="6964104" cy="456655"/>
+            </a:xfrm>
+            <a:custGeom>
+              <a:avLst/>
+              <a:pathLst>
+                <a:path w="6964104" h="456655">
+                  <a:moveTo>
+                    <a:pt x="6964104" y="456655"/>
+                  </a:moveTo>
+                  <a:lnTo>
+                    <a:pt x="6893760" y="454887"/>
+                  </a:lnTo>
+                  <a:lnTo>
+                    <a:pt x="6823415" y="453057"/>
+                  </a:lnTo>
+                  <a:lnTo>
+                    <a:pt x="6753071" y="451162"/>
+                  </a:lnTo>
+                  <a:lnTo>
+                    <a:pt x="6682726" y="449198"/>
+                  </a:lnTo>
+                  <a:lnTo>
+                    <a:pt x="6612382" y="447165"/>
+                  </a:lnTo>
+                  <a:lnTo>
+                    <a:pt x="6542037" y="445059"/>
+                  </a:lnTo>
+                  <a:lnTo>
+                    <a:pt x="6471693" y="442878"/>
+                  </a:lnTo>
+                  <a:lnTo>
+                    <a:pt x="6401348" y="440619"/>
+                  </a:lnTo>
+                  <a:lnTo>
+                    <a:pt x="6331004" y="438280"/>
+                  </a:lnTo>
+                  <a:lnTo>
+                    <a:pt x="6260659" y="435857"/>
+                  </a:lnTo>
+                  <a:lnTo>
+                    <a:pt x="6190315" y="433347"/>
+                  </a:lnTo>
+                  <a:lnTo>
+                    <a:pt x="6119970" y="430748"/>
+                  </a:lnTo>
+                  <a:lnTo>
+                    <a:pt x="6049626" y="428056"/>
+                  </a:lnTo>
+                  <a:lnTo>
+                    <a:pt x="5979281" y="425268"/>
+                  </a:lnTo>
+                  <a:lnTo>
+                    <a:pt x="5908937" y="422380"/>
+                  </a:lnTo>
+                  <a:lnTo>
+                    <a:pt x="5838592" y="419389"/>
+                  </a:lnTo>
+                  <a:lnTo>
+                    <a:pt x="5768248" y="416292"/>
+                  </a:lnTo>
+                  <a:lnTo>
+                    <a:pt x="5697903" y="413084"/>
+                  </a:lnTo>
+                  <a:lnTo>
+                    <a:pt x="5627559" y="409761"/>
+                  </a:lnTo>
+                  <a:lnTo>
+                    <a:pt x="5557214" y="406320"/>
+                  </a:lnTo>
+                  <a:lnTo>
+                    <a:pt x="5486870" y="402756"/>
+                  </a:lnTo>
+                  <a:lnTo>
+                    <a:pt x="5416525" y="399065"/>
+                  </a:lnTo>
+                  <a:lnTo>
+                    <a:pt x="5346181" y="395242"/>
+                  </a:lnTo>
+                  <a:lnTo>
+                    <a:pt x="5275836" y="391282"/>
+                  </a:lnTo>
+                  <a:lnTo>
+                    <a:pt x="5205492" y="387182"/>
+                  </a:lnTo>
+                  <a:lnTo>
+                    <a:pt x="5135147" y="382934"/>
+                  </a:lnTo>
+                  <a:lnTo>
+                    <a:pt x="5064803" y="378535"/>
+                  </a:lnTo>
+                  <a:lnTo>
+                    <a:pt x="4994458" y="373980"/>
+                  </a:lnTo>
+                  <a:lnTo>
+                    <a:pt x="4924114" y="369261"/>
+                  </a:lnTo>
+                  <a:lnTo>
+                    <a:pt x="4853769" y="364374"/>
+                  </a:lnTo>
+                  <a:lnTo>
+                    <a:pt x="4783425" y="359313"/>
+                  </a:lnTo>
+                  <a:lnTo>
+                    <a:pt x="4713080" y="354070"/>
+                  </a:lnTo>
+                  <a:lnTo>
+                    <a:pt x="4642736" y="348641"/>
+                  </a:lnTo>
+                  <a:lnTo>
+                    <a:pt x="4572391" y="343018"/>
+                  </a:lnTo>
+                  <a:lnTo>
+                    <a:pt x="4502047" y="337194"/>
+                  </a:lnTo>
+                  <a:lnTo>
+                    <a:pt x="4431702" y="331162"/>
+                  </a:lnTo>
+                  <a:lnTo>
+                    <a:pt x="4361358" y="324915"/>
+                  </a:lnTo>
+                  <a:lnTo>
+                    <a:pt x="4291013" y="318445"/>
+                  </a:lnTo>
+                  <a:lnTo>
+                    <a:pt x="4220669" y="311744"/>
+                  </a:lnTo>
+                  <a:lnTo>
+                    <a:pt x="4150324" y="304804"/>
+                  </a:lnTo>
+                  <a:lnTo>
+                    <a:pt x="4079980" y="297616"/>
+                  </a:lnTo>
+                  <a:lnTo>
+                    <a:pt x="4009635" y="290171"/>
+                  </a:lnTo>
+                  <a:lnTo>
+                    <a:pt x="3939291" y="282461"/>
+                  </a:lnTo>
+                  <a:lnTo>
+                    <a:pt x="3868946" y="274475"/>
+                  </a:lnTo>
+                  <a:lnTo>
+                    <a:pt x="3798602" y="266205"/>
+                  </a:lnTo>
+                  <a:lnTo>
+                    <a:pt x="3728257" y="257639"/>
+                  </a:lnTo>
+                  <a:lnTo>
+                    <a:pt x="3657913" y="248767"/>
+                  </a:lnTo>
+                  <a:lnTo>
+                    <a:pt x="3587569" y="239578"/>
+                  </a:lnTo>
+                  <a:lnTo>
+                    <a:pt x="3517224" y="230062"/>
+                  </a:lnTo>
+                  <a:lnTo>
+                    <a:pt x="3446880" y="220206"/>
+                  </a:lnTo>
+                  <a:lnTo>
+                    <a:pt x="3376535" y="209997"/>
+                  </a:lnTo>
+                  <a:lnTo>
+                    <a:pt x="3306191" y="204519"/>
+                  </a:lnTo>
+                  <a:lnTo>
+                    <a:pt x="3235846" y="201178"/>
+                  </a:lnTo>
+                  <a:lnTo>
+                    <a:pt x="3165502" y="197801"/>
+                  </a:lnTo>
+                  <a:lnTo>
+                    <a:pt x="3095157" y="194386"/>
+                  </a:lnTo>
+                  <a:lnTo>
+                    <a:pt x="3024813" y="190934"/>
+                  </a:lnTo>
+                  <a:lnTo>
+                    <a:pt x="2954468" y="187443"/>
+                  </a:lnTo>
+                  <a:lnTo>
+                    <a:pt x="2884124" y="183913"/>
+                  </a:lnTo>
+                  <a:lnTo>
+                    <a:pt x="2813779" y="180345"/>
+                  </a:lnTo>
+                  <a:lnTo>
+                    <a:pt x="2743435" y="176737"/>
+                  </a:lnTo>
+                  <a:lnTo>
+                    <a:pt x="2673090" y="173089"/>
+                  </a:lnTo>
+                  <a:lnTo>
+                    <a:pt x="2602746" y="169400"/>
+                  </a:lnTo>
+                  <a:lnTo>
+                    <a:pt x="2532401" y="165671"/>
+                  </a:lnTo>
+                  <a:lnTo>
+                    <a:pt x="2462057" y="161901"/>
+                  </a:lnTo>
+                  <a:lnTo>
+                    <a:pt x="2391712" y="158088"/>
+                  </a:lnTo>
+                  <a:lnTo>
+                    <a:pt x="2321368" y="154234"/>
+                  </a:lnTo>
+                  <a:lnTo>
+                    <a:pt x="2251023" y="150337"/>
+                  </a:lnTo>
+                  <a:lnTo>
+                    <a:pt x="2180679" y="146396"/>
+                  </a:lnTo>
+                  <a:lnTo>
+                    <a:pt x="2110334" y="142412"/>
+                  </a:lnTo>
+                  <a:lnTo>
+                    <a:pt x="2039990" y="138384"/>
+                  </a:lnTo>
+                  <a:lnTo>
+                    <a:pt x="1969645" y="134311"/>
+                  </a:lnTo>
+                  <a:lnTo>
+                    <a:pt x="1899301" y="130194"/>
+                  </a:lnTo>
+                  <a:lnTo>
+                    <a:pt x="1828956" y="126030"/>
+                  </a:lnTo>
+                  <a:lnTo>
+                    <a:pt x="1758612" y="121821"/>
+                  </a:lnTo>
+                  <a:lnTo>
+                    <a:pt x="1688267" y="117564"/>
+                  </a:lnTo>
+                  <a:lnTo>
+                    <a:pt x="1617923" y="113261"/>
+                  </a:lnTo>
+                  <a:lnTo>
+                    <a:pt x="1547578" y="108910"/>
+                  </a:lnTo>
+                  <a:lnTo>
+                    <a:pt x="1477234" y="104511"/>
+                  </a:lnTo>
+                  <a:lnTo>
+                    <a:pt x="1406889" y="100063"/>
+                  </a:lnTo>
+                  <a:lnTo>
+                    <a:pt x="1336545" y="95566"/>
+                  </a:lnTo>
+                  <a:lnTo>
+                    <a:pt x="1266200" y="91019"/>
+                  </a:lnTo>
+                  <a:lnTo>
+                    <a:pt x="1195856" y="86422"/>
+                  </a:lnTo>
+                  <a:lnTo>
+                    <a:pt x="1125511" y="81774"/>
+                  </a:lnTo>
+                  <a:lnTo>
+                    <a:pt x="1055167" y="77074"/>
+                  </a:lnTo>
+                  <a:lnTo>
+                    <a:pt x="984822" y="72322"/>
+                  </a:lnTo>
+                  <a:lnTo>
+                    <a:pt x="914478" y="67518"/>
+                  </a:lnTo>
+                  <a:lnTo>
+                    <a:pt x="844133" y="62661"/>
+                  </a:lnTo>
+                  <a:lnTo>
+                    <a:pt x="773789" y="57749"/>
+                  </a:lnTo>
+                  <a:lnTo>
+                    <a:pt x="703444" y="52784"/>
+                  </a:lnTo>
+                  <a:lnTo>
+                    <a:pt x="633100" y="47763"/>
+                  </a:lnTo>
+                  <a:lnTo>
+                    <a:pt x="562755" y="42687"/>
+                  </a:lnTo>
+                  <a:lnTo>
+                    <a:pt x="492411" y="37554"/>
+                  </a:lnTo>
+                  <a:lnTo>
+                    <a:pt x="422066" y="32365"/>
+                  </a:lnTo>
+                  <a:lnTo>
+                    <a:pt x="351722" y="27118"/>
+                  </a:lnTo>
+                  <a:lnTo>
+                    <a:pt x="281377" y="21813"/>
+                  </a:lnTo>
+                  <a:lnTo>
+                    <a:pt x="211033" y="16449"/>
+                  </a:lnTo>
+                  <a:lnTo>
+                    <a:pt x="140688" y="11026"/>
+                  </a:lnTo>
+                  <a:lnTo>
+                    <a:pt x="70344" y="5543"/>
+                  </a:lnTo>
+                  <a:lnTo>
+                    <a:pt x="0" y="0"/>
+                  </a:lnTo>
+                </a:path>
+              </a:pathLst>
+            </a:custGeom>
+          </p:spPr>
+          <p:txBody>
+            <a:bodyPr/>
+            <a:lstStyle/>
+            <a:p/>
+          </p:txBody>
+        </p:sp>
+        <p:sp>
+          <p:nvSpPr>
+            <p:cNvPr id="69" name="pl69"/>
+            <p:cNvSpPr/>
+            <p:nvPr/>
+          </p:nvSpPr>
+          <p:spPr>
+            <a:xfrm>
+              <a:off x="1235312" y="4695206"/>
+              <a:ext cx="6964104" cy="806711"/>
+            </a:xfrm>
+            <a:custGeom>
+              <a:avLst/>
+              <a:pathLst>
+                <a:path w="6964104" h="806711">
+                  <a:moveTo>
+                    <a:pt x="0" y="0"/>
+                  </a:moveTo>
+                  <a:lnTo>
+                    <a:pt x="70344" y="20468"/>
+                  </a:lnTo>
+                  <a:lnTo>
+                    <a:pt x="140688" y="40470"/>
+                  </a:lnTo>
+                  <a:lnTo>
+                    <a:pt x="211033" y="60017"/>
+                  </a:lnTo>
+                  <a:lnTo>
+                    <a:pt x="281377" y="79118"/>
+                  </a:lnTo>
+                  <a:lnTo>
+                    <a:pt x="351722" y="97784"/>
+                  </a:lnTo>
+                  <a:lnTo>
+                    <a:pt x="422066" y="116025"/>
+                  </a:lnTo>
+                  <a:lnTo>
+                    <a:pt x="492411" y="133851"/>
+                  </a:lnTo>
+                  <a:lnTo>
+                    <a:pt x="562755" y="151270"/>
+                  </a:lnTo>
+                  <a:lnTo>
+                    <a:pt x="633100" y="168292"/>
+                  </a:lnTo>
+                  <a:lnTo>
+                    <a:pt x="703444" y="184927"/>
+                  </a:lnTo>
+                  <a:lnTo>
+                    <a:pt x="773789" y="201183"/>
+                  </a:lnTo>
+                  <a:lnTo>
+                    <a:pt x="844133" y="217068"/>
+                  </a:lnTo>
+                  <a:lnTo>
+                    <a:pt x="914478" y="232591"/>
+                  </a:lnTo>
+                  <a:lnTo>
+                    <a:pt x="984822" y="247761"/>
+                  </a:lnTo>
+                  <a:lnTo>
+                    <a:pt x="1055167" y="262585"/>
+                  </a:lnTo>
+                  <a:lnTo>
+                    <a:pt x="1125511" y="277072"/>
+                  </a:lnTo>
+                  <a:lnTo>
+                    <a:pt x="1195856" y="291228"/>
+                  </a:lnTo>
+                  <a:lnTo>
+                    <a:pt x="1266200" y="305062"/>
+                  </a:lnTo>
+                  <a:lnTo>
+                    <a:pt x="1336545" y="318581"/>
+                  </a:lnTo>
+                  <a:lnTo>
+                    <a:pt x="1406889" y="331792"/>
+                  </a:lnTo>
+                  <a:lnTo>
+                    <a:pt x="1477234" y="344702"/>
+                  </a:lnTo>
+                  <a:lnTo>
+                    <a:pt x="1547578" y="357318"/>
+                  </a:lnTo>
+                  <a:lnTo>
+                    <a:pt x="1617923" y="369646"/>
+                  </a:lnTo>
+                  <a:lnTo>
+                    <a:pt x="1688267" y="381694"/>
+                  </a:lnTo>
+                  <a:lnTo>
+                    <a:pt x="1758612" y="393467"/>
+                  </a:lnTo>
+                  <a:lnTo>
+                    <a:pt x="1828956" y="404972"/>
+                  </a:lnTo>
+                  <a:lnTo>
+                    <a:pt x="1899301" y="416214"/>
+                  </a:lnTo>
+                  <a:lnTo>
+                    <a:pt x="1969645" y="427201"/>
+                  </a:lnTo>
+                  <a:lnTo>
+                    <a:pt x="2039990" y="437937"/>
+                  </a:lnTo>
+                  <a:lnTo>
+                    <a:pt x="2110334" y="448429"/>
+                  </a:lnTo>
+                  <a:lnTo>
+                    <a:pt x="2180679" y="458682"/>
+                  </a:lnTo>
+                  <a:lnTo>
+                    <a:pt x="2251023" y="468701"/>
+                  </a:lnTo>
+                  <a:lnTo>
+                    <a:pt x="2321368" y="478492"/>
+                  </a:lnTo>
+                  <a:lnTo>
+                    <a:pt x="2391712" y="488060"/>
+                  </a:lnTo>
+                  <a:lnTo>
+                    <a:pt x="2462057" y="497410"/>
+                  </a:lnTo>
+                  <a:lnTo>
+                    <a:pt x="2532401" y="506547"/>
+                  </a:lnTo>
+                  <a:lnTo>
+                    <a:pt x="2602746" y="515475"/>
+                  </a:lnTo>
+                  <a:lnTo>
+                    <a:pt x="2673090" y="524201"/>
+                  </a:lnTo>
+                  <a:lnTo>
+                    <a:pt x="2743435" y="532727"/>
+                  </a:lnTo>
+                  <a:lnTo>
+                    <a:pt x="2813779" y="541060"/>
+                  </a:lnTo>
+                  <a:lnTo>
+                    <a:pt x="2884124" y="549202"/>
+                  </a:lnTo>
+                  <a:lnTo>
+                    <a:pt x="2954468" y="557159"/>
+                  </a:lnTo>
+                  <a:lnTo>
+                    <a:pt x="3024813" y="564935"/>
+                  </a:lnTo>
+                  <a:lnTo>
+                    <a:pt x="3095157" y="572533"/>
+                  </a:lnTo>
+                  <a:lnTo>
+                    <a:pt x="3165502" y="579959"/>
+                  </a:lnTo>
+                  <a:lnTo>
+                    <a:pt x="3235846" y="587215"/>
+                  </a:lnTo>
+                  <a:lnTo>
+                    <a:pt x="3306191" y="594306"/>
+                  </a:lnTo>
+                  <a:lnTo>
+                    <a:pt x="3376535" y="601236"/>
+                  </a:lnTo>
+                  <a:lnTo>
+                    <a:pt x="3446880" y="608007"/>
+                  </a:lnTo>
+                  <a:lnTo>
+                    <a:pt x="3517224" y="614625"/>
+                  </a:lnTo>
+                  <a:lnTo>
+                    <a:pt x="3587569" y="621091"/>
+                  </a:lnTo>
+                  <a:lnTo>
+                    <a:pt x="3657913" y="627411"/>
+                  </a:lnTo>
+                  <a:lnTo>
+                    <a:pt x="3728257" y="633586"/>
+                  </a:lnTo>
+                  <a:lnTo>
+                    <a:pt x="3798602" y="639620"/>
+                  </a:lnTo>
+                  <a:lnTo>
+                    <a:pt x="3868946" y="645518"/>
+                  </a:lnTo>
+                  <a:lnTo>
+                    <a:pt x="3939291" y="651280"/>
+                  </a:lnTo>
+                  <a:lnTo>
+                    <a:pt x="4009635" y="656912"/>
+                  </a:lnTo>
+                  <a:lnTo>
+                    <a:pt x="4079980" y="662415"/>
+                  </a:lnTo>
+                  <a:lnTo>
+                    <a:pt x="4150324" y="667793"/>
+                  </a:lnTo>
+                  <a:lnTo>
+                    <a:pt x="4220669" y="673048"/>
+                  </a:lnTo>
+                  <a:lnTo>
+                    <a:pt x="4291013" y="678184"/>
+                  </a:lnTo>
+                  <a:lnTo>
+                    <a:pt x="4361358" y="683203"/>
+                  </a:lnTo>
+                  <a:lnTo>
+                    <a:pt x="4431702" y="688107"/>
+                  </a:lnTo>
+                  <a:lnTo>
+                    <a:pt x="4502047" y="692899"/>
+                  </a:lnTo>
+                  <a:lnTo>
+                    <a:pt x="4572391" y="697583"/>
+                  </a:lnTo>
+                  <a:lnTo>
+                    <a:pt x="4642736" y="702160"/>
+                  </a:lnTo>
+                  <a:lnTo>
+                    <a:pt x="4713080" y="706632"/>
+                  </a:lnTo>
+                  <a:lnTo>
+                    <a:pt x="4783425" y="711003"/>
+                  </a:lnTo>
+                  <a:lnTo>
+                    <a:pt x="4853769" y="715273"/>
+                  </a:lnTo>
+                  <a:lnTo>
+                    <a:pt x="4924114" y="719447"/>
+                  </a:lnTo>
+                  <a:lnTo>
+                    <a:pt x="4994458" y="723526"/>
+                  </a:lnTo>
+                  <a:lnTo>
+                    <a:pt x="5064803" y="727511"/>
+                  </a:lnTo>
+                  <a:lnTo>
+                    <a:pt x="5135147" y="731406"/>
+                  </a:lnTo>
+                  <a:lnTo>
+                    <a:pt x="5205492" y="735212"/>
+                  </a:lnTo>
+                  <a:lnTo>
+                    <a:pt x="5275836" y="738932"/>
+                  </a:lnTo>
+                  <a:lnTo>
+                    <a:pt x="5346181" y="742567"/>
+                  </a:lnTo>
+                  <a:lnTo>
+                    <a:pt x="5416525" y="746118"/>
+                  </a:lnTo>
+                  <a:lnTo>
+                    <a:pt x="5486870" y="749589"/>
+                  </a:lnTo>
+                  <a:lnTo>
+                    <a:pt x="5557214" y="752981"/>
+                  </a:lnTo>
+                  <a:lnTo>
+                    <a:pt x="5627559" y="756296"/>
+                  </a:lnTo>
+                  <a:lnTo>
+                    <a:pt x="5697903" y="759535"/>
+                  </a:lnTo>
+                  <a:lnTo>
+                    <a:pt x="5768248" y="762700"/>
+                  </a:lnTo>
+                  <a:lnTo>
+                    <a:pt x="5838592" y="765794"/>
+                  </a:lnTo>
+                  <a:lnTo>
+                    <a:pt x="5908937" y="768816"/>
+                  </a:lnTo>
+                  <a:lnTo>
+                    <a:pt x="5979281" y="771770"/>
+                  </a:lnTo>
+                  <a:lnTo>
+                    <a:pt x="6049626" y="774657"/>
+                  </a:lnTo>
+                  <a:lnTo>
+                    <a:pt x="6119970" y="777478"/>
+                  </a:lnTo>
+                  <a:lnTo>
+                    <a:pt x="6190315" y="780234"/>
+                  </a:lnTo>
+                  <a:lnTo>
+                    <a:pt x="6260659" y="782928"/>
+                  </a:lnTo>
+                  <a:lnTo>
+                    <a:pt x="6331004" y="785561"/>
+                  </a:lnTo>
+                  <a:lnTo>
+                    <a:pt x="6401348" y="788133"/>
+                  </a:lnTo>
+                  <a:lnTo>
+                    <a:pt x="6471693" y="790647"/>
+                  </a:lnTo>
+                  <a:lnTo>
+                    <a:pt x="6542037" y="793103"/>
+                  </a:lnTo>
+                  <a:lnTo>
+                    <a:pt x="6612382" y="795504"/>
+                  </a:lnTo>
+                  <a:lnTo>
+                    <a:pt x="6682726" y="797850"/>
+                  </a:lnTo>
+                  <a:lnTo>
+                    <a:pt x="6753071" y="800142"/>
+                  </a:lnTo>
+                  <a:lnTo>
+                    <a:pt x="6823415" y="802383"/>
+                  </a:lnTo>
+                  <a:lnTo>
+                    <a:pt x="6893760" y="804572"/>
+                  </a:lnTo>
+                  <a:lnTo>
+                    <a:pt x="6964104" y="806711"/>
+                  </a:lnTo>
+                </a:path>
+              </a:pathLst>
+            </a:custGeom>
+            <a:ln w="27101" cap="flat">
+              <a:solidFill>
+                <a:srgbClr val="FF8C00">
+                  <a:alpha val="100000"/>
+                </a:srgbClr>
+              </a:solidFill>
+              <a:prstDash val="solid"/>
+              <a:round/>
+            </a:ln>
+          </p:spPr>
+          <p:txBody>
+            <a:bodyPr/>
+            <a:lstStyle/>
+            <a:p/>
+          </p:txBody>
+        </p:sp>
+        <p:sp>
+          <p:nvSpPr>
+            <p:cNvPr id="70" name="pl70"/>
+            <p:cNvSpPr/>
+            <p:nvPr/>
+          </p:nvSpPr>
+          <p:spPr>
+            <a:xfrm>
+              <a:off x="887106" y="5294352"/>
+              <a:ext cx="7660515" cy="0"/>
+            </a:xfrm>
+            <a:custGeom>
+              <a:avLst/>
+              <a:pathLst>
+                <a:path w="7660515" h="0">
+                  <a:moveTo>
+                    <a:pt x="0" y="0"/>
+                  </a:moveTo>
+                  <a:lnTo>
+                    <a:pt x="7660515" y="0"/>
+                  </a:lnTo>
+                  <a:lnTo>
+                    <a:pt x="7660515" y="0"/>
+                  </a:lnTo>
+                </a:path>
+              </a:pathLst>
+            </a:custGeom>
+            <a:ln w="13550" cap="flat">
+              <a:solidFill>
+                <a:srgbClr val="7F7F7F">
+                  <a:alpha val="100000"/>
+                </a:srgbClr>
+              </a:solidFill>
+              <a:prstDash val="dash"/>
+              <a:round/>
+            </a:ln>
+          </p:spPr>
+          <p:txBody>
+            <a:bodyPr/>
+            <a:lstStyle/>
+            <a:p/>
+          </p:txBody>
+        </p:sp>
+        <p:sp>
+          <p:nvSpPr>
+            <p:cNvPr id="71" name="pl71"/>
+            <p:cNvSpPr/>
+            <p:nvPr/>
+          </p:nvSpPr>
+          <p:spPr>
+            <a:xfrm>
+              <a:off x="4590457" y="4336484"/>
+              <a:ext cx="0" cy="1317069"/>
+            </a:xfrm>
+            <a:custGeom>
+              <a:avLst/>
+              <a:pathLst>
+                <a:path w="0" h="1317069">
+                  <a:moveTo>
+                    <a:pt x="0" y="1317069"/>
+                  </a:moveTo>
+                  <a:lnTo>
+                    <a:pt x="0" y="0"/>
+                  </a:lnTo>
+                  <a:lnTo>
+                    <a:pt x="0" y="0"/>
+                  </a:lnTo>
+                </a:path>
+              </a:pathLst>
+            </a:custGeom>
+            <a:ln w="13550" cap="flat">
+              <a:solidFill>
+                <a:srgbClr val="666666">
+                  <a:alpha val="100000"/>
+                </a:srgbClr>
+              </a:solidFill>
+              <a:prstDash val="dot"/>
+              <a:round/>
+            </a:ln>
+          </p:spPr>
+          <p:txBody>
+            <a:bodyPr/>
+            <a:lstStyle/>
+            <a:p/>
+          </p:txBody>
+        </p:sp>
+        <p:sp>
+          <p:nvSpPr>
+            <p:cNvPr id="72" name="tx72"/>
+            <p:cNvSpPr/>
+            <p:nvPr/>
+          </p:nvSpPr>
+          <p:spPr>
+            <a:xfrm>
+              <a:off x="762297" y="5553636"/>
+              <a:ext cx="62179" cy="80101"/>
+            </a:xfrm>
+            <a:prstGeom prst="rect">
+              <a:avLst/>
+            </a:prstGeom>
+            <a:noFill/>
+          </p:spPr>
+          <p:txBody>
+            <a:bodyPr lIns="0" rIns="0" tIns="0" bIns="0" anchorCtr="1" anchor="ctr" wrap="none"/>
+            <a:lstStyle/>
+            <a:p>
+              <a:pPr algn="l" marL="0" marR="0" indent="0">
+                <a:lnSpc>
+                  <a:spcPts val="880"/>
+                </a:lnSpc>
+                <a:spcBef>
+                  <a:spcPts val="0"/>
+                </a:spcBef>
+                <a:spcAft>
+                  <a:spcPts val="0"/>
+                </a:spcAft>
+              </a:pPr>
+              <a:r>
+                <a:rPr sz="880">
+                  <a:solidFill>
+                    <a:srgbClr val="4D4D4D">
+                      <a:alpha val="100000"/>
+                    </a:srgbClr>
+                  </a:solidFill>
+                  <a:latin typeface="Helvetica"/>
+                  <a:cs typeface="Helvetica"/>
+                </a:rPr>
+                <a:t>0</a:t>
+              </a:r>
+            </a:p>
+          </p:txBody>
+        </p:sp>
+        <p:sp>
+          <p:nvSpPr>
+            <p:cNvPr id="73" name="tx73"/>
+            <p:cNvSpPr/>
+            <p:nvPr/>
+          </p:nvSpPr>
+          <p:spPr>
+            <a:xfrm>
+              <a:off x="762297" y="5254302"/>
+              <a:ext cx="62179" cy="80101"/>
+            </a:xfrm>
+            <a:prstGeom prst="rect">
+              <a:avLst/>
+            </a:prstGeom>
+            <a:noFill/>
+          </p:spPr>
+          <p:txBody>
+            <a:bodyPr lIns="0" rIns="0" tIns="0" bIns="0" anchorCtr="1" anchor="ctr" wrap="none"/>
+            <a:lstStyle/>
+            <a:p>
+              <a:pPr algn="l" marL="0" marR="0" indent="0">
+                <a:lnSpc>
+                  <a:spcPts val="880"/>
+                </a:lnSpc>
+                <a:spcBef>
+                  <a:spcPts val="0"/>
+                </a:spcBef>
+                <a:spcAft>
+                  <a:spcPts val="0"/>
+                </a:spcAft>
+              </a:pPr>
+              <a:r>
+                <a:rPr sz="880">
+                  <a:solidFill>
+                    <a:srgbClr val="4D4D4D">
+                      <a:alpha val="100000"/>
+                    </a:srgbClr>
+                  </a:solidFill>
+                  <a:latin typeface="Helvetica"/>
+                  <a:cs typeface="Helvetica"/>
+                </a:rPr>
+                <a:t>1</a:t>
+              </a:r>
+            </a:p>
+          </p:txBody>
+        </p:sp>
+        <p:sp>
+          <p:nvSpPr>
+            <p:cNvPr id="74" name="tx74"/>
+            <p:cNvSpPr/>
+            <p:nvPr/>
+          </p:nvSpPr>
+          <p:spPr>
+            <a:xfrm>
+              <a:off x="762297" y="4954968"/>
+              <a:ext cx="62179" cy="80101"/>
+            </a:xfrm>
+            <a:prstGeom prst="rect">
+              <a:avLst/>
+            </a:prstGeom>
+            <a:noFill/>
+          </p:spPr>
+          <p:txBody>
+            <a:bodyPr lIns="0" rIns="0" tIns="0" bIns="0" anchorCtr="1" anchor="ctr" wrap="none"/>
+            <a:lstStyle/>
+            <a:p>
+              <a:pPr algn="l" marL="0" marR="0" indent="0">
+                <a:lnSpc>
+                  <a:spcPts val="880"/>
+                </a:lnSpc>
+                <a:spcBef>
+                  <a:spcPts val="0"/>
+                </a:spcBef>
+                <a:spcAft>
+                  <a:spcPts val="0"/>
+                </a:spcAft>
+              </a:pPr>
+              <a:r>
+                <a:rPr sz="880">
+                  <a:solidFill>
+                    <a:srgbClr val="4D4D4D">
+                      <a:alpha val="100000"/>
+                    </a:srgbClr>
+                  </a:solidFill>
+                  <a:latin typeface="Helvetica"/>
+                  <a:cs typeface="Helvetica"/>
+                </a:rPr>
+                <a:t>2</a:t>
+              </a:r>
+            </a:p>
+          </p:txBody>
+        </p:sp>
+        <p:sp>
+          <p:nvSpPr>
+            <p:cNvPr id="75" name="tx75"/>
+            <p:cNvSpPr/>
+            <p:nvPr/>
+          </p:nvSpPr>
+          <p:spPr>
+            <a:xfrm>
+              <a:off x="762297" y="4655634"/>
+              <a:ext cx="62179" cy="80101"/>
+            </a:xfrm>
+            <a:prstGeom prst="rect">
+              <a:avLst/>
+            </a:prstGeom>
+            <a:noFill/>
+          </p:spPr>
+          <p:txBody>
+            <a:bodyPr lIns="0" rIns="0" tIns="0" bIns="0" anchorCtr="1" anchor="ctr" wrap="none"/>
+            <a:lstStyle/>
+            <a:p>
+              <a:pPr algn="l" marL="0" marR="0" indent="0">
+                <a:lnSpc>
+                  <a:spcPts val="880"/>
+                </a:lnSpc>
+                <a:spcBef>
+                  <a:spcPts val="0"/>
+                </a:spcBef>
+                <a:spcAft>
+                  <a:spcPts val="0"/>
+                </a:spcAft>
+              </a:pPr>
+              <a:r>
+                <a:rPr sz="880">
+                  <a:solidFill>
+                    <a:srgbClr val="4D4D4D">
+                      <a:alpha val="100000"/>
+                    </a:srgbClr>
+                  </a:solidFill>
+                  <a:latin typeface="Helvetica"/>
+                  <a:cs typeface="Helvetica"/>
+                </a:rPr>
+                <a:t>3</a:t>
+              </a:r>
+            </a:p>
+          </p:txBody>
+        </p:sp>
+        <p:sp>
+          <p:nvSpPr>
+            <p:cNvPr id="76" name="tx76"/>
+            <p:cNvSpPr/>
+            <p:nvPr/>
+          </p:nvSpPr>
+          <p:spPr>
+            <a:xfrm>
+              <a:off x="762297" y="4356300"/>
+              <a:ext cx="62179" cy="80101"/>
+            </a:xfrm>
+            <a:prstGeom prst="rect">
+              <a:avLst/>
+            </a:prstGeom>
+            <a:noFill/>
+          </p:spPr>
+          <p:txBody>
+            <a:bodyPr lIns="0" rIns="0" tIns="0" bIns="0" anchorCtr="1" anchor="ctr" wrap="none"/>
+            <a:lstStyle/>
+            <a:p>
+              <a:pPr algn="l" marL="0" marR="0" indent="0">
+                <a:lnSpc>
+                  <a:spcPts val="880"/>
+                </a:lnSpc>
+                <a:spcBef>
+                  <a:spcPts val="0"/>
+                </a:spcBef>
+                <a:spcAft>
+                  <a:spcPts val="0"/>
+                </a:spcAft>
+              </a:pPr>
+              <a:r>
+                <a:rPr sz="880">
+                  <a:solidFill>
+                    <a:srgbClr val="4D4D4D">
+                      <a:alpha val="100000"/>
+                    </a:srgbClr>
+                  </a:solidFill>
+                  <a:latin typeface="Helvetica"/>
+                  <a:cs typeface="Helvetica"/>
+                </a:rPr>
+                <a:t>4</a:t>
+              </a:r>
+            </a:p>
+          </p:txBody>
+        </p:sp>
+        <p:sp>
+          <p:nvSpPr>
+            <p:cNvPr id="77" name="tx77"/>
+            <p:cNvSpPr/>
+            <p:nvPr/>
+          </p:nvSpPr>
+          <p:spPr>
+            <a:xfrm>
+              <a:off x="1133333" y="5716183"/>
+              <a:ext cx="161574" cy="80101"/>
+            </a:xfrm>
+            <a:prstGeom prst="rect">
+              <a:avLst/>
+            </a:prstGeom>
+            <a:noFill/>
+          </p:spPr>
+          <p:txBody>
+            <a:bodyPr lIns="0" rIns="0" tIns="0" bIns="0" anchorCtr="1" anchor="ctr" wrap="none"/>
+            <a:lstStyle/>
+            <a:p>
+              <a:pPr algn="l" marL="0" marR="0" indent="0">
+                <a:lnSpc>
+                  <a:spcPts val="880"/>
+                </a:lnSpc>
+                <a:spcBef>
+                  <a:spcPts val="0"/>
+                </a:spcBef>
+                <a:spcAft>
+                  <a:spcPts val="0"/>
+                </a:spcAft>
+              </a:pPr>
+              <a:r>
+                <a:rPr sz="880">
+                  <a:solidFill>
+                    <a:srgbClr val="4D4D4D">
+                      <a:alpha val="100000"/>
+                    </a:srgbClr>
+                  </a:solidFill>
+                  <a:latin typeface="Helvetica"/>
+                  <a:cs typeface="Helvetica"/>
+                </a:rPr>
+                <a:t>-40</a:t>
+              </a:r>
+            </a:p>
+          </p:txBody>
+        </p:sp>
+        <p:sp>
+          <p:nvSpPr>
+            <p:cNvPr id="78" name="tx78"/>
+            <p:cNvSpPr/>
+            <p:nvPr/>
+          </p:nvSpPr>
+          <p:spPr>
+            <a:xfrm>
+              <a:off x="1978619" y="5716183"/>
+              <a:ext cx="161574" cy="80101"/>
+            </a:xfrm>
+            <a:prstGeom prst="rect">
+              <a:avLst/>
+            </a:prstGeom>
+            <a:noFill/>
+          </p:spPr>
+          <p:txBody>
+            <a:bodyPr lIns="0" rIns="0" tIns="0" bIns="0" anchorCtr="1" anchor="ctr" wrap="none"/>
+            <a:lstStyle/>
+            <a:p>
+              <a:pPr algn="l" marL="0" marR="0" indent="0">
+                <a:lnSpc>
+                  <a:spcPts val="880"/>
+                </a:lnSpc>
+                <a:spcBef>
+                  <a:spcPts val="0"/>
+                </a:spcBef>
+                <a:spcAft>
+                  <a:spcPts val="0"/>
+                </a:spcAft>
+              </a:pPr>
+              <a:r>
+                <a:rPr sz="880">
+                  <a:solidFill>
+                    <a:srgbClr val="4D4D4D">
+                      <a:alpha val="100000"/>
+                    </a:srgbClr>
+                  </a:solidFill>
+                  <a:latin typeface="Helvetica"/>
+                  <a:cs typeface="Helvetica"/>
+                </a:rPr>
+                <a:t>-30</a:t>
+              </a:r>
+            </a:p>
+          </p:txBody>
+        </p:sp>
+        <p:sp>
+          <p:nvSpPr>
+            <p:cNvPr id="79" name="tx79"/>
+            <p:cNvSpPr/>
+            <p:nvPr/>
+          </p:nvSpPr>
+          <p:spPr>
+            <a:xfrm>
+              <a:off x="2823906" y="5716183"/>
+              <a:ext cx="161574" cy="80101"/>
+            </a:xfrm>
+            <a:prstGeom prst="rect">
+              <a:avLst/>
+            </a:prstGeom>
+            <a:noFill/>
+          </p:spPr>
+          <p:txBody>
+            <a:bodyPr lIns="0" rIns="0" tIns="0" bIns="0" anchorCtr="1" anchor="ctr" wrap="none"/>
+            <a:lstStyle/>
+            <a:p>
+              <a:pPr algn="l" marL="0" marR="0" indent="0">
+                <a:lnSpc>
+                  <a:spcPts val="880"/>
+                </a:lnSpc>
+                <a:spcBef>
+                  <a:spcPts val="0"/>
+                </a:spcBef>
+                <a:spcAft>
+                  <a:spcPts val="0"/>
+                </a:spcAft>
+              </a:pPr>
+              <a:r>
+                <a:rPr sz="880">
+                  <a:solidFill>
+                    <a:srgbClr val="4D4D4D">
+                      <a:alpha val="100000"/>
+                    </a:srgbClr>
+                  </a:solidFill>
+                  <a:latin typeface="Helvetica"/>
+                  <a:cs typeface="Helvetica"/>
+                </a:rPr>
+                <a:t>-20</a:t>
+              </a:r>
+            </a:p>
+          </p:txBody>
+        </p:sp>
+        <p:sp>
+          <p:nvSpPr>
+            <p:cNvPr id="80" name="tx80"/>
+            <p:cNvSpPr/>
+            <p:nvPr/>
+          </p:nvSpPr>
+          <p:spPr>
+            <a:xfrm>
+              <a:off x="3669192" y="5716183"/>
+              <a:ext cx="161574" cy="80101"/>
+            </a:xfrm>
+            <a:prstGeom prst="rect">
+              <a:avLst/>
+            </a:prstGeom>
+            <a:noFill/>
+          </p:spPr>
+          <p:txBody>
+            <a:bodyPr lIns="0" rIns="0" tIns="0" bIns="0" anchorCtr="1" anchor="ctr" wrap="none"/>
+            <a:lstStyle/>
+            <a:p>
+              <a:pPr algn="l" marL="0" marR="0" indent="0">
+                <a:lnSpc>
+                  <a:spcPts val="880"/>
+                </a:lnSpc>
+                <a:spcBef>
+                  <a:spcPts val="0"/>
+                </a:spcBef>
+                <a:spcAft>
+                  <a:spcPts val="0"/>
+                </a:spcAft>
+              </a:pPr>
+              <a:r>
+                <a:rPr sz="880">
+                  <a:solidFill>
+                    <a:srgbClr val="4D4D4D">
+                      <a:alpha val="100000"/>
+                    </a:srgbClr>
+                  </a:solidFill>
+                  <a:latin typeface="Helvetica"/>
+                  <a:cs typeface="Helvetica"/>
+                </a:rPr>
+                <a:t>-10</a:t>
+              </a:r>
+            </a:p>
+          </p:txBody>
+        </p:sp>
+        <p:sp>
+          <p:nvSpPr>
+            <p:cNvPr id="81" name="tx81"/>
+            <p:cNvSpPr/>
+            <p:nvPr/>
+          </p:nvSpPr>
+          <p:spPr>
+            <a:xfrm>
+              <a:off x="4564176" y="5716183"/>
+              <a:ext cx="62179" cy="80101"/>
+            </a:xfrm>
+            <a:prstGeom prst="rect">
+              <a:avLst/>
+            </a:prstGeom>
+            <a:noFill/>
+          </p:spPr>
+          <p:txBody>
+            <a:bodyPr lIns="0" rIns="0" tIns="0" bIns="0" anchorCtr="1" anchor="ctr" wrap="none"/>
+            <a:lstStyle/>
+            <a:p>
+              <a:pPr algn="l" marL="0" marR="0" indent="0">
+                <a:lnSpc>
+                  <a:spcPts val="880"/>
+                </a:lnSpc>
+                <a:spcBef>
+                  <a:spcPts val="0"/>
+                </a:spcBef>
+                <a:spcAft>
+                  <a:spcPts val="0"/>
+                </a:spcAft>
+              </a:pPr>
+              <a:r>
+                <a:rPr sz="880">
+                  <a:solidFill>
+                    <a:srgbClr val="4D4D4D">
+                      <a:alpha val="100000"/>
+                    </a:srgbClr>
+                  </a:solidFill>
+                  <a:latin typeface="Helvetica"/>
+                  <a:cs typeface="Helvetica"/>
+                </a:rPr>
+                <a:t>0</a:t>
+              </a:r>
+            </a:p>
+          </p:txBody>
+        </p:sp>
+        <p:sp>
+          <p:nvSpPr>
+            <p:cNvPr id="82" name="tx82"/>
+            <p:cNvSpPr/>
+            <p:nvPr/>
+          </p:nvSpPr>
+          <p:spPr>
+            <a:xfrm>
+              <a:off x="5378373" y="5716183"/>
+              <a:ext cx="124358" cy="80101"/>
+            </a:xfrm>
+            <a:prstGeom prst="rect">
+              <a:avLst/>
+            </a:prstGeom>
+            <a:noFill/>
+          </p:spPr>
+          <p:txBody>
+            <a:bodyPr lIns="0" rIns="0" tIns="0" bIns="0" anchorCtr="1" anchor="ctr" wrap="none"/>
+            <a:lstStyle/>
+            <a:p>
+              <a:pPr algn="l" marL="0" marR="0" indent="0">
+                <a:lnSpc>
+                  <a:spcPts val="880"/>
+                </a:lnSpc>
+                <a:spcBef>
+                  <a:spcPts val="0"/>
+                </a:spcBef>
+                <a:spcAft>
+                  <a:spcPts val="0"/>
+                </a:spcAft>
+              </a:pPr>
+              <a:r>
+                <a:rPr sz="880">
+                  <a:solidFill>
+                    <a:srgbClr val="4D4D4D">
+                      <a:alpha val="100000"/>
+                    </a:srgbClr>
+                  </a:solidFill>
+                  <a:latin typeface="Helvetica"/>
+                  <a:cs typeface="Helvetica"/>
+                </a:rPr>
+                <a:t>10</a:t>
+              </a:r>
+            </a:p>
+          </p:txBody>
+        </p:sp>
+        <p:sp>
+          <p:nvSpPr>
+            <p:cNvPr id="83" name="tx83"/>
+            <p:cNvSpPr/>
+            <p:nvPr/>
+          </p:nvSpPr>
+          <p:spPr>
+            <a:xfrm>
+              <a:off x="6223659" y="5716183"/>
+              <a:ext cx="124358" cy="80101"/>
+            </a:xfrm>
+            <a:prstGeom prst="rect">
+              <a:avLst/>
+            </a:prstGeom>
+            <a:noFill/>
+          </p:spPr>
+          <p:txBody>
+            <a:bodyPr lIns="0" rIns="0" tIns="0" bIns="0" anchorCtr="1" anchor="ctr" wrap="none"/>
+            <a:lstStyle/>
+            <a:p>
+              <a:pPr algn="l" marL="0" marR="0" indent="0">
+                <a:lnSpc>
+                  <a:spcPts val="880"/>
+                </a:lnSpc>
+                <a:spcBef>
+                  <a:spcPts val="0"/>
+                </a:spcBef>
+                <a:spcAft>
+                  <a:spcPts val="0"/>
+                </a:spcAft>
+              </a:pPr>
+              <a:r>
+                <a:rPr sz="880">
+                  <a:solidFill>
+                    <a:srgbClr val="4D4D4D">
+                      <a:alpha val="100000"/>
+                    </a:srgbClr>
+                  </a:solidFill>
+                  <a:latin typeface="Helvetica"/>
+                  <a:cs typeface="Helvetica"/>
+                </a:rPr>
+                <a:t>20</a:t>
+              </a:r>
+            </a:p>
+          </p:txBody>
+        </p:sp>
+        <p:sp>
+          <p:nvSpPr>
+            <p:cNvPr id="84" name="tx84"/>
+            <p:cNvSpPr/>
+            <p:nvPr/>
+          </p:nvSpPr>
+          <p:spPr>
+            <a:xfrm>
+              <a:off x="7068946" y="5716183"/>
+              <a:ext cx="124358" cy="80101"/>
+            </a:xfrm>
+            <a:prstGeom prst="rect">
+              <a:avLst/>
+            </a:prstGeom>
+            <a:noFill/>
+          </p:spPr>
+          <p:txBody>
+            <a:bodyPr lIns="0" rIns="0" tIns="0" bIns="0" anchorCtr="1" anchor="ctr" wrap="none"/>
+            <a:lstStyle/>
+            <a:p>
+              <a:pPr algn="l" marL="0" marR="0" indent="0">
+                <a:lnSpc>
+                  <a:spcPts val="880"/>
+                </a:lnSpc>
+                <a:spcBef>
+                  <a:spcPts val="0"/>
+                </a:spcBef>
+                <a:spcAft>
+                  <a:spcPts val="0"/>
+                </a:spcAft>
+              </a:pPr>
+              <a:r>
+                <a:rPr sz="880">
+                  <a:solidFill>
+                    <a:srgbClr val="4D4D4D">
+                      <a:alpha val="100000"/>
+                    </a:srgbClr>
+                  </a:solidFill>
+                  <a:latin typeface="Helvetica"/>
+                  <a:cs typeface="Helvetica"/>
+                </a:rPr>
+                <a:t>30</a:t>
+              </a:r>
+            </a:p>
+          </p:txBody>
+        </p:sp>
+        <p:sp>
+          <p:nvSpPr>
+            <p:cNvPr id="85" name="tx85"/>
+            <p:cNvSpPr/>
+            <p:nvPr/>
+          </p:nvSpPr>
+          <p:spPr>
+            <a:xfrm>
+              <a:off x="7914232" y="5716183"/>
+              <a:ext cx="124358" cy="80101"/>
+            </a:xfrm>
+            <a:prstGeom prst="rect">
+              <a:avLst/>
+            </a:prstGeom>
+            <a:noFill/>
+          </p:spPr>
+          <p:txBody>
+            <a:bodyPr lIns="0" rIns="0" tIns="0" bIns="0" anchorCtr="1" anchor="ctr" wrap="none"/>
+            <a:lstStyle/>
+            <a:p>
+              <a:pPr algn="l" marL="0" marR="0" indent="0">
+                <a:lnSpc>
+                  <a:spcPts val="880"/>
+                </a:lnSpc>
+                <a:spcBef>
+                  <a:spcPts val="0"/>
+                </a:spcBef>
+                <a:spcAft>
+                  <a:spcPts val="0"/>
+                </a:spcAft>
+              </a:pPr>
+              <a:r>
+                <a:rPr sz="880">
+                  <a:solidFill>
+                    <a:srgbClr val="4D4D4D">
+                      <a:alpha val="100000"/>
+                    </a:srgbClr>
+                  </a:solidFill>
+                  <a:latin typeface="Helvetica"/>
+                  <a:cs typeface="Helvetica"/>
+                </a:rPr>
+                <a:t>40</a:t>
+              </a:r>
+            </a:p>
+          </p:txBody>
+        </p:sp>
+        <p:sp>
+          <p:nvSpPr>
+            <p:cNvPr id="86" name="tx86"/>
+            <p:cNvSpPr/>
+            <p:nvPr/>
+          </p:nvSpPr>
+          <p:spPr>
+            <a:xfrm>
+              <a:off x="2928340" y="5855859"/>
+              <a:ext cx="3578047" cy="100218"/>
+            </a:xfrm>
+            <a:prstGeom prst="rect">
+              <a:avLst/>
+            </a:prstGeom>
+            <a:noFill/>
+          </p:spPr>
+          <p:txBody>
+            <a:bodyPr lIns="0" rIns="0" tIns="0" bIns="0" anchorCtr="1" anchor="ctr" wrap="none"/>
+            <a:lstStyle/>
+            <a:p>
+              <a:pPr algn="l" marL="0" marR="0" indent="0">
+                <a:lnSpc>
+                  <a:spcPts val="1100"/>
+                </a:lnSpc>
+                <a:spcBef>
+                  <a:spcPts val="0"/>
+                </a:spcBef>
+                <a:spcAft>
+                  <a:spcPts val="0"/>
+                </a:spcAft>
+              </a:pPr>
+              <a:r>
+                <a:rPr sz="1100">
+                  <a:solidFill>
+                    <a:srgbClr val="000000">
+                      <a:alpha val="100000"/>
+                    </a:srgbClr>
+                  </a:solidFill>
+                  <a:latin typeface="Helvetica"/>
+                  <a:cs typeface="Helvetica"/>
+                </a:rPr>
+                <a:t>eGFR difference (%): 100 × (CKD-EPI Cr-Cys − CG) / CG</a:t>
+              </a:r>
+            </a:p>
+          </p:txBody>
+        </p:sp>
+        <p:sp>
+          <p:nvSpPr>
+            <p:cNvPr id="87" name="tx87"/>
+            <p:cNvSpPr/>
+            <p:nvPr/>
+          </p:nvSpPr>
+          <p:spPr>
+            <a:xfrm rot="-5400000">
+              <a:off x="138035" y="4944909"/>
+              <a:ext cx="1016904" cy="100218"/>
+            </a:xfrm>
+            <a:prstGeom prst="rect">
+              <a:avLst/>
+            </a:prstGeom>
+            <a:noFill/>
+          </p:spPr>
+          <p:txBody>
+            <a:bodyPr lIns="0" rIns="0" tIns="0" bIns="0" anchorCtr="1" anchor="ctr" wrap="none"/>
+            <a:lstStyle/>
+            <a:p>
+              <a:pPr algn="l" marL="0" marR="0" indent="0">
+                <a:lnSpc>
+                  <a:spcPts val="1100"/>
+                </a:lnSpc>
+                <a:spcBef>
+                  <a:spcPts val="0"/>
+                </a:spcBef>
+                <a:spcAft>
+                  <a:spcPts val="0"/>
+                </a:spcAft>
+              </a:pPr>
+              <a:r>
+                <a:rPr sz="1100">
+                  <a:solidFill>
+                    <a:srgbClr val="000000">
+                      <a:alpha val="100000"/>
+                    </a:srgbClr>
+                  </a:solidFill>
+                  <a:latin typeface="Helvetica"/>
+                  <a:cs typeface="Helvetica"/>
+                </a:rPr>
+                <a:t>subHR (95% CI)</a:t>
+              </a:r>
+            </a:p>
+          </p:txBody>
+        </p:sp>
+        <p:sp>
+          <p:nvSpPr>
+            <p:cNvPr id="88" name="tx88"/>
+            <p:cNvSpPr/>
+            <p:nvPr/>
+          </p:nvSpPr>
+          <p:spPr>
+            <a:xfrm>
+              <a:off x="887106" y="4159544"/>
+              <a:ext cx="6985375" cy="82021"/>
+            </a:xfrm>
+            <a:prstGeom prst="rect">
+              <a:avLst/>
+            </a:prstGeom>
+            <a:noFill/>
+          </p:spPr>
+          <p:txBody>
+            <a:bodyPr lIns="0" rIns="0" tIns="0" bIns="0" anchorCtr="1" anchor="ctr" wrap="none"/>
+            <a:lstStyle/>
+            <a:p>
+              <a:pPr algn="l" marL="0" marR="0" indent="0">
+                <a:lnSpc>
+                  <a:spcPts val="900"/>
+                </a:lnSpc>
+                <a:spcBef>
+                  <a:spcPts val="0"/>
+                </a:spcBef>
+                <a:spcAft>
+                  <a:spcPts val="0"/>
+                </a:spcAft>
+              </a:pPr>
+              <a:r>
+                <a:rPr sz="900">
+                  <a:solidFill>
+                    <a:srgbClr val="404040">
+                      <a:alpha val="100000"/>
+                    </a:srgbClr>
+                  </a:solidFill>
+                  <a:latin typeface="Helvetica"/>
+                  <a:cs typeface="Helvetica"/>
+                </a:rPr>
+                <a:t>subHR per 10 % decline: 1.32 (1.14-1.52), p_Bonf = 0.001 (n = 6)  |  per IQR decline (Δ = 29.3 %): 2.25 (1.47-3.43)  |  IQR: [-14.6, 14.7] %</a:t>
+              </a:r>
+            </a:p>
+          </p:txBody>
+        </p:sp>
+        <p:sp>
+          <p:nvSpPr>
+            <p:cNvPr id="89" name="tx89"/>
+            <p:cNvSpPr/>
+            <p:nvPr/>
+          </p:nvSpPr>
+          <p:spPr>
+            <a:xfrm>
+              <a:off x="887106" y="3932770"/>
               <a:ext cx="921898" cy="120152"/>
             </a:xfrm>
             <a:prstGeom prst="rect">
